--- a/Science_Teesside/Teaching_Packs/GROW/lessons/W6A/GROW_Science_Autumn1_W6A_Earth_And_Planets.pptx
+++ b/Science_Teesside/Teaching_Packs/GROW/lessons/W6A/GROW_Science_Autumn1_W6A_Earth_And_Planets.pptx
@@ -2,25 +2,25 @@
 <file path=ppt/presentation.xml><?xml version="1.0" encoding="utf-8"?>
 <p:presentation xmlns:p="http://schemas.openxmlformats.org/presentationml/2006/main">
   <p:sldMasterIdLst>
-    <p:sldMasterId xmlns:r="http://schemas.openxmlformats.org/officeDocument/2006/relationships" id="2147483648" r:id="R777b74fcd03e4cda"/>
+    <p:sldMasterId xmlns:r="http://schemas.openxmlformats.org/officeDocument/2006/relationships" id="2147483648" r:id="R6ceca076e4a24999"/>
   </p:sldMasterIdLst>
   <p:notesMasterIdLst>
-    <p:notesMasterId xmlns:r="http://schemas.openxmlformats.org/officeDocument/2006/relationships" r:id="R3ed51725e4834561"/>
+    <p:notesMasterId xmlns:r="http://schemas.openxmlformats.org/officeDocument/2006/relationships" r:id="R206d874742d14a9b"/>
   </p:notesMasterIdLst>
   <p:sldIdLst>
-    <p:sldId xmlns:r="http://schemas.openxmlformats.org/officeDocument/2006/relationships" id="256" r:id="R688fa6dff96f475f"/>
-    <p:sldId xmlns:r="http://schemas.openxmlformats.org/officeDocument/2006/relationships" id="257" r:id="Rd4349b6b938f493b"/>
-    <p:sldId xmlns:r="http://schemas.openxmlformats.org/officeDocument/2006/relationships" id="258" r:id="R6b7b65caf0674c41"/>
-    <p:sldId xmlns:r="http://schemas.openxmlformats.org/officeDocument/2006/relationships" id="259" r:id="Rbe53129f3cce46a9"/>
-    <p:sldId xmlns:r="http://schemas.openxmlformats.org/officeDocument/2006/relationships" id="260" r:id="Rab0cebac5c534020"/>
-    <p:sldId xmlns:r="http://schemas.openxmlformats.org/officeDocument/2006/relationships" id="261" r:id="R91f6f4391ef2482b"/>
-    <p:sldId xmlns:r="http://schemas.openxmlformats.org/officeDocument/2006/relationships" id="262" r:id="R9eefda6804eb4f45"/>
-    <p:sldId xmlns:r="http://schemas.openxmlformats.org/officeDocument/2006/relationships" id="263" r:id="R710b73aa20eb42e2"/>
-    <p:sldId xmlns:r="http://schemas.openxmlformats.org/officeDocument/2006/relationships" id="264" r:id="Rb8f6611bf1dd4b25"/>
-    <p:sldId xmlns:r="http://schemas.openxmlformats.org/officeDocument/2006/relationships" id="265" r:id="Ra674f5ff91de4d62"/>
-    <p:sldId xmlns:r="http://schemas.openxmlformats.org/officeDocument/2006/relationships" id="266" r:id="Raa3e3ca518994b03"/>
-    <p:sldId xmlns:r="http://schemas.openxmlformats.org/officeDocument/2006/relationships" id="267" r:id="R43db0970ac3449ac"/>
-    <p:sldId xmlns:r="http://schemas.openxmlformats.org/officeDocument/2006/relationships" id="268" r:id="R6e582a719a23427b"/>
+    <p:sldId xmlns:r="http://schemas.openxmlformats.org/officeDocument/2006/relationships" id="256" r:id="R39f58553ce494de2"/>
+    <p:sldId xmlns:r="http://schemas.openxmlformats.org/officeDocument/2006/relationships" id="257" r:id="R5568edc809a04642"/>
+    <p:sldId xmlns:r="http://schemas.openxmlformats.org/officeDocument/2006/relationships" id="258" r:id="Re527e794e85c43dc"/>
+    <p:sldId xmlns:r="http://schemas.openxmlformats.org/officeDocument/2006/relationships" id="259" r:id="R2a061d9dec9149d4"/>
+    <p:sldId xmlns:r="http://schemas.openxmlformats.org/officeDocument/2006/relationships" id="260" r:id="Rd4c71fefdd254a1c"/>
+    <p:sldId xmlns:r="http://schemas.openxmlformats.org/officeDocument/2006/relationships" id="261" r:id="R8b7916427dcf4bed"/>
+    <p:sldId xmlns:r="http://schemas.openxmlformats.org/officeDocument/2006/relationships" id="262" r:id="R3189d7e7b53d4677"/>
+    <p:sldId xmlns:r="http://schemas.openxmlformats.org/officeDocument/2006/relationships" id="263" r:id="R6bfac2a77fa94240"/>
+    <p:sldId xmlns:r="http://schemas.openxmlformats.org/officeDocument/2006/relationships" id="264" r:id="R8168ae73aa204f45"/>
+    <p:sldId xmlns:r="http://schemas.openxmlformats.org/officeDocument/2006/relationships" id="265" r:id="Red18025272ac4783"/>
+    <p:sldId xmlns:r="http://schemas.openxmlformats.org/officeDocument/2006/relationships" id="266" r:id="Rb0b29ad8226043ab"/>
+    <p:sldId xmlns:r="http://schemas.openxmlformats.org/officeDocument/2006/relationships" id="267" r:id="Rf2c0546301844e0b"/>
+    <p:sldId xmlns:r="http://schemas.openxmlformats.org/officeDocument/2006/relationships" id="268" r:id="R92a9738ff5504096"/>
   </p:sldIdLst>
   <p:sldSz cx="12192000" cy="6858000"/>
   <p:notesSz cx="6858000" cy="9144000"/>
@@ -492,6 +492,14 @@
               <a:t>[/Sources]</a:t>
             </a:r>
           </a:p>
+          <a:p xmlns:a="http://schemas.openxmlformats.org/drawingml/2006/main">
+            <a:r>
+              <a:t>
+[Sources]
+NASA, The Blue Marble, Apollo 17, 1972. https://science.nasa.gov/resource/the-blue-marble/
+[/Sources]</a:t>
+            </a:r>
+          </a:p>
         </p:txBody>
       </p:sp>
       <p:sp>
@@ -1817,7 +1825,7 @@
   </p:cSld>
   <p:clrMap bg1="lt1" tx1="dk1" bg2="lt2" tx2="dk2" accent1="accent1" accent2="accent2" accent3="accent3" accent4="accent4" accent5="accent5" accent6="accent6" hlink="hlink" folHlink="folHlink"/>
   <p:sldLayoutIdLst>
-    <p:sldLayoutId xmlns:r="http://schemas.openxmlformats.org/officeDocument/2006/relationships" id="2147483649" r:id="Redcf6c6289fb4fd8"/>
+    <p:sldLayoutId xmlns:r="http://schemas.openxmlformats.org/officeDocument/2006/relationships" id="2147483649" r:id="R7f9bdfb9221d47f7"/>
   </p:sldLayoutIdLst>
   <p:txStyles>
     <p:titleStyle>
@@ -2350,7 +2358,7 @@
     <p:bg>
       <p:bgPr>
         <a:solidFill xmlns:a="http://schemas.openxmlformats.org/drawingml/2006/main">
-          <a:srgbClr val="F5F1E8"/>
+          <a:srgbClr val="FAF9F5"/>
         </a:solidFill>
       </p:bgPr>
     </p:bg>
@@ -2379,8 +2387,8 @@
         </p:nvSpPr>
         <p:spPr>
           <a:xfrm xmlns:a="http://schemas.openxmlformats.org/drawingml/2006/main">
-            <a:off x="609600" y="552450"/>
-            <a:ext cx="781050" cy="57150"/>
+            <a:off x="609600" y="733425"/>
+            <a:ext cx="781050" cy="38100"/>
           </a:xfrm>
           <a:prstGeom xmlns:a="http://schemas.openxmlformats.org/drawingml/2006/main" prst="rect">
             <a:avLst/>
@@ -2410,34 +2418,43 @@
         </p:nvSpPr>
         <p:spPr>
           <a:xfrm xmlns:a="http://schemas.openxmlformats.org/drawingml/2006/main">
-            <a:off x="609600" y="762000"/>
-            <a:ext cx="8572500" cy="285750"/>
-          </a:xfrm>
-          <a:prstGeom xmlns:a="http://schemas.openxmlformats.org/drawingml/2006/main" prst="rect">
-            <a:avLst/>
-          </a:prstGeom>
-          <a:noFill xmlns:a="http://schemas.openxmlformats.org/drawingml/2006/main"/>
-          <a:ln xmlns:a="http://schemas.openxmlformats.org/drawingml/2006/main" w="0">
-            <a:noFill/>
-            <a:prstDash val="solid"/>
-          </a:ln>
-        </p:spPr>
-        <p:txBody>
-          <a:bodyPr xmlns:a="http://schemas.openxmlformats.org/drawingml/2006/main" lIns="0" tIns="0" rIns="0" bIns="0" anchor="ctr"/>
-          <a:lstStyle xmlns:a="http://schemas.openxmlformats.org/drawingml/2006/main"/>
-          <a:p xmlns:a="http://schemas.openxmlformats.org/drawingml/2006/main">
-            <a:pPr>
-              <a:defRPr sz="1500" b="1">
+            <a:off x="609600" y="342900"/>
+            <a:ext cx="9334500" cy="304800"/>
+          </a:xfrm>
+          <a:prstGeom xmlns:a="http://schemas.openxmlformats.org/drawingml/2006/main" prst="rect">
+            <a:avLst/>
+          </a:prstGeom>
+          <a:noFill xmlns:a="http://schemas.openxmlformats.org/drawingml/2006/main"/>
+          <a:ln xmlns:a="http://schemas.openxmlformats.org/drawingml/2006/main" w="0">
+            <a:noFill/>
+            <a:prstDash val="solid"/>
+          </a:ln>
+        </p:spPr>
+        <p:txBody>
+          <a:bodyPr xmlns:a="http://schemas.openxmlformats.org/drawingml/2006/main" lIns="0" tIns="0" rIns="0" bIns="0" anchor="ctr">
+            <a:noAutofit/>
+          </a:bodyPr>
+          <a:lstStyle xmlns:a="http://schemas.openxmlformats.org/drawingml/2006/main"/>
+          <a:p xmlns:a="http://schemas.openxmlformats.org/drawingml/2006/main">
+            <a:pPr algn="l">
+              <a:buNone/>
+              <a:defRPr sz="1350" b="1">
                 <a:solidFill>
                   <a:srgbClr val="28685E"/>
                 </a:solidFill>
-              </a:defRPr>
-            </a:pPr>
-            <a:r>
-              <a:rPr sz="1500" b="1">
+                <a:latin typeface="Calibri"/>
+                <a:ea typeface="Calibri"/>
+                <a:cs typeface="Calibri"/>
+              </a:defRPr>
+            </a:pPr>
+            <a:r>
+              <a:rPr sz="1350" b="1">
                 <a:solidFill>
                   <a:srgbClr val="28685E"/>
                 </a:solidFill>
+                <a:latin typeface="Calibri"/>
+                <a:ea typeface="Calibri"/>
+                <a:cs typeface="Calibri"/>
               </a:rPr>
               <a:t>MADE BY MATT  /  GROW SCIENCE</a:t>
             </a:r>
@@ -2460,34 +2477,43 @@
         </p:nvSpPr>
         <p:spPr>
           <a:xfrm xmlns:a="http://schemas.openxmlformats.org/drawingml/2006/main">
-            <a:off x="609600" y="1352550"/>
-            <a:ext cx="10972800" cy="952500"/>
-          </a:xfrm>
-          <a:prstGeom xmlns:a="http://schemas.openxmlformats.org/drawingml/2006/main" prst="rect">
-            <a:avLst/>
-          </a:prstGeom>
-          <a:noFill xmlns:a="http://schemas.openxmlformats.org/drawingml/2006/main"/>
-          <a:ln xmlns:a="http://schemas.openxmlformats.org/drawingml/2006/main" w="0">
-            <a:noFill/>
-            <a:prstDash val="solid"/>
-          </a:ln>
-        </p:spPr>
-        <p:txBody>
-          <a:bodyPr xmlns:a="http://schemas.openxmlformats.org/drawingml/2006/main" lIns="0" tIns="0" rIns="0" bIns="0" anchor="ctr"/>
-          <a:lstStyle xmlns:a="http://schemas.openxmlformats.org/drawingml/2006/main"/>
-          <a:p xmlns:a="http://schemas.openxmlformats.org/drawingml/2006/main">
-            <a:pPr>
-              <a:defRPr sz="3750" b="1">
-                <a:solidFill>
-                  <a:srgbClr val="152B3A"/>
-                </a:solidFill>
-              </a:defRPr>
-            </a:pPr>
-            <a:r>
-              <a:rPr sz="3750" b="1">
-                <a:solidFill>
-                  <a:srgbClr val="152B3A"/>
-                </a:solidFill>
+            <a:off x="609600" y="990600"/>
+            <a:ext cx="10972800" cy="1000125"/>
+          </a:xfrm>
+          <a:prstGeom xmlns:a="http://schemas.openxmlformats.org/drawingml/2006/main" prst="rect">
+            <a:avLst/>
+          </a:prstGeom>
+          <a:noFill xmlns:a="http://schemas.openxmlformats.org/drawingml/2006/main"/>
+          <a:ln xmlns:a="http://schemas.openxmlformats.org/drawingml/2006/main" w="0">
+            <a:noFill/>
+            <a:prstDash val="solid"/>
+          </a:ln>
+        </p:spPr>
+        <p:txBody>
+          <a:bodyPr xmlns:a="http://schemas.openxmlformats.org/drawingml/2006/main" lIns="0" tIns="0" rIns="0" bIns="0" anchor="ctr">
+            <a:noAutofit/>
+          </a:bodyPr>
+          <a:lstStyle xmlns:a="http://schemas.openxmlformats.org/drawingml/2006/main"/>
+          <a:p xmlns:a="http://schemas.openxmlformats.org/drawingml/2006/main">
+            <a:pPr algn="l">
+              <a:buNone/>
+              <a:defRPr sz="3675" b="1">
+                <a:solidFill>
+                  <a:srgbClr val="152B3A"/>
+                </a:solidFill>
+                <a:latin typeface="Calibri"/>
+                <a:ea typeface="Calibri"/>
+                <a:cs typeface="Calibri"/>
+              </a:defRPr>
+            </a:pPr>
+            <a:r>
+              <a:rPr sz="3675" b="1">
+                <a:solidFill>
+                  <a:srgbClr val="152B3A"/>
+                </a:solidFill>
+                <a:latin typeface="Calibri"/>
+                <a:ea typeface="Calibri"/>
+                <a:cs typeface="Calibri"/>
               </a:rPr>
               <a:t>Earth and the planets</a:t>
             </a:r>
@@ -2510,14 +2536,14 @@
         </p:nvSpPr>
         <p:spPr>
           <a:xfrm xmlns:a="http://schemas.openxmlformats.org/drawingml/2006/main">
-            <a:off x="609600" y="6219825"/>
+            <a:off x="609600" y="6191250"/>
             <a:ext cx="10972800" cy="9525"/>
           </a:xfrm>
           <a:prstGeom xmlns:a="http://schemas.openxmlformats.org/drawingml/2006/main" prst="rect">
             <a:avLst/>
           </a:prstGeom>
           <a:solidFill xmlns:a="http://schemas.openxmlformats.org/drawingml/2006/main">
-            <a:srgbClr val="DCE7DD"/>
+            <a:srgbClr val="CEDBD3"/>
           </a:solidFill>
           <a:ln xmlns:a="http://schemas.openxmlformats.org/drawingml/2006/main" w="0">
             <a:noFill/>
@@ -2541,34 +2567,43 @@
         </p:nvSpPr>
         <p:spPr>
           <a:xfrm xmlns:a="http://schemas.openxmlformats.org/drawingml/2006/main">
-            <a:off x="609600" y="6381750"/>
-            <a:ext cx="9906000" cy="228600"/>
-          </a:xfrm>
-          <a:prstGeom xmlns:a="http://schemas.openxmlformats.org/drawingml/2006/main" prst="rect">
-            <a:avLst/>
-          </a:prstGeom>
-          <a:noFill xmlns:a="http://schemas.openxmlformats.org/drawingml/2006/main"/>
-          <a:ln xmlns:a="http://schemas.openxmlformats.org/drawingml/2006/main" w="0">
-            <a:noFill/>
-            <a:prstDash val="solid"/>
-          </a:ln>
-        </p:spPr>
-        <p:txBody>
-          <a:bodyPr xmlns:a="http://schemas.openxmlformats.org/drawingml/2006/main" lIns="0" tIns="0" rIns="0" bIns="0" anchor="ctr"/>
-          <a:lstStyle xmlns:a="http://schemas.openxmlformats.org/drawingml/2006/main"/>
-          <a:p xmlns:a="http://schemas.openxmlformats.org/drawingml/2006/main">
-            <a:pPr>
-              <a:defRPr sz="1275" b="0">
+            <a:off x="609600" y="6419850"/>
+            <a:ext cx="9525000" cy="219075"/>
+          </a:xfrm>
+          <a:prstGeom xmlns:a="http://schemas.openxmlformats.org/drawingml/2006/main" prst="rect">
+            <a:avLst/>
+          </a:prstGeom>
+          <a:noFill xmlns:a="http://schemas.openxmlformats.org/drawingml/2006/main"/>
+          <a:ln xmlns:a="http://schemas.openxmlformats.org/drawingml/2006/main" w="0">
+            <a:noFill/>
+            <a:prstDash val="solid"/>
+          </a:ln>
+        </p:spPr>
+        <p:txBody>
+          <a:bodyPr xmlns:a="http://schemas.openxmlformats.org/drawingml/2006/main" lIns="0" tIns="0" rIns="0" bIns="0" anchor="ctr">
+            <a:noAutofit/>
+          </a:bodyPr>
+          <a:lstStyle xmlns:a="http://schemas.openxmlformats.org/drawingml/2006/main"/>
+          <a:p xmlns:a="http://schemas.openxmlformats.org/drawingml/2006/main">
+            <a:pPr algn="l">
+              <a:buNone/>
+              <a:defRPr sz="1200" b="0">
                 <a:solidFill>
                   <a:srgbClr val="50616B"/>
                 </a:solidFill>
-              </a:defRPr>
-            </a:pPr>
-            <a:r>
-              <a:rPr sz="1275" b="0">
+                <a:latin typeface="Calibri"/>
+                <a:ea typeface="Calibri"/>
+                <a:cs typeface="Calibri"/>
+              </a:defRPr>
+            </a:pPr>
+            <a:r>
+              <a:rPr sz="1200" b="0">
                 <a:solidFill>
                   <a:srgbClr val="50616B"/>
                 </a:solidFill>
+                <a:latin typeface="Calibri"/>
+                <a:ea typeface="Calibri"/>
+                <a:cs typeface="Calibri"/>
               </a:rPr>
               <a:t>AUTUMN 1  ·  WEEK 6  ·  LESSON A</a:t>
             </a:r>
@@ -2591,27 +2626,33 @@
         </p:nvSpPr>
         <p:spPr>
           <a:xfrm xmlns:a="http://schemas.openxmlformats.org/drawingml/2006/main">
-            <a:off x="11106150" y="6362700"/>
-            <a:ext cx="476250" cy="238125"/>
-          </a:xfrm>
-          <a:prstGeom xmlns:a="http://schemas.openxmlformats.org/drawingml/2006/main" prst="rect">
-            <a:avLst/>
-          </a:prstGeom>
-          <a:noFill xmlns:a="http://schemas.openxmlformats.org/drawingml/2006/main"/>
-          <a:ln xmlns:a="http://schemas.openxmlformats.org/drawingml/2006/main" w="0">
-            <a:noFill/>
-            <a:prstDash val="solid"/>
-          </a:ln>
-        </p:spPr>
-        <p:txBody>
-          <a:bodyPr xmlns:a="http://schemas.openxmlformats.org/drawingml/2006/main" lIns="0" tIns="0" rIns="0" bIns="0" anchor="ctr"/>
-          <a:lstStyle xmlns:a="http://schemas.openxmlformats.org/drawingml/2006/main"/>
-          <a:p xmlns:a="http://schemas.openxmlformats.org/drawingml/2006/main">
-            <a:pPr>
+            <a:off x="11106150" y="6400800"/>
+            <a:ext cx="476250" cy="247650"/>
+          </a:xfrm>
+          <a:prstGeom xmlns:a="http://schemas.openxmlformats.org/drawingml/2006/main" prst="rect">
+            <a:avLst/>
+          </a:prstGeom>
+          <a:noFill xmlns:a="http://schemas.openxmlformats.org/drawingml/2006/main"/>
+          <a:ln xmlns:a="http://schemas.openxmlformats.org/drawingml/2006/main" w="0">
+            <a:noFill/>
+            <a:prstDash val="solid"/>
+          </a:ln>
+        </p:spPr>
+        <p:txBody>
+          <a:bodyPr xmlns:a="http://schemas.openxmlformats.org/drawingml/2006/main" lIns="0" tIns="0" rIns="0" bIns="0" anchor="ctr">
+            <a:noAutofit/>
+          </a:bodyPr>
+          <a:lstStyle xmlns:a="http://schemas.openxmlformats.org/drawingml/2006/main"/>
+          <a:p xmlns:a="http://schemas.openxmlformats.org/drawingml/2006/main">
+            <a:pPr algn="l">
+              <a:buNone/>
               <a:defRPr sz="1350" b="1">
                 <a:solidFill>
                   <a:srgbClr val="28685E"/>
                 </a:solidFill>
+                <a:latin typeface="Calibri"/>
+                <a:ea typeface="Calibri"/>
+                <a:cs typeface="Calibri"/>
               </a:defRPr>
             </a:pPr>
             <a:r>
@@ -2619,6 +2660,9 @@
                 <a:solidFill>
                   <a:srgbClr val="28685E"/>
                 </a:solidFill>
+                <a:latin typeface="Calibri"/>
+                <a:ea typeface="Calibri"/>
+                <a:cs typeface="Calibri"/>
               </a:rPr>
               <a:t>01</a:t>
             </a:r>
@@ -2641,34 +2685,43 @@
         </p:nvSpPr>
         <p:spPr>
           <a:xfrm xmlns:a="http://schemas.openxmlformats.org/drawingml/2006/main">
-            <a:off x="609600" y="2809875"/>
-            <a:ext cx="10668000" cy="1000125"/>
-          </a:xfrm>
-          <a:prstGeom xmlns:a="http://schemas.openxmlformats.org/drawingml/2006/main" prst="rect">
-            <a:avLst/>
-          </a:prstGeom>
-          <a:noFill xmlns:a="http://schemas.openxmlformats.org/drawingml/2006/main"/>
-          <a:ln xmlns:a="http://schemas.openxmlformats.org/drawingml/2006/main" w="0">
-            <a:noFill/>
-            <a:prstDash val="solid"/>
-          </a:ln>
-        </p:spPr>
-        <p:txBody>
-          <a:bodyPr xmlns:a="http://schemas.openxmlformats.org/drawingml/2006/main" lIns="0" tIns="0" rIns="0" bIns="0" anchor="ctr"/>
-          <a:lstStyle xmlns:a="http://schemas.openxmlformats.org/drawingml/2006/main"/>
-          <a:p xmlns:a="http://schemas.openxmlformats.org/drawingml/2006/main">
-            <a:pPr>
-              <a:defRPr sz="3900" b="1">
+            <a:off x="609600" y="2447925"/>
+            <a:ext cx="5429250" cy="1638300"/>
+          </a:xfrm>
+          <a:prstGeom xmlns:a="http://schemas.openxmlformats.org/drawingml/2006/main" prst="rect">
+            <a:avLst/>
+          </a:prstGeom>
+          <a:noFill xmlns:a="http://schemas.openxmlformats.org/drawingml/2006/main"/>
+          <a:ln xmlns:a="http://schemas.openxmlformats.org/drawingml/2006/main" w="0">
+            <a:noFill/>
+            <a:prstDash val="solid"/>
+          </a:ln>
+        </p:spPr>
+        <p:txBody>
+          <a:bodyPr xmlns:a="http://schemas.openxmlformats.org/drawingml/2006/main" lIns="0" tIns="0" rIns="0" bIns="0" anchor="ctr">
+            <a:noAutofit/>
+          </a:bodyPr>
+          <a:lstStyle xmlns:a="http://schemas.openxmlformats.org/drawingml/2006/main"/>
+          <a:p xmlns:a="http://schemas.openxmlformats.org/drawingml/2006/main">
+            <a:pPr algn="l">
+              <a:buNone/>
+              <a:defRPr sz="3600" b="1">
                 <a:solidFill>
                   <a:srgbClr val="28685E"/>
                 </a:solidFill>
-              </a:defRPr>
-            </a:pPr>
-            <a:r>
-              <a:rPr sz="3900" b="1">
+                <a:latin typeface="Calibri"/>
+                <a:ea typeface="Calibri"/>
+                <a:cs typeface="Calibri"/>
+              </a:defRPr>
+            </a:pPr>
+            <a:r>
+              <a:rPr sz="3600" b="1">
                 <a:solidFill>
                   <a:srgbClr val="28685E"/>
                 </a:solidFill>
+                <a:latin typeface="Calibri"/>
+                <a:ea typeface="Calibri"/>
+                <a:cs typeface="Calibri"/>
               </a:rPr>
               <a:t>Order. Orbit. Explain.</a:t>
             </a:r>
@@ -2691,40 +2744,71 @@
         </p:nvSpPr>
         <p:spPr>
           <a:xfrm xmlns:a="http://schemas.openxmlformats.org/drawingml/2006/main">
-            <a:off x="609600" y="4143375"/>
-            <a:ext cx="10668000" cy="1143000"/>
-          </a:xfrm>
-          <a:prstGeom xmlns:a="http://schemas.openxmlformats.org/drawingml/2006/main" prst="rect">
-            <a:avLst/>
-          </a:prstGeom>
-          <a:noFill xmlns:a="http://schemas.openxmlformats.org/drawingml/2006/main"/>
-          <a:ln xmlns:a="http://schemas.openxmlformats.org/drawingml/2006/main" w="0">
-            <a:noFill/>
-            <a:prstDash val="solid"/>
-          </a:ln>
-        </p:spPr>
-        <p:txBody>
-          <a:bodyPr xmlns:a="http://schemas.openxmlformats.org/drawingml/2006/main" lIns="0" tIns="0" rIns="0" bIns="0" anchor="ctr"/>
-          <a:lstStyle xmlns:a="http://schemas.openxmlformats.org/drawingml/2006/main"/>
-          <a:p xmlns:a="http://schemas.openxmlformats.org/drawingml/2006/main">
-            <a:pPr>
-              <a:defRPr sz="2550" b="0">
-                <a:solidFill>
-                  <a:srgbClr val="152B3A"/>
-                </a:solidFill>
-              </a:defRPr>
-            </a:pPr>
-            <a:r>
-              <a:rPr sz="2550" b="0">
-                <a:solidFill>
-                  <a:srgbClr val="152B3A"/>
-                </a:solidFill>
+            <a:off x="609600" y="4286250"/>
+            <a:ext cx="5314950" cy="1466850"/>
+          </a:xfrm>
+          <a:prstGeom xmlns:a="http://schemas.openxmlformats.org/drawingml/2006/main" prst="rect">
+            <a:avLst/>
+          </a:prstGeom>
+          <a:noFill xmlns:a="http://schemas.openxmlformats.org/drawingml/2006/main"/>
+          <a:ln xmlns:a="http://schemas.openxmlformats.org/drawingml/2006/main" w="0">
+            <a:noFill/>
+            <a:prstDash val="solid"/>
+          </a:ln>
+        </p:spPr>
+        <p:txBody>
+          <a:bodyPr xmlns:a="http://schemas.openxmlformats.org/drawingml/2006/main" lIns="0" tIns="0" rIns="0" bIns="0" anchor="ctr">
+            <a:noAutofit/>
+          </a:bodyPr>
+          <a:lstStyle xmlns:a="http://schemas.openxmlformats.org/drawingml/2006/main"/>
+          <a:p xmlns:a="http://schemas.openxmlformats.org/drawingml/2006/main">
+            <a:pPr algn="l">
+              <a:buNone/>
+              <a:defRPr sz="2400" b="0">
+                <a:solidFill>
+                  <a:srgbClr val="152B3A"/>
+                </a:solidFill>
+                <a:latin typeface="Calibri"/>
+                <a:ea typeface="Calibri"/>
+                <a:cs typeface="Calibri"/>
+              </a:defRPr>
+            </a:pPr>
+            <a:r>
+              <a:rPr sz="2400" b="0">
+                <a:solidFill>
+                  <a:srgbClr val="152B3A"/>
+                </a:solidFill>
+                <a:latin typeface="Calibri"/>
+                <a:ea typeface="Calibri"/>
+                <a:cs typeface="Calibri"/>
               </a:rPr>
               <a:t>Describe how Earth and the other planets move around the Sun.</a:t>
             </a:r>
           </a:p>
         </p:txBody>
       </p:sp>
+      <p:pic>
+        <p:nvPicPr>
+          <p:cNvPr id="19" name=""/>
+          <p:cNvPicPr>
+            <a:picLocks xmlns:a="http://schemas.openxmlformats.org/drawingml/2006/main" noChangeAspect="1"/>
+          </p:cNvPicPr>
+          <p:nvPr/>
+        </p:nvPicPr>
+        <p:blipFill>
+          <a:blip xmlns:r="http://schemas.openxmlformats.org/officeDocument/2006/relationships" xmlns:a="http://schemas.openxmlformats.org/drawingml/2006/main" r:embed="Ra7ed454d0d8a492f"/>
+          <a:stretch xmlns:a="http://schemas.openxmlformats.org/drawingml/2006/main"/>
+        </p:blipFill>
+        <p:spPr>
+          <a:xfrm xmlns:a="http://schemas.openxmlformats.org/drawingml/2006/main">
+            <a:off x="7134225" y="2200275"/>
+            <a:ext cx="3714750" cy="3714750"/>
+          </a:xfrm>
+          <a:prstGeom xmlns:a="http://schemas.openxmlformats.org/drawingml/2006/main" prst="rect">
+            <a:avLst/>
+          </a:prstGeom>
+        </p:spPr>
+      </p:pic>
     </p:spTree>
     <p:extLst>
       <p:ext uri="{BB962C8B-B14F-4D97-AF65-F5344CB8AC3E}">
@@ -2741,7 +2825,7 @@
     <p:bg>
       <p:bgPr>
         <a:solidFill xmlns:a="http://schemas.openxmlformats.org/drawingml/2006/main">
-          <a:srgbClr val="F5F1E8"/>
+          <a:srgbClr val="FAF9F5"/>
         </a:solidFill>
       </p:bgPr>
     </p:bg>
@@ -2770,8 +2854,8 @@
         </p:nvSpPr>
         <p:spPr>
           <a:xfrm xmlns:a="http://schemas.openxmlformats.org/drawingml/2006/main">
-            <a:off x="609600" y="552450"/>
-            <a:ext cx="781050" cy="57150"/>
+            <a:off x="609600" y="733425"/>
+            <a:ext cx="781050" cy="38100"/>
           </a:xfrm>
           <a:prstGeom xmlns:a="http://schemas.openxmlformats.org/drawingml/2006/main" prst="rect">
             <a:avLst/>
@@ -2801,34 +2885,43 @@
         </p:nvSpPr>
         <p:spPr>
           <a:xfrm xmlns:a="http://schemas.openxmlformats.org/drawingml/2006/main">
-            <a:off x="609600" y="762000"/>
-            <a:ext cx="8572500" cy="285750"/>
-          </a:xfrm>
-          <a:prstGeom xmlns:a="http://schemas.openxmlformats.org/drawingml/2006/main" prst="rect">
-            <a:avLst/>
-          </a:prstGeom>
-          <a:noFill xmlns:a="http://schemas.openxmlformats.org/drawingml/2006/main"/>
-          <a:ln xmlns:a="http://schemas.openxmlformats.org/drawingml/2006/main" w="0">
-            <a:noFill/>
-            <a:prstDash val="solid"/>
-          </a:ln>
-        </p:spPr>
-        <p:txBody>
-          <a:bodyPr xmlns:a="http://schemas.openxmlformats.org/drawingml/2006/main" lIns="0" tIns="0" rIns="0" bIns="0" anchor="ctr"/>
-          <a:lstStyle xmlns:a="http://schemas.openxmlformats.org/drawingml/2006/main"/>
-          <a:p xmlns:a="http://schemas.openxmlformats.org/drawingml/2006/main">
-            <a:pPr>
-              <a:defRPr sz="1500" b="1">
+            <a:off x="609600" y="342900"/>
+            <a:ext cx="9334500" cy="304800"/>
+          </a:xfrm>
+          <a:prstGeom xmlns:a="http://schemas.openxmlformats.org/drawingml/2006/main" prst="rect">
+            <a:avLst/>
+          </a:prstGeom>
+          <a:noFill xmlns:a="http://schemas.openxmlformats.org/drawingml/2006/main"/>
+          <a:ln xmlns:a="http://schemas.openxmlformats.org/drawingml/2006/main" w="0">
+            <a:noFill/>
+            <a:prstDash val="solid"/>
+          </a:ln>
+        </p:spPr>
+        <p:txBody>
+          <a:bodyPr xmlns:a="http://schemas.openxmlformats.org/drawingml/2006/main" lIns="0" tIns="0" rIns="0" bIns="0" anchor="ctr">
+            <a:noAutofit/>
+          </a:bodyPr>
+          <a:lstStyle xmlns:a="http://schemas.openxmlformats.org/drawingml/2006/main"/>
+          <a:p xmlns:a="http://schemas.openxmlformats.org/drawingml/2006/main">
+            <a:pPr algn="l">
+              <a:buNone/>
+              <a:defRPr sz="1350" b="1">
                 <a:solidFill>
                   <a:srgbClr val="28685E"/>
                 </a:solidFill>
-              </a:defRPr>
-            </a:pPr>
-            <a:r>
-              <a:rPr sz="1500" b="1">
+                <a:latin typeface="Calibri"/>
+                <a:ea typeface="Calibri"/>
+                <a:cs typeface="Calibri"/>
+              </a:defRPr>
+            </a:pPr>
+            <a:r>
+              <a:rPr sz="1350" b="1">
                 <a:solidFill>
                   <a:srgbClr val="28685E"/>
                 </a:solidFill>
+                <a:latin typeface="Calibri"/>
+                <a:ea typeface="Calibri"/>
+                <a:cs typeface="Calibri"/>
               </a:rPr>
               <a:t>MADE BY MATT  /  GROW SCIENCE</a:t>
             </a:r>
@@ -2851,34 +2944,43 @@
         </p:nvSpPr>
         <p:spPr>
           <a:xfrm xmlns:a="http://schemas.openxmlformats.org/drawingml/2006/main">
-            <a:off x="609600" y="1352550"/>
-            <a:ext cx="10972800" cy="952500"/>
-          </a:xfrm>
-          <a:prstGeom xmlns:a="http://schemas.openxmlformats.org/drawingml/2006/main" prst="rect">
-            <a:avLst/>
-          </a:prstGeom>
-          <a:noFill xmlns:a="http://schemas.openxmlformats.org/drawingml/2006/main"/>
-          <a:ln xmlns:a="http://schemas.openxmlformats.org/drawingml/2006/main" w="0">
-            <a:noFill/>
-            <a:prstDash val="solid"/>
-          </a:ln>
-        </p:spPr>
-        <p:txBody>
-          <a:bodyPr xmlns:a="http://schemas.openxmlformats.org/drawingml/2006/main" lIns="0" tIns="0" rIns="0" bIns="0" anchor="ctr"/>
-          <a:lstStyle xmlns:a="http://schemas.openxmlformats.org/drawingml/2006/main"/>
-          <a:p xmlns:a="http://schemas.openxmlformats.org/drawingml/2006/main">
-            <a:pPr>
-              <a:defRPr sz="3750" b="1">
-                <a:solidFill>
-                  <a:srgbClr val="152B3A"/>
-                </a:solidFill>
-              </a:defRPr>
-            </a:pPr>
-            <a:r>
-              <a:rPr sz="3750" b="1">
-                <a:solidFill>
-                  <a:srgbClr val="152B3A"/>
-                </a:solidFill>
+            <a:off x="609600" y="990600"/>
+            <a:ext cx="10972800" cy="1000125"/>
+          </a:xfrm>
+          <a:prstGeom xmlns:a="http://schemas.openxmlformats.org/drawingml/2006/main" prst="rect">
+            <a:avLst/>
+          </a:prstGeom>
+          <a:noFill xmlns:a="http://schemas.openxmlformats.org/drawingml/2006/main"/>
+          <a:ln xmlns:a="http://schemas.openxmlformats.org/drawingml/2006/main" w="0">
+            <a:noFill/>
+            <a:prstDash val="solid"/>
+          </a:ln>
+        </p:spPr>
+        <p:txBody>
+          <a:bodyPr xmlns:a="http://schemas.openxmlformats.org/drawingml/2006/main" lIns="0" tIns="0" rIns="0" bIns="0" anchor="ctr">
+            <a:noAutofit/>
+          </a:bodyPr>
+          <a:lstStyle xmlns:a="http://schemas.openxmlformats.org/drawingml/2006/main"/>
+          <a:p xmlns:a="http://schemas.openxmlformats.org/drawingml/2006/main">
+            <a:pPr algn="l">
+              <a:buNone/>
+              <a:defRPr sz="3675" b="1">
+                <a:solidFill>
+                  <a:srgbClr val="152B3A"/>
+                </a:solidFill>
+                <a:latin typeface="Calibri"/>
+                <a:ea typeface="Calibri"/>
+                <a:cs typeface="Calibri"/>
+              </a:defRPr>
+            </a:pPr>
+            <a:r>
+              <a:rPr sz="3675" b="1">
+                <a:solidFill>
+                  <a:srgbClr val="152B3A"/>
+                </a:solidFill>
+                <a:latin typeface="Calibri"/>
+                <a:ea typeface="Calibri"/>
+                <a:cs typeface="Calibri"/>
               </a:rPr>
               <a:t>Sort five statements</a:t>
             </a:r>
@@ -2901,14 +3003,14 @@
         </p:nvSpPr>
         <p:spPr>
           <a:xfrm xmlns:a="http://schemas.openxmlformats.org/drawingml/2006/main">
-            <a:off x="609600" y="6219825"/>
+            <a:off x="609600" y="6191250"/>
             <a:ext cx="10972800" cy="9525"/>
           </a:xfrm>
           <a:prstGeom xmlns:a="http://schemas.openxmlformats.org/drawingml/2006/main" prst="rect">
             <a:avLst/>
           </a:prstGeom>
           <a:solidFill xmlns:a="http://schemas.openxmlformats.org/drawingml/2006/main">
-            <a:srgbClr val="DCE7DD"/>
+            <a:srgbClr val="CEDBD3"/>
           </a:solidFill>
           <a:ln xmlns:a="http://schemas.openxmlformats.org/drawingml/2006/main" w="0">
             <a:noFill/>
@@ -2932,34 +3034,43 @@
         </p:nvSpPr>
         <p:spPr>
           <a:xfrm xmlns:a="http://schemas.openxmlformats.org/drawingml/2006/main">
-            <a:off x="609600" y="6381750"/>
-            <a:ext cx="9906000" cy="228600"/>
-          </a:xfrm>
-          <a:prstGeom xmlns:a="http://schemas.openxmlformats.org/drawingml/2006/main" prst="rect">
-            <a:avLst/>
-          </a:prstGeom>
-          <a:noFill xmlns:a="http://schemas.openxmlformats.org/drawingml/2006/main"/>
-          <a:ln xmlns:a="http://schemas.openxmlformats.org/drawingml/2006/main" w="0">
-            <a:noFill/>
-            <a:prstDash val="solid"/>
-          </a:ln>
-        </p:spPr>
-        <p:txBody>
-          <a:bodyPr xmlns:a="http://schemas.openxmlformats.org/drawingml/2006/main" lIns="0" tIns="0" rIns="0" bIns="0" anchor="ctr"/>
-          <a:lstStyle xmlns:a="http://schemas.openxmlformats.org/drawingml/2006/main"/>
-          <a:p xmlns:a="http://schemas.openxmlformats.org/drawingml/2006/main">
-            <a:pPr>
-              <a:defRPr sz="1275" b="0">
+            <a:off x="609600" y="6419850"/>
+            <a:ext cx="9525000" cy="219075"/>
+          </a:xfrm>
+          <a:prstGeom xmlns:a="http://schemas.openxmlformats.org/drawingml/2006/main" prst="rect">
+            <a:avLst/>
+          </a:prstGeom>
+          <a:noFill xmlns:a="http://schemas.openxmlformats.org/drawingml/2006/main"/>
+          <a:ln xmlns:a="http://schemas.openxmlformats.org/drawingml/2006/main" w="0">
+            <a:noFill/>
+            <a:prstDash val="solid"/>
+          </a:ln>
+        </p:spPr>
+        <p:txBody>
+          <a:bodyPr xmlns:a="http://schemas.openxmlformats.org/drawingml/2006/main" lIns="0" tIns="0" rIns="0" bIns="0" anchor="ctr">
+            <a:noAutofit/>
+          </a:bodyPr>
+          <a:lstStyle xmlns:a="http://schemas.openxmlformats.org/drawingml/2006/main"/>
+          <a:p xmlns:a="http://schemas.openxmlformats.org/drawingml/2006/main">
+            <a:pPr algn="l">
+              <a:buNone/>
+              <a:defRPr sz="1200" b="0">
                 <a:solidFill>
                   <a:srgbClr val="50616B"/>
                 </a:solidFill>
-              </a:defRPr>
-            </a:pPr>
-            <a:r>
-              <a:rPr sz="1275" b="0">
+                <a:latin typeface="Calibri"/>
+                <a:ea typeface="Calibri"/>
+                <a:cs typeface="Calibri"/>
+              </a:defRPr>
+            </a:pPr>
+            <a:r>
+              <a:rPr sz="1200" b="0">
                 <a:solidFill>
                   <a:srgbClr val="50616B"/>
                 </a:solidFill>
+                <a:latin typeface="Calibri"/>
+                <a:ea typeface="Calibri"/>
+                <a:cs typeface="Calibri"/>
               </a:rPr>
               <a:t>AUTUMN 1  ·  WEEK 6  ·  LESSON A</a:t>
             </a:r>
@@ -2982,27 +3093,33 @@
         </p:nvSpPr>
         <p:spPr>
           <a:xfrm xmlns:a="http://schemas.openxmlformats.org/drawingml/2006/main">
-            <a:off x="11106150" y="6362700"/>
-            <a:ext cx="476250" cy="238125"/>
-          </a:xfrm>
-          <a:prstGeom xmlns:a="http://schemas.openxmlformats.org/drawingml/2006/main" prst="rect">
-            <a:avLst/>
-          </a:prstGeom>
-          <a:noFill xmlns:a="http://schemas.openxmlformats.org/drawingml/2006/main"/>
-          <a:ln xmlns:a="http://schemas.openxmlformats.org/drawingml/2006/main" w="0">
-            <a:noFill/>
-            <a:prstDash val="solid"/>
-          </a:ln>
-        </p:spPr>
-        <p:txBody>
-          <a:bodyPr xmlns:a="http://schemas.openxmlformats.org/drawingml/2006/main" lIns="0" tIns="0" rIns="0" bIns="0" anchor="ctr"/>
-          <a:lstStyle xmlns:a="http://schemas.openxmlformats.org/drawingml/2006/main"/>
-          <a:p xmlns:a="http://schemas.openxmlformats.org/drawingml/2006/main">
-            <a:pPr>
+            <a:off x="11106150" y="6400800"/>
+            <a:ext cx="476250" cy="247650"/>
+          </a:xfrm>
+          <a:prstGeom xmlns:a="http://schemas.openxmlformats.org/drawingml/2006/main" prst="rect">
+            <a:avLst/>
+          </a:prstGeom>
+          <a:noFill xmlns:a="http://schemas.openxmlformats.org/drawingml/2006/main"/>
+          <a:ln xmlns:a="http://schemas.openxmlformats.org/drawingml/2006/main" w="0">
+            <a:noFill/>
+            <a:prstDash val="solid"/>
+          </a:ln>
+        </p:spPr>
+        <p:txBody>
+          <a:bodyPr xmlns:a="http://schemas.openxmlformats.org/drawingml/2006/main" lIns="0" tIns="0" rIns="0" bIns="0" anchor="ctr">
+            <a:noAutofit/>
+          </a:bodyPr>
+          <a:lstStyle xmlns:a="http://schemas.openxmlformats.org/drawingml/2006/main"/>
+          <a:p xmlns:a="http://schemas.openxmlformats.org/drawingml/2006/main">
+            <a:pPr algn="l">
+              <a:buNone/>
               <a:defRPr sz="1350" b="1">
                 <a:solidFill>
                   <a:srgbClr val="28685E"/>
                 </a:solidFill>
+                <a:latin typeface="Calibri"/>
+                <a:ea typeface="Calibri"/>
+                <a:cs typeface="Calibri"/>
               </a:defRPr>
             </a:pPr>
             <a:r>
@@ -3010,6 +3127,9 @@
                 <a:solidFill>
                   <a:srgbClr val="28685E"/>
                 </a:solidFill>
+                <a:latin typeface="Calibri"/>
+                <a:ea typeface="Calibri"/>
+                <a:cs typeface="Calibri"/>
               </a:rPr>
               <a:t>10</a:t>
             </a:r>
@@ -3032,34 +3152,43 @@
         </p:nvSpPr>
         <p:spPr>
           <a:xfrm xmlns:a="http://schemas.openxmlformats.org/drawingml/2006/main">
-            <a:off x="609600" y="2619375"/>
-            <a:ext cx="10972800" cy="533400"/>
-          </a:xfrm>
-          <a:prstGeom xmlns:a="http://schemas.openxmlformats.org/drawingml/2006/main" prst="rect">
-            <a:avLst/>
-          </a:prstGeom>
-          <a:noFill xmlns:a="http://schemas.openxmlformats.org/drawingml/2006/main"/>
-          <a:ln xmlns:a="http://schemas.openxmlformats.org/drawingml/2006/main" w="0">
-            <a:noFill/>
-            <a:prstDash val="solid"/>
-          </a:ln>
-        </p:spPr>
-        <p:txBody>
-          <a:bodyPr xmlns:a="http://schemas.openxmlformats.org/drawingml/2006/main" lIns="0" tIns="0" rIns="0" bIns="0" anchor="ctr"/>
-          <a:lstStyle xmlns:a="http://schemas.openxmlformats.org/drawingml/2006/main"/>
-          <a:p xmlns:a="http://schemas.openxmlformats.org/drawingml/2006/main">
-            <a:pPr>
-              <a:defRPr sz="2175" b="0">
-                <a:solidFill>
-                  <a:srgbClr val="152B3A"/>
-                </a:solidFill>
-              </a:defRPr>
-            </a:pPr>
-            <a:r>
-              <a:rPr sz="2175" b="0">
-                <a:solidFill>
-                  <a:srgbClr val="152B3A"/>
-                </a:solidFill>
+            <a:off x="1000125" y="2333625"/>
+            <a:ext cx="10382250" cy="622935"/>
+          </a:xfrm>
+          <a:prstGeom xmlns:a="http://schemas.openxmlformats.org/drawingml/2006/main" prst="rect">
+            <a:avLst/>
+          </a:prstGeom>
+          <a:noFill xmlns:a="http://schemas.openxmlformats.org/drawingml/2006/main"/>
+          <a:ln xmlns:a="http://schemas.openxmlformats.org/drawingml/2006/main" w="0">
+            <a:noFill/>
+            <a:prstDash val="solid"/>
+          </a:ln>
+        </p:spPr>
+        <p:txBody>
+          <a:bodyPr xmlns:a="http://schemas.openxmlformats.org/drawingml/2006/main" lIns="0" tIns="0" rIns="0" bIns="0" anchor="ctr">
+            <a:noAutofit/>
+          </a:bodyPr>
+          <a:lstStyle xmlns:a="http://schemas.openxmlformats.org/drawingml/2006/main"/>
+          <a:p xmlns:a="http://schemas.openxmlformats.org/drawingml/2006/main">
+            <a:pPr algn="l">
+              <a:buNone/>
+              <a:defRPr sz="2400" b="0">
+                <a:solidFill>
+                  <a:srgbClr val="152B3A"/>
+                </a:solidFill>
+                <a:latin typeface="Calibri"/>
+                <a:ea typeface="Calibri"/>
+                <a:cs typeface="Calibri"/>
+              </a:defRPr>
+            </a:pPr>
+            <a:r>
+              <a:rPr sz="2400" b="0">
+                <a:solidFill>
+                  <a:srgbClr val="152B3A"/>
+                </a:solidFill>
+                <a:latin typeface="Calibri"/>
+                <a:ea typeface="Calibri"/>
+                <a:cs typeface="Calibri"/>
               </a:rPr>
               <a:t>Planets orbit the Sun.</a:t>
             </a:r>
@@ -3082,34 +3211,43 @@
         </p:nvSpPr>
         <p:spPr>
           <a:xfrm xmlns:a="http://schemas.openxmlformats.org/drawingml/2006/main">
-            <a:off x="609600" y="3228975"/>
-            <a:ext cx="10972800" cy="533400"/>
-          </a:xfrm>
-          <a:prstGeom xmlns:a="http://schemas.openxmlformats.org/drawingml/2006/main" prst="rect">
-            <a:avLst/>
-          </a:prstGeom>
-          <a:noFill xmlns:a="http://schemas.openxmlformats.org/drawingml/2006/main"/>
-          <a:ln xmlns:a="http://schemas.openxmlformats.org/drawingml/2006/main" w="0">
-            <a:noFill/>
-            <a:prstDash val="solid"/>
-          </a:ln>
-        </p:spPr>
-        <p:txBody>
-          <a:bodyPr xmlns:a="http://schemas.openxmlformats.org/drawingml/2006/main" lIns="0" tIns="0" rIns="0" bIns="0" anchor="ctr"/>
-          <a:lstStyle xmlns:a="http://schemas.openxmlformats.org/drawingml/2006/main"/>
-          <a:p xmlns:a="http://schemas.openxmlformats.org/drawingml/2006/main">
-            <a:pPr>
-              <a:defRPr sz="2175" b="0">
-                <a:solidFill>
-                  <a:srgbClr val="152B3A"/>
-                </a:solidFill>
-              </a:defRPr>
-            </a:pPr>
-            <a:r>
-              <a:rPr sz="2175" b="0">
-                <a:solidFill>
-                  <a:srgbClr val="152B3A"/>
-                </a:solidFill>
+            <a:off x="1000125" y="3013710"/>
+            <a:ext cx="10382250" cy="622935"/>
+          </a:xfrm>
+          <a:prstGeom xmlns:a="http://schemas.openxmlformats.org/drawingml/2006/main" prst="rect">
+            <a:avLst/>
+          </a:prstGeom>
+          <a:noFill xmlns:a="http://schemas.openxmlformats.org/drawingml/2006/main"/>
+          <a:ln xmlns:a="http://schemas.openxmlformats.org/drawingml/2006/main" w="0">
+            <a:noFill/>
+            <a:prstDash val="solid"/>
+          </a:ln>
+        </p:spPr>
+        <p:txBody>
+          <a:bodyPr xmlns:a="http://schemas.openxmlformats.org/drawingml/2006/main" lIns="0" tIns="0" rIns="0" bIns="0" anchor="ctr">
+            <a:noAutofit/>
+          </a:bodyPr>
+          <a:lstStyle xmlns:a="http://schemas.openxmlformats.org/drawingml/2006/main"/>
+          <a:p xmlns:a="http://schemas.openxmlformats.org/drawingml/2006/main">
+            <a:pPr algn="l">
+              <a:buNone/>
+              <a:defRPr sz="2400" b="0">
+                <a:solidFill>
+                  <a:srgbClr val="152B3A"/>
+                </a:solidFill>
+                <a:latin typeface="Calibri"/>
+                <a:ea typeface="Calibri"/>
+                <a:cs typeface="Calibri"/>
+              </a:defRPr>
+            </a:pPr>
+            <a:r>
+              <a:rPr sz="2400" b="0">
+                <a:solidFill>
+                  <a:srgbClr val="152B3A"/>
+                </a:solidFill>
+                <a:latin typeface="Calibri"/>
+                <a:ea typeface="Calibri"/>
+                <a:cs typeface="Calibri"/>
               </a:rPr>
               <a:t>The Sun orbits Earth.</a:t>
             </a:r>
@@ -3132,34 +3270,43 @@
         </p:nvSpPr>
         <p:spPr>
           <a:xfrm xmlns:a="http://schemas.openxmlformats.org/drawingml/2006/main">
-            <a:off x="609600" y="3838575"/>
-            <a:ext cx="10972800" cy="533400"/>
-          </a:xfrm>
-          <a:prstGeom xmlns:a="http://schemas.openxmlformats.org/drawingml/2006/main" prst="rect">
-            <a:avLst/>
-          </a:prstGeom>
-          <a:noFill xmlns:a="http://schemas.openxmlformats.org/drawingml/2006/main"/>
-          <a:ln xmlns:a="http://schemas.openxmlformats.org/drawingml/2006/main" w="0">
-            <a:noFill/>
-            <a:prstDash val="solid"/>
-          </a:ln>
-        </p:spPr>
-        <p:txBody>
-          <a:bodyPr xmlns:a="http://schemas.openxmlformats.org/drawingml/2006/main" lIns="0" tIns="0" rIns="0" bIns="0" anchor="ctr"/>
-          <a:lstStyle xmlns:a="http://schemas.openxmlformats.org/drawingml/2006/main"/>
-          <a:p xmlns:a="http://schemas.openxmlformats.org/drawingml/2006/main">
-            <a:pPr>
-              <a:defRPr sz="2175" b="0">
-                <a:solidFill>
-                  <a:srgbClr val="152B3A"/>
-                </a:solidFill>
-              </a:defRPr>
-            </a:pPr>
-            <a:r>
-              <a:rPr sz="2175" b="0">
-                <a:solidFill>
-                  <a:srgbClr val="152B3A"/>
-                </a:solidFill>
+            <a:off x="1000125" y="3693795"/>
+            <a:ext cx="10382250" cy="622935"/>
+          </a:xfrm>
+          <a:prstGeom xmlns:a="http://schemas.openxmlformats.org/drawingml/2006/main" prst="rect">
+            <a:avLst/>
+          </a:prstGeom>
+          <a:noFill xmlns:a="http://schemas.openxmlformats.org/drawingml/2006/main"/>
+          <a:ln xmlns:a="http://schemas.openxmlformats.org/drawingml/2006/main" w="0">
+            <a:noFill/>
+            <a:prstDash val="solid"/>
+          </a:ln>
+        </p:spPr>
+        <p:txBody>
+          <a:bodyPr xmlns:a="http://schemas.openxmlformats.org/drawingml/2006/main" lIns="0" tIns="0" rIns="0" bIns="0" anchor="ctr">
+            <a:noAutofit/>
+          </a:bodyPr>
+          <a:lstStyle xmlns:a="http://schemas.openxmlformats.org/drawingml/2006/main"/>
+          <a:p xmlns:a="http://schemas.openxmlformats.org/drawingml/2006/main">
+            <a:pPr algn="l">
+              <a:buNone/>
+              <a:defRPr sz="2400" b="0">
+                <a:solidFill>
+                  <a:srgbClr val="152B3A"/>
+                </a:solidFill>
+                <a:latin typeface="Calibri"/>
+                <a:ea typeface="Calibri"/>
+                <a:cs typeface="Calibri"/>
+              </a:defRPr>
+            </a:pPr>
+            <a:r>
+              <a:rPr sz="2400" b="0">
+                <a:solidFill>
+                  <a:srgbClr val="152B3A"/>
+                </a:solidFill>
+                <a:latin typeface="Calibri"/>
+                <a:ea typeface="Calibri"/>
+                <a:cs typeface="Calibri"/>
               </a:rPr>
               <a:t>Gravity keeps the planets in orbit.</a:t>
             </a:r>
@@ -3182,34 +3329,43 @@
         </p:nvSpPr>
         <p:spPr>
           <a:xfrm xmlns:a="http://schemas.openxmlformats.org/drawingml/2006/main">
-            <a:off x="609600" y="4448175"/>
-            <a:ext cx="10972800" cy="533400"/>
-          </a:xfrm>
-          <a:prstGeom xmlns:a="http://schemas.openxmlformats.org/drawingml/2006/main" prst="rect">
-            <a:avLst/>
-          </a:prstGeom>
-          <a:noFill xmlns:a="http://schemas.openxmlformats.org/drawingml/2006/main"/>
-          <a:ln xmlns:a="http://schemas.openxmlformats.org/drawingml/2006/main" w="0">
-            <a:noFill/>
-            <a:prstDash val="solid"/>
-          </a:ln>
-        </p:spPr>
-        <p:txBody>
-          <a:bodyPr xmlns:a="http://schemas.openxmlformats.org/drawingml/2006/main" lIns="0" tIns="0" rIns="0" bIns="0" anchor="ctr"/>
-          <a:lstStyle xmlns:a="http://schemas.openxmlformats.org/drawingml/2006/main"/>
-          <a:p xmlns:a="http://schemas.openxmlformats.org/drawingml/2006/main">
-            <a:pPr>
-              <a:defRPr sz="2175" b="0">
-                <a:solidFill>
-                  <a:srgbClr val="152B3A"/>
-                </a:solidFill>
-              </a:defRPr>
-            </a:pPr>
-            <a:r>
-              <a:rPr sz="2175" b="0">
-                <a:solidFill>
-                  <a:srgbClr val="152B3A"/>
-                </a:solidFill>
+            <a:off x="1000125" y="4373880"/>
+            <a:ext cx="10382250" cy="622935"/>
+          </a:xfrm>
+          <a:prstGeom xmlns:a="http://schemas.openxmlformats.org/drawingml/2006/main" prst="rect">
+            <a:avLst/>
+          </a:prstGeom>
+          <a:noFill xmlns:a="http://schemas.openxmlformats.org/drawingml/2006/main"/>
+          <a:ln xmlns:a="http://schemas.openxmlformats.org/drawingml/2006/main" w="0">
+            <a:noFill/>
+            <a:prstDash val="solid"/>
+          </a:ln>
+        </p:spPr>
+        <p:txBody>
+          <a:bodyPr xmlns:a="http://schemas.openxmlformats.org/drawingml/2006/main" lIns="0" tIns="0" rIns="0" bIns="0" anchor="ctr">
+            <a:noAutofit/>
+          </a:bodyPr>
+          <a:lstStyle xmlns:a="http://schemas.openxmlformats.org/drawingml/2006/main"/>
+          <a:p xmlns:a="http://schemas.openxmlformats.org/drawingml/2006/main">
+            <a:pPr algn="l">
+              <a:buNone/>
+              <a:defRPr sz="2400" b="0">
+                <a:solidFill>
+                  <a:srgbClr val="152B3A"/>
+                </a:solidFill>
+                <a:latin typeface="Calibri"/>
+                <a:ea typeface="Calibri"/>
+                <a:cs typeface="Calibri"/>
+              </a:defRPr>
+            </a:pPr>
+            <a:r>
+              <a:rPr sz="2400" b="0">
+                <a:solidFill>
+                  <a:srgbClr val="152B3A"/>
+                </a:solidFill>
+                <a:latin typeface="Calibri"/>
+                <a:ea typeface="Calibri"/>
+                <a:cs typeface="Calibri"/>
               </a:rPr>
               <a:t>There is no gravity in space.</a:t>
             </a:r>
@@ -3232,36 +3388,450 @@
         </p:nvSpPr>
         <p:spPr>
           <a:xfrm xmlns:a="http://schemas.openxmlformats.org/drawingml/2006/main">
-            <a:off x="609600" y="5057775"/>
-            <a:ext cx="10972800" cy="533400"/>
-          </a:xfrm>
-          <a:prstGeom xmlns:a="http://schemas.openxmlformats.org/drawingml/2006/main" prst="rect">
-            <a:avLst/>
-          </a:prstGeom>
-          <a:noFill xmlns:a="http://schemas.openxmlformats.org/drawingml/2006/main"/>
-          <a:ln xmlns:a="http://schemas.openxmlformats.org/drawingml/2006/main" w="0">
-            <a:noFill/>
-            <a:prstDash val="solid"/>
-          </a:ln>
-        </p:spPr>
-        <p:txBody>
-          <a:bodyPr xmlns:a="http://schemas.openxmlformats.org/drawingml/2006/main" lIns="0" tIns="0" rIns="0" bIns="0" anchor="ctr"/>
-          <a:lstStyle xmlns:a="http://schemas.openxmlformats.org/drawingml/2006/main"/>
-          <a:p xmlns:a="http://schemas.openxmlformats.org/drawingml/2006/main">
-            <a:pPr>
-              <a:defRPr sz="2175" b="0">
-                <a:solidFill>
-                  <a:srgbClr val="152B3A"/>
-                </a:solidFill>
-              </a:defRPr>
-            </a:pPr>
-            <a:r>
-              <a:rPr sz="2175" b="0">
-                <a:solidFill>
-                  <a:srgbClr val="152B3A"/>
-                </a:solidFill>
+            <a:off x="1000125" y="5053965"/>
+            <a:ext cx="10382250" cy="622935"/>
+          </a:xfrm>
+          <a:prstGeom xmlns:a="http://schemas.openxmlformats.org/drawingml/2006/main" prst="rect">
+            <a:avLst/>
+          </a:prstGeom>
+          <a:noFill xmlns:a="http://schemas.openxmlformats.org/drawingml/2006/main"/>
+          <a:ln xmlns:a="http://schemas.openxmlformats.org/drawingml/2006/main" w="0">
+            <a:noFill/>
+            <a:prstDash val="solid"/>
+          </a:ln>
+        </p:spPr>
+        <p:txBody>
+          <a:bodyPr xmlns:a="http://schemas.openxmlformats.org/drawingml/2006/main" lIns="0" tIns="0" rIns="0" bIns="0" anchor="ctr">
+            <a:noAutofit/>
+          </a:bodyPr>
+          <a:lstStyle xmlns:a="http://schemas.openxmlformats.org/drawingml/2006/main"/>
+          <a:p xmlns:a="http://schemas.openxmlformats.org/drawingml/2006/main">
+            <a:pPr algn="l">
+              <a:buNone/>
+              <a:defRPr sz="2400" b="0">
+                <a:solidFill>
+                  <a:srgbClr val="152B3A"/>
+                </a:solidFill>
+                <a:latin typeface="Calibri"/>
+                <a:ea typeface="Calibri"/>
+                <a:cs typeface="Calibri"/>
+              </a:defRPr>
+            </a:pPr>
+            <a:r>
+              <a:rPr sz="2400" b="0">
+                <a:solidFill>
+                  <a:srgbClr val="152B3A"/>
+                </a:solidFill>
+                <a:latin typeface="Calibri"/>
+                <a:ea typeface="Calibri"/>
+                <a:cs typeface="Calibri"/>
               </a:rPr>
               <a:t>Further-out planets have longer years.</a:t>
+            </a:r>
+          </a:p>
+        </p:txBody>
+      </p:sp>
+      <p:sp>
+        <p:nvSpPr>
+          <p:cNvPr id="13" name="cue-0">
+            <a:extLst xmlns:a="http://schemas.openxmlformats.org/drawingml/2006/main">
+              <a:ext uri="{FF2B5EF4-FFF2-40B4-BE49-F238E27FC236}">
+                <a16:creationId xmlns:a16="http://schemas.microsoft.com/office/drawing/2014/main" id="{171F9D71-9BE5-463F-88CF-3E51DD10BA40}"/>
+              </a:ext>
+            </a:extLst>
+          </p:cNvPr>
+          <p:cNvSpPr>
+            <a:spLocks xmlns:a="http://schemas.openxmlformats.org/drawingml/2006/main" noGrp="1"/>
+          </p:cNvSpPr>
+          <p:nvPr/>
+        </p:nvSpPr>
+        <p:spPr>
+          <a:xfrm xmlns:a="http://schemas.openxmlformats.org/drawingml/2006/main">
+            <a:off x="609600" y="2362200"/>
+            <a:ext cx="323850" cy="323850"/>
+          </a:xfrm>
+          <a:prstGeom xmlns:a="http://schemas.openxmlformats.org/drawingml/2006/main" prst="rect">
+            <a:avLst/>
+          </a:prstGeom>
+          <a:noFill xmlns:a="http://schemas.openxmlformats.org/drawingml/2006/main"/>
+          <a:ln xmlns:a="http://schemas.openxmlformats.org/drawingml/2006/main" w="0">
+            <a:noFill/>
+          </a:ln>
+        </p:spPr>
+        <p:txBody>
+          <a:bodyPr xmlns:a="http://schemas.openxmlformats.org/drawingml/2006/main" lIns="0" tIns="0" rIns="0" bIns="0" anchor="ctr">
+            <a:noAutofit/>
+          </a:bodyPr>
+          <a:lstStyle xmlns:a="http://schemas.openxmlformats.org/drawingml/2006/main"/>
+          <a:p xmlns:a="http://schemas.openxmlformats.org/drawingml/2006/main">
+            <a:pPr algn="l">
+              <a:defRPr sz="1350" b="1">
+                <a:solidFill>
+                  <a:srgbClr val="28685E"/>
+                </a:solidFill>
+                <a:latin typeface="Calibri"/>
+                <a:ea typeface="Calibri"/>
+                <a:cs typeface="Calibri"/>
+              </a:defRPr>
+            </a:pPr>
+            <a:r>
+              <a:rPr sz="1350" b="1">
+                <a:solidFill>
+                  <a:srgbClr val="28685E"/>
+                </a:solidFill>
+                <a:latin typeface="Calibri"/>
+                <a:ea typeface="Calibri"/>
+                <a:cs typeface="Calibri"/>
+              </a:rPr>
+              <a:t>01</a:t>
+            </a:r>
+          </a:p>
+        </p:txBody>
+      </p:sp>
+      <p:sp>
+        <p:nvSpPr>
+          <p:cNvPr id="14" name="row-rule-0">
+            <a:extLst xmlns:a="http://schemas.openxmlformats.org/drawingml/2006/main">
+              <a:ext uri="{FF2B5EF4-FFF2-40B4-BE49-F238E27FC236}">
+                <a16:creationId xmlns:a16="http://schemas.microsoft.com/office/drawing/2014/main" id="{218D5259-934A-4BAA-B57E-4A3E135DEFE8}"/>
+              </a:ext>
+            </a:extLst>
+          </p:cNvPr>
+          <p:cNvSpPr>
+            <a:spLocks xmlns:a="http://schemas.openxmlformats.org/drawingml/2006/main" noGrp="1"/>
+          </p:cNvSpPr>
+          <p:nvPr/>
+        </p:nvSpPr>
+        <p:spPr>
+          <a:xfrm xmlns:a="http://schemas.openxmlformats.org/drawingml/2006/main">
+            <a:off x="1000125" y="2966085"/>
+            <a:ext cx="10334625" cy="0"/>
+          </a:xfrm>
+          <a:prstGeom xmlns:a="http://schemas.openxmlformats.org/drawingml/2006/main" prst="line">
+            <a:avLst/>
+          </a:prstGeom>
+          <a:noFill xmlns:a="http://schemas.openxmlformats.org/drawingml/2006/main"/>
+          <a:ln xmlns:a="http://schemas.openxmlformats.org/drawingml/2006/main" w="9525">
+            <a:solidFill>
+              <a:srgbClr val="CEDBD3"/>
+            </a:solidFill>
+          </a:ln>
+        </p:spPr>
+      </p:sp>
+      <p:sp>
+        <p:nvSpPr>
+          <p:cNvPr id="15" name="cue-1">
+            <a:extLst xmlns:a="http://schemas.openxmlformats.org/drawingml/2006/main">
+              <a:ext uri="{FF2B5EF4-FFF2-40B4-BE49-F238E27FC236}">
+                <a16:creationId xmlns:a16="http://schemas.microsoft.com/office/drawing/2014/main" id="{4A181AB2-D76D-4451-8B72-37C5530A0841}"/>
+              </a:ext>
+            </a:extLst>
+          </p:cNvPr>
+          <p:cNvSpPr>
+            <a:spLocks xmlns:a="http://schemas.openxmlformats.org/drawingml/2006/main" noGrp="1"/>
+          </p:cNvSpPr>
+          <p:nvPr/>
+        </p:nvSpPr>
+        <p:spPr>
+          <a:xfrm xmlns:a="http://schemas.openxmlformats.org/drawingml/2006/main">
+            <a:off x="609600" y="3042285"/>
+            <a:ext cx="323850" cy="323850"/>
+          </a:xfrm>
+          <a:prstGeom xmlns:a="http://schemas.openxmlformats.org/drawingml/2006/main" prst="rect">
+            <a:avLst/>
+          </a:prstGeom>
+          <a:noFill xmlns:a="http://schemas.openxmlformats.org/drawingml/2006/main"/>
+          <a:ln xmlns:a="http://schemas.openxmlformats.org/drawingml/2006/main" w="0">
+            <a:noFill/>
+          </a:ln>
+        </p:spPr>
+        <p:txBody>
+          <a:bodyPr xmlns:a="http://schemas.openxmlformats.org/drawingml/2006/main" lIns="0" tIns="0" rIns="0" bIns="0" anchor="ctr">
+            <a:noAutofit/>
+          </a:bodyPr>
+          <a:lstStyle xmlns:a="http://schemas.openxmlformats.org/drawingml/2006/main"/>
+          <a:p xmlns:a="http://schemas.openxmlformats.org/drawingml/2006/main">
+            <a:pPr algn="l">
+              <a:defRPr sz="1350" b="1">
+                <a:solidFill>
+                  <a:srgbClr val="28685E"/>
+                </a:solidFill>
+                <a:latin typeface="Calibri"/>
+                <a:ea typeface="Calibri"/>
+                <a:cs typeface="Calibri"/>
+              </a:defRPr>
+            </a:pPr>
+            <a:r>
+              <a:rPr sz="1350" b="1">
+                <a:solidFill>
+                  <a:srgbClr val="28685E"/>
+                </a:solidFill>
+                <a:latin typeface="Calibri"/>
+                <a:ea typeface="Calibri"/>
+                <a:cs typeface="Calibri"/>
+              </a:rPr>
+              <a:t>02</a:t>
+            </a:r>
+          </a:p>
+        </p:txBody>
+      </p:sp>
+      <p:sp>
+        <p:nvSpPr>
+          <p:cNvPr id="16" name="row-rule-1">
+            <a:extLst xmlns:a="http://schemas.openxmlformats.org/drawingml/2006/main">
+              <a:ext uri="{FF2B5EF4-FFF2-40B4-BE49-F238E27FC236}">
+                <a16:creationId xmlns:a16="http://schemas.microsoft.com/office/drawing/2014/main" id="{932D20F2-1D4F-4C0D-958F-B338007FDB5D}"/>
+              </a:ext>
+            </a:extLst>
+          </p:cNvPr>
+          <p:cNvSpPr>
+            <a:spLocks xmlns:a="http://schemas.openxmlformats.org/drawingml/2006/main" noGrp="1"/>
+          </p:cNvSpPr>
+          <p:nvPr/>
+        </p:nvSpPr>
+        <p:spPr>
+          <a:xfrm xmlns:a="http://schemas.openxmlformats.org/drawingml/2006/main">
+            <a:off x="1000125" y="3646170"/>
+            <a:ext cx="10334625" cy="0"/>
+          </a:xfrm>
+          <a:prstGeom xmlns:a="http://schemas.openxmlformats.org/drawingml/2006/main" prst="line">
+            <a:avLst/>
+          </a:prstGeom>
+          <a:noFill xmlns:a="http://schemas.openxmlformats.org/drawingml/2006/main"/>
+          <a:ln xmlns:a="http://schemas.openxmlformats.org/drawingml/2006/main" w="9525">
+            <a:solidFill>
+              <a:srgbClr val="CEDBD3"/>
+            </a:solidFill>
+          </a:ln>
+        </p:spPr>
+      </p:sp>
+      <p:sp>
+        <p:nvSpPr>
+          <p:cNvPr id="17" name="cue-2">
+            <a:extLst xmlns:a="http://schemas.openxmlformats.org/drawingml/2006/main">
+              <a:ext uri="{FF2B5EF4-FFF2-40B4-BE49-F238E27FC236}">
+                <a16:creationId xmlns:a16="http://schemas.microsoft.com/office/drawing/2014/main" id="{17EB4468-971B-4365-AA6E-9CEBB8406CF2}"/>
+              </a:ext>
+            </a:extLst>
+          </p:cNvPr>
+          <p:cNvSpPr>
+            <a:spLocks xmlns:a="http://schemas.openxmlformats.org/drawingml/2006/main" noGrp="1"/>
+          </p:cNvSpPr>
+          <p:nvPr/>
+        </p:nvSpPr>
+        <p:spPr>
+          <a:xfrm xmlns:a="http://schemas.openxmlformats.org/drawingml/2006/main">
+            <a:off x="609600" y="3722370"/>
+            <a:ext cx="323850" cy="323850"/>
+          </a:xfrm>
+          <a:prstGeom xmlns:a="http://schemas.openxmlformats.org/drawingml/2006/main" prst="rect">
+            <a:avLst/>
+          </a:prstGeom>
+          <a:noFill xmlns:a="http://schemas.openxmlformats.org/drawingml/2006/main"/>
+          <a:ln xmlns:a="http://schemas.openxmlformats.org/drawingml/2006/main" w="0">
+            <a:noFill/>
+          </a:ln>
+        </p:spPr>
+        <p:txBody>
+          <a:bodyPr xmlns:a="http://schemas.openxmlformats.org/drawingml/2006/main" lIns="0" tIns="0" rIns="0" bIns="0" anchor="ctr">
+            <a:noAutofit/>
+          </a:bodyPr>
+          <a:lstStyle xmlns:a="http://schemas.openxmlformats.org/drawingml/2006/main"/>
+          <a:p xmlns:a="http://schemas.openxmlformats.org/drawingml/2006/main">
+            <a:pPr algn="l">
+              <a:defRPr sz="1350" b="1">
+                <a:solidFill>
+                  <a:srgbClr val="28685E"/>
+                </a:solidFill>
+                <a:latin typeface="Calibri"/>
+                <a:ea typeface="Calibri"/>
+                <a:cs typeface="Calibri"/>
+              </a:defRPr>
+            </a:pPr>
+            <a:r>
+              <a:rPr sz="1350" b="1">
+                <a:solidFill>
+                  <a:srgbClr val="28685E"/>
+                </a:solidFill>
+                <a:latin typeface="Calibri"/>
+                <a:ea typeface="Calibri"/>
+                <a:cs typeface="Calibri"/>
+              </a:rPr>
+              <a:t>03</a:t>
+            </a:r>
+          </a:p>
+        </p:txBody>
+      </p:sp>
+      <p:sp>
+        <p:nvSpPr>
+          <p:cNvPr id="18" name="row-rule-2">
+            <a:extLst xmlns:a="http://schemas.openxmlformats.org/drawingml/2006/main">
+              <a:ext uri="{FF2B5EF4-FFF2-40B4-BE49-F238E27FC236}">
+                <a16:creationId xmlns:a16="http://schemas.microsoft.com/office/drawing/2014/main" id="{93813EC8-1866-4D9A-82F9-C0172C69BE43}"/>
+              </a:ext>
+            </a:extLst>
+          </p:cNvPr>
+          <p:cNvSpPr>
+            <a:spLocks xmlns:a="http://schemas.openxmlformats.org/drawingml/2006/main" noGrp="1"/>
+          </p:cNvSpPr>
+          <p:nvPr/>
+        </p:nvSpPr>
+        <p:spPr>
+          <a:xfrm xmlns:a="http://schemas.openxmlformats.org/drawingml/2006/main">
+            <a:off x="1000125" y="4326255"/>
+            <a:ext cx="10334625" cy="0"/>
+          </a:xfrm>
+          <a:prstGeom xmlns:a="http://schemas.openxmlformats.org/drawingml/2006/main" prst="line">
+            <a:avLst/>
+          </a:prstGeom>
+          <a:noFill xmlns:a="http://schemas.openxmlformats.org/drawingml/2006/main"/>
+          <a:ln xmlns:a="http://schemas.openxmlformats.org/drawingml/2006/main" w="9525">
+            <a:solidFill>
+              <a:srgbClr val="CEDBD3"/>
+            </a:solidFill>
+          </a:ln>
+        </p:spPr>
+      </p:sp>
+      <p:sp>
+        <p:nvSpPr>
+          <p:cNvPr id="19" name="cue-3">
+            <a:extLst xmlns:a="http://schemas.openxmlformats.org/drawingml/2006/main">
+              <a:ext uri="{FF2B5EF4-FFF2-40B4-BE49-F238E27FC236}">
+                <a16:creationId xmlns:a16="http://schemas.microsoft.com/office/drawing/2014/main" id="{D6A7B101-B50D-4D8D-A5E0-7E61079212EC}"/>
+              </a:ext>
+            </a:extLst>
+          </p:cNvPr>
+          <p:cNvSpPr>
+            <a:spLocks xmlns:a="http://schemas.openxmlformats.org/drawingml/2006/main" noGrp="1"/>
+          </p:cNvSpPr>
+          <p:nvPr/>
+        </p:nvSpPr>
+        <p:spPr>
+          <a:xfrm xmlns:a="http://schemas.openxmlformats.org/drawingml/2006/main">
+            <a:off x="609600" y="4402455"/>
+            <a:ext cx="323850" cy="323850"/>
+          </a:xfrm>
+          <a:prstGeom xmlns:a="http://schemas.openxmlformats.org/drawingml/2006/main" prst="rect">
+            <a:avLst/>
+          </a:prstGeom>
+          <a:noFill xmlns:a="http://schemas.openxmlformats.org/drawingml/2006/main"/>
+          <a:ln xmlns:a="http://schemas.openxmlformats.org/drawingml/2006/main" w="0">
+            <a:noFill/>
+          </a:ln>
+        </p:spPr>
+        <p:txBody>
+          <a:bodyPr xmlns:a="http://schemas.openxmlformats.org/drawingml/2006/main" lIns="0" tIns="0" rIns="0" bIns="0" anchor="ctr">
+            <a:noAutofit/>
+          </a:bodyPr>
+          <a:lstStyle xmlns:a="http://schemas.openxmlformats.org/drawingml/2006/main"/>
+          <a:p xmlns:a="http://schemas.openxmlformats.org/drawingml/2006/main">
+            <a:pPr algn="l">
+              <a:defRPr sz="1350" b="1">
+                <a:solidFill>
+                  <a:srgbClr val="28685E"/>
+                </a:solidFill>
+                <a:latin typeface="Calibri"/>
+                <a:ea typeface="Calibri"/>
+                <a:cs typeface="Calibri"/>
+              </a:defRPr>
+            </a:pPr>
+            <a:r>
+              <a:rPr sz="1350" b="1">
+                <a:solidFill>
+                  <a:srgbClr val="28685E"/>
+                </a:solidFill>
+                <a:latin typeface="Calibri"/>
+                <a:ea typeface="Calibri"/>
+                <a:cs typeface="Calibri"/>
+              </a:rPr>
+              <a:t>04</a:t>
+            </a:r>
+          </a:p>
+        </p:txBody>
+      </p:sp>
+      <p:sp>
+        <p:nvSpPr>
+          <p:cNvPr id="20" name="row-rule-3">
+            <a:extLst xmlns:a="http://schemas.openxmlformats.org/drawingml/2006/main">
+              <a:ext uri="{FF2B5EF4-FFF2-40B4-BE49-F238E27FC236}">
+                <a16:creationId xmlns:a16="http://schemas.microsoft.com/office/drawing/2014/main" id="{0DC3E006-82BC-47D2-9B76-4423ADD135C2}"/>
+              </a:ext>
+            </a:extLst>
+          </p:cNvPr>
+          <p:cNvSpPr>
+            <a:spLocks xmlns:a="http://schemas.openxmlformats.org/drawingml/2006/main" noGrp="1"/>
+          </p:cNvSpPr>
+          <p:nvPr/>
+        </p:nvSpPr>
+        <p:spPr>
+          <a:xfrm xmlns:a="http://schemas.openxmlformats.org/drawingml/2006/main">
+            <a:off x="1000125" y="5006340"/>
+            <a:ext cx="10334625" cy="0"/>
+          </a:xfrm>
+          <a:prstGeom xmlns:a="http://schemas.openxmlformats.org/drawingml/2006/main" prst="line">
+            <a:avLst/>
+          </a:prstGeom>
+          <a:noFill xmlns:a="http://schemas.openxmlformats.org/drawingml/2006/main"/>
+          <a:ln xmlns:a="http://schemas.openxmlformats.org/drawingml/2006/main" w="9525">
+            <a:solidFill>
+              <a:srgbClr val="CEDBD3"/>
+            </a:solidFill>
+          </a:ln>
+        </p:spPr>
+      </p:sp>
+      <p:sp>
+        <p:nvSpPr>
+          <p:cNvPr id="21" name="cue-4">
+            <a:extLst xmlns:a="http://schemas.openxmlformats.org/drawingml/2006/main">
+              <a:ext uri="{FF2B5EF4-FFF2-40B4-BE49-F238E27FC236}">
+                <a16:creationId xmlns:a16="http://schemas.microsoft.com/office/drawing/2014/main" id="{FB3E944E-798B-4178-ACC5-BE4BB80B8339}"/>
+              </a:ext>
+            </a:extLst>
+          </p:cNvPr>
+          <p:cNvSpPr>
+            <a:spLocks xmlns:a="http://schemas.openxmlformats.org/drawingml/2006/main" noGrp="1"/>
+          </p:cNvSpPr>
+          <p:nvPr/>
+        </p:nvSpPr>
+        <p:spPr>
+          <a:xfrm xmlns:a="http://schemas.openxmlformats.org/drawingml/2006/main">
+            <a:off x="609600" y="5082540"/>
+            <a:ext cx="323850" cy="323850"/>
+          </a:xfrm>
+          <a:prstGeom xmlns:a="http://schemas.openxmlformats.org/drawingml/2006/main" prst="rect">
+            <a:avLst/>
+          </a:prstGeom>
+          <a:noFill xmlns:a="http://schemas.openxmlformats.org/drawingml/2006/main"/>
+          <a:ln xmlns:a="http://schemas.openxmlformats.org/drawingml/2006/main" w="0">
+            <a:noFill/>
+          </a:ln>
+        </p:spPr>
+        <p:txBody>
+          <a:bodyPr xmlns:a="http://schemas.openxmlformats.org/drawingml/2006/main" lIns="0" tIns="0" rIns="0" bIns="0" anchor="ctr">
+            <a:noAutofit/>
+          </a:bodyPr>
+          <a:lstStyle xmlns:a="http://schemas.openxmlformats.org/drawingml/2006/main"/>
+          <a:p xmlns:a="http://schemas.openxmlformats.org/drawingml/2006/main">
+            <a:pPr algn="l">
+              <a:defRPr sz="1350" b="1">
+                <a:solidFill>
+                  <a:srgbClr val="28685E"/>
+                </a:solidFill>
+                <a:latin typeface="Calibri"/>
+                <a:ea typeface="Calibri"/>
+                <a:cs typeface="Calibri"/>
+              </a:defRPr>
+            </a:pPr>
+            <a:r>
+              <a:rPr sz="1350" b="1">
+                <a:solidFill>
+                  <a:srgbClr val="28685E"/>
+                </a:solidFill>
+                <a:latin typeface="Calibri"/>
+                <a:ea typeface="Calibri"/>
+                <a:cs typeface="Calibri"/>
+              </a:rPr>
+              <a:t>05</a:t>
             </a:r>
           </a:p>
         </p:txBody>
@@ -3282,7 +3852,7 @@
     <p:bg>
       <p:bgPr>
         <a:solidFill xmlns:a="http://schemas.openxmlformats.org/drawingml/2006/main">
-          <a:srgbClr val="F5F1E8"/>
+          <a:srgbClr val="FAF9F5"/>
         </a:solidFill>
       </p:bgPr>
     </p:bg>
@@ -3311,8 +3881,8 @@
         </p:nvSpPr>
         <p:spPr>
           <a:xfrm xmlns:a="http://schemas.openxmlformats.org/drawingml/2006/main">
-            <a:off x="609600" y="552450"/>
-            <a:ext cx="781050" cy="57150"/>
+            <a:off x="609600" y="733425"/>
+            <a:ext cx="781050" cy="38100"/>
           </a:xfrm>
           <a:prstGeom xmlns:a="http://schemas.openxmlformats.org/drawingml/2006/main" prst="rect">
             <a:avLst/>
@@ -3342,34 +3912,43 @@
         </p:nvSpPr>
         <p:spPr>
           <a:xfrm xmlns:a="http://schemas.openxmlformats.org/drawingml/2006/main">
-            <a:off x="609600" y="762000"/>
-            <a:ext cx="8572500" cy="285750"/>
-          </a:xfrm>
-          <a:prstGeom xmlns:a="http://schemas.openxmlformats.org/drawingml/2006/main" prst="rect">
-            <a:avLst/>
-          </a:prstGeom>
-          <a:noFill xmlns:a="http://schemas.openxmlformats.org/drawingml/2006/main"/>
-          <a:ln xmlns:a="http://schemas.openxmlformats.org/drawingml/2006/main" w="0">
-            <a:noFill/>
-            <a:prstDash val="solid"/>
-          </a:ln>
-        </p:spPr>
-        <p:txBody>
-          <a:bodyPr xmlns:a="http://schemas.openxmlformats.org/drawingml/2006/main" lIns="0" tIns="0" rIns="0" bIns="0" anchor="ctr"/>
-          <a:lstStyle xmlns:a="http://schemas.openxmlformats.org/drawingml/2006/main"/>
-          <a:p xmlns:a="http://schemas.openxmlformats.org/drawingml/2006/main">
-            <a:pPr>
-              <a:defRPr sz="1500" b="1">
+            <a:off x="609600" y="342900"/>
+            <a:ext cx="9334500" cy="304800"/>
+          </a:xfrm>
+          <a:prstGeom xmlns:a="http://schemas.openxmlformats.org/drawingml/2006/main" prst="rect">
+            <a:avLst/>
+          </a:prstGeom>
+          <a:noFill xmlns:a="http://schemas.openxmlformats.org/drawingml/2006/main"/>
+          <a:ln xmlns:a="http://schemas.openxmlformats.org/drawingml/2006/main" w="0">
+            <a:noFill/>
+            <a:prstDash val="solid"/>
+          </a:ln>
+        </p:spPr>
+        <p:txBody>
+          <a:bodyPr xmlns:a="http://schemas.openxmlformats.org/drawingml/2006/main" lIns="0" tIns="0" rIns="0" bIns="0" anchor="ctr">
+            <a:noAutofit/>
+          </a:bodyPr>
+          <a:lstStyle xmlns:a="http://schemas.openxmlformats.org/drawingml/2006/main"/>
+          <a:p xmlns:a="http://schemas.openxmlformats.org/drawingml/2006/main">
+            <a:pPr algn="l">
+              <a:buNone/>
+              <a:defRPr sz="1350" b="1">
                 <a:solidFill>
                   <a:srgbClr val="28685E"/>
                 </a:solidFill>
-              </a:defRPr>
-            </a:pPr>
-            <a:r>
-              <a:rPr sz="1500" b="1">
+                <a:latin typeface="Calibri"/>
+                <a:ea typeface="Calibri"/>
+                <a:cs typeface="Calibri"/>
+              </a:defRPr>
+            </a:pPr>
+            <a:r>
+              <a:rPr sz="1350" b="1">
                 <a:solidFill>
                   <a:srgbClr val="28685E"/>
                 </a:solidFill>
+                <a:latin typeface="Calibri"/>
+                <a:ea typeface="Calibri"/>
+                <a:cs typeface="Calibri"/>
               </a:rPr>
               <a:t>MADE BY MATT  /  GROW SCIENCE</a:t>
             </a:r>
@@ -3392,34 +3971,43 @@
         </p:nvSpPr>
         <p:spPr>
           <a:xfrm xmlns:a="http://schemas.openxmlformats.org/drawingml/2006/main">
-            <a:off x="609600" y="1352550"/>
-            <a:ext cx="10972800" cy="952500"/>
-          </a:xfrm>
-          <a:prstGeom xmlns:a="http://schemas.openxmlformats.org/drawingml/2006/main" prst="rect">
-            <a:avLst/>
-          </a:prstGeom>
-          <a:noFill xmlns:a="http://schemas.openxmlformats.org/drawingml/2006/main"/>
-          <a:ln xmlns:a="http://schemas.openxmlformats.org/drawingml/2006/main" w="0">
-            <a:noFill/>
-            <a:prstDash val="solid"/>
-          </a:ln>
-        </p:spPr>
-        <p:txBody>
-          <a:bodyPr xmlns:a="http://schemas.openxmlformats.org/drawingml/2006/main" lIns="0" tIns="0" rIns="0" bIns="0" anchor="ctr"/>
-          <a:lstStyle xmlns:a="http://schemas.openxmlformats.org/drawingml/2006/main"/>
-          <a:p xmlns:a="http://schemas.openxmlformats.org/drawingml/2006/main">
-            <a:pPr>
-              <a:defRPr sz="3750" b="1">
-                <a:solidFill>
-                  <a:srgbClr val="152B3A"/>
-                </a:solidFill>
-              </a:defRPr>
-            </a:pPr>
-            <a:r>
-              <a:rPr sz="3750" b="1">
-                <a:solidFill>
-                  <a:srgbClr val="152B3A"/>
-                </a:solidFill>
+            <a:off x="609600" y="990600"/>
+            <a:ext cx="10972800" cy="1000125"/>
+          </a:xfrm>
+          <a:prstGeom xmlns:a="http://schemas.openxmlformats.org/drawingml/2006/main" prst="rect">
+            <a:avLst/>
+          </a:prstGeom>
+          <a:noFill xmlns:a="http://schemas.openxmlformats.org/drawingml/2006/main"/>
+          <a:ln xmlns:a="http://schemas.openxmlformats.org/drawingml/2006/main" w="0">
+            <a:noFill/>
+            <a:prstDash val="solid"/>
+          </a:ln>
+        </p:spPr>
+        <p:txBody>
+          <a:bodyPr xmlns:a="http://schemas.openxmlformats.org/drawingml/2006/main" lIns="0" tIns="0" rIns="0" bIns="0" anchor="ctr">
+            <a:noAutofit/>
+          </a:bodyPr>
+          <a:lstStyle xmlns:a="http://schemas.openxmlformats.org/drawingml/2006/main"/>
+          <a:p xmlns:a="http://schemas.openxmlformats.org/drawingml/2006/main">
+            <a:pPr algn="l">
+              <a:buNone/>
+              <a:defRPr sz="3675" b="1">
+                <a:solidFill>
+                  <a:srgbClr val="152B3A"/>
+                </a:solidFill>
+                <a:latin typeface="Calibri"/>
+                <a:ea typeface="Calibri"/>
+                <a:cs typeface="Calibri"/>
+              </a:defRPr>
+            </a:pPr>
+            <a:r>
+              <a:rPr sz="3675" b="1">
+                <a:solidFill>
+                  <a:srgbClr val="152B3A"/>
+                </a:solidFill>
+                <a:latin typeface="Calibri"/>
+                <a:ea typeface="Calibri"/>
+                <a:cs typeface="Calibri"/>
               </a:rPr>
               <a:t>Answers to the five claims</a:t>
             </a:r>
@@ -3442,14 +4030,14 @@
         </p:nvSpPr>
         <p:spPr>
           <a:xfrm xmlns:a="http://schemas.openxmlformats.org/drawingml/2006/main">
-            <a:off x="609600" y="6219825"/>
+            <a:off x="609600" y="6191250"/>
             <a:ext cx="10972800" cy="9525"/>
           </a:xfrm>
           <a:prstGeom xmlns:a="http://schemas.openxmlformats.org/drawingml/2006/main" prst="rect">
             <a:avLst/>
           </a:prstGeom>
           <a:solidFill xmlns:a="http://schemas.openxmlformats.org/drawingml/2006/main">
-            <a:srgbClr val="DCE7DD"/>
+            <a:srgbClr val="CEDBD3"/>
           </a:solidFill>
           <a:ln xmlns:a="http://schemas.openxmlformats.org/drawingml/2006/main" w="0">
             <a:noFill/>
@@ -3473,34 +4061,43 @@
         </p:nvSpPr>
         <p:spPr>
           <a:xfrm xmlns:a="http://schemas.openxmlformats.org/drawingml/2006/main">
-            <a:off x="609600" y="6381750"/>
-            <a:ext cx="9906000" cy="228600"/>
-          </a:xfrm>
-          <a:prstGeom xmlns:a="http://schemas.openxmlformats.org/drawingml/2006/main" prst="rect">
-            <a:avLst/>
-          </a:prstGeom>
-          <a:noFill xmlns:a="http://schemas.openxmlformats.org/drawingml/2006/main"/>
-          <a:ln xmlns:a="http://schemas.openxmlformats.org/drawingml/2006/main" w="0">
-            <a:noFill/>
-            <a:prstDash val="solid"/>
-          </a:ln>
-        </p:spPr>
-        <p:txBody>
-          <a:bodyPr xmlns:a="http://schemas.openxmlformats.org/drawingml/2006/main" lIns="0" tIns="0" rIns="0" bIns="0" anchor="ctr"/>
-          <a:lstStyle xmlns:a="http://schemas.openxmlformats.org/drawingml/2006/main"/>
-          <a:p xmlns:a="http://schemas.openxmlformats.org/drawingml/2006/main">
-            <a:pPr>
-              <a:defRPr sz="1275" b="0">
+            <a:off x="609600" y="6419850"/>
+            <a:ext cx="9525000" cy="219075"/>
+          </a:xfrm>
+          <a:prstGeom xmlns:a="http://schemas.openxmlformats.org/drawingml/2006/main" prst="rect">
+            <a:avLst/>
+          </a:prstGeom>
+          <a:noFill xmlns:a="http://schemas.openxmlformats.org/drawingml/2006/main"/>
+          <a:ln xmlns:a="http://schemas.openxmlformats.org/drawingml/2006/main" w="0">
+            <a:noFill/>
+            <a:prstDash val="solid"/>
+          </a:ln>
+        </p:spPr>
+        <p:txBody>
+          <a:bodyPr xmlns:a="http://schemas.openxmlformats.org/drawingml/2006/main" lIns="0" tIns="0" rIns="0" bIns="0" anchor="ctr">
+            <a:noAutofit/>
+          </a:bodyPr>
+          <a:lstStyle xmlns:a="http://schemas.openxmlformats.org/drawingml/2006/main"/>
+          <a:p xmlns:a="http://schemas.openxmlformats.org/drawingml/2006/main">
+            <a:pPr algn="l">
+              <a:buNone/>
+              <a:defRPr sz="1200" b="0">
                 <a:solidFill>
                   <a:srgbClr val="50616B"/>
                 </a:solidFill>
-              </a:defRPr>
-            </a:pPr>
-            <a:r>
-              <a:rPr sz="1275" b="0">
+                <a:latin typeface="Calibri"/>
+                <a:ea typeface="Calibri"/>
+                <a:cs typeface="Calibri"/>
+              </a:defRPr>
+            </a:pPr>
+            <a:r>
+              <a:rPr sz="1200" b="0">
                 <a:solidFill>
                   <a:srgbClr val="50616B"/>
                 </a:solidFill>
+                <a:latin typeface="Calibri"/>
+                <a:ea typeface="Calibri"/>
+                <a:cs typeface="Calibri"/>
               </a:rPr>
               <a:t>AUTUMN 1  ·  WEEK 6  ·  LESSON A</a:t>
             </a:r>
@@ -3523,27 +4120,33 @@
         </p:nvSpPr>
         <p:spPr>
           <a:xfrm xmlns:a="http://schemas.openxmlformats.org/drawingml/2006/main">
-            <a:off x="11106150" y="6362700"/>
-            <a:ext cx="476250" cy="238125"/>
-          </a:xfrm>
-          <a:prstGeom xmlns:a="http://schemas.openxmlformats.org/drawingml/2006/main" prst="rect">
-            <a:avLst/>
-          </a:prstGeom>
-          <a:noFill xmlns:a="http://schemas.openxmlformats.org/drawingml/2006/main"/>
-          <a:ln xmlns:a="http://schemas.openxmlformats.org/drawingml/2006/main" w="0">
-            <a:noFill/>
-            <a:prstDash val="solid"/>
-          </a:ln>
-        </p:spPr>
-        <p:txBody>
-          <a:bodyPr xmlns:a="http://schemas.openxmlformats.org/drawingml/2006/main" lIns="0" tIns="0" rIns="0" bIns="0" anchor="ctr"/>
-          <a:lstStyle xmlns:a="http://schemas.openxmlformats.org/drawingml/2006/main"/>
-          <a:p xmlns:a="http://schemas.openxmlformats.org/drawingml/2006/main">
-            <a:pPr>
+            <a:off x="11106150" y="6400800"/>
+            <a:ext cx="476250" cy="247650"/>
+          </a:xfrm>
+          <a:prstGeom xmlns:a="http://schemas.openxmlformats.org/drawingml/2006/main" prst="rect">
+            <a:avLst/>
+          </a:prstGeom>
+          <a:noFill xmlns:a="http://schemas.openxmlformats.org/drawingml/2006/main"/>
+          <a:ln xmlns:a="http://schemas.openxmlformats.org/drawingml/2006/main" w="0">
+            <a:noFill/>
+            <a:prstDash val="solid"/>
+          </a:ln>
+        </p:spPr>
+        <p:txBody>
+          <a:bodyPr xmlns:a="http://schemas.openxmlformats.org/drawingml/2006/main" lIns="0" tIns="0" rIns="0" bIns="0" anchor="ctr">
+            <a:noAutofit/>
+          </a:bodyPr>
+          <a:lstStyle xmlns:a="http://schemas.openxmlformats.org/drawingml/2006/main"/>
+          <a:p xmlns:a="http://schemas.openxmlformats.org/drawingml/2006/main">
+            <a:pPr algn="l">
+              <a:buNone/>
               <a:defRPr sz="1350" b="1">
                 <a:solidFill>
                   <a:srgbClr val="28685E"/>
                 </a:solidFill>
+                <a:latin typeface="Calibri"/>
+                <a:ea typeface="Calibri"/>
+                <a:cs typeface="Calibri"/>
               </a:defRPr>
             </a:pPr>
             <a:r>
@@ -3551,6 +4154,9 @@
                 <a:solidFill>
                   <a:srgbClr val="28685E"/>
                 </a:solidFill>
+                <a:latin typeface="Calibri"/>
+                <a:ea typeface="Calibri"/>
+                <a:cs typeface="Calibri"/>
               </a:rPr>
               <a:t>11</a:t>
             </a:r>
@@ -3573,34 +4179,45 @@
         </p:nvSpPr>
         <p:spPr>
           <a:xfrm xmlns:a="http://schemas.openxmlformats.org/drawingml/2006/main">
-            <a:off x="609600" y="2619375"/>
-            <a:ext cx="4953000" cy="428625"/>
-          </a:xfrm>
-          <a:prstGeom xmlns:a="http://schemas.openxmlformats.org/drawingml/2006/main" prst="rect">
-            <a:avLst/>
-          </a:prstGeom>
-          <a:noFill xmlns:a="http://schemas.openxmlformats.org/drawingml/2006/main"/>
-          <a:ln xmlns:a="http://schemas.openxmlformats.org/drawingml/2006/main" w="0">
-            <a:noFill/>
-            <a:prstDash val="solid"/>
-          </a:ln>
-        </p:spPr>
-        <p:txBody>
-          <a:bodyPr xmlns:a="http://schemas.openxmlformats.org/drawingml/2006/main" lIns="0" tIns="0" rIns="0" bIns="0" anchor="ctr"/>
-          <a:lstStyle xmlns:a="http://schemas.openxmlformats.org/drawingml/2006/main"/>
-          <a:p xmlns:a="http://schemas.openxmlformats.org/drawingml/2006/main">
-            <a:pPr>
-              <a:defRPr sz="2025" b="1">
+            <a:off x="609600" y="2219325"/>
+            <a:ext cx="5257800" cy="762000"/>
+          </a:xfrm>
+          <a:prstGeom xmlns:a="http://schemas.openxmlformats.org/drawingml/2006/main" prst="rect">
+            <a:avLst/>
+          </a:prstGeom>
+          <a:solidFill xmlns:a="http://schemas.openxmlformats.org/drawingml/2006/main">
+            <a:srgbClr val="E7EFE9"/>
+          </a:solidFill>
+          <a:ln xmlns:a="http://schemas.openxmlformats.org/drawingml/2006/main" w="0">
+            <a:noFill/>
+            <a:prstDash val="solid"/>
+          </a:ln>
+        </p:spPr>
+        <p:txBody>
+          <a:bodyPr xmlns:a="http://schemas.openxmlformats.org/drawingml/2006/main" lIns="228600" tIns="114300" rIns="228600" bIns="114300" anchor="ctr">
+            <a:noAutofit/>
+          </a:bodyPr>
+          <a:lstStyle xmlns:a="http://schemas.openxmlformats.org/drawingml/2006/main"/>
+          <a:p xmlns:a="http://schemas.openxmlformats.org/drawingml/2006/main">
+            <a:pPr algn="l">
+              <a:buNone/>
+              <a:defRPr sz="1875" b="1">
                 <a:solidFill>
                   <a:srgbClr val="28685E"/>
                 </a:solidFill>
-              </a:defRPr>
-            </a:pPr>
-            <a:r>
-              <a:rPr sz="2025" b="1">
+                <a:latin typeface="Calibri"/>
+                <a:ea typeface="Calibri"/>
+                <a:cs typeface="Calibri"/>
+              </a:defRPr>
+            </a:pPr>
+            <a:r>
+              <a:rPr sz="1875" b="1">
                 <a:solidFill>
                   <a:srgbClr val="28685E"/>
                 </a:solidFill>
+                <a:latin typeface="Calibri"/>
+                <a:ea typeface="Calibri"/>
+                <a:cs typeface="Calibri"/>
               </a:rPr>
               <a:t>TRUE CLAIMS</a:t>
             </a:r>
@@ -3623,34 +4240,45 @@
         </p:nvSpPr>
         <p:spPr>
           <a:xfrm xmlns:a="http://schemas.openxmlformats.org/drawingml/2006/main">
-            <a:off x="6572250" y="2619375"/>
-            <a:ext cx="4953000" cy="428625"/>
-          </a:xfrm>
-          <a:prstGeom xmlns:a="http://schemas.openxmlformats.org/drawingml/2006/main" prst="rect">
-            <a:avLst/>
-          </a:prstGeom>
-          <a:noFill xmlns:a="http://schemas.openxmlformats.org/drawingml/2006/main"/>
-          <a:ln xmlns:a="http://schemas.openxmlformats.org/drawingml/2006/main" w="0">
-            <a:noFill/>
-            <a:prstDash val="solid"/>
-          </a:ln>
-        </p:spPr>
-        <p:txBody>
-          <a:bodyPr xmlns:a="http://schemas.openxmlformats.org/drawingml/2006/main" lIns="0" tIns="0" rIns="0" bIns="0" anchor="ctr"/>
-          <a:lstStyle xmlns:a="http://schemas.openxmlformats.org/drawingml/2006/main"/>
-          <a:p xmlns:a="http://schemas.openxmlformats.org/drawingml/2006/main">
-            <a:pPr>
-              <a:defRPr sz="2025" b="1">
-                <a:solidFill>
-                  <a:srgbClr val="A65D25"/>
-                </a:solidFill>
-              </a:defRPr>
-            </a:pPr>
-            <a:r>
-              <a:rPr sz="2025" b="1">
-                <a:solidFill>
-                  <a:srgbClr val="A65D25"/>
-                </a:solidFill>
+            <a:off x="6381750" y="2219325"/>
+            <a:ext cx="5200650" cy="762000"/>
+          </a:xfrm>
+          <a:prstGeom xmlns:a="http://schemas.openxmlformats.org/drawingml/2006/main" prst="rect">
+            <a:avLst/>
+          </a:prstGeom>
+          <a:solidFill xmlns:a="http://schemas.openxmlformats.org/drawingml/2006/main">
+            <a:srgbClr val="F0EBE3"/>
+          </a:solidFill>
+          <a:ln xmlns:a="http://schemas.openxmlformats.org/drawingml/2006/main" w="0">
+            <a:noFill/>
+            <a:prstDash val="solid"/>
+          </a:ln>
+        </p:spPr>
+        <p:txBody>
+          <a:bodyPr xmlns:a="http://schemas.openxmlformats.org/drawingml/2006/main" lIns="228600" tIns="114300" rIns="228600" bIns="114300" anchor="ctr">
+            <a:noAutofit/>
+          </a:bodyPr>
+          <a:lstStyle xmlns:a="http://schemas.openxmlformats.org/drawingml/2006/main"/>
+          <a:p xmlns:a="http://schemas.openxmlformats.org/drawingml/2006/main">
+            <a:pPr algn="l">
+              <a:buNone/>
+              <a:defRPr sz="1875" b="1">
+                <a:solidFill>
+                  <a:srgbClr val="A95D21"/>
+                </a:solidFill>
+                <a:latin typeface="Calibri"/>
+                <a:ea typeface="Calibri"/>
+                <a:cs typeface="Calibri"/>
+              </a:defRPr>
+            </a:pPr>
+            <a:r>
+              <a:rPr sz="1875" b="1">
+                <a:solidFill>
+                  <a:srgbClr val="A95D21"/>
+                </a:solidFill>
+                <a:latin typeface="Calibri"/>
+                <a:ea typeface="Calibri"/>
+                <a:cs typeface="Calibri"/>
               </a:rPr>
               <a:t>FALSE CLAIMS</a:t>
             </a:r>
@@ -3673,27 +4301,35 @@
         </p:nvSpPr>
         <p:spPr>
           <a:xfrm xmlns:a="http://schemas.openxmlformats.org/drawingml/2006/main">
-            <a:off x="609600" y="3333750"/>
-            <a:ext cx="4953000" cy="2524125"/>
-          </a:xfrm>
-          <a:prstGeom xmlns:a="http://schemas.openxmlformats.org/drawingml/2006/main" prst="rect">
-            <a:avLst/>
-          </a:prstGeom>
-          <a:noFill xmlns:a="http://schemas.openxmlformats.org/drawingml/2006/main"/>
-          <a:ln xmlns:a="http://schemas.openxmlformats.org/drawingml/2006/main" w="0">
-            <a:noFill/>
-            <a:prstDash val="solid"/>
-          </a:ln>
-        </p:spPr>
-        <p:txBody>
-          <a:bodyPr xmlns:a="http://schemas.openxmlformats.org/drawingml/2006/main" lIns="0" tIns="0" rIns="0" bIns="0" anchor="ctr"/>
-          <a:lstStyle xmlns:a="http://schemas.openxmlformats.org/drawingml/2006/main"/>
-          <a:p xmlns:a="http://schemas.openxmlformats.org/drawingml/2006/main">
-            <a:pPr>
+            <a:off x="609600" y="2981325"/>
+            <a:ext cx="5257800" cy="2714625"/>
+          </a:xfrm>
+          <a:prstGeom xmlns:a="http://schemas.openxmlformats.org/drawingml/2006/main" prst="rect">
+            <a:avLst/>
+          </a:prstGeom>
+          <a:solidFill xmlns:a="http://schemas.openxmlformats.org/drawingml/2006/main">
+            <a:srgbClr val="E7EFE9"/>
+          </a:solidFill>
+          <a:ln xmlns:a="http://schemas.openxmlformats.org/drawingml/2006/main" w="0">
+            <a:noFill/>
+            <a:prstDash val="solid"/>
+          </a:ln>
+        </p:spPr>
+        <p:txBody>
+          <a:bodyPr xmlns:a="http://schemas.openxmlformats.org/drawingml/2006/main" lIns="228600" tIns="114300" rIns="228600" bIns="114300" anchor="ctr">
+            <a:noAutofit/>
+          </a:bodyPr>
+          <a:lstStyle xmlns:a="http://schemas.openxmlformats.org/drawingml/2006/main"/>
+          <a:p xmlns:a="http://schemas.openxmlformats.org/drawingml/2006/main">
+            <a:pPr algn="l">
+              <a:buNone/>
               <a:defRPr sz="2400" b="0">
                 <a:solidFill>
                   <a:srgbClr val="152B3A"/>
                 </a:solidFill>
+                <a:latin typeface="Calibri"/>
+                <a:ea typeface="Calibri"/>
+                <a:cs typeface="Calibri"/>
               </a:defRPr>
             </a:pPr>
             <a:r>
@@ -3701,16 +4337,23 @@
                 <a:solidFill>
                   <a:srgbClr val="152B3A"/>
                 </a:solidFill>
+                <a:latin typeface="Calibri"/>
+                <a:ea typeface="Calibri"/>
+                <a:cs typeface="Calibri"/>
               </a:rPr>
               <a:t>Planets orbit the Sun.</a:t>
             </a:r>
           </a:p>
           <a:p xmlns:a="http://schemas.openxmlformats.org/drawingml/2006/main">
-            <a:pPr>
+            <a:pPr algn="l">
+              <a:buNone/>
               <a:defRPr sz="2400" b="0">
                 <a:solidFill>
                   <a:srgbClr val="152B3A"/>
                 </a:solidFill>
+                <a:latin typeface="Calibri"/>
+                <a:ea typeface="Calibri"/>
+                <a:cs typeface="Calibri"/>
               </a:defRPr>
             </a:pPr>
             <a:r>
@@ -3718,16 +4361,23 @@
                 <a:solidFill>
                   <a:srgbClr val="152B3A"/>
                 </a:solidFill>
+                <a:latin typeface="Calibri"/>
+                <a:ea typeface="Calibri"/>
+                <a:cs typeface="Calibri"/>
               </a:rPr>
               <a:t>Gravity keeps them in orbit.</a:t>
             </a:r>
           </a:p>
           <a:p xmlns:a="http://schemas.openxmlformats.org/drawingml/2006/main">
-            <a:pPr>
+            <a:pPr algn="l">
+              <a:buNone/>
               <a:defRPr sz="2400" b="0">
                 <a:solidFill>
                   <a:srgbClr val="152B3A"/>
                 </a:solidFill>
+                <a:latin typeface="Calibri"/>
+                <a:ea typeface="Calibri"/>
+                <a:cs typeface="Calibri"/>
               </a:defRPr>
             </a:pPr>
             <a:r>
@@ -3735,6 +4385,9 @@
                 <a:solidFill>
                   <a:srgbClr val="152B3A"/>
                 </a:solidFill>
+                <a:latin typeface="Calibri"/>
+                <a:ea typeface="Calibri"/>
+                <a:cs typeface="Calibri"/>
               </a:rPr>
               <a:t>Outer planets have longer years.</a:t>
             </a:r>
@@ -3757,27 +4410,35 @@
         </p:nvSpPr>
         <p:spPr>
           <a:xfrm xmlns:a="http://schemas.openxmlformats.org/drawingml/2006/main">
-            <a:off x="6572250" y="3333750"/>
-            <a:ext cx="4857750" cy="2524125"/>
-          </a:xfrm>
-          <a:prstGeom xmlns:a="http://schemas.openxmlformats.org/drawingml/2006/main" prst="rect">
-            <a:avLst/>
-          </a:prstGeom>
-          <a:noFill xmlns:a="http://schemas.openxmlformats.org/drawingml/2006/main"/>
-          <a:ln xmlns:a="http://schemas.openxmlformats.org/drawingml/2006/main" w="0">
-            <a:noFill/>
-            <a:prstDash val="solid"/>
-          </a:ln>
-        </p:spPr>
-        <p:txBody>
-          <a:bodyPr xmlns:a="http://schemas.openxmlformats.org/drawingml/2006/main" lIns="0" tIns="0" rIns="0" bIns="0" anchor="ctr"/>
-          <a:lstStyle xmlns:a="http://schemas.openxmlformats.org/drawingml/2006/main"/>
-          <a:p xmlns:a="http://schemas.openxmlformats.org/drawingml/2006/main">
-            <a:pPr>
+            <a:off x="6381750" y="2981325"/>
+            <a:ext cx="5200650" cy="2714625"/>
+          </a:xfrm>
+          <a:prstGeom xmlns:a="http://schemas.openxmlformats.org/drawingml/2006/main" prst="rect">
+            <a:avLst/>
+          </a:prstGeom>
+          <a:solidFill xmlns:a="http://schemas.openxmlformats.org/drawingml/2006/main">
+            <a:srgbClr val="F0EBE3"/>
+          </a:solidFill>
+          <a:ln xmlns:a="http://schemas.openxmlformats.org/drawingml/2006/main" w="0">
+            <a:noFill/>
+            <a:prstDash val="solid"/>
+          </a:ln>
+        </p:spPr>
+        <p:txBody>
+          <a:bodyPr xmlns:a="http://schemas.openxmlformats.org/drawingml/2006/main" lIns="228600" tIns="114300" rIns="228600" bIns="114300" anchor="ctr">
+            <a:noAutofit/>
+          </a:bodyPr>
+          <a:lstStyle xmlns:a="http://schemas.openxmlformats.org/drawingml/2006/main"/>
+          <a:p xmlns:a="http://schemas.openxmlformats.org/drawingml/2006/main">
+            <a:pPr algn="l">
+              <a:buNone/>
               <a:defRPr sz="2400" b="0">
                 <a:solidFill>
                   <a:srgbClr val="152B3A"/>
                 </a:solidFill>
+                <a:latin typeface="Calibri"/>
+                <a:ea typeface="Calibri"/>
+                <a:cs typeface="Calibri"/>
               </a:defRPr>
             </a:pPr>
             <a:r>
@@ -3785,16 +4446,23 @@
                 <a:solidFill>
                   <a:srgbClr val="152B3A"/>
                 </a:solidFill>
+                <a:latin typeface="Calibri"/>
+                <a:ea typeface="Calibri"/>
+                <a:cs typeface="Calibri"/>
               </a:rPr>
               <a:t>The Sun orbits Earth.</a:t>
             </a:r>
           </a:p>
           <a:p xmlns:a="http://schemas.openxmlformats.org/drawingml/2006/main">
-            <a:pPr>
+            <a:pPr algn="l">
+              <a:buNone/>
               <a:defRPr sz="2400" b="0">
                 <a:solidFill>
                   <a:srgbClr val="152B3A"/>
                 </a:solidFill>
+                <a:latin typeface="Calibri"/>
+                <a:ea typeface="Calibri"/>
+                <a:cs typeface="Calibri"/>
               </a:defRPr>
             </a:pPr>
             <a:r>
@@ -3802,6 +4470,9 @@
                 <a:solidFill>
                   <a:srgbClr val="152B3A"/>
                 </a:solidFill>
+                <a:latin typeface="Calibri"/>
+                <a:ea typeface="Calibri"/>
+                <a:cs typeface="Calibri"/>
               </a:rPr>
               <a:t>There is no gravity in space.</a:t>
             </a:r>
@@ -3824,7 +4495,7 @@
     <p:bg>
       <p:bgPr>
         <a:solidFill xmlns:a="http://schemas.openxmlformats.org/drawingml/2006/main">
-          <a:srgbClr val="F5F1E8"/>
+          <a:srgbClr val="FAF9F5"/>
         </a:solidFill>
       </p:bgPr>
     </p:bg>
@@ -3853,8 +4524,8 @@
         </p:nvSpPr>
         <p:spPr>
           <a:xfrm xmlns:a="http://schemas.openxmlformats.org/drawingml/2006/main">
-            <a:off x="609600" y="552450"/>
-            <a:ext cx="781050" cy="57150"/>
+            <a:off x="609600" y="733425"/>
+            <a:ext cx="781050" cy="38100"/>
           </a:xfrm>
           <a:prstGeom xmlns:a="http://schemas.openxmlformats.org/drawingml/2006/main" prst="rect">
             <a:avLst/>
@@ -3884,34 +4555,43 @@
         </p:nvSpPr>
         <p:spPr>
           <a:xfrm xmlns:a="http://schemas.openxmlformats.org/drawingml/2006/main">
-            <a:off x="609600" y="762000"/>
-            <a:ext cx="8572500" cy="285750"/>
-          </a:xfrm>
-          <a:prstGeom xmlns:a="http://schemas.openxmlformats.org/drawingml/2006/main" prst="rect">
-            <a:avLst/>
-          </a:prstGeom>
-          <a:noFill xmlns:a="http://schemas.openxmlformats.org/drawingml/2006/main"/>
-          <a:ln xmlns:a="http://schemas.openxmlformats.org/drawingml/2006/main" w="0">
-            <a:noFill/>
-            <a:prstDash val="solid"/>
-          </a:ln>
-        </p:spPr>
-        <p:txBody>
-          <a:bodyPr xmlns:a="http://schemas.openxmlformats.org/drawingml/2006/main" lIns="0" tIns="0" rIns="0" bIns="0" anchor="ctr"/>
-          <a:lstStyle xmlns:a="http://schemas.openxmlformats.org/drawingml/2006/main"/>
-          <a:p xmlns:a="http://schemas.openxmlformats.org/drawingml/2006/main">
-            <a:pPr>
-              <a:defRPr sz="1500" b="1">
+            <a:off x="609600" y="342900"/>
+            <a:ext cx="9334500" cy="304800"/>
+          </a:xfrm>
+          <a:prstGeom xmlns:a="http://schemas.openxmlformats.org/drawingml/2006/main" prst="rect">
+            <a:avLst/>
+          </a:prstGeom>
+          <a:noFill xmlns:a="http://schemas.openxmlformats.org/drawingml/2006/main"/>
+          <a:ln xmlns:a="http://schemas.openxmlformats.org/drawingml/2006/main" w="0">
+            <a:noFill/>
+            <a:prstDash val="solid"/>
+          </a:ln>
+        </p:spPr>
+        <p:txBody>
+          <a:bodyPr xmlns:a="http://schemas.openxmlformats.org/drawingml/2006/main" lIns="0" tIns="0" rIns="0" bIns="0" anchor="ctr">
+            <a:noAutofit/>
+          </a:bodyPr>
+          <a:lstStyle xmlns:a="http://schemas.openxmlformats.org/drawingml/2006/main"/>
+          <a:p xmlns:a="http://schemas.openxmlformats.org/drawingml/2006/main">
+            <a:pPr algn="l">
+              <a:buNone/>
+              <a:defRPr sz="1350" b="1">
                 <a:solidFill>
                   <a:srgbClr val="28685E"/>
                 </a:solidFill>
-              </a:defRPr>
-            </a:pPr>
-            <a:r>
-              <a:rPr sz="1500" b="1">
+                <a:latin typeface="Calibri"/>
+                <a:ea typeface="Calibri"/>
+                <a:cs typeface="Calibri"/>
+              </a:defRPr>
+            </a:pPr>
+            <a:r>
+              <a:rPr sz="1350" b="1">
                 <a:solidFill>
                   <a:srgbClr val="28685E"/>
                 </a:solidFill>
+                <a:latin typeface="Calibri"/>
+                <a:ea typeface="Calibri"/>
+                <a:cs typeface="Calibri"/>
               </a:rPr>
               <a:t>MADE BY MATT  /  GROW SCIENCE</a:t>
             </a:r>
@@ -3934,34 +4614,43 @@
         </p:nvSpPr>
         <p:spPr>
           <a:xfrm xmlns:a="http://schemas.openxmlformats.org/drawingml/2006/main">
-            <a:off x="609600" y="1352550"/>
-            <a:ext cx="10972800" cy="952500"/>
-          </a:xfrm>
-          <a:prstGeom xmlns:a="http://schemas.openxmlformats.org/drawingml/2006/main" prst="rect">
-            <a:avLst/>
-          </a:prstGeom>
-          <a:noFill xmlns:a="http://schemas.openxmlformats.org/drawingml/2006/main"/>
-          <a:ln xmlns:a="http://schemas.openxmlformats.org/drawingml/2006/main" w="0">
-            <a:noFill/>
-            <a:prstDash val="solid"/>
-          </a:ln>
-        </p:spPr>
-        <p:txBody>
-          <a:bodyPr xmlns:a="http://schemas.openxmlformats.org/drawingml/2006/main" lIns="0" tIns="0" rIns="0" bIns="0" anchor="ctr"/>
-          <a:lstStyle xmlns:a="http://schemas.openxmlformats.org/drawingml/2006/main"/>
-          <a:p xmlns:a="http://schemas.openxmlformats.org/drawingml/2006/main">
-            <a:pPr>
-              <a:defRPr sz="3750" b="1">
-                <a:solidFill>
-                  <a:srgbClr val="152B3A"/>
-                </a:solidFill>
-              </a:defRPr>
-            </a:pPr>
-            <a:r>
-              <a:rPr sz="3750" b="1">
-                <a:solidFill>
-                  <a:srgbClr val="152B3A"/>
-                </a:solidFill>
+            <a:off x="609600" y="990600"/>
+            <a:ext cx="10972800" cy="1000125"/>
+          </a:xfrm>
+          <a:prstGeom xmlns:a="http://schemas.openxmlformats.org/drawingml/2006/main" prst="rect">
+            <a:avLst/>
+          </a:prstGeom>
+          <a:noFill xmlns:a="http://schemas.openxmlformats.org/drawingml/2006/main"/>
+          <a:ln xmlns:a="http://schemas.openxmlformats.org/drawingml/2006/main" w="0">
+            <a:noFill/>
+            <a:prstDash val="solid"/>
+          </a:ln>
+        </p:spPr>
+        <p:txBody>
+          <a:bodyPr xmlns:a="http://schemas.openxmlformats.org/drawingml/2006/main" lIns="0" tIns="0" rIns="0" bIns="0" anchor="ctr">
+            <a:noAutofit/>
+          </a:bodyPr>
+          <a:lstStyle xmlns:a="http://schemas.openxmlformats.org/drawingml/2006/main"/>
+          <a:p xmlns:a="http://schemas.openxmlformats.org/drawingml/2006/main">
+            <a:pPr algn="l">
+              <a:buNone/>
+              <a:defRPr sz="3675" b="1">
+                <a:solidFill>
+                  <a:srgbClr val="152B3A"/>
+                </a:solidFill>
+                <a:latin typeface="Calibri"/>
+                <a:ea typeface="Calibri"/>
+                <a:cs typeface="Calibri"/>
+              </a:defRPr>
+            </a:pPr>
+            <a:r>
+              <a:rPr sz="3675" b="1">
+                <a:solidFill>
+                  <a:srgbClr val="152B3A"/>
+                </a:solidFill>
+                <a:latin typeface="Calibri"/>
+                <a:ea typeface="Calibri"/>
+                <a:cs typeface="Calibri"/>
               </a:rPr>
               <a:t>Use time as evidence</a:t>
             </a:r>
@@ -3984,14 +4673,14 @@
         </p:nvSpPr>
         <p:spPr>
           <a:xfrm xmlns:a="http://schemas.openxmlformats.org/drawingml/2006/main">
-            <a:off x="609600" y="6219825"/>
+            <a:off x="609600" y="6191250"/>
             <a:ext cx="10972800" cy="9525"/>
           </a:xfrm>
           <a:prstGeom xmlns:a="http://schemas.openxmlformats.org/drawingml/2006/main" prst="rect">
             <a:avLst/>
           </a:prstGeom>
           <a:solidFill xmlns:a="http://schemas.openxmlformats.org/drawingml/2006/main">
-            <a:srgbClr val="DCE7DD"/>
+            <a:srgbClr val="CEDBD3"/>
           </a:solidFill>
           <a:ln xmlns:a="http://schemas.openxmlformats.org/drawingml/2006/main" w="0">
             <a:noFill/>
@@ -4015,34 +4704,43 @@
         </p:nvSpPr>
         <p:spPr>
           <a:xfrm xmlns:a="http://schemas.openxmlformats.org/drawingml/2006/main">
-            <a:off x="609600" y="6381750"/>
-            <a:ext cx="9906000" cy="228600"/>
-          </a:xfrm>
-          <a:prstGeom xmlns:a="http://schemas.openxmlformats.org/drawingml/2006/main" prst="rect">
-            <a:avLst/>
-          </a:prstGeom>
-          <a:noFill xmlns:a="http://schemas.openxmlformats.org/drawingml/2006/main"/>
-          <a:ln xmlns:a="http://schemas.openxmlformats.org/drawingml/2006/main" w="0">
-            <a:noFill/>
-            <a:prstDash val="solid"/>
-          </a:ln>
-        </p:spPr>
-        <p:txBody>
-          <a:bodyPr xmlns:a="http://schemas.openxmlformats.org/drawingml/2006/main" lIns="0" tIns="0" rIns="0" bIns="0" anchor="ctr"/>
-          <a:lstStyle xmlns:a="http://schemas.openxmlformats.org/drawingml/2006/main"/>
-          <a:p xmlns:a="http://schemas.openxmlformats.org/drawingml/2006/main">
-            <a:pPr>
-              <a:defRPr sz="1275" b="0">
+            <a:off x="609600" y="6419850"/>
+            <a:ext cx="9525000" cy="219075"/>
+          </a:xfrm>
+          <a:prstGeom xmlns:a="http://schemas.openxmlformats.org/drawingml/2006/main" prst="rect">
+            <a:avLst/>
+          </a:prstGeom>
+          <a:noFill xmlns:a="http://schemas.openxmlformats.org/drawingml/2006/main"/>
+          <a:ln xmlns:a="http://schemas.openxmlformats.org/drawingml/2006/main" w="0">
+            <a:noFill/>
+            <a:prstDash val="solid"/>
+          </a:ln>
+        </p:spPr>
+        <p:txBody>
+          <a:bodyPr xmlns:a="http://schemas.openxmlformats.org/drawingml/2006/main" lIns="0" tIns="0" rIns="0" bIns="0" anchor="ctr">
+            <a:noAutofit/>
+          </a:bodyPr>
+          <a:lstStyle xmlns:a="http://schemas.openxmlformats.org/drawingml/2006/main"/>
+          <a:p xmlns:a="http://schemas.openxmlformats.org/drawingml/2006/main">
+            <a:pPr algn="l">
+              <a:buNone/>
+              <a:defRPr sz="1200" b="0">
                 <a:solidFill>
                   <a:srgbClr val="50616B"/>
                 </a:solidFill>
-              </a:defRPr>
-            </a:pPr>
-            <a:r>
-              <a:rPr sz="1275" b="0">
+                <a:latin typeface="Calibri"/>
+                <a:ea typeface="Calibri"/>
+                <a:cs typeface="Calibri"/>
+              </a:defRPr>
+            </a:pPr>
+            <a:r>
+              <a:rPr sz="1200" b="0">
                 <a:solidFill>
                   <a:srgbClr val="50616B"/>
                 </a:solidFill>
+                <a:latin typeface="Calibri"/>
+                <a:ea typeface="Calibri"/>
+                <a:cs typeface="Calibri"/>
               </a:rPr>
               <a:t>AUTUMN 1  ·  WEEK 6  ·  LESSON A</a:t>
             </a:r>
@@ -4065,27 +4763,33 @@
         </p:nvSpPr>
         <p:spPr>
           <a:xfrm xmlns:a="http://schemas.openxmlformats.org/drawingml/2006/main">
-            <a:off x="11106150" y="6362700"/>
-            <a:ext cx="476250" cy="238125"/>
-          </a:xfrm>
-          <a:prstGeom xmlns:a="http://schemas.openxmlformats.org/drawingml/2006/main" prst="rect">
-            <a:avLst/>
-          </a:prstGeom>
-          <a:noFill xmlns:a="http://schemas.openxmlformats.org/drawingml/2006/main"/>
-          <a:ln xmlns:a="http://schemas.openxmlformats.org/drawingml/2006/main" w="0">
-            <a:noFill/>
-            <a:prstDash val="solid"/>
-          </a:ln>
-        </p:spPr>
-        <p:txBody>
-          <a:bodyPr xmlns:a="http://schemas.openxmlformats.org/drawingml/2006/main" lIns="0" tIns="0" rIns="0" bIns="0" anchor="ctr"/>
-          <a:lstStyle xmlns:a="http://schemas.openxmlformats.org/drawingml/2006/main"/>
-          <a:p xmlns:a="http://schemas.openxmlformats.org/drawingml/2006/main">
-            <a:pPr>
+            <a:off x="11106150" y="6400800"/>
+            <a:ext cx="476250" cy="247650"/>
+          </a:xfrm>
+          <a:prstGeom xmlns:a="http://schemas.openxmlformats.org/drawingml/2006/main" prst="rect">
+            <a:avLst/>
+          </a:prstGeom>
+          <a:noFill xmlns:a="http://schemas.openxmlformats.org/drawingml/2006/main"/>
+          <a:ln xmlns:a="http://schemas.openxmlformats.org/drawingml/2006/main" w="0">
+            <a:noFill/>
+            <a:prstDash val="solid"/>
+          </a:ln>
+        </p:spPr>
+        <p:txBody>
+          <a:bodyPr xmlns:a="http://schemas.openxmlformats.org/drawingml/2006/main" lIns="0" tIns="0" rIns="0" bIns="0" anchor="ctr">
+            <a:noAutofit/>
+          </a:bodyPr>
+          <a:lstStyle xmlns:a="http://schemas.openxmlformats.org/drawingml/2006/main"/>
+          <a:p xmlns:a="http://schemas.openxmlformats.org/drawingml/2006/main">
+            <a:pPr algn="l">
+              <a:buNone/>
               <a:defRPr sz="1350" b="1">
                 <a:solidFill>
                   <a:srgbClr val="28685E"/>
                 </a:solidFill>
+                <a:latin typeface="Calibri"/>
+                <a:ea typeface="Calibri"/>
+                <a:cs typeface="Calibri"/>
               </a:defRPr>
             </a:pPr>
             <a:r>
@@ -4093,6 +4797,9 @@
                 <a:solidFill>
                   <a:srgbClr val="28685E"/>
                 </a:solidFill>
+                <a:latin typeface="Calibri"/>
+                <a:ea typeface="Calibri"/>
+                <a:cs typeface="Calibri"/>
               </a:rPr>
               <a:t>12</a:t>
             </a:r>
@@ -4115,34 +4822,45 @@
         </p:nvSpPr>
         <p:spPr>
           <a:xfrm xmlns:a="http://schemas.openxmlformats.org/drawingml/2006/main">
-            <a:off x="609600" y="2686050"/>
-            <a:ext cx="10858500" cy="1524000"/>
-          </a:xfrm>
-          <a:prstGeom xmlns:a="http://schemas.openxmlformats.org/drawingml/2006/main" prst="rect">
-            <a:avLst/>
-          </a:prstGeom>
-          <a:noFill xmlns:a="http://schemas.openxmlformats.org/drawingml/2006/main"/>
-          <a:ln xmlns:a="http://schemas.openxmlformats.org/drawingml/2006/main" w="0">
-            <a:noFill/>
-            <a:prstDash val="solid"/>
-          </a:ln>
-        </p:spPr>
-        <p:txBody>
-          <a:bodyPr xmlns:a="http://schemas.openxmlformats.org/drawingml/2006/main" lIns="0" tIns="0" rIns="0" bIns="0" anchor="ctr"/>
-          <a:lstStyle xmlns:a="http://schemas.openxmlformats.org/drawingml/2006/main"/>
-          <a:p xmlns:a="http://schemas.openxmlformats.org/drawingml/2006/main">
-            <a:pPr>
-              <a:defRPr sz="2925" b="1">
+            <a:off x="457200" y="2190750"/>
+            <a:ext cx="11277600" cy="2143125"/>
+          </a:xfrm>
+          <a:prstGeom xmlns:a="http://schemas.openxmlformats.org/drawingml/2006/main" prst="rect">
+            <a:avLst/>
+          </a:prstGeom>
+          <a:solidFill xmlns:a="http://schemas.openxmlformats.org/drawingml/2006/main">
+            <a:srgbClr val="E7EFE9"/>
+          </a:solidFill>
+          <a:ln xmlns:a="http://schemas.openxmlformats.org/drawingml/2006/main" w="0">
+            <a:noFill/>
+            <a:prstDash val="solid"/>
+          </a:ln>
+        </p:spPr>
+        <p:txBody>
+          <a:bodyPr xmlns:a="http://schemas.openxmlformats.org/drawingml/2006/main" lIns="152400" tIns="114300" rIns="152400" bIns="114300" anchor="ctr">
+            <a:noAutofit/>
+          </a:bodyPr>
+          <a:lstStyle xmlns:a="http://schemas.openxmlformats.org/drawingml/2006/main"/>
+          <a:p xmlns:a="http://schemas.openxmlformats.org/drawingml/2006/main">
+            <a:pPr algn="l">
+              <a:buNone/>
+              <a:defRPr sz="3075" b="1">
                 <a:solidFill>
                   <a:srgbClr val="28685E"/>
                 </a:solidFill>
-              </a:defRPr>
-            </a:pPr>
-            <a:r>
-              <a:rPr sz="2925" b="1">
+                <a:latin typeface="Calibri"/>
+                <a:ea typeface="Calibri"/>
+                <a:cs typeface="Calibri"/>
+              </a:defRPr>
+            </a:pPr>
+            <a:r>
+              <a:rPr sz="3075" b="1">
                 <a:solidFill>
                   <a:srgbClr val="28685E"/>
                 </a:solidFill>
+                <a:latin typeface="Calibri"/>
+                <a:ea typeface="Calibri"/>
+                <a:cs typeface="Calibri"/>
               </a:rPr>
               <a:t>Neptune's year is much longer than Earth's: about 165 Earth years for one orbit.</a:t>
             </a:r>
@@ -4165,34 +4883,43 @@
         </p:nvSpPr>
         <p:spPr>
           <a:xfrm xmlns:a="http://schemas.openxmlformats.org/drawingml/2006/main">
-            <a:off x="609600" y="4552950"/>
-            <a:ext cx="10858500" cy="1285875"/>
-          </a:xfrm>
-          <a:prstGeom xmlns:a="http://schemas.openxmlformats.org/drawingml/2006/main" prst="rect">
-            <a:avLst/>
-          </a:prstGeom>
-          <a:noFill xmlns:a="http://schemas.openxmlformats.org/drawingml/2006/main"/>
-          <a:ln xmlns:a="http://schemas.openxmlformats.org/drawingml/2006/main" w="0">
-            <a:noFill/>
-            <a:prstDash val="solid"/>
-          </a:ln>
-        </p:spPr>
-        <p:txBody>
-          <a:bodyPr xmlns:a="http://schemas.openxmlformats.org/drawingml/2006/main" lIns="0" tIns="0" rIns="0" bIns="0" anchor="ctr"/>
-          <a:lstStyle xmlns:a="http://schemas.openxmlformats.org/drawingml/2006/main"/>
-          <a:p xmlns:a="http://schemas.openxmlformats.org/drawingml/2006/main">
-            <a:pPr>
-              <a:defRPr sz="2700" b="0">
-                <a:solidFill>
-                  <a:srgbClr val="152B3A"/>
-                </a:solidFill>
-              </a:defRPr>
-            </a:pPr>
-            <a:r>
-              <a:rPr sz="2700" b="0">
-                <a:solidFill>
-                  <a:srgbClr val="152B3A"/>
-                </a:solidFill>
+            <a:off x="609600" y="4438650"/>
+            <a:ext cx="10972800" cy="1257300"/>
+          </a:xfrm>
+          <a:prstGeom xmlns:a="http://schemas.openxmlformats.org/drawingml/2006/main" prst="rect">
+            <a:avLst/>
+          </a:prstGeom>
+          <a:noFill xmlns:a="http://schemas.openxmlformats.org/drawingml/2006/main"/>
+          <a:ln xmlns:a="http://schemas.openxmlformats.org/drawingml/2006/main" w="0">
+            <a:noFill/>
+            <a:prstDash val="solid"/>
+          </a:ln>
+        </p:spPr>
+        <p:txBody>
+          <a:bodyPr xmlns:a="http://schemas.openxmlformats.org/drawingml/2006/main" lIns="0" tIns="0" rIns="0" bIns="0" anchor="ctr">
+            <a:noAutofit/>
+          </a:bodyPr>
+          <a:lstStyle xmlns:a="http://schemas.openxmlformats.org/drawingml/2006/main"/>
+          <a:p xmlns:a="http://schemas.openxmlformats.org/drawingml/2006/main">
+            <a:pPr algn="l">
+              <a:buNone/>
+              <a:defRPr sz="2550" b="0">
+                <a:solidFill>
+                  <a:srgbClr val="152B3A"/>
+                </a:solidFill>
+                <a:latin typeface="Calibri"/>
+                <a:ea typeface="Calibri"/>
+                <a:cs typeface="Calibri"/>
+              </a:defRPr>
+            </a:pPr>
+            <a:r>
+              <a:rPr sz="2550" b="0">
+                <a:solidFill>
+                  <a:srgbClr val="152B3A"/>
+                </a:solidFill>
+                <a:latin typeface="Calibri"/>
+                <a:ea typeface="Calibri"/>
+                <a:cs typeface="Calibri"/>
               </a:rPr>
               <a:t>A year means one orbit, not always 365 days.</a:t>
             </a:r>
@@ -4215,7 +4942,7 @@
     <p:bg>
       <p:bgPr>
         <a:solidFill xmlns:a="http://schemas.openxmlformats.org/drawingml/2006/main">
-          <a:srgbClr val="F5F1E8"/>
+          <a:srgbClr val="FAF9F5"/>
         </a:solidFill>
       </p:bgPr>
     </p:bg>
@@ -4244,8 +4971,8 @@
         </p:nvSpPr>
         <p:spPr>
           <a:xfrm xmlns:a="http://schemas.openxmlformats.org/drawingml/2006/main">
-            <a:off x="609600" y="552450"/>
-            <a:ext cx="781050" cy="57150"/>
+            <a:off x="609600" y="733425"/>
+            <a:ext cx="781050" cy="38100"/>
           </a:xfrm>
           <a:prstGeom xmlns:a="http://schemas.openxmlformats.org/drawingml/2006/main" prst="rect">
             <a:avLst/>
@@ -4275,34 +5002,43 @@
         </p:nvSpPr>
         <p:spPr>
           <a:xfrm xmlns:a="http://schemas.openxmlformats.org/drawingml/2006/main">
-            <a:off x="609600" y="762000"/>
-            <a:ext cx="8572500" cy="285750"/>
-          </a:xfrm>
-          <a:prstGeom xmlns:a="http://schemas.openxmlformats.org/drawingml/2006/main" prst="rect">
-            <a:avLst/>
-          </a:prstGeom>
-          <a:noFill xmlns:a="http://schemas.openxmlformats.org/drawingml/2006/main"/>
-          <a:ln xmlns:a="http://schemas.openxmlformats.org/drawingml/2006/main" w="0">
-            <a:noFill/>
-            <a:prstDash val="solid"/>
-          </a:ln>
-        </p:spPr>
-        <p:txBody>
-          <a:bodyPr xmlns:a="http://schemas.openxmlformats.org/drawingml/2006/main" lIns="0" tIns="0" rIns="0" bIns="0" anchor="ctr"/>
-          <a:lstStyle xmlns:a="http://schemas.openxmlformats.org/drawingml/2006/main"/>
-          <a:p xmlns:a="http://schemas.openxmlformats.org/drawingml/2006/main">
-            <a:pPr>
-              <a:defRPr sz="1500" b="1">
+            <a:off x="609600" y="342900"/>
+            <a:ext cx="9334500" cy="304800"/>
+          </a:xfrm>
+          <a:prstGeom xmlns:a="http://schemas.openxmlformats.org/drawingml/2006/main" prst="rect">
+            <a:avLst/>
+          </a:prstGeom>
+          <a:noFill xmlns:a="http://schemas.openxmlformats.org/drawingml/2006/main"/>
+          <a:ln xmlns:a="http://schemas.openxmlformats.org/drawingml/2006/main" w="0">
+            <a:noFill/>
+            <a:prstDash val="solid"/>
+          </a:ln>
+        </p:spPr>
+        <p:txBody>
+          <a:bodyPr xmlns:a="http://schemas.openxmlformats.org/drawingml/2006/main" lIns="0" tIns="0" rIns="0" bIns="0" anchor="ctr">
+            <a:noAutofit/>
+          </a:bodyPr>
+          <a:lstStyle xmlns:a="http://schemas.openxmlformats.org/drawingml/2006/main"/>
+          <a:p xmlns:a="http://schemas.openxmlformats.org/drawingml/2006/main">
+            <a:pPr algn="l">
+              <a:buNone/>
+              <a:defRPr sz="1350" b="1">
                 <a:solidFill>
                   <a:srgbClr val="28685E"/>
                 </a:solidFill>
-              </a:defRPr>
-            </a:pPr>
-            <a:r>
-              <a:rPr sz="1500" b="1">
+                <a:latin typeface="Calibri"/>
+                <a:ea typeface="Calibri"/>
+                <a:cs typeface="Calibri"/>
+              </a:defRPr>
+            </a:pPr>
+            <a:r>
+              <a:rPr sz="1350" b="1">
                 <a:solidFill>
                   <a:srgbClr val="28685E"/>
                 </a:solidFill>
+                <a:latin typeface="Calibri"/>
+                <a:ea typeface="Calibri"/>
+                <a:cs typeface="Calibri"/>
               </a:rPr>
               <a:t>MADE BY MATT  /  GROW SCIENCE</a:t>
             </a:r>
@@ -4325,34 +5061,43 @@
         </p:nvSpPr>
         <p:spPr>
           <a:xfrm xmlns:a="http://schemas.openxmlformats.org/drawingml/2006/main">
-            <a:off x="609600" y="1352550"/>
-            <a:ext cx="10972800" cy="952500"/>
-          </a:xfrm>
-          <a:prstGeom xmlns:a="http://schemas.openxmlformats.org/drawingml/2006/main" prst="rect">
-            <a:avLst/>
-          </a:prstGeom>
-          <a:noFill xmlns:a="http://schemas.openxmlformats.org/drawingml/2006/main"/>
-          <a:ln xmlns:a="http://schemas.openxmlformats.org/drawingml/2006/main" w="0">
-            <a:noFill/>
-            <a:prstDash val="solid"/>
-          </a:ln>
-        </p:spPr>
-        <p:txBody>
-          <a:bodyPr xmlns:a="http://schemas.openxmlformats.org/drawingml/2006/main" lIns="0" tIns="0" rIns="0" bIns="0" anchor="ctr"/>
-          <a:lstStyle xmlns:a="http://schemas.openxmlformats.org/drawingml/2006/main"/>
-          <a:p xmlns:a="http://schemas.openxmlformats.org/drawingml/2006/main">
-            <a:pPr>
-              <a:defRPr sz="3750" b="1">
-                <a:solidFill>
-                  <a:srgbClr val="152B3A"/>
-                </a:solidFill>
-              </a:defRPr>
-            </a:pPr>
-            <a:r>
-              <a:rPr sz="3750" b="1">
-                <a:solidFill>
-                  <a:srgbClr val="152B3A"/>
-                </a:solidFill>
+            <a:off x="609600" y="990600"/>
+            <a:ext cx="10972800" cy="1000125"/>
+          </a:xfrm>
+          <a:prstGeom xmlns:a="http://schemas.openxmlformats.org/drawingml/2006/main" prst="rect">
+            <a:avLst/>
+          </a:prstGeom>
+          <a:noFill xmlns:a="http://schemas.openxmlformats.org/drawingml/2006/main"/>
+          <a:ln xmlns:a="http://schemas.openxmlformats.org/drawingml/2006/main" w="0">
+            <a:noFill/>
+            <a:prstDash val="solid"/>
+          </a:ln>
+        </p:spPr>
+        <p:txBody>
+          <a:bodyPr xmlns:a="http://schemas.openxmlformats.org/drawingml/2006/main" lIns="0" tIns="0" rIns="0" bIns="0" anchor="ctr">
+            <a:noAutofit/>
+          </a:bodyPr>
+          <a:lstStyle xmlns:a="http://schemas.openxmlformats.org/drawingml/2006/main"/>
+          <a:p xmlns:a="http://schemas.openxmlformats.org/drawingml/2006/main">
+            <a:pPr algn="l">
+              <a:buNone/>
+              <a:defRPr sz="3675" b="1">
+                <a:solidFill>
+                  <a:srgbClr val="152B3A"/>
+                </a:solidFill>
+                <a:latin typeface="Calibri"/>
+                <a:ea typeface="Calibri"/>
+                <a:cs typeface="Calibri"/>
+              </a:defRPr>
+            </a:pPr>
+            <a:r>
+              <a:rPr sz="3675" b="1">
+                <a:solidFill>
+                  <a:srgbClr val="152B3A"/>
+                </a:solidFill>
+                <a:latin typeface="Calibri"/>
+                <a:ea typeface="Calibri"/>
+                <a:cs typeface="Calibri"/>
               </a:rPr>
               <a:t>Keep your orbit explanation</a:t>
             </a:r>
@@ -4375,14 +5120,14 @@
         </p:nvSpPr>
         <p:spPr>
           <a:xfrm xmlns:a="http://schemas.openxmlformats.org/drawingml/2006/main">
-            <a:off x="609600" y="6219825"/>
+            <a:off x="609600" y="6191250"/>
             <a:ext cx="10972800" cy="9525"/>
           </a:xfrm>
           <a:prstGeom xmlns:a="http://schemas.openxmlformats.org/drawingml/2006/main" prst="rect">
             <a:avLst/>
           </a:prstGeom>
           <a:solidFill xmlns:a="http://schemas.openxmlformats.org/drawingml/2006/main">
-            <a:srgbClr val="DCE7DD"/>
+            <a:srgbClr val="CEDBD3"/>
           </a:solidFill>
           <a:ln xmlns:a="http://schemas.openxmlformats.org/drawingml/2006/main" w="0">
             <a:noFill/>
@@ -4406,34 +5151,43 @@
         </p:nvSpPr>
         <p:spPr>
           <a:xfrm xmlns:a="http://schemas.openxmlformats.org/drawingml/2006/main">
-            <a:off x="609600" y="6381750"/>
-            <a:ext cx="9906000" cy="228600"/>
-          </a:xfrm>
-          <a:prstGeom xmlns:a="http://schemas.openxmlformats.org/drawingml/2006/main" prst="rect">
-            <a:avLst/>
-          </a:prstGeom>
-          <a:noFill xmlns:a="http://schemas.openxmlformats.org/drawingml/2006/main"/>
-          <a:ln xmlns:a="http://schemas.openxmlformats.org/drawingml/2006/main" w="0">
-            <a:noFill/>
-            <a:prstDash val="solid"/>
-          </a:ln>
-        </p:spPr>
-        <p:txBody>
-          <a:bodyPr xmlns:a="http://schemas.openxmlformats.org/drawingml/2006/main" lIns="0" tIns="0" rIns="0" bIns="0" anchor="ctr"/>
-          <a:lstStyle xmlns:a="http://schemas.openxmlformats.org/drawingml/2006/main"/>
-          <a:p xmlns:a="http://schemas.openxmlformats.org/drawingml/2006/main">
-            <a:pPr>
-              <a:defRPr sz="1275" b="0">
+            <a:off x="609600" y="6419850"/>
+            <a:ext cx="9525000" cy="219075"/>
+          </a:xfrm>
+          <a:prstGeom xmlns:a="http://schemas.openxmlformats.org/drawingml/2006/main" prst="rect">
+            <a:avLst/>
+          </a:prstGeom>
+          <a:noFill xmlns:a="http://schemas.openxmlformats.org/drawingml/2006/main"/>
+          <a:ln xmlns:a="http://schemas.openxmlformats.org/drawingml/2006/main" w="0">
+            <a:noFill/>
+            <a:prstDash val="solid"/>
+          </a:ln>
+        </p:spPr>
+        <p:txBody>
+          <a:bodyPr xmlns:a="http://schemas.openxmlformats.org/drawingml/2006/main" lIns="0" tIns="0" rIns="0" bIns="0" anchor="ctr">
+            <a:noAutofit/>
+          </a:bodyPr>
+          <a:lstStyle xmlns:a="http://schemas.openxmlformats.org/drawingml/2006/main"/>
+          <a:p xmlns:a="http://schemas.openxmlformats.org/drawingml/2006/main">
+            <a:pPr algn="l">
+              <a:buNone/>
+              <a:defRPr sz="1200" b="0">
                 <a:solidFill>
                   <a:srgbClr val="50616B"/>
                 </a:solidFill>
-              </a:defRPr>
-            </a:pPr>
-            <a:r>
-              <a:rPr sz="1275" b="0">
+                <a:latin typeface="Calibri"/>
+                <a:ea typeface="Calibri"/>
+                <a:cs typeface="Calibri"/>
+              </a:defRPr>
+            </a:pPr>
+            <a:r>
+              <a:rPr sz="1200" b="0">
                 <a:solidFill>
                   <a:srgbClr val="50616B"/>
                 </a:solidFill>
+                <a:latin typeface="Calibri"/>
+                <a:ea typeface="Calibri"/>
+                <a:cs typeface="Calibri"/>
               </a:rPr>
               <a:t>AUTUMN 1  ·  WEEK 6  ·  LESSON A</a:t>
             </a:r>
@@ -4456,27 +5210,33 @@
         </p:nvSpPr>
         <p:spPr>
           <a:xfrm xmlns:a="http://schemas.openxmlformats.org/drawingml/2006/main">
-            <a:off x="11106150" y="6362700"/>
-            <a:ext cx="476250" cy="238125"/>
-          </a:xfrm>
-          <a:prstGeom xmlns:a="http://schemas.openxmlformats.org/drawingml/2006/main" prst="rect">
-            <a:avLst/>
-          </a:prstGeom>
-          <a:noFill xmlns:a="http://schemas.openxmlformats.org/drawingml/2006/main"/>
-          <a:ln xmlns:a="http://schemas.openxmlformats.org/drawingml/2006/main" w="0">
-            <a:noFill/>
-            <a:prstDash val="solid"/>
-          </a:ln>
-        </p:spPr>
-        <p:txBody>
-          <a:bodyPr xmlns:a="http://schemas.openxmlformats.org/drawingml/2006/main" lIns="0" tIns="0" rIns="0" bIns="0" anchor="ctr"/>
-          <a:lstStyle xmlns:a="http://schemas.openxmlformats.org/drawingml/2006/main"/>
-          <a:p xmlns:a="http://schemas.openxmlformats.org/drawingml/2006/main">
-            <a:pPr>
+            <a:off x="11106150" y="6400800"/>
+            <a:ext cx="476250" cy="247650"/>
+          </a:xfrm>
+          <a:prstGeom xmlns:a="http://schemas.openxmlformats.org/drawingml/2006/main" prst="rect">
+            <a:avLst/>
+          </a:prstGeom>
+          <a:noFill xmlns:a="http://schemas.openxmlformats.org/drawingml/2006/main"/>
+          <a:ln xmlns:a="http://schemas.openxmlformats.org/drawingml/2006/main" w="0">
+            <a:noFill/>
+            <a:prstDash val="solid"/>
+          </a:ln>
+        </p:spPr>
+        <p:txBody>
+          <a:bodyPr xmlns:a="http://schemas.openxmlformats.org/drawingml/2006/main" lIns="0" tIns="0" rIns="0" bIns="0" anchor="ctr">
+            <a:noAutofit/>
+          </a:bodyPr>
+          <a:lstStyle xmlns:a="http://schemas.openxmlformats.org/drawingml/2006/main"/>
+          <a:p xmlns:a="http://schemas.openxmlformats.org/drawingml/2006/main">
+            <a:pPr algn="l">
+              <a:buNone/>
               <a:defRPr sz="1350" b="1">
                 <a:solidFill>
                   <a:srgbClr val="28685E"/>
                 </a:solidFill>
+                <a:latin typeface="Calibri"/>
+                <a:ea typeface="Calibri"/>
+                <a:cs typeface="Calibri"/>
               </a:defRPr>
             </a:pPr>
             <a:r>
@@ -4484,6 +5244,9 @@
                 <a:solidFill>
                   <a:srgbClr val="28685E"/>
                 </a:solidFill>
+                <a:latin typeface="Calibri"/>
+                <a:ea typeface="Calibri"/>
+                <a:cs typeface="Calibri"/>
               </a:rPr>
               <a:t>13</a:t>
             </a:r>
@@ -4506,34 +5269,43 @@
         </p:nvSpPr>
         <p:spPr>
           <a:xfrm xmlns:a="http://schemas.openxmlformats.org/drawingml/2006/main">
-            <a:off x="609600" y="2619375"/>
-            <a:ext cx="10972800" cy="781050"/>
-          </a:xfrm>
-          <a:prstGeom xmlns:a="http://schemas.openxmlformats.org/drawingml/2006/main" prst="rect">
-            <a:avLst/>
-          </a:prstGeom>
-          <a:noFill xmlns:a="http://schemas.openxmlformats.org/drawingml/2006/main"/>
-          <a:ln xmlns:a="http://schemas.openxmlformats.org/drawingml/2006/main" w="0">
-            <a:noFill/>
-            <a:prstDash val="solid"/>
-          </a:ln>
-        </p:spPr>
-        <p:txBody>
-          <a:bodyPr xmlns:a="http://schemas.openxmlformats.org/drawingml/2006/main" lIns="0" tIns="0" rIns="0" bIns="0" anchor="ctr"/>
-          <a:lstStyle xmlns:a="http://schemas.openxmlformats.org/drawingml/2006/main"/>
-          <a:p xmlns:a="http://schemas.openxmlformats.org/drawingml/2006/main">
-            <a:pPr>
-              <a:defRPr sz="2550" b="0">
-                <a:solidFill>
-                  <a:srgbClr val="152B3A"/>
-                </a:solidFill>
-              </a:defRPr>
-            </a:pPr>
-            <a:r>
-              <a:rPr sz="2550" b="0">
-                <a:solidFill>
-                  <a:srgbClr val="152B3A"/>
-                </a:solidFill>
+            <a:off x="1000125" y="2333625"/>
+            <a:ext cx="10382250" cy="1076325"/>
+          </a:xfrm>
+          <a:prstGeom xmlns:a="http://schemas.openxmlformats.org/drawingml/2006/main" prst="rect">
+            <a:avLst/>
+          </a:prstGeom>
+          <a:noFill xmlns:a="http://schemas.openxmlformats.org/drawingml/2006/main"/>
+          <a:ln xmlns:a="http://schemas.openxmlformats.org/drawingml/2006/main" w="0">
+            <a:noFill/>
+            <a:prstDash val="solid"/>
+          </a:ln>
+        </p:spPr>
+        <p:txBody>
+          <a:bodyPr xmlns:a="http://schemas.openxmlformats.org/drawingml/2006/main" lIns="0" tIns="0" rIns="0" bIns="0" anchor="ctr">
+            <a:noAutofit/>
+          </a:bodyPr>
+          <a:lstStyle xmlns:a="http://schemas.openxmlformats.org/drawingml/2006/main"/>
+          <a:p xmlns:a="http://schemas.openxmlformats.org/drawingml/2006/main">
+            <a:pPr algn="l">
+              <a:buNone/>
+              <a:defRPr sz="2625" b="0">
+                <a:solidFill>
+                  <a:srgbClr val="152B3A"/>
+                </a:solidFill>
+                <a:latin typeface="Calibri"/>
+                <a:ea typeface="Calibri"/>
+                <a:cs typeface="Calibri"/>
+              </a:defRPr>
+            </a:pPr>
+            <a:r>
+              <a:rPr sz="2625" b="0">
+                <a:solidFill>
+                  <a:srgbClr val="152B3A"/>
+                </a:solidFill>
+                <a:latin typeface="Calibri"/>
+                <a:ea typeface="Calibri"/>
+                <a:cs typeface="Calibri"/>
               </a:rPr>
               <a:t>Label and keep today's order strip and explanation.</a:t>
             </a:r>
@@ -4556,34 +5328,43 @@
         </p:nvSpPr>
         <p:spPr>
           <a:xfrm xmlns:a="http://schemas.openxmlformats.org/drawingml/2006/main">
-            <a:off x="609600" y="3476625"/>
-            <a:ext cx="10972800" cy="781050"/>
-          </a:xfrm>
-          <a:prstGeom xmlns:a="http://schemas.openxmlformats.org/drawingml/2006/main" prst="rect">
-            <a:avLst/>
-          </a:prstGeom>
-          <a:noFill xmlns:a="http://schemas.openxmlformats.org/drawingml/2006/main"/>
-          <a:ln xmlns:a="http://schemas.openxmlformats.org/drawingml/2006/main" w="0">
-            <a:noFill/>
-            <a:prstDash val="solid"/>
-          </a:ln>
-        </p:spPr>
-        <p:txBody>
-          <a:bodyPr xmlns:a="http://schemas.openxmlformats.org/drawingml/2006/main" lIns="0" tIns="0" rIns="0" bIns="0" anchor="ctr"/>
-          <a:lstStyle xmlns:a="http://schemas.openxmlformats.org/drawingml/2006/main"/>
-          <a:p xmlns:a="http://schemas.openxmlformats.org/drawingml/2006/main">
-            <a:pPr>
-              <a:defRPr sz="2550" b="0">
-                <a:solidFill>
-                  <a:srgbClr val="152B3A"/>
-                </a:solidFill>
-              </a:defRPr>
-            </a:pPr>
-            <a:r>
-              <a:rPr sz="2550" b="0">
-                <a:solidFill>
-                  <a:srgbClr val="152B3A"/>
-                </a:solidFill>
+            <a:off x="1000125" y="3467100"/>
+            <a:ext cx="10382250" cy="1076325"/>
+          </a:xfrm>
+          <a:prstGeom xmlns:a="http://schemas.openxmlformats.org/drawingml/2006/main" prst="rect">
+            <a:avLst/>
+          </a:prstGeom>
+          <a:noFill xmlns:a="http://schemas.openxmlformats.org/drawingml/2006/main"/>
+          <a:ln xmlns:a="http://schemas.openxmlformats.org/drawingml/2006/main" w="0">
+            <a:noFill/>
+            <a:prstDash val="solid"/>
+          </a:ln>
+        </p:spPr>
+        <p:txBody>
+          <a:bodyPr xmlns:a="http://schemas.openxmlformats.org/drawingml/2006/main" lIns="0" tIns="0" rIns="0" bIns="0" anchor="ctr">
+            <a:noAutofit/>
+          </a:bodyPr>
+          <a:lstStyle xmlns:a="http://schemas.openxmlformats.org/drawingml/2006/main"/>
+          <a:p xmlns:a="http://schemas.openxmlformats.org/drawingml/2006/main">
+            <a:pPr algn="l">
+              <a:buNone/>
+              <a:defRPr sz="2625" b="0">
+                <a:solidFill>
+                  <a:srgbClr val="152B3A"/>
+                </a:solidFill>
+                <a:latin typeface="Calibri"/>
+                <a:ea typeface="Calibri"/>
+                <a:cs typeface="Calibri"/>
+              </a:defRPr>
+            </a:pPr>
+            <a:r>
+              <a:rPr sz="2625" b="0">
+                <a:solidFill>
+                  <a:srgbClr val="152B3A"/>
+                </a:solidFill>
+                <a:latin typeface="Calibri"/>
+                <a:ea typeface="Calibri"/>
+                <a:cs typeface="Calibri"/>
               </a:rPr>
               <a:t>Next lesson: build the model and test year comparisons.</a:t>
             </a:r>
@@ -4606,36 +5387,276 @@
         </p:nvSpPr>
         <p:spPr>
           <a:xfrm xmlns:a="http://schemas.openxmlformats.org/drawingml/2006/main">
-            <a:off x="609600" y="4333875"/>
-            <a:ext cx="10972800" cy="781050"/>
-          </a:xfrm>
-          <a:prstGeom xmlns:a="http://schemas.openxmlformats.org/drawingml/2006/main" prst="rect">
-            <a:avLst/>
-          </a:prstGeom>
-          <a:noFill xmlns:a="http://schemas.openxmlformats.org/drawingml/2006/main"/>
-          <a:ln xmlns:a="http://schemas.openxmlformats.org/drawingml/2006/main" w="0">
-            <a:noFill/>
-            <a:prstDash val="solid"/>
-          </a:ln>
-        </p:spPr>
-        <p:txBody>
-          <a:bodyPr xmlns:a="http://schemas.openxmlformats.org/drawingml/2006/main" lIns="0" tIns="0" rIns="0" bIns="0" anchor="ctr"/>
-          <a:lstStyle xmlns:a="http://schemas.openxmlformats.org/drawingml/2006/main"/>
-          <a:p xmlns:a="http://schemas.openxmlformats.org/drawingml/2006/main">
-            <a:pPr>
-              <a:defRPr sz="2550" b="0">
-                <a:solidFill>
-                  <a:srgbClr val="152B3A"/>
-                </a:solidFill>
-              </a:defRPr>
-            </a:pPr>
-            <a:r>
-              <a:rPr sz="2550" b="0">
-                <a:solidFill>
-                  <a:srgbClr val="152B3A"/>
-                </a:solidFill>
+            <a:off x="1000125" y="4600575"/>
+            <a:ext cx="10382250" cy="1076325"/>
+          </a:xfrm>
+          <a:prstGeom xmlns:a="http://schemas.openxmlformats.org/drawingml/2006/main" prst="rect">
+            <a:avLst/>
+          </a:prstGeom>
+          <a:noFill xmlns:a="http://schemas.openxmlformats.org/drawingml/2006/main"/>
+          <a:ln xmlns:a="http://schemas.openxmlformats.org/drawingml/2006/main" w="0">
+            <a:noFill/>
+            <a:prstDash val="solid"/>
+          </a:ln>
+        </p:spPr>
+        <p:txBody>
+          <a:bodyPr xmlns:a="http://schemas.openxmlformats.org/drawingml/2006/main" lIns="0" tIns="0" rIns="0" bIns="0" anchor="ctr">
+            <a:noAutofit/>
+          </a:bodyPr>
+          <a:lstStyle xmlns:a="http://schemas.openxmlformats.org/drawingml/2006/main"/>
+          <a:p xmlns:a="http://schemas.openxmlformats.org/drawingml/2006/main">
+            <a:pPr algn="l">
+              <a:buNone/>
+              <a:defRPr sz="2625" b="0">
+                <a:solidFill>
+                  <a:srgbClr val="152B3A"/>
+                </a:solidFill>
+                <a:latin typeface="Calibri"/>
+                <a:ea typeface="Calibri"/>
+                <a:cs typeface="Calibri"/>
+              </a:defRPr>
+            </a:pPr>
+            <a:r>
+              <a:rPr sz="2625" b="0">
+                <a:solidFill>
+                  <a:srgbClr val="152B3A"/>
+                </a:solidFill>
+                <a:latin typeface="Calibri"/>
+                <a:ea typeface="Calibri"/>
+                <a:cs typeface="Calibri"/>
               </a:rPr>
               <a:t>Choose one arrow or idea to check again.</a:t>
+            </a:r>
+          </a:p>
+        </p:txBody>
+      </p:sp>
+      <p:sp>
+        <p:nvSpPr>
+          <p:cNvPr id="11" name="cue-0">
+            <a:extLst xmlns:a="http://schemas.openxmlformats.org/drawingml/2006/main">
+              <a:ext uri="{FF2B5EF4-FFF2-40B4-BE49-F238E27FC236}">
+                <a16:creationId xmlns:a16="http://schemas.microsoft.com/office/drawing/2014/main" id="{351FA045-AF15-4A5C-857F-8DC46AD9F79A}"/>
+              </a:ext>
+            </a:extLst>
+          </p:cNvPr>
+          <p:cNvSpPr>
+            <a:spLocks xmlns:a="http://schemas.openxmlformats.org/drawingml/2006/main" noGrp="1"/>
+          </p:cNvSpPr>
+          <p:nvPr/>
+        </p:nvSpPr>
+        <p:spPr>
+          <a:xfrm xmlns:a="http://schemas.openxmlformats.org/drawingml/2006/main">
+            <a:off x="609600" y="2362200"/>
+            <a:ext cx="323850" cy="323850"/>
+          </a:xfrm>
+          <a:prstGeom xmlns:a="http://schemas.openxmlformats.org/drawingml/2006/main" prst="rect">
+            <a:avLst/>
+          </a:prstGeom>
+          <a:noFill xmlns:a="http://schemas.openxmlformats.org/drawingml/2006/main"/>
+          <a:ln xmlns:a="http://schemas.openxmlformats.org/drawingml/2006/main" w="0">
+            <a:noFill/>
+          </a:ln>
+        </p:spPr>
+        <p:txBody>
+          <a:bodyPr xmlns:a="http://schemas.openxmlformats.org/drawingml/2006/main" lIns="0" tIns="0" rIns="0" bIns="0" anchor="ctr">
+            <a:noAutofit/>
+          </a:bodyPr>
+          <a:lstStyle xmlns:a="http://schemas.openxmlformats.org/drawingml/2006/main"/>
+          <a:p xmlns:a="http://schemas.openxmlformats.org/drawingml/2006/main">
+            <a:pPr algn="l">
+              <a:defRPr sz="1350" b="1">
+                <a:solidFill>
+                  <a:srgbClr val="28685E"/>
+                </a:solidFill>
+                <a:latin typeface="Calibri"/>
+                <a:ea typeface="Calibri"/>
+                <a:cs typeface="Calibri"/>
+              </a:defRPr>
+            </a:pPr>
+            <a:r>
+              <a:rPr sz="1350" b="1">
+                <a:solidFill>
+                  <a:srgbClr val="28685E"/>
+                </a:solidFill>
+                <a:latin typeface="Calibri"/>
+                <a:ea typeface="Calibri"/>
+                <a:cs typeface="Calibri"/>
+              </a:rPr>
+              <a:t>01</a:t>
+            </a:r>
+          </a:p>
+        </p:txBody>
+      </p:sp>
+      <p:sp>
+        <p:nvSpPr>
+          <p:cNvPr id="12" name="row-rule-0">
+            <a:extLst xmlns:a="http://schemas.openxmlformats.org/drawingml/2006/main">
+              <a:ext uri="{FF2B5EF4-FFF2-40B4-BE49-F238E27FC236}">
+                <a16:creationId xmlns:a16="http://schemas.microsoft.com/office/drawing/2014/main" id="{9871E4F1-0624-408B-87F8-94E071E44872}"/>
+              </a:ext>
+            </a:extLst>
+          </p:cNvPr>
+          <p:cNvSpPr>
+            <a:spLocks xmlns:a="http://schemas.openxmlformats.org/drawingml/2006/main" noGrp="1"/>
+          </p:cNvSpPr>
+          <p:nvPr/>
+        </p:nvSpPr>
+        <p:spPr>
+          <a:xfrm xmlns:a="http://schemas.openxmlformats.org/drawingml/2006/main">
+            <a:off x="1000125" y="3419475"/>
+            <a:ext cx="10334625" cy="0"/>
+          </a:xfrm>
+          <a:prstGeom xmlns:a="http://schemas.openxmlformats.org/drawingml/2006/main" prst="line">
+            <a:avLst/>
+          </a:prstGeom>
+          <a:noFill xmlns:a="http://schemas.openxmlformats.org/drawingml/2006/main"/>
+          <a:ln xmlns:a="http://schemas.openxmlformats.org/drawingml/2006/main" w="9525">
+            <a:solidFill>
+              <a:srgbClr val="CEDBD3"/>
+            </a:solidFill>
+          </a:ln>
+        </p:spPr>
+      </p:sp>
+      <p:sp>
+        <p:nvSpPr>
+          <p:cNvPr id="13" name="cue-1">
+            <a:extLst xmlns:a="http://schemas.openxmlformats.org/drawingml/2006/main">
+              <a:ext uri="{FF2B5EF4-FFF2-40B4-BE49-F238E27FC236}">
+                <a16:creationId xmlns:a16="http://schemas.microsoft.com/office/drawing/2014/main" id="{74620F40-135D-4A8C-B1F8-6FA917F595AA}"/>
+              </a:ext>
+            </a:extLst>
+          </p:cNvPr>
+          <p:cNvSpPr>
+            <a:spLocks xmlns:a="http://schemas.openxmlformats.org/drawingml/2006/main" noGrp="1"/>
+          </p:cNvSpPr>
+          <p:nvPr/>
+        </p:nvSpPr>
+        <p:spPr>
+          <a:xfrm xmlns:a="http://schemas.openxmlformats.org/drawingml/2006/main">
+            <a:off x="609600" y="3495675"/>
+            <a:ext cx="323850" cy="323850"/>
+          </a:xfrm>
+          <a:prstGeom xmlns:a="http://schemas.openxmlformats.org/drawingml/2006/main" prst="rect">
+            <a:avLst/>
+          </a:prstGeom>
+          <a:noFill xmlns:a="http://schemas.openxmlformats.org/drawingml/2006/main"/>
+          <a:ln xmlns:a="http://schemas.openxmlformats.org/drawingml/2006/main" w="0">
+            <a:noFill/>
+          </a:ln>
+        </p:spPr>
+        <p:txBody>
+          <a:bodyPr xmlns:a="http://schemas.openxmlformats.org/drawingml/2006/main" lIns="0" tIns="0" rIns="0" bIns="0" anchor="ctr">
+            <a:noAutofit/>
+          </a:bodyPr>
+          <a:lstStyle xmlns:a="http://schemas.openxmlformats.org/drawingml/2006/main"/>
+          <a:p xmlns:a="http://schemas.openxmlformats.org/drawingml/2006/main">
+            <a:pPr algn="l">
+              <a:defRPr sz="1350" b="1">
+                <a:solidFill>
+                  <a:srgbClr val="28685E"/>
+                </a:solidFill>
+                <a:latin typeface="Calibri"/>
+                <a:ea typeface="Calibri"/>
+                <a:cs typeface="Calibri"/>
+              </a:defRPr>
+            </a:pPr>
+            <a:r>
+              <a:rPr sz="1350" b="1">
+                <a:solidFill>
+                  <a:srgbClr val="28685E"/>
+                </a:solidFill>
+                <a:latin typeface="Calibri"/>
+                <a:ea typeface="Calibri"/>
+                <a:cs typeface="Calibri"/>
+              </a:rPr>
+              <a:t>02</a:t>
+            </a:r>
+          </a:p>
+        </p:txBody>
+      </p:sp>
+      <p:sp>
+        <p:nvSpPr>
+          <p:cNvPr id="14" name="row-rule-1">
+            <a:extLst xmlns:a="http://schemas.openxmlformats.org/drawingml/2006/main">
+              <a:ext uri="{FF2B5EF4-FFF2-40B4-BE49-F238E27FC236}">
+                <a16:creationId xmlns:a16="http://schemas.microsoft.com/office/drawing/2014/main" id="{4BCCF92F-8392-4C77-9F43-8F834ED94156}"/>
+              </a:ext>
+            </a:extLst>
+          </p:cNvPr>
+          <p:cNvSpPr>
+            <a:spLocks xmlns:a="http://schemas.openxmlformats.org/drawingml/2006/main" noGrp="1"/>
+          </p:cNvSpPr>
+          <p:nvPr/>
+        </p:nvSpPr>
+        <p:spPr>
+          <a:xfrm xmlns:a="http://schemas.openxmlformats.org/drawingml/2006/main">
+            <a:off x="1000125" y="4552950"/>
+            <a:ext cx="10334625" cy="0"/>
+          </a:xfrm>
+          <a:prstGeom xmlns:a="http://schemas.openxmlformats.org/drawingml/2006/main" prst="line">
+            <a:avLst/>
+          </a:prstGeom>
+          <a:noFill xmlns:a="http://schemas.openxmlformats.org/drawingml/2006/main"/>
+          <a:ln xmlns:a="http://schemas.openxmlformats.org/drawingml/2006/main" w="9525">
+            <a:solidFill>
+              <a:srgbClr val="CEDBD3"/>
+            </a:solidFill>
+          </a:ln>
+        </p:spPr>
+      </p:sp>
+      <p:sp>
+        <p:nvSpPr>
+          <p:cNvPr id="15" name="cue-2">
+            <a:extLst xmlns:a="http://schemas.openxmlformats.org/drawingml/2006/main">
+              <a:ext uri="{FF2B5EF4-FFF2-40B4-BE49-F238E27FC236}">
+                <a16:creationId xmlns:a16="http://schemas.microsoft.com/office/drawing/2014/main" id="{4BDCEDAE-B697-489D-8E42-CAC412590A43}"/>
+              </a:ext>
+            </a:extLst>
+          </p:cNvPr>
+          <p:cNvSpPr>
+            <a:spLocks xmlns:a="http://schemas.openxmlformats.org/drawingml/2006/main" noGrp="1"/>
+          </p:cNvSpPr>
+          <p:nvPr/>
+        </p:nvSpPr>
+        <p:spPr>
+          <a:xfrm xmlns:a="http://schemas.openxmlformats.org/drawingml/2006/main">
+            <a:off x="609600" y="4629150"/>
+            <a:ext cx="323850" cy="323850"/>
+          </a:xfrm>
+          <a:prstGeom xmlns:a="http://schemas.openxmlformats.org/drawingml/2006/main" prst="rect">
+            <a:avLst/>
+          </a:prstGeom>
+          <a:noFill xmlns:a="http://schemas.openxmlformats.org/drawingml/2006/main"/>
+          <a:ln xmlns:a="http://schemas.openxmlformats.org/drawingml/2006/main" w="0">
+            <a:noFill/>
+          </a:ln>
+        </p:spPr>
+        <p:txBody>
+          <a:bodyPr xmlns:a="http://schemas.openxmlformats.org/drawingml/2006/main" lIns="0" tIns="0" rIns="0" bIns="0" anchor="ctr">
+            <a:noAutofit/>
+          </a:bodyPr>
+          <a:lstStyle xmlns:a="http://schemas.openxmlformats.org/drawingml/2006/main"/>
+          <a:p xmlns:a="http://schemas.openxmlformats.org/drawingml/2006/main">
+            <a:pPr algn="l">
+              <a:defRPr sz="1350" b="1">
+                <a:solidFill>
+                  <a:srgbClr val="28685E"/>
+                </a:solidFill>
+                <a:latin typeface="Calibri"/>
+                <a:ea typeface="Calibri"/>
+                <a:cs typeface="Calibri"/>
+              </a:defRPr>
+            </a:pPr>
+            <a:r>
+              <a:rPr sz="1350" b="1">
+                <a:solidFill>
+                  <a:srgbClr val="28685E"/>
+                </a:solidFill>
+                <a:latin typeface="Calibri"/>
+                <a:ea typeface="Calibri"/>
+                <a:cs typeface="Calibri"/>
+              </a:rPr>
+              <a:t>03</a:t>
             </a:r>
           </a:p>
         </p:txBody>
@@ -4656,7 +5677,7 @@
     <p:bg>
       <p:bgPr>
         <a:solidFill xmlns:a="http://schemas.openxmlformats.org/drawingml/2006/main">
-          <a:srgbClr val="F5F1E8"/>
+          <a:srgbClr val="FAF9F5"/>
         </a:solidFill>
       </p:bgPr>
     </p:bg>
@@ -4685,8 +5706,8 @@
         </p:nvSpPr>
         <p:spPr>
           <a:xfrm xmlns:a="http://schemas.openxmlformats.org/drawingml/2006/main">
-            <a:off x="609600" y="552450"/>
-            <a:ext cx="781050" cy="57150"/>
+            <a:off x="609600" y="733425"/>
+            <a:ext cx="781050" cy="38100"/>
           </a:xfrm>
           <a:prstGeom xmlns:a="http://schemas.openxmlformats.org/drawingml/2006/main" prst="rect">
             <a:avLst/>
@@ -4716,34 +5737,43 @@
         </p:nvSpPr>
         <p:spPr>
           <a:xfrm xmlns:a="http://schemas.openxmlformats.org/drawingml/2006/main">
-            <a:off x="609600" y="762000"/>
-            <a:ext cx="8572500" cy="285750"/>
-          </a:xfrm>
-          <a:prstGeom xmlns:a="http://schemas.openxmlformats.org/drawingml/2006/main" prst="rect">
-            <a:avLst/>
-          </a:prstGeom>
-          <a:noFill xmlns:a="http://schemas.openxmlformats.org/drawingml/2006/main"/>
-          <a:ln xmlns:a="http://schemas.openxmlformats.org/drawingml/2006/main" w="0">
-            <a:noFill/>
-            <a:prstDash val="solid"/>
-          </a:ln>
-        </p:spPr>
-        <p:txBody>
-          <a:bodyPr xmlns:a="http://schemas.openxmlformats.org/drawingml/2006/main" lIns="0" tIns="0" rIns="0" bIns="0" anchor="ctr"/>
-          <a:lstStyle xmlns:a="http://schemas.openxmlformats.org/drawingml/2006/main"/>
-          <a:p xmlns:a="http://schemas.openxmlformats.org/drawingml/2006/main">
-            <a:pPr>
-              <a:defRPr sz="1500" b="1">
+            <a:off x="609600" y="342900"/>
+            <a:ext cx="9334500" cy="304800"/>
+          </a:xfrm>
+          <a:prstGeom xmlns:a="http://schemas.openxmlformats.org/drawingml/2006/main" prst="rect">
+            <a:avLst/>
+          </a:prstGeom>
+          <a:noFill xmlns:a="http://schemas.openxmlformats.org/drawingml/2006/main"/>
+          <a:ln xmlns:a="http://schemas.openxmlformats.org/drawingml/2006/main" w="0">
+            <a:noFill/>
+            <a:prstDash val="solid"/>
+          </a:ln>
+        </p:spPr>
+        <p:txBody>
+          <a:bodyPr xmlns:a="http://schemas.openxmlformats.org/drawingml/2006/main" lIns="0" tIns="0" rIns="0" bIns="0" anchor="ctr">
+            <a:noAutofit/>
+          </a:bodyPr>
+          <a:lstStyle xmlns:a="http://schemas.openxmlformats.org/drawingml/2006/main"/>
+          <a:p xmlns:a="http://schemas.openxmlformats.org/drawingml/2006/main">
+            <a:pPr algn="l">
+              <a:buNone/>
+              <a:defRPr sz="1350" b="1">
                 <a:solidFill>
                   <a:srgbClr val="28685E"/>
                 </a:solidFill>
-              </a:defRPr>
-            </a:pPr>
-            <a:r>
-              <a:rPr sz="1500" b="1">
+                <a:latin typeface="Calibri"/>
+                <a:ea typeface="Calibri"/>
+                <a:cs typeface="Calibri"/>
+              </a:defRPr>
+            </a:pPr>
+            <a:r>
+              <a:rPr sz="1350" b="1">
                 <a:solidFill>
                   <a:srgbClr val="28685E"/>
                 </a:solidFill>
+                <a:latin typeface="Calibri"/>
+                <a:ea typeface="Calibri"/>
+                <a:cs typeface="Calibri"/>
               </a:rPr>
               <a:t>MADE BY MATT  /  GROW SCIENCE</a:t>
             </a:r>
@@ -4766,34 +5796,43 @@
         </p:nvSpPr>
         <p:spPr>
           <a:xfrm xmlns:a="http://schemas.openxmlformats.org/drawingml/2006/main">
-            <a:off x="609600" y="1352550"/>
-            <a:ext cx="10972800" cy="952500"/>
-          </a:xfrm>
-          <a:prstGeom xmlns:a="http://schemas.openxmlformats.org/drawingml/2006/main" prst="rect">
-            <a:avLst/>
-          </a:prstGeom>
-          <a:noFill xmlns:a="http://schemas.openxmlformats.org/drawingml/2006/main"/>
-          <a:ln xmlns:a="http://schemas.openxmlformats.org/drawingml/2006/main" w="0">
-            <a:noFill/>
-            <a:prstDash val="solid"/>
-          </a:ln>
-        </p:spPr>
-        <p:txBody>
-          <a:bodyPr xmlns:a="http://schemas.openxmlformats.org/drawingml/2006/main" lIns="0" tIns="0" rIns="0" bIns="0" anchor="ctr"/>
-          <a:lstStyle xmlns:a="http://schemas.openxmlformats.org/drawingml/2006/main"/>
-          <a:p xmlns:a="http://schemas.openxmlformats.org/drawingml/2006/main">
-            <a:pPr>
-              <a:defRPr sz="3750" b="1">
-                <a:solidFill>
-                  <a:srgbClr val="152B3A"/>
-                </a:solidFill>
-              </a:defRPr>
-            </a:pPr>
-            <a:r>
-              <a:rPr sz="3750" b="1">
-                <a:solidFill>
-                  <a:srgbClr val="152B3A"/>
-                </a:solidFill>
+            <a:off x="609600" y="990600"/>
+            <a:ext cx="10972800" cy="1000125"/>
+          </a:xfrm>
+          <a:prstGeom xmlns:a="http://schemas.openxmlformats.org/drawingml/2006/main" prst="rect">
+            <a:avLst/>
+          </a:prstGeom>
+          <a:noFill xmlns:a="http://schemas.openxmlformats.org/drawingml/2006/main"/>
+          <a:ln xmlns:a="http://schemas.openxmlformats.org/drawingml/2006/main" w="0">
+            <a:noFill/>
+            <a:prstDash val="solid"/>
+          </a:ln>
+        </p:spPr>
+        <p:txBody>
+          <a:bodyPr xmlns:a="http://schemas.openxmlformats.org/drawingml/2006/main" lIns="0" tIns="0" rIns="0" bIns="0" anchor="ctr">
+            <a:noAutofit/>
+          </a:bodyPr>
+          <a:lstStyle xmlns:a="http://schemas.openxmlformats.org/drawingml/2006/main"/>
+          <a:p xmlns:a="http://schemas.openxmlformats.org/drawingml/2006/main">
+            <a:pPr algn="l">
+              <a:buNone/>
+              <a:defRPr sz="3675" b="1">
+                <a:solidFill>
+                  <a:srgbClr val="152B3A"/>
+                </a:solidFill>
+                <a:latin typeface="Calibri"/>
+                <a:ea typeface="Calibri"/>
+                <a:cs typeface="Calibri"/>
+              </a:defRPr>
+            </a:pPr>
+            <a:r>
+              <a:rPr sz="3675" b="1">
+                <a:solidFill>
+                  <a:srgbClr val="152B3A"/>
+                </a:solidFill>
+                <a:latin typeface="Calibri"/>
+                <a:ea typeface="Calibri"/>
+                <a:cs typeface="Calibri"/>
               </a:rPr>
               <a:t>Start with the planets you know</a:t>
             </a:r>
@@ -4816,14 +5855,14 @@
         </p:nvSpPr>
         <p:spPr>
           <a:xfrm xmlns:a="http://schemas.openxmlformats.org/drawingml/2006/main">
-            <a:off x="609600" y="6219825"/>
+            <a:off x="609600" y="6191250"/>
             <a:ext cx="10972800" cy="9525"/>
           </a:xfrm>
           <a:prstGeom xmlns:a="http://schemas.openxmlformats.org/drawingml/2006/main" prst="rect">
             <a:avLst/>
           </a:prstGeom>
           <a:solidFill xmlns:a="http://schemas.openxmlformats.org/drawingml/2006/main">
-            <a:srgbClr val="DCE7DD"/>
+            <a:srgbClr val="CEDBD3"/>
           </a:solidFill>
           <a:ln xmlns:a="http://schemas.openxmlformats.org/drawingml/2006/main" w="0">
             <a:noFill/>
@@ -4847,34 +5886,43 @@
         </p:nvSpPr>
         <p:spPr>
           <a:xfrm xmlns:a="http://schemas.openxmlformats.org/drawingml/2006/main">
-            <a:off x="609600" y="6381750"/>
-            <a:ext cx="9906000" cy="228600"/>
-          </a:xfrm>
-          <a:prstGeom xmlns:a="http://schemas.openxmlformats.org/drawingml/2006/main" prst="rect">
-            <a:avLst/>
-          </a:prstGeom>
-          <a:noFill xmlns:a="http://schemas.openxmlformats.org/drawingml/2006/main"/>
-          <a:ln xmlns:a="http://schemas.openxmlformats.org/drawingml/2006/main" w="0">
-            <a:noFill/>
-            <a:prstDash val="solid"/>
-          </a:ln>
-        </p:spPr>
-        <p:txBody>
-          <a:bodyPr xmlns:a="http://schemas.openxmlformats.org/drawingml/2006/main" lIns="0" tIns="0" rIns="0" bIns="0" anchor="ctr"/>
-          <a:lstStyle xmlns:a="http://schemas.openxmlformats.org/drawingml/2006/main"/>
-          <a:p xmlns:a="http://schemas.openxmlformats.org/drawingml/2006/main">
-            <a:pPr>
-              <a:defRPr sz="1275" b="0">
+            <a:off x="609600" y="6419850"/>
+            <a:ext cx="9525000" cy="219075"/>
+          </a:xfrm>
+          <a:prstGeom xmlns:a="http://schemas.openxmlformats.org/drawingml/2006/main" prst="rect">
+            <a:avLst/>
+          </a:prstGeom>
+          <a:noFill xmlns:a="http://schemas.openxmlformats.org/drawingml/2006/main"/>
+          <a:ln xmlns:a="http://schemas.openxmlformats.org/drawingml/2006/main" w="0">
+            <a:noFill/>
+            <a:prstDash val="solid"/>
+          </a:ln>
+        </p:spPr>
+        <p:txBody>
+          <a:bodyPr xmlns:a="http://schemas.openxmlformats.org/drawingml/2006/main" lIns="0" tIns="0" rIns="0" bIns="0" anchor="ctr">
+            <a:noAutofit/>
+          </a:bodyPr>
+          <a:lstStyle xmlns:a="http://schemas.openxmlformats.org/drawingml/2006/main"/>
+          <a:p xmlns:a="http://schemas.openxmlformats.org/drawingml/2006/main">
+            <a:pPr algn="l">
+              <a:buNone/>
+              <a:defRPr sz="1200" b="0">
                 <a:solidFill>
                   <a:srgbClr val="50616B"/>
                 </a:solidFill>
-              </a:defRPr>
-            </a:pPr>
-            <a:r>
-              <a:rPr sz="1275" b="0">
+                <a:latin typeface="Calibri"/>
+                <a:ea typeface="Calibri"/>
+                <a:cs typeface="Calibri"/>
+              </a:defRPr>
+            </a:pPr>
+            <a:r>
+              <a:rPr sz="1200" b="0">
                 <a:solidFill>
                   <a:srgbClr val="50616B"/>
                 </a:solidFill>
+                <a:latin typeface="Calibri"/>
+                <a:ea typeface="Calibri"/>
+                <a:cs typeface="Calibri"/>
               </a:rPr>
               <a:t>AUTUMN 1  ·  WEEK 6  ·  LESSON A</a:t>
             </a:r>
@@ -4897,27 +5945,33 @@
         </p:nvSpPr>
         <p:spPr>
           <a:xfrm xmlns:a="http://schemas.openxmlformats.org/drawingml/2006/main">
-            <a:off x="11106150" y="6362700"/>
-            <a:ext cx="476250" cy="238125"/>
-          </a:xfrm>
-          <a:prstGeom xmlns:a="http://schemas.openxmlformats.org/drawingml/2006/main" prst="rect">
-            <a:avLst/>
-          </a:prstGeom>
-          <a:noFill xmlns:a="http://schemas.openxmlformats.org/drawingml/2006/main"/>
-          <a:ln xmlns:a="http://schemas.openxmlformats.org/drawingml/2006/main" w="0">
-            <a:noFill/>
-            <a:prstDash val="solid"/>
-          </a:ln>
-        </p:spPr>
-        <p:txBody>
-          <a:bodyPr xmlns:a="http://schemas.openxmlformats.org/drawingml/2006/main" lIns="0" tIns="0" rIns="0" bIns="0" anchor="ctr"/>
-          <a:lstStyle xmlns:a="http://schemas.openxmlformats.org/drawingml/2006/main"/>
-          <a:p xmlns:a="http://schemas.openxmlformats.org/drawingml/2006/main">
-            <a:pPr>
+            <a:off x="11106150" y="6400800"/>
+            <a:ext cx="476250" cy="247650"/>
+          </a:xfrm>
+          <a:prstGeom xmlns:a="http://schemas.openxmlformats.org/drawingml/2006/main" prst="rect">
+            <a:avLst/>
+          </a:prstGeom>
+          <a:noFill xmlns:a="http://schemas.openxmlformats.org/drawingml/2006/main"/>
+          <a:ln xmlns:a="http://schemas.openxmlformats.org/drawingml/2006/main" w="0">
+            <a:noFill/>
+            <a:prstDash val="solid"/>
+          </a:ln>
+        </p:spPr>
+        <p:txBody>
+          <a:bodyPr xmlns:a="http://schemas.openxmlformats.org/drawingml/2006/main" lIns="0" tIns="0" rIns="0" bIns="0" anchor="ctr">
+            <a:noAutofit/>
+          </a:bodyPr>
+          <a:lstStyle xmlns:a="http://schemas.openxmlformats.org/drawingml/2006/main"/>
+          <a:p xmlns:a="http://schemas.openxmlformats.org/drawingml/2006/main">
+            <a:pPr algn="l">
+              <a:buNone/>
               <a:defRPr sz="1350" b="1">
                 <a:solidFill>
                   <a:srgbClr val="28685E"/>
                 </a:solidFill>
+                <a:latin typeface="Calibri"/>
+                <a:ea typeface="Calibri"/>
+                <a:cs typeface="Calibri"/>
               </a:defRPr>
             </a:pPr>
             <a:r>
@@ -4925,6 +5979,9 @@
                 <a:solidFill>
                   <a:srgbClr val="28685E"/>
                 </a:solidFill>
+                <a:latin typeface="Calibri"/>
+                <a:ea typeface="Calibri"/>
+                <a:cs typeface="Calibri"/>
               </a:rPr>
               <a:t>02</a:t>
             </a:r>
@@ -4947,34 +6004,43 @@
         </p:nvSpPr>
         <p:spPr>
           <a:xfrm xmlns:a="http://schemas.openxmlformats.org/drawingml/2006/main">
-            <a:off x="609600" y="2619375"/>
-            <a:ext cx="10972800" cy="781050"/>
-          </a:xfrm>
-          <a:prstGeom xmlns:a="http://schemas.openxmlformats.org/drawingml/2006/main" prst="rect">
-            <a:avLst/>
-          </a:prstGeom>
-          <a:noFill xmlns:a="http://schemas.openxmlformats.org/drawingml/2006/main"/>
-          <a:ln xmlns:a="http://schemas.openxmlformats.org/drawingml/2006/main" w="0">
-            <a:noFill/>
-            <a:prstDash val="solid"/>
-          </a:ln>
-        </p:spPr>
-        <p:txBody>
-          <a:bodyPr xmlns:a="http://schemas.openxmlformats.org/drawingml/2006/main" lIns="0" tIns="0" rIns="0" bIns="0" anchor="ctr"/>
-          <a:lstStyle xmlns:a="http://schemas.openxmlformats.org/drawingml/2006/main"/>
-          <a:p xmlns:a="http://schemas.openxmlformats.org/drawingml/2006/main">
-            <a:pPr>
-              <a:defRPr sz="2550" b="0">
-                <a:solidFill>
-                  <a:srgbClr val="152B3A"/>
-                </a:solidFill>
-              </a:defRPr>
-            </a:pPr>
-            <a:r>
-              <a:rPr sz="2550" b="0">
-                <a:solidFill>
-                  <a:srgbClr val="152B3A"/>
-                </a:solidFill>
+            <a:off x="1000125" y="2333625"/>
+            <a:ext cx="10382250" cy="1076325"/>
+          </a:xfrm>
+          <a:prstGeom xmlns:a="http://schemas.openxmlformats.org/drawingml/2006/main" prst="rect">
+            <a:avLst/>
+          </a:prstGeom>
+          <a:noFill xmlns:a="http://schemas.openxmlformats.org/drawingml/2006/main"/>
+          <a:ln xmlns:a="http://schemas.openxmlformats.org/drawingml/2006/main" w="0">
+            <a:noFill/>
+            <a:prstDash val="solid"/>
+          </a:ln>
+        </p:spPr>
+        <p:txBody>
+          <a:bodyPr xmlns:a="http://schemas.openxmlformats.org/drawingml/2006/main" lIns="0" tIns="0" rIns="0" bIns="0" anchor="ctr">
+            <a:noAutofit/>
+          </a:bodyPr>
+          <a:lstStyle xmlns:a="http://schemas.openxmlformats.org/drawingml/2006/main"/>
+          <a:p xmlns:a="http://schemas.openxmlformats.org/drawingml/2006/main">
+            <a:pPr algn="l">
+              <a:buNone/>
+              <a:defRPr sz="2625" b="0">
+                <a:solidFill>
+                  <a:srgbClr val="152B3A"/>
+                </a:solidFill>
+                <a:latin typeface="Calibri"/>
+                <a:ea typeface="Calibri"/>
+                <a:cs typeface="Calibri"/>
+              </a:defRPr>
+            </a:pPr>
+            <a:r>
+              <a:rPr sz="2625" b="0">
+                <a:solidFill>
+                  <a:srgbClr val="152B3A"/>
+                </a:solidFill>
+                <a:latin typeface="Calibri"/>
+                <a:ea typeface="Calibri"/>
+                <a:cs typeface="Calibri"/>
               </a:rPr>
               <a:t>Supported: order Mercury, Venus, Earth and Mars.</a:t>
             </a:r>
@@ -4997,34 +6063,43 @@
         </p:nvSpPr>
         <p:spPr>
           <a:xfrm xmlns:a="http://schemas.openxmlformats.org/drawingml/2006/main">
-            <a:off x="609600" y="3476625"/>
-            <a:ext cx="10972800" cy="781050"/>
-          </a:xfrm>
-          <a:prstGeom xmlns:a="http://schemas.openxmlformats.org/drawingml/2006/main" prst="rect">
-            <a:avLst/>
-          </a:prstGeom>
-          <a:noFill xmlns:a="http://schemas.openxmlformats.org/drawingml/2006/main"/>
-          <a:ln xmlns:a="http://schemas.openxmlformats.org/drawingml/2006/main" w="0">
-            <a:noFill/>
-            <a:prstDash val="solid"/>
-          </a:ln>
-        </p:spPr>
-        <p:txBody>
-          <a:bodyPr xmlns:a="http://schemas.openxmlformats.org/drawingml/2006/main" lIns="0" tIns="0" rIns="0" bIns="0" anchor="ctr"/>
-          <a:lstStyle xmlns:a="http://schemas.openxmlformats.org/drawingml/2006/main"/>
-          <a:p xmlns:a="http://schemas.openxmlformats.org/drawingml/2006/main">
-            <a:pPr>
-              <a:defRPr sz="2550" b="0">
-                <a:solidFill>
-                  <a:srgbClr val="152B3A"/>
-                </a:solidFill>
-              </a:defRPr>
-            </a:pPr>
-            <a:r>
-              <a:rPr sz="2550" b="0">
-                <a:solidFill>
-                  <a:srgbClr val="152B3A"/>
-                </a:solidFill>
+            <a:off x="1000125" y="3467100"/>
+            <a:ext cx="10382250" cy="1076325"/>
+          </a:xfrm>
+          <a:prstGeom xmlns:a="http://schemas.openxmlformats.org/drawingml/2006/main" prst="rect">
+            <a:avLst/>
+          </a:prstGeom>
+          <a:noFill xmlns:a="http://schemas.openxmlformats.org/drawingml/2006/main"/>
+          <a:ln xmlns:a="http://schemas.openxmlformats.org/drawingml/2006/main" w="0">
+            <a:noFill/>
+            <a:prstDash val="solid"/>
+          </a:ln>
+        </p:spPr>
+        <p:txBody>
+          <a:bodyPr xmlns:a="http://schemas.openxmlformats.org/drawingml/2006/main" lIns="0" tIns="0" rIns="0" bIns="0" anchor="ctr">
+            <a:noAutofit/>
+          </a:bodyPr>
+          <a:lstStyle xmlns:a="http://schemas.openxmlformats.org/drawingml/2006/main"/>
+          <a:p xmlns:a="http://schemas.openxmlformats.org/drawingml/2006/main">
+            <a:pPr algn="l">
+              <a:buNone/>
+              <a:defRPr sz="2625" b="0">
+                <a:solidFill>
+                  <a:srgbClr val="152B3A"/>
+                </a:solidFill>
+                <a:latin typeface="Calibri"/>
+                <a:ea typeface="Calibri"/>
+                <a:cs typeface="Calibri"/>
+              </a:defRPr>
+            </a:pPr>
+            <a:r>
+              <a:rPr sz="2625" b="0">
+                <a:solidFill>
+                  <a:srgbClr val="152B3A"/>
+                </a:solidFill>
+                <a:latin typeface="Calibri"/>
+                <a:ea typeface="Calibri"/>
+                <a:cs typeface="Calibri"/>
               </a:rPr>
               <a:t>Standard: write the first four planets from the Sun.</a:t>
             </a:r>
@@ -5047,36 +6122,276 @@
         </p:nvSpPr>
         <p:spPr>
           <a:xfrm xmlns:a="http://schemas.openxmlformats.org/drawingml/2006/main">
-            <a:off x="609600" y="4333875"/>
-            <a:ext cx="10972800" cy="781050"/>
-          </a:xfrm>
-          <a:prstGeom xmlns:a="http://schemas.openxmlformats.org/drawingml/2006/main" prst="rect">
-            <a:avLst/>
-          </a:prstGeom>
-          <a:noFill xmlns:a="http://schemas.openxmlformats.org/drawingml/2006/main"/>
-          <a:ln xmlns:a="http://schemas.openxmlformats.org/drawingml/2006/main" w="0">
-            <a:noFill/>
-            <a:prstDash val="solid"/>
-          </a:ln>
-        </p:spPr>
-        <p:txBody>
-          <a:bodyPr xmlns:a="http://schemas.openxmlformats.org/drawingml/2006/main" lIns="0" tIns="0" rIns="0" bIns="0" anchor="ctr"/>
-          <a:lstStyle xmlns:a="http://schemas.openxmlformats.org/drawingml/2006/main"/>
-          <a:p xmlns:a="http://schemas.openxmlformats.org/drawingml/2006/main">
-            <a:pPr>
-              <a:defRPr sz="2550" b="0">
-                <a:solidFill>
-                  <a:srgbClr val="152B3A"/>
-                </a:solidFill>
-              </a:defRPr>
-            </a:pPr>
-            <a:r>
-              <a:rPr sz="2550" b="0">
-                <a:solidFill>
-                  <a:srgbClr val="152B3A"/>
-                </a:solidFill>
+            <a:off x="1000125" y="4600575"/>
+            <a:ext cx="10382250" cy="1076325"/>
+          </a:xfrm>
+          <a:prstGeom xmlns:a="http://schemas.openxmlformats.org/drawingml/2006/main" prst="rect">
+            <a:avLst/>
+          </a:prstGeom>
+          <a:noFill xmlns:a="http://schemas.openxmlformats.org/drawingml/2006/main"/>
+          <a:ln xmlns:a="http://schemas.openxmlformats.org/drawingml/2006/main" w="0">
+            <a:noFill/>
+            <a:prstDash val="solid"/>
+          </a:ln>
+        </p:spPr>
+        <p:txBody>
+          <a:bodyPr xmlns:a="http://schemas.openxmlformats.org/drawingml/2006/main" lIns="0" tIns="0" rIns="0" bIns="0" anchor="ctr">
+            <a:noAutofit/>
+          </a:bodyPr>
+          <a:lstStyle xmlns:a="http://schemas.openxmlformats.org/drawingml/2006/main"/>
+          <a:p xmlns:a="http://schemas.openxmlformats.org/drawingml/2006/main">
+            <a:pPr algn="l">
+              <a:buNone/>
+              <a:defRPr sz="2625" b="0">
+                <a:solidFill>
+                  <a:srgbClr val="152B3A"/>
+                </a:solidFill>
+                <a:latin typeface="Calibri"/>
+                <a:ea typeface="Calibri"/>
+                <a:cs typeface="Calibri"/>
+              </a:defRPr>
+            </a:pPr>
+            <a:r>
+              <a:rPr sz="2625" b="0">
+                <a:solidFill>
+                  <a:srgbClr val="152B3A"/>
+                </a:solidFill>
+                <a:latin typeface="Calibri"/>
+                <a:ea typeface="Calibri"/>
+                <a:cs typeface="Calibri"/>
               </a:rPr>
               <a:t>Stretch: try all eight planets in order.</a:t>
+            </a:r>
+          </a:p>
+        </p:txBody>
+      </p:sp>
+      <p:sp>
+        <p:nvSpPr>
+          <p:cNvPr id="11" name="cue-0">
+            <a:extLst xmlns:a="http://schemas.openxmlformats.org/drawingml/2006/main">
+              <a:ext uri="{FF2B5EF4-FFF2-40B4-BE49-F238E27FC236}">
+                <a16:creationId xmlns:a16="http://schemas.microsoft.com/office/drawing/2014/main" id="{37C65946-1533-43A3-9BC4-DC2AF16304C7}"/>
+              </a:ext>
+            </a:extLst>
+          </p:cNvPr>
+          <p:cNvSpPr>
+            <a:spLocks xmlns:a="http://schemas.openxmlformats.org/drawingml/2006/main" noGrp="1"/>
+          </p:cNvSpPr>
+          <p:nvPr/>
+        </p:nvSpPr>
+        <p:spPr>
+          <a:xfrm xmlns:a="http://schemas.openxmlformats.org/drawingml/2006/main">
+            <a:off x="609600" y="2362200"/>
+            <a:ext cx="323850" cy="323850"/>
+          </a:xfrm>
+          <a:prstGeom xmlns:a="http://schemas.openxmlformats.org/drawingml/2006/main" prst="rect">
+            <a:avLst/>
+          </a:prstGeom>
+          <a:noFill xmlns:a="http://schemas.openxmlformats.org/drawingml/2006/main"/>
+          <a:ln xmlns:a="http://schemas.openxmlformats.org/drawingml/2006/main" w="0">
+            <a:noFill/>
+          </a:ln>
+        </p:spPr>
+        <p:txBody>
+          <a:bodyPr xmlns:a="http://schemas.openxmlformats.org/drawingml/2006/main" lIns="0" tIns="0" rIns="0" bIns="0" anchor="ctr">
+            <a:noAutofit/>
+          </a:bodyPr>
+          <a:lstStyle xmlns:a="http://schemas.openxmlformats.org/drawingml/2006/main"/>
+          <a:p xmlns:a="http://schemas.openxmlformats.org/drawingml/2006/main">
+            <a:pPr algn="l">
+              <a:defRPr sz="1350" b="1">
+                <a:solidFill>
+                  <a:srgbClr val="28685E"/>
+                </a:solidFill>
+                <a:latin typeface="Calibri"/>
+                <a:ea typeface="Calibri"/>
+                <a:cs typeface="Calibri"/>
+              </a:defRPr>
+            </a:pPr>
+            <a:r>
+              <a:rPr sz="1350" b="1">
+                <a:solidFill>
+                  <a:srgbClr val="28685E"/>
+                </a:solidFill>
+                <a:latin typeface="Calibri"/>
+                <a:ea typeface="Calibri"/>
+                <a:cs typeface="Calibri"/>
+              </a:rPr>
+              <a:t>01</a:t>
+            </a:r>
+          </a:p>
+        </p:txBody>
+      </p:sp>
+      <p:sp>
+        <p:nvSpPr>
+          <p:cNvPr id="12" name="row-rule-0">
+            <a:extLst xmlns:a="http://schemas.openxmlformats.org/drawingml/2006/main">
+              <a:ext uri="{FF2B5EF4-FFF2-40B4-BE49-F238E27FC236}">
+                <a16:creationId xmlns:a16="http://schemas.microsoft.com/office/drawing/2014/main" id="{5D46C18F-DEB3-49DA-AE64-746339DFEDF5}"/>
+              </a:ext>
+            </a:extLst>
+          </p:cNvPr>
+          <p:cNvSpPr>
+            <a:spLocks xmlns:a="http://schemas.openxmlformats.org/drawingml/2006/main" noGrp="1"/>
+          </p:cNvSpPr>
+          <p:nvPr/>
+        </p:nvSpPr>
+        <p:spPr>
+          <a:xfrm xmlns:a="http://schemas.openxmlformats.org/drawingml/2006/main">
+            <a:off x="1000125" y="3419475"/>
+            <a:ext cx="10334625" cy="0"/>
+          </a:xfrm>
+          <a:prstGeom xmlns:a="http://schemas.openxmlformats.org/drawingml/2006/main" prst="line">
+            <a:avLst/>
+          </a:prstGeom>
+          <a:noFill xmlns:a="http://schemas.openxmlformats.org/drawingml/2006/main"/>
+          <a:ln xmlns:a="http://schemas.openxmlformats.org/drawingml/2006/main" w="9525">
+            <a:solidFill>
+              <a:srgbClr val="CEDBD3"/>
+            </a:solidFill>
+          </a:ln>
+        </p:spPr>
+      </p:sp>
+      <p:sp>
+        <p:nvSpPr>
+          <p:cNvPr id="13" name="cue-1">
+            <a:extLst xmlns:a="http://schemas.openxmlformats.org/drawingml/2006/main">
+              <a:ext uri="{FF2B5EF4-FFF2-40B4-BE49-F238E27FC236}">
+                <a16:creationId xmlns:a16="http://schemas.microsoft.com/office/drawing/2014/main" id="{46393463-E33E-42D7-97BB-253005E8B12D}"/>
+              </a:ext>
+            </a:extLst>
+          </p:cNvPr>
+          <p:cNvSpPr>
+            <a:spLocks xmlns:a="http://schemas.openxmlformats.org/drawingml/2006/main" noGrp="1"/>
+          </p:cNvSpPr>
+          <p:nvPr/>
+        </p:nvSpPr>
+        <p:spPr>
+          <a:xfrm xmlns:a="http://schemas.openxmlformats.org/drawingml/2006/main">
+            <a:off x="609600" y="3495675"/>
+            <a:ext cx="323850" cy="323850"/>
+          </a:xfrm>
+          <a:prstGeom xmlns:a="http://schemas.openxmlformats.org/drawingml/2006/main" prst="rect">
+            <a:avLst/>
+          </a:prstGeom>
+          <a:noFill xmlns:a="http://schemas.openxmlformats.org/drawingml/2006/main"/>
+          <a:ln xmlns:a="http://schemas.openxmlformats.org/drawingml/2006/main" w="0">
+            <a:noFill/>
+          </a:ln>
+        </p:spPr>
+        <p:txBody>
+          <a:bodyPr xmlns:a="http://schemas.openxmlformats.org/drawingml/2006/main" lIns="0" tIns="0" rIns="0" bIns="0" anchor="ctr">
+            <a:noAutofit/>
+          </a:bodyPr>
+          <a:lstStyle xmlns:a="http://schemas.openxmlformats.org/drawingml/2006/main"/>
+          <a:p xmlns:a="http://schemas.openxmlformats.org/drawingml/2006/main">
+            <a:pPr algn="l">
+              <a:defRPr sz="1350" b="1">
+                <a:solidFill>
+                  <a:srgbClr val="28685E"/>
+                </a:solidFill>
+                <a:latin typeface="Calibri"/>
+                <a:ea typeface="Calibri"/>
+                <a:cs typeface="Calibri"/>
+              </a:defRPr>
+            </a:pPr>
+            <a:r>
+              <a:rPr sz="1350" b="1">
+                <a:solidFill>
+                  <a:srgbClr val="28685E"/>
+                </a:solidFill>
+                <a:latin typeface="Calibri"/>
+                <a:ea typeface="Calibri"/>
+                <a:cs typeface="Calibri"/>
+              </a:rPr>
+              <a:t>02</a:t>
+            </a:r>
+          </a:p>
+        </p:txBody>
+      </p:sp>
+      <p:sp>
+        <p:nvSpPr>
+          <p:cNvPr id="14" name="row-rule-1">
+            <a:extLst xmlns:a="http://schemas.openxmlformats.org/drawingml/2006/main">
+              <a:ext uri="{FF2B5EF4-FFF2-40B4-BE49-F238E27FC236}">
+                <a16:creationId xmlns:a16="http://schemas.microsoft.com/office/drawing/2014/main" id="{9B2E1C28-590B-42DD-82AD-3BE822F112BC}"/>
+              </a:ext>
+            </a:extLst>
+          </p:cNvPr>
+          <p:cNvSpPr>
+            <a:spLocks xmlns:a="http://schemas.openxmlformats.org/drawingml/2006/main" noGrp="1"/>
+          </p:cNvSpPr>
+          <p:nvPr/>
+        </p:nvSpPr>
+        <p:spPr>
+          <a:xfrm xmlns:a="http://schemas.openxmlformats.org/drawingml/2006/main">
+            <a:off x="1000125" y="4552950"/>
+            <a:ext cx="10334625" cy="0"/>
+          </a:xfrm>
+          <a:prstGeom xmlns:a="http://schemas.openxmlformats.org/drawingml/2006/main" prst="line">
+            <a:avLst/>
+          </a:prstGeom>
+          <a:noFill xmlns:a="http://schemas.openxmlformats.org/drawingml/2006/main"/>
+          <a:ln xmlns:a="http://schemas.openxmlformats.org/drawingml/2006/main" w="9525">
+            <a:solidFill>
+              <a:srgbClr val="CEDBD3"/>
+            </a:solidFill>
+          </a:ln>
+        </p:spPr>
+      </p:sp>
+      <p:sp>
+        <p:nvSpPr>
+          <p:cNvPr id="15" name="cue-2">
+            <a:extLst xmlns:a="http://schemas.openxmlformats.org/drawingml/2006/main">
+              <a:ext uri="{FF2B5EF4-FFF2-40B4-BE49-F238E27FC236}">
+                <a16:creationId xmlns:a16="http://schemas.microsoft.com/office/drawing/2014/main" id="{02B42398-A8C7-4258-AA95-154059ECDE2A}"/>
+              </a:ext>
+            </a:extLst>
+          </p:cNvPr>
+          <p:cNvSpPr>
+            <a:spLocks xmlns:a="http://schemas.openxmlformats.org/drawingml/2006/main" noGrp="1"/>
+          </p:cNvSpPr>
+          <p:nvPr/>
+        </p:nvSpPr>
+        <p:spPr>
+          <a:xfrm xmlns:a="http://schemas.openxmlformats.org/drawingml/2006/main">
+            <a:off x="609600" y="4629150"/>
+            <a:ext cx="323850" cy="323850"/>
+          </a:xfrm>
+          <a:prstGeom xmlns:a="http://schemas.openxmlformats.org/drawingml/2006/main" prst="rect">
+            <a:avLst/>
+          </a:prstGeom>
+          <a:noFill xmlns:a="http://schemas.openxmlformats.org/drawingml/2006/main"/>
+          <a:ln xmlns:a="http://schemas.openxmlformats.org/drawingml/2006/main" w="0">
+            <a:noFill/>
+          </a:ln>
+        </p:spPr>
+        <p:txBody>
+          <a:bodyPr xmlns:a="http://schemas.openxmlformats.org/drawingml/2006/main" lIns="0" tIns="0" rIns="0" bIns="0" anchor="ctr">
+            <a:noAutofit/>
+          </a:bodyPr>
+          <a:lstStyle xmlns:a="http://schemas.openxmlformats.org/drawingml/2006/main"/>
+          <a:p xmlns:a="http://schemas.openxmlformats.org/drawingml/2006/main">
+            <a:pPr algn="l">
+              <a:defRPr sz="1350" b="1">
+                <a:solidFill>
+                  <a:srgbClr val="28685E"/>
+                </a:solidFill>
+                <a:latin typeface="Calibri"/>
+                <a:ea typeface="Calibri"/>
+                <a:cs typeface="Calibri"/>
+              </a:defRPr>
+            </a:pPr>
+            <a:r>
+              <a:rPr sz="1350" b="1">
+                <a:solidFill>
+                  <a:srgbClr val="28685E"/>
+                </a:solidFill>
+                <a:latin typeface="Calibri"/>
+                <a:ea typeface="Calibri"/>
+                <a:cs typeface="Calibri"/>
+              </a:rPr>
+              <a:t>03</a:t>
             </a:r>
           </a:p>
         </p:txBody>
@@ -5097,7 +6412,7 @@
     <p:bg>
       <p:bgPr>
         <a:solidFill xmlns:a="http://schemas.openxmlformats.org/drawingml/2006/main">
-          <a:srgbClr val="F5F1E8"/>
+          <a:srgbClr val="FAF9F5"/>
         </a:solidFill>
       </p:bgPr>
     </p:bg>
@@ -5126,8 +6441,8 @@
         </p:nvSpPr>
         <p:spPr>
           <a:xfrm xmlns:a="http://schemas.openxmlformats.org/drawingml/2006/main">
-            <a:off x="609600" y="552450"/>
-            <a:ext cx="781050" cy="57150"/>
+            <a:off x="609600" y="733425"/>
+            <a:ext cx="781050" cy="38100"/>
           </a:xfrm>
           <a:prstGeom xmlns:a="http://schemas.openxmlformats.org/drawingml/2006/main" prst="rect">
             <a:avLst/>
@@ -5157,34 +6472,43 @@
         </p:nvSpPr>
         <p:spPr>
           <a:xfrm xmlns:a="http://schemas.openxmlformats.org/drawingml/2006/main">
-            <a:off x="609600" y="762000"/>
-            <a:ext cx="8572500" cy="285750"/>
-          </a:xfrm>
-          <a:prstGeom xmlns:a="http://schemas.openxmlformats.org/drawingml/2006/main" prst="rect">
-            <a:avLst/>
-          </a:prstGeom>
-          <a:noFill xmlns:a="http://schemas.openxmlformats.org/drawingml/2006/main"/>
-          <a:ln xmlns:a="http://schemas.openxmlformats.org/drawingml/2006/main" w="0">
-            <a:noFill/>
-            <a:prstDash val="solid"/>
-          </a:ln>
-        </p:spPr>
-        <p:txBody>
-          <a:bodyPr xmlns:a="http://schemas.openxmlformats.org/drawingml/2006/main" lIns="0" tIns="0" rIns="0" bIns="0" anchor="ctr"/>
-          <a:lstStyle xmlns:a="http://schemas.openxmlformats.org/drawingml/2006/main"/>
-          <a:p xmlns:a="http://schemas.openxmlformats.org/drawingml/2006/main">
-            <a:pPr>
-              <a:defRPr sz="1500" b="1">
+            <a:off x="609600" y="342900"/>
+            <a:ext cx="9334500" cy="304800"/>
+          </a:xfrm>
+          <a:prstGeom xmlns:a="http://schemas.openxmlformats.org/drawingml/2006/main" prst="rect">
+            <a:avLst/>
+          </a:prstGeom>
+          <a:noFill xmlns:a="http://schemas.openxmlformats.org/drawingml/2006/main"/>
+          <a:ln xmlns:a="http://schemas.openxmlformats.org/drawingml/2006/main" w="0">
+            <a:noFill/>
+            <a:prstDash val="solid"/>
+          </a:ln>
+        </p:spPr>
+        <p:txBody>
+          <a:bodyPr xmlns:a="http://schemas.openxmlformats.org/drawingml/2006/main" lIns="0" tIns="0" rIns="0" bIns="0" anchor="ctr">
+            <a:noAutofit/>
+          </a:bodyPr>
+          <a:lstStyle xmlns:a="http://schemas.openxmlformats.org/drawingml/2006/main"/>
+          <a:p xmlns:a="http://schemas.openxmlformats.org/drawingml/2006/main">
+            <a:pPr algn="l">
+              <a:buNone/>
+              <a:defRPr sz="1350" b="1">
                 <a:solidFill>
                   <a:srgbClr val="28685E"/>
                 </a:solidFill>
-              </a:defRPr>
-            </a:pPr>
-            <a:r>
-              <a:rPr sz="1500" b="1">
+                <a:latin typeface="Calibri"/>
+                <a:ea typeface="Calibri"/>
+                <a:cs typeface="Calibri"/>
+              </a:defRPr>
+            </a:pPr>
+            <a:r>
+              <a:rPr sz="1350" b="1">
                 <a:solidFill>
                   <a:srgbClr val="28685E"/>
                 </a:solidFill>
+                <a:latin typeface="Calibri"/>
+                <a:ea typeface="Calibri"/>
+                <a:cs typeface="Calibri"/>
               </a:rPr>
               <a:t>MADE BY MATT  /  GROW SCIENCE</a:t>
             </a:r>
@@ -5207,34 +6531,43 @@
         </p:nvSpPr>
         <p:spPr>
           <a:xfrm xmlns:a="http://schemas.openxmlformats.org/drawingml/2006/main">
-            <a:off x="609600" y="1352550"/>
-            <a:ext cx="10972800" cy="952500"/>
-          </a:xfrm>
-          <a:prstGeom xmlns:a="http://schemas.openxmlformats.org/drawingml/2006/main" prst="rect">
-            <a:avLst/>
-          </a:prstGeom>
-          <a:noFill xmlns:a="http://schemas.openxmlformats.org/drawingml/2006/main"/>
-          <a:ln xmlns:a="http://schemas.openxmlformats.org/drawingml/2006/main" w="0">
-            <a:noFill/>
-            <a:prstDash val="solid"/>
-          </a:ln>
-        </p:spPr>
-        <p:txBody>
-          <a:bodyPr xmlns:a="http://schemas.openxmlformats.org/drawingml/2006/main" lIns="0" tIns="0" rIns="0" bIns="0" anchor="ctr"/>
-          <a:lstStyle xmlns:a="http://schemas.openxmlformats.org/drawingml/2006/main"/>
-          <a:p xmlns:a="http://schemas.openxmlformats.org/drawingml/2006/main">
-            <a:pPr>
-              <a:defRPr sz="3750" b="1">
-                <a:solidFill>
-                  <a:srgbClr val="152B3A"/>
-                </a:solidFill>
-              </a:defRPr>
-            </a:pPr>
-            <a:r>
-              <a:rPr sz="3750" b="1">
-                <a:solidFill>
-                  <a:srgbClr val="152B3A"/>
-                </a:solidFill>
+            <a:off x="609600" y="990600"/>
+            <a:ext cx="10972800" cy="1000125"/>
+          </a:xfrm>
+          <a:prstGeom xmlns:a="http://schemas.openxmlformats.org/drawingml/2006/main" prst="rect">
+            <a:avLst/>
+          </a:prstGeom>
+          <a:noFill xmlns:a="http://schemas.openxmlformats.org/drawingml/2006/main"/>
+          <a:ln xmlns:a="http://schemas.openxmlformats.org/drawingml/2006/main" w="0">
+            <a:noFill/>
+            <a:prstDash val="solid"/>
+          </a:ln>
+        </p:spPr>
+        <p:txBody>
+          <a:bodyPr xmlns:a="http://schemas.openxmlformats.org/drawingml/2006/main" lIns="0" tIns="0" rIns="0" bIns="0" anchor="ctr">
+            <a:noAutofit/>
+          </a:bodyPr>
+          <a:lstStyle xmlns:a="http://schemas.openxmlformats.org/drawingml/2006/main"/>
+          <a:p xmlns:a="http://schemas.openxmlformats.org/drawingml/2006/main">
+            <a:pPr algn="l">
+              <a:buNone/>
+              <a:defRPr sz="3675" b="1">
+                <a:solidFill>
+                  <a:srgbClr val="152B3A"/>
+                </a:solidFill>
+                <a:latin typeface="Calibri"/>
+                <a:ea typeface="Calibri"/>
+                <a:cs typeface="Calibri"/>
+              </a:defRPr>
+            </a:pPr>
+            <a:r>
+              <a:rPr sz="3675" b="1">
+                <a:solidFill>
+                  <a:srgbClr val="152B3A"/>
+                </a:solidFill>
+                <a:latin typeface="Calibri"/>
+                <a:ea typeface="Calibri"/>
+                <a:cs typeface="Calibri"/>
               </a:rPr>
               <a:t>Three things to work out</a:t>
             </a:r>
@@ -5257,14 +6590,14 @@
         </p:nvSpPr>
         <p:spPr>
           <a:xfrm xmlns:a="http://schemas.openxmlformats.org/drawingml/2006/main">
-            <a:off x="609600" y="6219825"/>
+            <a:off x="609600" y="6191250"/>
             <a:ext cx="10972800" cy="9525"/>
           </a:xfrm>
           <a:prstGeom xmlns:a="http://schemas.openxmlformats.org/drawingml/2006/main" prst="rect">
             <a:avLst/>
           </a:prstGeom>
           <a:solidFill xmlns:a="http://schemas.openxmlformats.org/drawingml/2006/main">
-            <a:srgbClr val="DCE7DD"/>
+            <a:srgbClr val="CEDBD3"/>
           </a:solidFill>
           <a:ln xmlns:a="http://schemas.openxmlformats.org/drawingml/2006/main" w="0">
             <a:noFill/>
@@ -5288,34 +6621,43 @@
         </p:nvSpPr>
         <p:spPr>
           <a:xfrm xmlns:a="http://schemas.openxmlformats.org/drawingml/2006/main">
-            <a:off x="609600" y="6381750"/>
-            <a:ext cx="9906000" cy="228600"/>
-          </a:xfrm>
-          <a:prstGeom xmlns:a="http://schemas.openxmlformats.org/drawingml/2006/main" prst="rect">
-            <a:avLst/>
-          </a:prstGeom>
-          <a:noFill xmlns:a="http://schemas.openxmlformats.org/drawingml/2006/main"/>
-          <a:ln xmlns:a="http://schemas.openxmlformats.org/drawingml/2006/main" w="0">
-            <a:noFill/>
-            <a:prstDash val="solid"/>
-          </a:ln>
-        </p:spPr>
-        <p:txBody>
-          <a:bodyPr xmlns:a="http://schemas.openxmlformats.org/drawingml/2006/main" lIns="0" tIns="0" rIns="0" bIns="0" anchor="ctr"/>
-          <a:lstStyle xmlns:a="http://schemas.openxmlformats.org/drawingml/2006/main"/>
-          <a:p xmlns:a="http://schemas.openxmlformats.org/drawingml/2006/main">
-            <a:pPr>
-              <a:defRPr sz="1275" b="0">
+            <a:off x="609600" y="6419850"/>
+            <a:ext cx="9525000" cy="219075"/>
+          </a:xfrm>
+          <a:prstGeom xmlns:a="http://schemas.openxmlformats.org/drawingml/2006/main" prst="rect">
+            <a:avLst/>
+          </a:prstGeom>
+          <a:noFill xmlns:a="http://schemas.openxmlformats.org/drawingml/2006/main"/>
+          <a:ln xmlns:a="http://schemas.openxmlformats.org/drawingml/2006/main" w="0">
+            <a:noFill/>
+            <a:prstDash val="solid"/>
+          </a:ln>
+        </p:spPr>
+        <p:txBody>
+          <a:bodyPr xmlns:a="http://schemas.openxmlformats.org/drawingml/2006/main" lIns="0" tIns="0" rIns="0" bIns="0" anchor="ctr">
+            <a:noAutofit/>
+          </a:bodyPr>
+          <a:lstStyle xmlns:a="http://schemas.openxmlformats.org/drawingml/2006/main"/>
+          <a:p xmlns:a="http://schemas.openxmlformats.org/drawingml/2006/main">
+            <a:pPr algn="l">
+              <a:buNone/>
+              <a:defRPr sz="1200" b="0">
                 <a:solidFill>
                   <a:srgbClr val="50616B"/>
                 </a:solidFill>
-              </a:defRPr>
-            </a:pPr>
-            <a:r>
-              <a:rPr sz="1275" b="0">
+                <a:latin typeface="Calibri"/>
+                <a:ea typeface="Calibri"/>
+                <a:cs typeface="Calibri"/>
+              </a:defRPr>
+            </a:pPr>
+            <a:r>
+              <a:rPr sz="1200" b="0">
                 <a:solidFill>
                   <a:srgbClr val="50616B"/>
                 </a:solidFill>
+                <a:latin typeface="Calibri"/>
+                <a:ea typeface="Calibri"/>
+                <a:cs typeface="Calibri"/>
               </a:rPr>
               <a:t>AUTUMN 1  ·  WEEK 6  ·  LESSON A</a:t>
             </a:r>
@@ -5338,27 +6680,33 @@
         </p:nvSpPr>
         <p:spPr>
           <a:xfrm xmlns:a="http://schemas.openxmlformats.org/drawingml/2006/main">
-            <a:off x="11106150" y="6362700"/>
-            <a:ext cx="476250" cy="238125"/>
-          </a:xfrm>
-          <a:prstGeom xmlns:a="http://schemas.openxmlformats.org/drawingml/2006/main" prst="rect">
-            <a:avLst/>
-          </a:prstGeom>
-          <a:noFill xmlns:a="http://schemas.openxmlformats.org/drawingml/2006/main"/>
-          <a:ln xmlns:a="http://schemas.openxmlformats.org/drawingml/2006/main" w="0">
-            <a:noFill/>
-            <a:prstDash val="solid"/>
-          </a:ln>
-        </p:spPr>
-        <p:txBody>
-          <a:bodyPr xmlns:a="http://schemas.openxmlformats.org/drawingml/2006/main" lIns="0" tIns="0" rIns="0" bIns="0" anchor="ctr"/>
-          <a:lstStyle xmlns:a="http://schemas.openxmlformats.org/drawingml/2006/main"/>
-          <a:p xmlns:a="http://schemas.openxmlformats.org/drawingml/2006/main">
-            <a:pPr>
+            <a:off x="11106150" y="6400800"/>
+            <a:ext cx="476250" cy="247650"/>
+          </a:xfrm>
+          <a:prstGeom xmlns:a="http://schemas.openxmlformats.org/drawingml/2006/main" prst="rect">
+            <a:avLst/>
+          </a:prstGeom>
+          <a:noFill xmlns:a="http://schemas.openxmlformats.org/drawingml/2006/main"/>
+          <a:ln xmlns:a="http://schemas.openxmlformats.org/drawingml/2006/main" w="0">
+            <a:noFill/>
+            <a:prstDash val="solid"/>
+          </a:ln>
+        </p:spPr>
+        <p:txBody>
+          <a:bodyPr xmlns:a="http://schemas.openxmlformats.org/drawingml/2006/main" lIns="0" tIns="0" rIns="0" bIns="0" anchor="ctr">
+            <a:noAutofit/>
+          </a:bodyPr>
+          <a:lstStyle xmlns:a="http://schemas.openxmlformats.org/drawingml/2006/main"/>
+          <a:p xmlns:a="http://schemas.openxmlformats.org/drawingml/2006/main">
+            <a:pPr algn="l">
+              <a:buNone/>
               <a:defRPr sz="1350" b="1">
                 <a:solidFill>
                   <a:srgbClr val="28685E"/>
                 </a:solidFill>
+                <a:latin typeface="Calibri"/>
+                <a:ea typeface="Calibri"/>
+                <a:cs typeface="Calibri"/>
               </a:defRPr>
             </a:pPr>
             <a:r>
@@ -5366,6 +6714,9 @@
                 <a:solidFill>
                   <a:srgbClr val="28685E"/>
                 </a:solidFill>
+                <a:latin typeface="Calibri"/>
+                <a:ea typeface="Calibri"/>
+                <a:cs typeface="Calibri"/>
               </a:rPr>
               <a:t>03</a:t>
             </a:r>
@@ -5388,34 +6739,43 @@
         </p:nvSpPr>
         <p:spPr>
           <a:xfrm xmlns:a="http://schemas.openxmlformats.org/drawingml/2006/main">
-            <a:off x="609600" y="2619375"/>
-            <a:ext cx="10972800" cy="781050"/>
-          </a:xfrm>
-          <a:prstGeom xmlns:a="http://schemas.openxmlformats.org/drawingml/2006/main" prst="rect">
-            <a:avLst/>
-          </a:prstGeom>
-          <a:noFill xmlns:a="http://schemas.openxmlformats.org/drawingml/2006/main"/>
-          <a:ln xmlns:a="http://schemas.openxmlformats.org/drawingml/2006/main" w="0">
-            <a:noFill/>
-            <a:prstDash val="solid"/>
-          </a:ln>
-        </p:spPr>
-        <p:txBody>
-          <a:bodyPr xmlns:a="http://schemas.openxmlformats.org/drawingml/2006/main" lIns="0" tIns="0" rIns="0" bIns="0" anchor="ctr"/>
-          <a:lstStyle xmlns:a="http://schemas.openxmlformats.org/drawingml/2006/main"/>
-          <a:p xmlns:a="http://schemas.openxmlformats.org/drawingml/2006/main">
-            <a:pPr>
-              <a:defRPr sz="2550" b="0">
-                <a:solidFill>
-                  <a:srgbClr val="152B3A"/>
-                </a:solidFill>
-              </a:defRPr>
-            </a:pPr>
-            <a:r>
-              <a:rPr sz="2550" b="0">
-                <a:solidFill>
-                  <a:srgbClr val="152B3A"/>
-                </a:solidFill>
+            <a:off x="1000125" y="2333625"/>
+            <a:ext cx="10382250" cy="1076325"/>
+          </a:xfrm>
+          <a:prstGeom xmlns:a="http://schemas.openxmlformats.org/drawingml/2006/main" prst="rect">
+            <a:avLst/>
+          </a:prstGeom>
+          <a:noFill xmlns:a="http://schemas.openxmlformats.org/drawingml/2006/main"/>
+          <a:ln xmlns:a="http://schemas.openxmlformats.org/drawingml/2006/main" w="0">
+            <a:noFill/>
+            <a:prstDash val="solid"/>
+          </a:ln>
+        </p:spPr>
+        <p:txBody>
+          <a:bodyPr xmlns:a="http://schemas.openxmlformats.org/drawingml/2006/main" lIns="0" tIns="0" rIns="0" bIns="0" anchor="ctr">
+            <a:noAutofit/>
+          </a:bodyPr>
+          <a:lstStyle xmlns:a="http://schemas.openxmlformats.org/drawingml/2006/main"/>
+          <a:p xmlns:a="http://schemas.openxmlformats.org/drawingml/2006/main">
+            <a:pPr algn="l">
+              <a:buNone/>
+              <a:defRPr sz="2625" b="0">
+                <a:solidFill>
+                  <a:srgbClr val="152B3A"/>
+                </a:solidFill>
+                <a:latin typeface="Calibri"/>
+                <a:ea typeface="Calibri"/>
+                <a:cs typeface="Calibri"/>
+              </a:defRPr>
+            </a:pPr>
+            <a:r>
+              <a:rPr sz="2625" b="0">
+                <a:solidFill>
+                  <a:srgbClr val="152B3A"/>
+                </a:solidFill>
+                <a:latin typeface="Calibri"/>
+                <a:ea typeface="Calibri"/>
+                <a:cs typeface="Calibri"/>
               </a:rPr>
               <a:t>1   Get the order right.</a:t>
             </a:r>
@@ -5438,34 +6798,43 @@
         </p:nvSpPr>
         <p:spPr>
           <a:xfrm xmlns:a="http://schemas.openxmlformats.org/drawingml/2006/main">
-            <a:off x="609600" y="3476625"/>
-            <a:ext cx="10972800" cy="781050"/>
-          </a:xfrm>
-          <a:prstGeom xmlns:a="http://schemas.openxmlformats.org/drawingml/2006/main" prst="rect">
-            <a:avLst/>
-          </a:prstGeom>
-          <a:noFill xmlns:a="http://schemas.openxmlformats.org/drawingml/2006/main"/>
-          <a:ln xmlns:a="http://schemas.openxmlformats.org/drawingml/2006/main" w="0">
-            <a:noFill/>
-            <a:prstDash val="solid"/>
-          </a:ln>
-        </p:spPr>
-        <p:txBody>
-          <a:bodyPr xmlns:a="http://schemas.openxmlformats.org/drawingml/2006/main" lIns="0" tIns="0" rIns="0" bIns="0" anchor="ctr"/>
-          <a:lstStyle xmlns:a="http://schemas.openxmlformats.org/drawingml/2006/main"/>
-          <a:p xmlns:a="http://schemas.openxmlformats.org/drawingml/2006/main">
-            <a:pPr>
-              <a:defRPr sz="2550" b="0">
-                <a:solidFill>
-                  <a:srgbClr val="152B3A"/>
-                </a:solidFill>
-              </a:defRPr>
-            </a:pPr>
-            <a:r>
-              <a:rPr sz="2550" b="0">
-                <a:solidFill>
-                  <a:srgbClr val="152B3A"/>
-                </a:solidFill>
+            <a:off x="1000125" y="3467100"/>
+            <a:ext cx="10382250" cy="1076325"/>
+          </a:xfrm>
+          <a:prstGeom xmlns:a="http://schemas.openxmlformats.org/drawingml/2006/main" prst="rect">
+            <a:avLst/>
+          </a:prstGeom>
+          <a:noFill xmlns:a="http://schemas.openxmlformats.org/drawingml/2006/main"/>
+          <a:ln xmlns:a="http://schemas.openxmlformats.org/drawingml/2006/main" w="0">
+            <a:noFill/>
+            <a:prstDash val="solid"/>
+          </a:ln>
+        </p:spPr>
+        <p:txBody>
+          <a:bodyPr xmlns:a="http://schemas.openxmlformats.org/drawingml/2006/main" lIns="0" tIns="0" rIns="0" bIns="0" anchor="ctr">
+            <a:noAutofit/>
+          </a:bodyPr>
+          <a:lstStyle xmlns:a="http://schemas.openxmlformats.org/drawingml/2006/main"/>
+          <a:p xmlns:a="http://schemas.openxmlformats.org/drawingml/2006/main">
+            <a:pPr algn="l">
+              <a:buNone/>
+              <a:defRPr sz="2625" b="0">
+                <a:solidFill>
+                  <a:srgbClr val="152B3A"/>
+                </a:solidFill>
+                <a:latin typeface="Calibri"/>
+                <a:ea typeface="Calibri"/>
+                <a:cs typeface="Calibri"/>
+              </a:defRPr>
+            </a:pPr>
+            <a:r>
+              <a:rPr sz="2625" b="0">
+                <a:solidFill>
+                  <a:srgbClr val="152B3A"/>
+                </a:solidFill>
+                <a:latin typeface="Calibri"/>
+                <a:ea typeface="Calibri"/>
+                <a:cs typeface="Calibri"/>
               </a:rPr>
               <a:t>2   Model an orbit.</a:t>
             </a:r>
@@ -5488,39 +6857,108 @@
         </p:nvSpPr>
         <p:spPr>
           <a:xfrm xmlns:a="http://schemas.openxmlformats.org/drawingml/2006/main">
-            <a:off x="609600" y="4333875"/>
-            <a:ext cx="10972800" cy="781050"/>
-          </a:xfrm>
-          <a:prstGeom xmlns:a="http://schemas.openxmlformats.org/drawingml/2006/main" prst="rect">
-            <a:avLst/>
-          </a:prstGeom>
-          <a:noFill xmlns:a="http://schemas.openxmlformats.org/drawingml/2006/main"/>
-          <a:ln xmlns:a="http://schemas.openxmlformats.org/drawingml/2006/main" w="0">
-            <a:noFill/>
-            <a:prstDash val="solid"/>
-          </a:ln>
-        </p:spPr>
-        <p:txBody>
-          <a:bodyPr xmlns:a="http://schemas.openxmlformats.org/drawingml/2006/main" lIns="0" tIns="0" rIns="0" bIns="0" anchor="ctr"/>
-          <a:lstStyle xmlns:a="http://schemas.openxmlformats.org/drawingml/2006/main"/>
-          <a:p xmlns:a="http://schemas.openxmlformats.org/drawingml/2006/main">
-            <a:pPr>
-              <a:defRPr sz="2550" b="0">
-                <a:solidFill>
-                  <a:srgbClr val="152B3A"/>
-                </a:solidFill>
-              </a:defRPr>
-            </a:pPr>
-            <a:r>
-              <a:rPr sz="2550" b="0">
-                <a:solidFill>
-                  <a:srgbClr val="152B3A"/>
-                </a:solidFill>
+            <a:off x="1000125" y="4600575"/>
+            <a:ext cx="10382250" cy="1076325"/>
+          </a:xfrm>
+          <a:prstGeom xmlns:a="http://schemas.openxmlformats.org/drawingml/2006/main" prst="rect">
+            <a:avLst/>
+          </a:prstGeom>
+          <a:noFill xmlns:a="http://schemas.openxmlformats.org/drawingml/2006/main"/>
+          <a:ln xmlns:a="http://schemas.openxmlformats.org/drawingml/2006/main" w="0">
+            <a:noFill/>
+            <a:prstDash val="solid"/>
+          </a:ln>
+        </p:spPr>
+        <p:txBody>
+          <a:bodyPr xmlns:a="http://schemas.openxmlformats.org/drawingml/2006/main" lIns="0" tIns="0" rIns="0" bIns="0" anchor="ctr">
+            <a:noAutofit/>
+          </a:bodyPr>
+          <a:lstStyle xmlns:a="http://schemas.openxmlformats.org/drawingml/2006/main"/>
+          <a:p xmlns:a="http://schemas.openxmlformats.org/drawingml/2006/main">
+            <a:pPr algn="l">
+              <a:buNone/>
+              <a:defRPr sz="2625" b="0">
+                <a:solidFill>
+                  <a:srgbClr val="152B3A"/>
+                </a:solidFill>
+                <a:latin typeface="Calibri"/>
+                <a:ea typeface="Calibri"/>
+                <a:cs typeface="Calibri"/>
+              </a:defRPr>
+            </a:pPr>
+            <a:r>
+              <a:rPr sz="2625" b="0">
+                <a:solidFill>
+                  <a:srgbClr val="152B3A"/>
+                </a:solidFill>
+                <a:latin typeface="Calibri"/>
+                <a:ea typeface="Calibri"/>
+                <a:cs typeface="Calibri"/>
               </a:rPr>
               <a:t>3   Explain what keeps the path curving.</a:t>
             </a:r>
           </a:p>
         </p:txBody>
+      </p:sp>
+      <p:sp>
+        <p:nvSpPr>
+          <p:cNvPr id="11" name="row-rule-0">
+            <a:extLst xmlns:a="http://schemas.openxmlformats.org/drawingml/2006/main">
+              <a:ext uri="{FF2B5EF4-FFF2-40B4-BE49-F238E27FC236}">
+                <a16:creationId xmlns:a16="http://schemas.microsoft.com/office/drawing/2014/main" id="{864DDDA2-77C3-43C4-807C-188BE9809802}"/>
+              </a:ext>
+            </a:extLst>
+          </p:cNvPr>
+          <p:cNvSpPr>
+            <a:spLocks xmlns:a="http://schemas.openxmlformats.org/drawingml/2006/main" noGrp="1"/>
+          </p:cNvSpPr>
+          <p:nvPr/>
+        </p:nvSpPr>
+        <p:spPr>
+          <a:xfrm xmlns:a="http://schemas.openxmlformats.org/drawingml/2006/main">
+            <a:off x="1000125" y="3419475"/>
+            <a:ext cx="10334625" cy="0"/>
+          </a:xfrm>
+          <a:prstGeom xmlns:a="http://schemas.openxmlformats.org/drawingml/2006/main" prst="line">
+            <a:avLst/>
+          </a:prstGeom>
+          <a:noFill xmlns:a="http://schemas.openxmlformats.org/drawingml/2006/main"/>
+          <a:ln xmlns:a="http://schemas.openxmlformats.org/drawingml/2006/main" w="9525">
+            <a:solidFill>
+              <a:srgbClr val="CEDBD3"/>
+            </a:solidFill>
+          </a:ln>
+        </p:spPr>
+      </p:sp>
+      <p:sp>
+        <p:nvSpPr>
+          <p:cNvPr id="12" name="row-rule-1">
+            <a:extLst xmlns:a="http://schemas.openxmlformats.org/drawingml/2006/main">
+              <a:ext uri="{FF2B5EF4-FFF2-40B4-BE49-F238E27FC236}">
+                <a16:creationId xmlns:a16="http://schemas.microsoft.com/office/drawing/2014/main" id="{58A00F81-B43B-47E3-9B49-E7775B817916}"/>
+              </a:ext>
+            </a:extLst>
+          </p:cNvPr>
+          <p:cNvSpPr>
+            <a:spLocks xmlns:a="http://schemas.openxmlformats.org/drawingml/2006/main" noGrp="1"/>
+          </p:cNvSpPr>
+          <p:nvPr/>
+        </p:nvSpPr>
+        <p:spPr>
+          <a:xfrm xmlns:a="http://schemas.openxmlformats.org/drawingml/2006/main">
+            <a:off x="1000125" y="4552950"/>
+            <a:ext cx="10334625" cy="0"/>
+          </a:xfrm>
+          <a:prstGeom xmlns:a="http://schemas.openxmlformats.org/drawingml/2006/main" prst="line">
+            <a:avLst/>
+          </a:prstGeom>
+          <a:noFill xmlns:a="http://schemas.openxmlformats.org/drawingml/2006/main"/>
+          <a:ln xmlns:a="http://schemas.openxmlformats.org/drawingml/2006/main" w="9525">
+            <a:solidFill>
+              <a:srgbClr val="CEDBD3"/>
+            </a:solidFill>
+          </a:ln>
+        </p:spPr>
       </p:sp>
     </p:spTree>
     <p:extLst>
@@ -5538,7 +6976,7 @@
     <p:bg>
       <p:bgPr>
         <a:solidFill xmlns:a="http://schemas.openxmlformats.org/drawingml/2006/main">
-          <a:srgbClr val="F5F1E8"/>
+          <a:srgbClr val="FAF9F5"/>
         </a:solidFill>
       </p:bgPr>
     </p:bg>
@@ -5567,8 +7005,8 @@
         </p:nvSpPr>
         <p:spPr>
           <a:xfrm xmlns:a="http://schemas.openxmlformats.org/drawingml/2006/main">
-            <a:off x="609600" y="552450"/>
-            <a:ext cx="781050" cy="57150"/>
+            <a:off x="609600" y="733425"/>
+            <a:ext cx="781050" cy="38100"/>
           </a:xfrm>
           <a:prstGeom xmlns:a="http://schemas.openxmlformats.org/drawingml/2006/main" prst="rect">
             <a:avLst/>
@@ -5598,34 +7036,43 @@
         </p:nvSpPr>
         <p:spPr>
           <a:xfrm xmlns:a="http://schemas.openxmlformats.org/drawingml/2006/main">
-            <a:off x="609600" y="762000"/>
-            <a:ext cx="8572500" cy="285750"/>
-          </a:xfrm>
-          <a:prstGeom xmlns:a="http://schemas.openxmlformats.org/drawingml/2006/main" prst="rect">
-            <a:avLst/>
-          </a:prstGeom>
-          <a:noFill xmlns:a="http://schemas.openxmlformats.org/drawingml/2006/main"/>
-          <a:ln xmlns:a="http://schemas.openxmlformats.org/drawingml/2006/main" w="0">
-            <a:noFill/>
-            <a:prstDash val="solid"/>
-          </a:ln>
-        </p:spPr>
-        <p:txBody>
-          <a:bodyPr xmlns:a="http://schemas.openxmlformats.org/drawingml/2006/main" lIns="0" tIns="0" rIns="0" bIns="0" anchor="ctr"/>
-          <a:lstStyle xmlns:a="http://schemas.openxmlformats.org/drawingml/2006/main"/>
-          <a:p xmlns:a="http://schemas.openxmlformats.org/drawingml/2006/main">
-            <a:pPr>
-              <a:defRPr sz="1500" b="1">
+            <a:off x="609600" y="342900"/>
+            <a:ext cx="9334500" cy="304800"/>
+          </a:xfrm>
+          <a:prstGeom xmlns:a="http://schemas.openxmlformats.org/drawingml/2006/main" prst="rect">
+            <a:avLst/>
+          </a:prstGeom>
+          <a:noFill xmlns:a="http://schemas.openxmlformats.org/drawingml/2006/main"/>
+          <a:ln xmlns:a="http://schemas.openxmlformats.org/drawingml/2006/main" w="0">
+            <a:noFill/>
+            <a:prstDash val="solid"/>
+          </a:ln>
+        </p:spPr>
+        <p:txBody>
+          <a:bodyPr xmlns:a="http://schemas.openxmlformats.org/drawingml/2006/main" lIns="0" tIns="0" rIns="0" bIns="0" anchor="ctr">
+            <a:noAutofit/>
+          </a:bodyPr>
+          <a:lstStyle xmlns:a="http://schemas.openxmlformats.org/drawingml/2006/main"/>
+          <a:p xmlns:a="http://schemas.openxmlformats.org/drawingml/2006/main">
+            <a:pPr algn="l">
+              <a:buNone/>
+              <a:defRPr sz="1350" b="1">
                 <a:solidFill>
                   <a:srgbClr val="28685E"/>
                 </a:solidFill>
-              </a:defRPr>
-            </a:pPr>
-            <a:r>
-              <a:rPr sz="1500" b="1">
+                <a:latin typeface="Calibri"/>
+                <a:ea typeface="Calibri"/>
+                <a:cs typeface="Calibri"/>
+              </a:defRPr>
+            </a:pPr>
+            <a:r>
+              <a:rPr sz="1350" b="1">
                 <a:solidFill>
                   <a:srgbClr val="28685E"/>
                 </a:solidFill>
+                <a:latin typeface="Calibri"/>
+                <a:ea typeface="Calibri"/>
+                <a:cs typeface="Calibri"/>
               </a:rPr>
               <a:t>MADE BY MATT  /  GROW SCIENCE</a:t>
             </a:r>
@@ -5648,34 +7095,43 @@
         </p:nvSpPr>
         <p:spPr>
           <a:xfrm xmlns:a="http://schemas.openxmlformats.org/drawingml/2006/main">
-            <a:off x="609600" y="1352550"/>
-            <a:ext cx="10972800" cy="952500"/>
-          </a:xfrm>
-          <a:prstGeom xmlns:a="http://schemas.openxmlformats.org/drawingml/2006/main" prst="rect">
-            <a:avLst/>
-          </a:prstGeom>
-          <a:noFill xmlns:a="http://schemas.openxmlformats.org/drawingml/2006/main"/>
-          <a:ln xmlns:a="http://schemas.openxmlformats.org/drawingml/2006/main" w="0">
-            <a:noFill/>
-            <a:prstDash val="solid"/>
-          </a:ln>
-        </p:spPr>
-        <p:txBody>
-          <a:bodyPr xmlns:a="http://schemas.openxmlformats.org/drawingml/2006/main" lIns="0" tIns="0" rIns="0" bIns="0" anchor="ctr"/>
-          <a:lstStyle xmlns:a="http://schemas.openxmlformats.org/drawingml/2006/main"/>
-          <a:p xmlns:a="http://schemas.openxmlformats.org/drawingml/2006/main">
-            <a:pPr>
-              <a:defRPr sz="3750" b="1">
-                <a:solidFill>
-                  <a:srgbClr val="152B3A"/>
-                </a:solidFill>
-              </a:defRPr>
-            </a:pPr>
-            <a:r>
-              <a:rPr sz="3750" b="1">
-                <a:solidFill>
-                  <a:srgbClr val="152B3A"/>
-                </a:solidFill>
+            <a:off x="609600" y="990600"/>
+            <a:ext cx="10972800" cy="1000125"/>
+          </a:xfrm>
+          <a:prstGeom xmlns:a="http://schemas.openxmlformats.org/drawingml/2006/main" prst="rect">
+            <a:avLst/>
+          </a:prstGeom>
+          <a:noFill xmlns:a="http://schemas.openxmlformats.org/drawingml/2006/main"/>
+          <a:ln xmlns:a="http://schemas.openxmlformats.org/drawingml/2006/main" w="0">
+            <a:noFill/>
+            <a:prstDash val="solid"/>
+          </a:ln>
+        </p:spPr>
+        <p:txBody>
+          <a:bodyPr xmlns:a="http://schemas.openxmlformats.org/drawingml/2006/main" lIns="0" tIns="0" rIns="0" bIns="0" anchor="ctr">
+            <a:noAutofit/>
+          </a:bodyPr>
+          <a:lstStyle xmlns:a="http://schemas.openxmlformats.org/drawingml/2006/main"/>
+          <a:p xmlns:a="http://schemas.openxmlformats.org/drawingml/2006/main">
+            <a:pPr algn="l">
+              <a:buNone/>
+              <a:defRPr sz="3675" b="1">
+                <a:solidFill>
+                  <a:srgbClr val="152B3A"/>
+                </a:solidFill>
+                <a:latin typeface="Calibri"/>
+                <a:ea typeface="Calibri"/>
+                <a:cs typeface="Calibri"/>
+              </a:defRPr>
+            </a:pPr>
+            <a:r>
+              <a:rPr sz="3675" b="1">
+                <a:solidFill>
+                  <a:srgbClr val="152B3A"/>
+                </a:solidFill>
+                <a:latin typeface="Calibri"/>
+                <a:ea typeface="Calibri"/>
+                <a:cs typeface="Calibri"/>
               </a:rPr>
               <a:t>Eight planets, one order</a:t>
             </a:r>
@@ -5698,14 +7154,14 @@
         </p:nvSpPr>
         <p:spPr>
           <a:xfrm xmlns:a="http://schemas.openxmlformats.org/drawingml/2006/main">
-            <a:off x="609600" y="6219825"/>
+            <a:off x="609600" y="6191250"/>
             <a:ext cx="10972800" cy="9525"/>
           </a:xfrm>
           <a:prstGeom xmlns:a="http://schemas.openxmlformats.org/drawingml/2006/main" prst="rect">
             <a:avLst/>
           </a:prstGeom>
           <a:solidFill xmlns:a="http://schemas.openxmlformats.org/drawingml/2006/main">
-            <a:srgbClr val="DCE7DD"/>
+            <a:srgbClr val="CEDBD3"/>
           </a:solidFill>
           <a:ln xmlns:a="http://schemas.openxmlformats.org/drawingml/2006/main" w="0">
             <a:noFill/>
@@ -5729,34 +7185,43 @@
         </p:nvSpPr>
         <p:spPr>
           <a:xfrm xmlns:a="http://schemas.openxmlformats.org/drawingml/2006/main">
-            <a:off x="609600" y="6381750"/>
-            <a:ext cx="9906000" cy="228600"/>
-          </a:xfrm>
-          <a:prstGeom xmlns:a="http://schemas.openxmlformats.org/drawingml/2006/main" prst="rect">
-            <a:avLst/>
-          </a:prstGeom>
-          <a:noFill xmlns:a="http://schemas.openxmlformats.org/drawingml/2006/main"/>
-          <a:ln xmlns:a="http://schemas.openxmlformats.org/drawingml/2006/main" w="0">
-            <a:noFill/>
-            <a:prstDash val="solid"/>
-          </a:ln>
-        </p:spPr>
-        <p:txBody>
-          <a:bodyPr xmlns:a="http://schemas.openxmlformats.org/drawingml/2006/main" lIns="0" tIns="0" rIns="0" bIns="0" anchor="ctr"/>
-          <a:lstStyle xmlns:a="http://schemas.openxmlformats.org/drawingml/2006/main"/>
-          <a:p xmlns:a="http://schemas.openxmlformats.org/drawingml/2006/main">
-            <a:pPr>
-              <a:defRPr sz="1275" b="0">
+            <a:off x="609600" y="6419850"/>
+            <a:ext cx="9525000" cy="219075"/>
+          </a:xfrm>
+          <a:prstGeom xmlns:a="http://schemas.openxmlformats.org/drawingml/2006/main" prst="rect">
+            <a:avLst/>
+          </a:prstGeom>
+          <a:noFill xmlns:a="http://schemas.openxmlformats.org/drawingml/2006/main"/>
+          <a:ln xmlns:a="http://schemas.openxmlformats.org/drawingml/2006/main" w="0">
+            <a:noFill/>
+            <a:prstDash val="solid"/>
+          </a:ln>
+        </p:spPr>
+        <p:txBody>
+          <a:bodyPr xmlns:a="http://schemas.openxmlformats.org/drawingml/2006/main" lIns="0" tIns="0" rIns="0" bIns="0" anchor="ctr">
+            <a:noAutofit/>
+          </a:bodyPr>
+          <a:lstStyle xmlns:a="http://schemas.openxmlformats.org/drawingml/2006/main"/>
+          <a:p xmlns:a="http://schemas.openxmlformats.org/drawingml/2006/main">
+            <a:pPr algn="l">
+              <a:buNone/>
+              <a:defRPr sz="1200" b="0">
                 <a:solidFill>
                   <a:srgbClr val="50616B"/>
                 </a:solidFill>
-              </a:defRPr>
-            </a:pPr>
-            <a:r>
-              <a:rPr sz="1275" b="0">
+                <a:latin typeface="Calibri"/>
+                <a:ea typeface="Calibri"/>
+                <a:cs typeface="Calibri"/>
+              </a:defRPr>
+            </a:pPr>
+            <a:r>
+              <a:rPr sz="1200" b="0">
                 <a:solidFill>
                   <a:srgbClr val="50616B"/>
                 </a:solidFill>
+                <a:latin typeface="Calibri"/>
+                <a:ea typeface="Calibri"/>
+                <a:cs typeface="Calibri"/>
               </a:rPr>
               <a:t>AUTUMN 1  ·  WEEK 6  ·  LESSON A</a:t>
             </a:r>
@@ -5779,27 +7244,33 @@
         </p:nvSpPr>
         <p:spPr>
           <a:xfrm xmlns:a="http://schemas.openxmlformats.org/drawingml/2006/main">
-            <a:off x="11106150" y="6362700"/>
-            <a:ext cx="476250" cy="238125"/>
-          </a:xfrm>
-          <a:prstGeom xmlns:a="http://schemas.openxmlformats.org/drawingml/2006/main" prst="rect">
-            <a:avLst/>
-          </a:prstGeom>
-          <a:noFill xmlns:a="http://schemas.openxmlformats.org/drawingml/2006/main"/>
-          <a:ln xmlns:a="http://schemas.openxmlformats.org/drawingml/2006/main" w="0">
-            <a:noFill/>
-            <a:prstDash val="solid"/>
-          </a:ln>
-        </p:spPr>
-        <p:txBody>
-          <a:bodyPr xmlns:a="http://schemas.openxmlformats.org/drawingml/2006/main" lIns="0" tIns="0" rIns="0" bIns="0" anchor="ctr"/>
-          <a:lstStyle xmlns:a="http://schemas.openxmlformats.org/drawingml/2006/main"/>
-          <a:p xmlns:a="http://schemas.openxmlformats.org/drawingml/2006/main">
-            <a:pPr>
+            <a:off x="11106150" y="6400800"/>
+            <a:ext cx="476250" cy="247650"/>
+          </a:xfrm>
+          <a:prstGeom xmlns:a="http://schemas.openxmlformats.org/drawingml/2006/main" prst="rect">
+            <a:avLst/>
+          </a:prstGeom>
+          <a:noFill xmlns:a="http://schemas.openxmlformats.org/drawingml/2006/main"/>
+          <a:ln xmlns:a="http://schemas.openxmlformats.org/drawingml/2006/main" w="0">
+            <a:noFill/>
+            <a:prstDash val="solid"/>
+          </a:ln>
+        </p:spPr>
+        <p:txBody>
+          <a:bodyPr xmlns:a="http://schemas.openxmlformats.org/drawingml/2006/main" lIns="0" tIns="0" rIns="0" bIns="0" anchor="ctr">
+            <a:noAutofit/>
+          </a:bodyPr>
+          <a:lstStyle xmlns:a="http://schemas.openxmlformats.org/drawingml/2006/main"/>
+          <a:p xmlns:a="http://schemas.openxmlformats.org/drawingml/2006/main">
+            <a:pPr algn="l">
+              <a:buNone/>
               <a:defRPr sz="1350" b="1">
                 <a:solidFill>
                   <a:srgbClr val="28685E"/>
                 </a:solidFill>
+                <a:latin typeface="Calibri"/>
+                <a:ea typeface="Calibri"/>
+                <a:cs typeface="Calibri"/>
               </a:defRPr>
             </a:pPr>
             <a:r>
@@ -5807,6 +7278,9 @@
                 <a:solidFill>
                   <a:srgbClr val="28685E"/>
                 </a:solidFill>
+                <a:latin typeface="Calibri"/>
+                <a:ea typeface="Calibri"/>
+                <a:cs typeface="Calibri"/>
               </a:rPr>
               <a:t>04</a:t>
             </a:r>
@@ -5829,34 +7303,45 @@
         </p:nvSpPr>
         <p:spPr>
           <a:xfrm xmlns:a="http://schemas.openxmlformats.org/drawingml/2006/main">
-            <a:off x="609600" y="2619375"/>
-            <a:ext cx="4953000" cy="428625"/>
-          </a:xfrm>
-          <a:prstGeom xmlns:a="http://schemas.openxmlformats.org/drawingml/2006/main" prst="rect">
-            <a:avLst/>
-          </a:prstGeom>
-          <a:noFill xmlns:a="http://schemas.openxmlformats.org/drawingml/2006/main"/>
-          <a:ln xmlns:a="http://schemas.openxmlformats.org/drawingml/2006/main" w="0">
-            <a:noFill/>
-            <a:prstDash val="solid"/>
-          </a:ln>
-        </p:spPr>
-        <p:txBody>
-          <a:bodyPr xmlns:a="http://schemas.openxmlformats.org/drawingml/2006/main" lIns="0" tIns="0" rIns="0" bIns="0" anchor="ctr"/>
-          <a:lstStyle xmlns:a="http://schemas.openxmlformats.org/drawingml/2006/main"/>
-          <a:p xmlns:a="http://schemas.openxmlformats.org/drawingml/2006/main">
-            <a:pPr>
-              <a:defRPr sz="2025" b="1">
+            <a:off x="609600" y="2219325"/>
+            <a:ext cx="5257800" cy="762000"/>
+          </a:xfrm>
+          <a:prstGeom xmlns:a="http://schemas.openxmlformats.org/drawingml/2006/main" prst="rect">
+            <a:avLst/>
+          </a:prstGeom>
+          <a:solidFill xmlns:a="http://schemas.openxmlformats.org/drawingml/2006/main">
+            <a:srgbClr val="E7EFE9"/>
+          </a:solidFill>
+          <a:ln xmlns:a="http://schemas.openxmlformats.org/drawingml/2006/main" w="0">
+            <a:noFill/>
+            <a:prstDash val="solid"/>
+          </a:ln>
+        </p:spPr>
+        <p:txBody>
+          <a:bodyPr xmlns:a="http://schemas.openxmlformats.org/drawingml/2006/main" lIns="228600" tIns="114300" rIns="228600" bIns="114300" anchor="ctr">
+            <a:noAutofit/>
+          </a:bodyPr>
+          <a:lstStyle xmlns:a="http://schemas.openxmlformats.org/drawingml/2006/main"/>
+          <a:p xmlns:a="http://schemas.openxmlformats.org/drawingml/2006/main">
+            <a:pPr algn="l">
+              <a:buNone/>
+              <a:defRPr sz="1875" b="1">
                 <a:solidFill>
                   <a:srgbClr val="28685E"/>
                 </a:solidFill>
-              </a:defRPr>
-            </a:pPr>
-            <a:r>
-              <a:rPr sz="2025" b="1">
+                <a:latin typeface="Calibri"/>
+                <a:ea typeface="Calibri"/>
+                <a:cs typeface="Calibri"/>
+              </a:defRPr>
+            </a:pPr>
+            <a:r>
+              <a:rPr sz="1875" b="1">
                 <a:solidFill>
                   <a:srgbClr val="28685E"/>
                 </a:solidFill>
+                <a:latin typeface="Calibri"/>
+                <a:ea typeface="Calibri"/>
+                <a:cs typeface="Calibri"/>
               </a:rPr>
               <a:t>ROCKY INNER PLANETS</a:t>
             </a:r>
@@ -5879,34 +7364,45 @@
         </p:nvSpPr>
         <p:spPr>
           <a:xfrm xmlns:a="http://schemas.openxmlformats.org/drawingml/2006/main">
-            <a:off x="6572250" y="2619375"/>
-            <a:ext cx="4953000" cy="428625"/>
-          </a:xfrm>
-          <a:prstGeom xmlns:a="http://schemas.openxmlformats.org/drawingml/2006/main" prst="rect">
-            <a:avLst/>
-          </a:prstGeom>
-          <a:noFill xmlns:a="http://schemas.openxmlformats.org/drawingml/2006/main"/>
-          <a:ln xmlns:a="http://schemas.openxmlformats.org/drawingml/2006/main" w="0">
-            <a:noFill/>
-            <a:prstDash val="solid"/>
-          </a:ln>
-        </p:spPr>
-        <p:txBody>
-          <a:bodyPr xmlns:a="http://schemas.openxmlformats.org/drawingml/2006/main" lIns="0" tIns="0" rIns="0" bIns="0" anchor="ctr"/>
-          <a:lstStyle xmlns:a="http://schemas.openxmlformats.org/drawingml/2006/main"/>
-          <a:p xmlns:a="http://schemas.openxmlformats.org/drawingml/2006/main">
-            <a:pPr>
-              <a:defRPr sz="2025" b="1">
-                <a:solidFill>
-                  <a:srgbClr val="A65D25"/>
-                </a:solidFill>
-              </a:defRPr>
-            </a:pPr>
-            <a:r>
-              <a:rPr sz="2025" b="1">
-                <a:solidFill>
-                  <a:srgbClr val="A65D25"/>
-                </a:solidFill>
+            <a:off x="6381750" y="2219325"/>
+            <a:ext cx="5200650" cy="762000"/>
+          </a:xfrm>
+          <a:prstGeom xmlns:a="http://schemas.openxmlformats.org/drawingml/2006/main" prst="rect">
+            <a:avLst/>
+          </a:prstGeom>
+          <a:solidFill xmlns:a="http://schemas.openxmlformats.org/drawingml/2006/main">
+            <a:srgbClr val="F0EBE3"/>
+          </a:solidFill>
+          <a:ln xmlns:a="http://schemas.openxmlformats.org/drawingml/2006/main" w="0">
+            <a:noFill/>
+            <a:prstDash val="solid"/>
+          </a:ln>
+        </p:spPr>
+        <p:txBody>
+          <a:bodyPr xmlns:a="http://schemas.openxmlformats.org/drawingml/2006/main" lIns="228600" tIns="114300" rIns="228600" bIns="114300" anchor="ctr">
+            <a:noAutofit/>
+          </a:bodyPr>
+          <a:lstStyle xmlns:a="http://schemas.openxmlformats.org/drawingml/2006/main"/>
+          <a:p xmlns:a="http://schemas.openxmlformats.org/drawingml/2006/main">
+            <a:pPr algn="l">
+              <a:buNone/>
+              <a:defRPr sz="1875" b="1">
+                <a:solidFill>
+                  <a:srgbClr val="A95D21"/>
+                </a:solidFill>
+                <a:latin typeface="Calibri"/>
+                <a:ea typeface="Calibri"/>
+                <a:cs typeface="Calibri"/>
+              </a:defRPr>
+            </a:pPr>
+            <a:r>
+              <a:rPr sz="1875" b="1">
+                <a:solidFill>
+                  <a:srgbClr val="A95D21"/>
+                </a:solidFill>
+                <a:latin typeface="Calibri"/>
+                <a:ea typeface="Calibri"/>
+                <a:cs typeface="Calibri"/>
               </a:rPr>
               <a:t>OUTER GIANTS</a:t>
             </a:r>
@@ -5929,27 +7425,35 @@
         </p:nvSpPr>
         <p:spPr>
           <a:xfrm xmlns:a="http://schemas.openxmlformats.org/drawingml/2006/main">
-            <a:off x="609600" y="3333750"/>
-            <a:ext cx="4953000" cy="2524125"/>
-          </a:xfrm>
-          <a:prstGeom xmlns:a="http://schemas.openxmlformats.org/drawingml/2006/main" prst="rect">
-            <a:avLst/>
-          </a:prstGeom>
-          <a:noFill xmlns:a="http://schemas.openxmlformats.org/drawingml/2006/main"/>
-          <a:ln xmlns:a="http://schemas.openxmlformats.org/drawingml/2006/main" w="0">
-            <a:noFill/>
-            <a:prstDash val="solid"/>
-          </a:ln>
-        </p:spPr>
-        <p:txBody>
-          <a:bodyPr xmlns:a="http://schemas.openxmlformats.org/drawingml/2006/main" lIns="0" tIns="0" rIns="0" bIns="0" anchor="ctr"/>
-          <a:lstStyle xmlns:a="http://schemas.openxmlformats.org/drawingml/2006/main"/>
-          <a:p xmlns:a="http://schemas.openxmlformats.org/drawingml/2006/main">
-            <a:pPr>
+            <a:off x="609600" y="2981325"/>
+            <a:ext cx="5257800" cy="2714625"/>
+          </a:xfrm>
+          <a:prstGeom xmlns:a="http://schemas.openxmlformats.org/drawingml/2006/main" prst="rect">
+            <a:avLst/>
+          </a:prstGeom>
+          <a:solidFill xmlns:a="http://schemas.openxmlformats.org/drawingml/2006/main">
+            <a:srgbClr val="E7EFE9"/>
+          </a:solidFill>
+          <a:ln xmlns:a="http://schemas.openxmlformats.org/drawingml/2006/main" w="0">
+            <a:noFill/>
+            <a:prstDash val="solid"/>
+          </a:ln>
+        </p:spPr>
+        <p:txBody>
+          <a:bodyPr xmlns:a="http://schemas.openxmlformats.org/drawingml/2006/main" lIns="228600" tIns="114300" rIns="228600" bIns="114300" anchor="ctr">
+            <a:noAutofit/>
+          </a:bodyPr>
+          <a:lstStyle xmlns:a="http://schemas.openxmlformats.org/drawingml/2006/main"/>
+          <a:p xmlns:a="http://schemas.openxmlformats.org/drawingml/2006/main">
+            <a:pPr algn="l">
+              <a:buNone/>
               <a:defRPr sz="2400" b="0">
                 <a:solidFill>
                   <a:srgbClr val="152B3A"/>
                 </a:solidFill>
+                <a:latin typeface="Calibri"/>
+                <a:ea typeface="Calibri"/>
+                <a:cs typeface="Calibri"/>
               </a:defRPr>
             </a:pPr>
             <a:r>
@@ -5957,16 +7461,23 @@
                 <a:solidFill>
                   <a:srgbClr val="152B3A"/>
                 </a:solidFill>
+                <a:latin typeface="Calibri"/>
+                <a:ea typeface="Calibri"/>
+                <a:cs typeface="Calibri"/>
               </a:rPr>
               <a:t>Mercury</a:t>
             </a:r>
           </a:p>
           <a:p xmlns:a="http://schemas.openxmlformats.org/drawingml/2006/main">
-            <a:pPr>
+            <a:pPr algn="l">
+              <a:buNone/>
               <a:defRPr sz="2400" b="0">
                 <a:solidFill>
                   <a:srgbClr val="152B3A"/>
                 </a:solidFill>
+                <a:latin typeface="Calibri"/>
+                <a:ea typeface="Calibri"/>
+                <a:cs typeface="Calibri"/>
               </a:defRPr>
             </a:pPr>
             <a:r>
@@ -5974,16 +7485,23 @@
                 <a:solidFill>
                   <a:srgbClr val="152B3A"/>
                 </a:solidFill>
+                <a:latin typeface="Calibri"/>
+                <a:ea typeface="Calibri"/>
+                <a:cs typeface="Calibri"/>
               </a:rPr>
               <a:t>Venus</a:t>
             </a:r>
           </a:p>
           <a:p xmlns:a="http://schemas.openxmlformats.org/drawingml/2006/main">
-            <a:pPr>
+            <a:pPr algn="l">
+              <a:buNone/>
               <a:defRPr sz="2400" b="0">
                 <a:solidFill>
                   <a:srgbClr val="152B3A"/>
                 </a:solidFill>
+                <a:latin typeface="Calibri"/>
+                <a:ea typeface="Calibri"/>
+                <a:cs typeface="Calibri"/>
               </a:defRPr>
             </a:pPr>
             <a:r>
@@ -5991,16 +7509,23 @@
                 <a:solidFill>
                   <a:srgbClr val="152B3A"/>
                 </a:solidFill>
+                <a:latin typeface="Calibri"/>
+                <a:ea typeface="Calibri"/>
+                <a:cs typeface="Calibri"/>
               </a:rPr>
               <a:t>Earth</a:t>
             </a:r>
           </a:p>
           <a:p xmlns:a="http://schemas.openxmlformats.org/drawingml/2006/main">
-            <a:pPr>
+            <a:pPr algn="l">
+              <a:buNone/>
               <a:defRPr sz="2400" b="0">
                 <a:solidFill>
                   <a:srgbClr val="152B3A"/>
                 </a:solidFill>
+                <a:latin typeface="Calibri"/>
+                <a:ea typeface="Calibri"/>
+                <a:cs typeface="Calibri"/>
               </a:defRPr>
             </a:pPr>
             <a:r>
@@ -6008,6 +7533,9 @@
                 <a:solidFill>
                   <a:srgbClr val="152B3A"/>
                 </a:solidFill>
+                <a:latin typeface="Calibri"/>
+                <a:ea typeface="Calibri"/>
+                <a:cs typeface="Calibri"/>
               </a:rPr>
               <a:t>Mars</a:t>
             </a:r>
@@ -6030,27 +7558,35 @@
         </p:nvSpPr>
         <p:spPr>
           <a:xfrm xmlns:a="http://schemas.openxmlformats.org/drawingml/2006/main">
-            <a:off x="6572250" y="3333750"/>
-            <a:ext cx="4857750" cy="2524125"/>
-          </a:xfrm>
-          <a:prstGeom xmlns:a="http://schemas.openxmlformats.org/drawingml/2006/main" prst="rect">
-            <a:avLst/>
-          </a:prstGeom>
-          <a:noFill xmlns:a="http://schemas.openxmlformats.org/drawingml/2006/main"/>
-          <a:ln xmlns:a="http://schemas.openxmlformats.org/drawingml/2006/main" w="0">
-            <a:noFill/>
-            <a:prstDash val="solid"/>
-          </a:ln>
-        </p:spPr>
-        <p:txBody>
-          <a:bodyPr xmlns:a="http://schemas.openxmlformats.org/drawingml/2006/main" lIns="0" tIns="0" rIns="0" bIns="0" anchor="ctr"/>
-          <a:lstStyle xmlns:a="http://schemas.openxmlformats.org/drawingml/2006/main"/>
-          <a:p xmlns:a="http://schemas.openxmlformats.org/drawingml/2006/main">
-            <a:pPr>
+            <a:off x="6381750" y="2981325"/>
+            <a:ext cx="5200650" cy="2714625"/>
+          </a:xfrm>
+          <a:prstGeom xmlns:a="http://schemas.openxmlformats.org/drawingml/2006/main" prst="rect">
+            <a:avLst/>
+          </a:prstGeom>
+          <a:solidFill xmlns:a="http://schemas.openxmlformats.org/drawingml/2006/main">
+            <a:srgbClr val="F0EBE3"/>
+          </a:solidFill>
+          <a:ln xmlns:a="http://schemas.openxmlformats.org/drawingml/2006/main" w="0">
+            <a:noFill/>
+            <a:prstDash val="solid"/>
+          </a:ln>
+        </p:spPr>
+        <p:txBody>
+          <a:bodyPr xmlns:a="http://schemas.openxmlformats.org/drawingml/2006/main" lIns="228600" tIns="114300" rIns="228600" bIns="114300" anchor="ctr">
+            <a:noAutofit/>
+          </a:bodyPr>
+          <a:lstStyle xmlns:a="http://schemas.openxmlformats.org/drawingml/2006/main"/>
+          <a:p xmlns:a="http://schemas.openxmlformats.org/drawingml/2006/main">
+            <a:pPr algn="l">
+              <a:buNone/>
               <a:defRPr sz="2400" b="0">
                 <a:solidFill>
                   <a:srgbClr val="152B3A"/>
                 </a:solidFill>
+                <a:latin typeface="Calibri"/>
+                <a:ea typeface="Calibri"/>
+                <a:cs typeface="Calibri"/>
               </a:defRPr>
             </a:pPr>
             <a:r>
@@ -6058,16 +7594,23 @@
                 <a:solidFill>
                   <a:srgbClr val="152B3A"/>
                 </a:solidFill>
+                <a:latin typeface="Calibri"/>
+                <a:ea typeface="Calibri"/>
+                <a:cs typeface="Calibri"/>
               </a:rPr>
               <a:t>Jupiter — gas giant</a:t>
             </a:r>
           </a:p>
           <a:p xmlns:a="http://schemas.openxmlformats.org/drawingml/2006/main">
-            <a:pPr>
+            <a:pPr algn="l">
+              <a:buNone/>
               <a:defRPr sz="2400" b="0">
                 <a:solidFill>
                   <a:srgbClr val="152B3A"/>
                 </a:solidFill>
+                <a:latin typeface="Calibri"/>
+                <a:ea typeface="Calibri"/>
+                <a:cs typeface="Calibri"/>
               </a:defRPr>
             </a:pPr>
             <a:r>
@@ -6075,16 +7618,23 @@
                 <a:solidFill>
                   <a:srgbClr val="152B3A"/>
                 </a:solidFill>
+                <a:latin typeface="Calibri"/>
+                <a:ea typeface="Calibri"/>
+                <a:cs typeface="Calibri"/>
               </a:rPr>
               <a:t>Saturn — gas giant</a:t>
             </a:r>
           </a:p>
           <a:p xmlns:a="http://schemas.openxmlformats.org/drawingml/2006/main">
-            <a:pPr>
+            <a:pPr algn="l">
+              <a:buNone/>
               <a:defRPr sz="2400" b="0">
                 <a:solidFill>
                   <a:srgbClr val="152B3A"/>
                 </a:solidFill>
+                <a:latin typeface="Calibri"/>
+                <a:ea typeface="Calibri"/>
+                <a:cs typeface="Calibri"/>
               </a:defRPr>
             </a:pPr>
             <a:r>
@@ -6092,16 +7642,23 @@
                 <a:solidFill>
                   <a:srgbClr val="152B3A"/>
                 </a:solidFill>
+                <a:latin typeface="Calibri"/>
+                <a:ea typeface="Calibri"/>
+                <a:cs typeface="Calibri"/>
               </a:rPr>
               <a:t>Uranus — ice giant</a:t>
             </a:r>
           </a:p>
           <a:p xmlns:a="http://schemas.openxmlformats.org/drawingml/2006/main">
-            <a:pPr>
+            <a:pPr algn="l">
+              <a:buNone/>
               <a:defRPr sz="2400" b="0">
                 <a:solidFill>
                   <a:srgbClr val="152B3A"/>
                 </a:solidFill>
+                <a:latin typeface="Calibri"/>
+                <a:ea typeface="Calibri"/>
+                <a:cs typeface="Calibri"/>
               </a:defRPr>
             </a:pPr>
             <a:r>
@@ -6109,6 +7666,9 @@
                 <a:solidFill>
                   <a:srgbClr val="152B3A"/>
                 </a:solidFill>
+                <a:latin typeface="Calibri"/>
+                <a:ea typeface="Calibri"/>
+                <a:cs typeface="Calibri"/>
               </a:rPr>
               <a:t>Neptune — ice giant</a:t>
             </a:r>
@@ -6131,7 +7691,7 @@
     <p:bg>
       <p:bgPr>
         <a:solidFill xmlns:a="http://schemas.openxmlformats.org/drawingml/2006/main">
-          <a:srgbClr val="F5F1E8"/>
+          <a:srgbClr val="FAF9F5"/>
         </a:solidFill>
       </p:bgPr>
     </p:bg>
@@ -6160,8 +7720,8 @@
         </p:nvSpPr>
         <p:spPr>
           <a:xfrm xmlns:a="http://schemas.openxmlformats.org/drawingml/2006/main">
-            <a:off x="609600" y="552450"/>
-            <a:ext cx="781050" cy="57150"/>
+            <a:off x="609600" y="733425"/>
+            <a:ext cx="781050" cy="38100"/>
           </a:xfrm>
           <a:prstGeom xmlns:a="http://schemas.openxmlformats.org/drawingml/2006/main" prst="rect">
             <a:avLst/>
@@ -6191,34 +7751,43 @@
         </p:nvSpPr>
         <p:spPr>
           <a:xfrm xmlns:a="http://schemas.openxmlformats.org/drawingml/2006/main">
-            <a:off x="609600" y="762000"/>
-            <a:ext cx="8572500" cy="285750"/>
-          </a:xfrm>
-          <a:prstGeom xmlns:a="http://schemas.openxmlformats.org/drawingml/2006/main" prst="rect">
-            <a:avLst/>
-          </a:prstGeom>
-          <a:noFill xmlns:a="http://schemas.openxmlformats.org/drawingml/2006/main"/>
-          <a:ln xmlns:a="http://schemas.openxmlformats.org/drawingml/2006/main" w="0">
-            <a:noFill/>
-            <a:prstDash val="solid"/>
-          </a:ln>
-        </p:spPr>
-        <p:txBody>
-          <a:bodyPr xmlns:a="http://schemas.openxmlformats.org/drawingml/2006/main" lIns="0" tIns="0" rIns="0" bIns="0" anchor="ctr"/>
-          <a:lstStyle xmlns:a="http://schemas.openxmlformats.org/drawingml/2006/main"/>
-          <a:p xmlns:a="http://schemas.openxmlformats.org/drawingml/2006/main">
-            <a:pPr>
-              <a:defRPr sz="1500" b="1">
+            <a:off x="609600" y="342900"/>
+            <a:ext cx="9334500" cy="304800"/>
+          </a:xfrm>
+          <a:prstGeom xmlns:a="http://schemas.openxmlformats.org/drawingml/2006/main" prst="rect">
+            <a:avLst/>
+          </a:prstGeom>
+          <a:noFill xmlns:a="http://schemas.openxmlformats.org/drawingml/2006/main"/>
+          <a:ln xmlns:a="http://schemas.openxmlformats.org/drawingml/2006/main" w="0">
+            <a:noFill/>
+            <a:prstDash val="solid"/>
+          </a:ln>
+        </p:spPr>
+        <p:txBody>
+          <a:bodyPr xmlns:a="http://schemas.openxmlformats.org/drawingml/2006/main" lIns="0" tIns="0" rIns="0" bIns="0" anchor="ctr">
+            <a:noAutofit/>
+          </a:bodyPr>
+          <a:lstStyle xmlns:a="http://schemas.openxmlformats.org/drawingml/2006/main"/>
+          <a:p xmlns:a="http://schemas.openxmlformats.org/drawingml/2006/main">
+            <a:pPr algn="l">
+              <a:buNone/>
+              <a:defRPr sz="1350" b="1">
                 <a:solidFill>
                   <a:srgbClr val="28685E"/>
                 </a:solidFill>
-              </a:defRPr>
-            </a:pPr>
-            <a:r>
-              <a:rPr sz="1500" b="1">
+                <a:latin typeface="Calibri"/>
+                <a:ea typeface="Calibri"/>
+                <a:cs typeface="Calibri"/>
+              </a:defRPr>
+            </a:pPr>
+            <a:r>
+              <a:rPr sz="1350" b="1">
                 <a:solidFill>
                   <a:srgbClr val="28685E"/>
                 </a:solidFill>
+                <a:latin typeface="Calibri"/>
+                <a:ea typeface="Calibri"/>
+                <a:cs typeface="Calibri"/>
               </a:rPr>
               <a:t>MADE BY MATT  /  GROW SCIENCE</a:t>
             </a:r>
@@ -6241,34 +7810,43 @@
         </p:nvSpPr>
         <p:spPr>
           <a:xfrm xmlns:a="http://schemas.openxmlformats.org/drawingml/2006/main">
-            <a:off x="609600" y="1352550"/>
-            <a:ext cx="10972800" cy="952500"/>
-          </a:xfrm>
-          <a:prstGeom xmlns:a="http://schemas.openxmlformats.org/drawingml/2006/main" prst="rect">
-            <a:avLst/>
-          </a:prstGeom>
-          <a:noFill xmlns:a="http://schemas.openxmlformats.org/drawingml/2006/main"/>
-          <a:ln xmlns:a="http://schemas.openxmlformats.org/drawingml/2006/main" w="0">
-            <a:noFill/>
-            <a:prstDash val="solid"/>
-          </a:ln>
-        </p:spPr>
-        <p:txBody>
-          <a:bodyPr xmlns:a="http://schemas.openxmlformats.org/drawingml/2006/main" lIns="0" tIns="0" rIns="0" bIns="0" anchor="ctr"/>
-          <a:lstStyle xmlns:a="http://schemas.openxmlformats.org/drawingml/2006/main"/>
-          <a:p xmlns:a="http://schemas.openxmlformats.org/drawingml/2006/main">
-            <a:pPr>
-              <a:defRPr sz="3750" b="1">
-                <a:solidFill>
-                  <a:srgbClr val="152B3A"/>
-                </a:solidFill>
-              </a:defRPr>
-            </a:pPr>
-            <a:r>
-              <a:rPr sz="3750" b="1">
-                <a:solidFill>
-                  <a:srgbClr val="152B3A"/>
-                </a:solidFill>
+            <a:off x="609600" y="990600"/>
+            <a:ext cx="10972800" cy="1000125"/>
+          </a:xfrm>
+          <a:prstGeom xmlns:a="http://schemas.openxmlformats.org/drawingml/2006/main" prst="rect">
+            <a:avLst/>
+          </a:prstGeom>
+          <a:noFill xmlns:a="http://schemas.openxmlformats.org/drawingml/2006/main"/>
+          <a:ln xmlns:a="http://schemas.openxmlformats.org/drawingml/2006/main" w="0">
+            <a:noFill/>
+            <a:prstDash val="solid"/>
+          </a:ln>
+        </p:spPr>
+        <p:txBody>
+          <a:bodyPr xmlns:a="http://schemas.openxmlformats.org/drawingml/2006/main" lIns="0" tIns="0" rIns="0" bIns="0" anchor="ctr">
+            <a:noAutofit/>
+          </a:bodyPr>
+          <a:lstStyle xmlns:a="http://schemas.openxmlformats.org/drawingml/2006/main"/>
+          <a:p xmlns:a="http://schemas.openxmlformats.org/drawingml/2006/main">
+            <a:pPr algn="l">
+              <a:buNone/>
+              <a:defRPr sz="3675" b="1">
+                <a:solidFill>
+                  <a:srgbClr val="152B3A"/>
+                </a:solidFill>
+                <a:latin typeface="Calibri"/>
+                <a:ea typeface="Calibri"/>
+                <a:cs typeface="Calibri"/>
+              </a:defRPr>
+            </a:pPr>
+            <a:r>
+              <a:rPr sz="3675" b="1">
+                <a:solidFill>
+                  <a:srgbClr val="152B3A"/>
+                </a:solidFill>
+                <a:latin typeface="Calibri"/>
+                <a:ea typeface="Calibri"/>
+                <a:cs typeface="Calibri"/>
               </a:rPr>
               <a:t>Gravity changes the direction</a:t>
             </a:r>
@@ -6291,14 +7869,14 @@
         </p:nvSpPr>
         <p:spPr>
           <a:xfrm xmlns:a="http://schemas.openxmlformats.org/drawingml/2006/main">
-            <a:off x="609600" y="6219825"/>
+            <a:off x="609600" y="6191250"/>
             <a:ext cx="10972800" cy="9525"/>
           </a:xfrm>
           <a:prstGeom xmlns:a="http://schemas.openxmlformats.org/drawingml/2006/main" prst="rect">
             <a:avLst/>
           </a:prstGeom>
           <a:solidFill xmlns:a="http://schemas.openxmlformats.org/drawingml/2006/main">
-            <a:srgbClr val="DCE7DD"/>
+            <a:srgbClr val="CEDBD3"/>
           </a:solidFill>
           <a:ln xmlns:a="http://schemas.openxmlformats.org/drawingml/2006/main" w="0">
             <a:noFill/>
@@ -6322,34 +7900,43 @@
         </p:nvSpPr>
         <p:spPr>
           <a:xfrm xmlns:a="http://schemas.openxmlformats.org/drawingml/2006/main">
-            <a:off x="609600" y="6381750"/>
-            <a:ext cx="9906000" cy="228600"/>
-          </a:xfrm>
-          <a:prstGeom xmlns:a="http://schemas.openxmlformats.org/drawingml/2006/main" prst="rect">
-            <a:avLst/>
-          </a:prstGeom>
-          <a:noFill xmlns:a="http://schemas.openxmlformats.org/drawingml/2006/main"/>
-          <a:ln xmlns:a="http://schemas.openxmlformats.org/drawingml/2006/main" w="0">
-            <a:noFill/>
-            <a:prstDash val="solid"/>
-          </a:ln>
-        </p:spPr>
-        <p:txBody>
-          <a:bodyPr xmlns:a="http://schemas.openxmlformats.org/drawingml/2006/main" lIns="0" tIns="0" rIns="0" bIns="0" anchor="ctr"/>
-          <a:lstStyle xmlns:a="http://schemas.openxmlformats.org/drawingml/2006/main"/>
-          <a:p xmlns:a="http://schemas.openxmlformats.org/drawingml/2006/main">
-            <a:pPr>
-              <a:defRPr sz="1275" b="0">
+            <a:off x="609600" y="6419850"/>
+            <a:ext cx="9525000" cy="219075"/>
+          </a:xfrm>
+          <a:prstGeom xmlns:a="http://schemas.openxmlformats.org/drawingml/2006/main" prst="rect">
+            <a:avLst/>
+          </a:prstGeom>
+          <a:noFill xmlns:a="http://schemas.openxmlformats.org/drawingml/2006/main"/>
+          <a:ln xmlns:a="http://schemas.openxmlformats.org/drawingml/2006/main" w="0">
+            <a:noFill/>
+            <a:prstDash val="solid"/>
+          </a:ln>
+        </p:spPr>
+        <p:txBody>
+          <a:bodyPr xmlns:a="http://schemas.openxmlformats.org/drawingml/2006/main" lIns="0" tIns="0" rIns="0" bIns="0" anchor="ctr">
+            <a:noAutofit/>
+          </a:bodyPr>
+          <a:lstStyle xmlns:a="http://schemas.openxmlformats.org/drawingml/2006/main"/>
+          <a:p xmlns:a="http://schemas.openxmlformats.org/drawingml/2006/main">
+            <a:pPr algn="l">
+              <a:buNone/>
+              <a:defRPr sz="1200" b="0">
                 <a:solidFill>
                   <a:srgbClr val="50616B"/>
                 </a:solidFill>
-              </a:defRPr>
-            </a:pPr>
-            <a:r>
-              <a:rPr sz="1275" b="0">
+                <a:latin typeface="Calibri"/>
+                <a:ea typeface="Calibri"/>
+                <a:cs typeface="Calibri"/>
+              </a:defRPr>
+            </a:pPr>
+            <a:r>
+              <a:rPr sz="1200" b="0">
                 <a:solidFill>
                   <a:srgbClr val="50616B"/>
                 </a:solidFill>
+                <a:latin typeface="Calibri"/>
+                <a:ea typeface="Calibri"/>
+                <a:cs typeface="Calibri"/>
               </a:rPr>
               <a:t>AUTUMN 1  ·  WEEK 6  ·  LESSON A</a:t>
             </a:r>
@@ -6372,27 +7959,33 @@
         </p:nvSpPr>
         <p:spPr>
           <a:xfrm xmlns:a="http://schemas.openxmlformats.org/drawingml/2006/main">
-            <a:off x="11106150" y="6362700"/>
-            <a:ext cx="476250" cy="238125"/>
-          </a:xfrm>
-          <a:prstGeom xmlns:a="http://schemas.openxmlformats.org/drawingml/2006/main" prst="rect">
-            <a:avLst/>
-          </a:prstGeom>
-          <a:noFill xmlns:a="http://schemas.openxmlformats.org/drawingml/2006/main"/>
-          <a:ln xmlns:a="http://schemas.openxmlformats.org/drawingml/2006/main" w="0">
-            <a:noFill/>
-            <a:prstDash val="solid"/>
-          </a:ln>
-        </p:spPr>
-        <p:txBody>
-          <a:bodyPr xmlns:a="http://schemas.openxmlformats.org/drawingml/2006/main" lIns="0" tIns="0" rIns="0" bIns="0" anchor="ctr"/>
-          <a:lstStyle xmlns:a="http://schemas.openxmlformats.org/drawingml/2006/main"/>
-          <a:p xmlns:a="http://schemas.openxmlformats.org/drawingml/2006/main">
-            <a:pPr>
+            <a:off x="11106150" y="6400800"/>
+            <a:ext cx="476250" cy="247650"/>
+          </a:xfrm>
+          <a:prstGeom xmlns:a="http://schemas.openxmlformats.org/drawingml/2006/main" prst="rect">
+            <a:avLst/>
+          </a:prstGeom>
+          <a:noFill xmlns:a="http://schemas.openxmlformats.org/drawingml/2006/main"/>
+          <a:ln xmlns:a="http://schemas.openxmlformats.org/drawingml/2006/main" w="0">
+            <a:noFill/>
+            <a:prstDash val="solid"/>
+          </a:ln>
+        </p:spPr>
+        <p:txBody>
+          <a:bodyPr xmlns:a="http://schemas.openxmlformats.org/drawingml/2006/main" lIns="0" tIns="0" rIns="0" bIns="0" anchor="ctr">
+            <a:noAutofit/>
+          </a:bodyPr>
+          <a:lstStyle xmlns:a="http://schemas.openxmlformats.org/drawingml/2006/main"/>
+          <a:p xmlns:a="http://schemas.openxmlformats.org/drawingml/2006/main">
+            <a:pPr algn="l">
+              <a:buNone/>
               <a:defRPr sz="1350" b="1">
                 <a:solidFill>
                   <a:srgbClr val="28685E"/>
                 </a:solidFill>
+                <a:latin typeface="Calibri"/>
+                <a:ea typeface="Calibri"/>
+                <a:cs typeface="Calibri"/>
               </a:defRPr>
             </a:pPr>
             <a:r>
@@ -6400,6 +7993,9 @@
                 <a:solidFill>
                   <a:srgbClr val="28685E"/>
                 </a:solidFill>
+                <a:latin typeface="Calibri"/>
+                <a:ea typeface="Calibri"/>
+                <a:cs typeface="Calibri"/>
               </a:rPr>
               <a:t>05</a:t>
             </a:r>
@@ -6598,6 +8194,7 @@
           <a:lstStyle xmlns:a="http://schemas.openxmlformats.org/drawingml/2006/main"/>
           <a:p xmlns:a="http://schemas.openxmlformats.org/drawingml/2006/main">
             <a:pPr>
+              <a:buNone/>
               <a:defRPr sz="1950" b="1">
                 <a:solidFill>
                   <a:srgbClr val="152B3A"/>
@@ -6648,6 +8245,7 @@
           <a:lstStyle xmlns:a="http://schemas.openxmlformats.org/drawingml/2006/main"/>
           <a:p xmlns:a="http://schemas.openxmlformats.org/drawingml/2006/main">
             <a:pPr>
+              <a:buNone/>
               <a:defRPr sz="1950" b="1">
                 <a:solidFill>
                   <a:srgbClr val="152B3A"/>
@@ -6698,6 +8296,7 @@
           <a:lstStyle xmlns:a="http://schemas.openxmlformats.org/drawingml/2006/main"/>
           <a:p xmlns:a="http://schemas.openxmlformats.org/drawingml/2006/main">
             <a:pPr>
+              <a:buNone/>
               <a:defRPr sz="1800" b="1">
                 <a:solidFill>
                   <a:srgbClr val="A65D25"/>
@@ -6748,6 +8347,7 @@
           <a:lstStyle xmlns:a="http://schemas.openxmlformats.org/drawingml/2006/main"/>
           <a:p xmlns:a="http://schemas.openxmlformats.org/drawingml/2006/main">
             <a:pPr>
+              <a:buNone/>
               <a:defRPr sz="1800" b="1">
                 <a:solidFill>
                   <a:srgbClr val="28685E"/>
@@ -6781,34 +8381,43 @@
         </p:nvSpPr>
         <p:spPr>
           <a:xfrm xmlns:a="http://schemas.openxmlformats.org/drawingml/2006/main">
-            <a:off x="6667500" y="2714625"/>
-            <a:ext cx="4857750" cy="1762125"/>
-          </a:xfrm>
-          <a:prstGeom xmlns:a="http://schemas.openxmlformats.org/drawingml/2006/main" prst="rect">
-            <a:avLst/>
-          </a:prstGeom>
-          <a:noFill xmlns:a="http://schemas.openxmlformats.org/drawingml/2006/main"/>
-          <a:ln xmlns:a="http://schemas.openxmlformats.org/drawingml/2006/main" w="0">
-            <a:noFill/>
-            <a:prstDash val="solid"/>
-          </a:ln>
-        </p:spPr>
-        <p:txBody>
-          <a:bodyPr xmlns:a="http://schemas.openxmlformats.org/drawingml/2006/main" lIns="0" tIns="0" rIns="0" bIns="0" anchor="ctr"/>
-          <a:lstStyle xmlns:a="http://schemas.openxmlformats.org/drawingml/2006/main"/>
-          <a:p xmlns:a="http://schemas.openxmlformats.org/drawingml/2006/main">
-            <a:pPr>
-              <a:defRPr sz="2550" b="1">
-                <a:solidFill>
-                  <a:srgbClr val="152B3A"/>
-                </a:solidFill>
-              </a:defRPr>
-            </a:pPr>
-            <a:r>
-              <a:rPr sz="2550" b="1">
-                <a:solidFill>
-                  <a:srgbClr val="152B3A"/>
-                </a:solidFill>
+            <a:off x="6667500" y="2476500"/>
+            <a:ext cx="4914900" cy="2095500"/>
+          </a:xfrm>
+          <a:prstGeom xmlns:a="http://schemas.openxmlformats.org/drawingml/2006/main" prst="rect">
+            <a:avLst/>
+          </a:prstGeom>
+          <a:noFill xmlns:a="http://schemas.openxmlformats.org/drawingml/2006/main"/>
+          <a:ln xmlns:a="http://schemas.openxmlformats.org/drawingml/2006/main" w="0">
+            <a:noFill/>
+            <a:prstDash val="solid"/>
+          </a:ln>
+        </p:spPr>
+        <p:txBody>
+          <a:bodyPr xmlns:a="http://schemas.openxmlformats.org/drawingml/2006/main" lIns="0" tIns="0" rIns="0" bIns="0" anchor="ctr">
+            <a:noAutofit/>
+          </a:bodyPr>
+          <a:lstStyle xmlns:a="http://schemas.openxmlformats.org/drawingml/2006/main"/>
+          <a:p xmlns:a="http://schemas.openxmlformats.org/drawingml/2006/main">
+            <a:pPr algn="l">
+              <a:buNone/>
+              <a:defRPr sz="2625" b="1">
+                <a:solidFill>
+                  <a:srgbClr val="152B3A"/>
+                </a:solidFill>
+                <a:latin typeface="Calibri"/>
+                <a:ea typeface="Calibri"/>
+                <a:cs typeface="Calibri"/>
+              </a:defRPr>
+            </a:pPr>
+            <a:r>
+              <a:rPr sz="2625" b="1">
+                <a:solidFill>
+                  <a:srgbClr val="152B3A"/>
+                </a:solidFill>
+                <a:latin typeface="Calibri"/>
+                <a:ea typeface="Calibri"/>
+                <a:cs typeface="Calibri"/>
               </a:rPr>
               <a:t>Motion is along the path. Gravity pulls towards the Sun.</a:t>
             </a:r>
@@ -6831,27 +8440,33 @@
         </p:nvSpPr>
         <p:spPr>
           <a:xfrm xmlns:a="http://schemas.openxmlformats.org/drawingml/2006/main">
-            <a:off x="6667500" y="4714875"/>
-            <a:ext cx="4857750" cy="1000125"/>
-          </a:xfrm>
-          <a:prstGeom xmlns:a="http://schemas.openxmlformats.org/drawingml/2006/main" prst="rect">
-            <a:avLst/>
-          </a:prstGeom>
-          <a:noFill xmlns:a="http://schemas.openxmlformats.org/drawingml/2006/main"/>
-          <a:ln xmlns:a="http://schemas.openxmlformats.org/drawingml/2006/main" w="0">
-            <a:noFill/>
-            <a:prstDash val="solid"/>
-          </a:ln>
-        </p:spPr>
-        <p:txBody>
-          <a:bodyPr xmlns:a="http://schemas.openxmlformats.org/drawingml/2006/main" lIns="0" tIns="0" rIns="0" bIns="0" anchor="ctr"/>
-          <a:lstStyle xmlns:a="http://schemas.openxmlformats.org/drawingml/2006/main"/>
-          <a:p xmlns:a="http://schemas.openxmlformats.org/drawingml/2006/main">
-            <a:pPr>
+            <a:off x="6667500" y="4781550"/>
+            <a:ext cx="4914900" cy="1057275"/>
+          </a:xfrm>
+          <a:prstGeom xmlns:a="http://schemas.openxmlformats.org/drawingml/2006/main" prst="rect">
+            <a:avLst/>
+          </a:prstGeom>
+          <a:noFill xmlns:a="http://schemas.openxmlformats.org/drawingml/2006/main"/>
+          <a:ln xmlns:a="http://schemas.openxmlformats.org/drawingml/2006/main" w="0">
+            <a:noFill/>
+            <a:prstDash val="solid"/>
+          </a:ln>
+        </p:spPr>
+        <p:txBody>
+          <a:bodyPr xmlns:a="http://schemas.openxmlformats.org/drawingml/2006/main" lIns="0" tIns="0" rIns="0" bIns="0" anchor="ctr">
+            <a:noAutofit/>
+          </a:bodyPr>
+          <a:lstStyle xmlns:a="http://schemas.openxmlformats.org/drawingml/2006/main"/>
+          <a:p xmlns:a="http://schemas.openxmlformats.org/drawingml/2006/main">
+            <a:pPr algn="l">
+              <a:buNone/>
               <a:defRPr sz="2175" b="0">
                 <a:solidFill>
                   <a:srgbClr val="28685E"/>
                 </a:solidFill>
+                <a:latin typeface="Calibri"/>
+                <a:ea typeface="Calibri"/>
+                <a:cs typeface="Calibri"/>
               </a:defRPr>
             </a:pPr>
             <a:r>
@@ -6859,6 +8474,9 @@
                 <a:solidFill>
                   <a:srgbClr val="28685E"/>
                 </a:solidFill>
+                <a:latin typeface="Calibri"/>
+                <a:ea typeface="Calibri"/>
+                <a:cs typeface="Calibri"/>
               </a:rPr>
               <a:t>Motion direction is not another force.</a:t>
             </a:r>
@@ -6881,7 +8499,7 @@
     <p:bg>
       <p:bgPr>
         <a:solidFill xmlns:a="http://schemas.openxmlformats.org/drawingml/2006/main">
-          <a:srgbClr val="F5F1E8"/>
+          <a:srgbClr val="FAF9F5"/>
         </a:solidFill>
       </p:bgPr>
     </p:bg>
@@ -6910,8 +8528,8 @@
         </p:nvSpPr>
         <p:spPr>
           <a:xfrm xmlns:a="http://schemas.openxmlformats.org/drawingml/2006/main">
-            <a:off x="609600" y="552450"/>
-            <a:ext cx="781050" cy="57150"/>
+            <a:off x="609600" y="733425"/>
+            <a:ext cx="781050" cy="38100"/>
           </a:xfrm>
           <a:prstGeom xmlns:a="http://schemas.openxmlformats.org/drawingml/2006/main" prst="rect">
             <a:avLst/>
@@ -6941,34 +8559,43 @@
         </p:nvSpPr>
         <p:spPr>
           <a:xfrm xmlns:a="http://schemas.openxmlformats.org/drawingml/2006/main">
-            <a:off x="609600" y="762000"/>
-            <a:ext cx="8572500" cy="285750"/>
-          </a:xfrm>
-          <a:prstGeom xmlns:a="http://schemas.openxmlformats.org/drawingml/2006/main" prst="rect">
-            <a:avLst/>
-          </a:prstGeom>
-          <a:noFill xmlns:a="http://schemas.openxmlformats.org/drawingml/2006/main"/>
-          <a:ln xmlns:a="http://schemas.openxmlformats.org/drawingml/2006/main" w="0">
-            <a:noFill/>
-            <a:prstDash val="solid"/>
-          </a:ln>
-        </p:spPr>
-        <p:txBody>
-          <a:bodyPr xmlns:a="http://schemas.openxmlformats.org/drawingml/2006/main" lIns="0" tIns="0" rIns="0" bIns="0" anchor="ctr"/>
-          <a:lstStyle xmlns:a="http://schemas.openxmlformats.org/drawingml/2006/main"/>
-          <a:p xmlns:a="http://schemas.openxmlformats.org/drawingml/2006/main">
-            <a:pPr>
-              <a:defRPr sz="1500" b="1">
+            <a:off x="609600" y="342900"/>
+            <a:ext cx="9334500" cy="304800"/>
+          </a:xfrm>
+          <a:prstGeom xmlns:a="http://schemas.openxmlformats.org/drawingml/2006/main" prst="rect">
+            <a:avLst/>
+          </a:prstGeom>
+          <a:noFill xmlns:a="http://schemas.openxmlformats.org/drawingml/2006/main"/>
+          <a:ln xmlns:a="http://schemas.openxmlformats.org/drawingml/2006/main" w="0">
+            <a:noFill/>
+            <a:prstDash val="solid"/>
+          </a:ln>
+        </p:spPr>
+        <p:txBody>
+          <a:bodyPr xmlns:a="http://schemas.openxmlformats.org/drawingml/2006/main" lIns="0" tIns="0" rIns="0" bIns="0" anchor="ctr">
+            <a:noAutofit/>
+          </a:bodyPr>
+          <a:lstStyle xmlns:a="http://schemas.openxmlformats.org/drawingml/2006/main"/>
+          <a:p xmlns:a="http://schemas.openxmlformats.org/drawingml/2006/main">
+            <a:pPr algn="l">
+              <a:buNone/>
+              <a:defRPr sz="1350" b="1">
                 <a:solidFill>
                   <a:srgbClr val="28685E"/>
                 </a:solidFill>
-              </a:defRPr>
-            </a:pPr>
-            <a:r>
-              <a:rPr sz="1500" b="1">
+                <a:latin typeface="Calibri"/>
+                <a:ea typeface="Calibri"/>
+                <a:cs typeface="Calibri"/>
+              </a:defRPr>
+            </a:pPr>
+            <a:r>
+              <a:rPr sz="1350" b="1">
                 <a:solidFill>
                   <a:srgbClr val="28685E"/>
                 </a:solidFill>
+                <a:latin typeface="Calibri"/>
+                <a:ea typeface="Calibri"/>
+                <a:cs typeface="Calibri"/>
               </a:rPr>
               <a:t>MADE BY MATT  /  GROW SCIENCE</a:t>
             </a:r>
@@ -6991,34 +8618,43 @@
         </p:nvSpPr>
         <p:spPr>
           <a:xfrm xmlns:a="http://schemas.openxmlformats.org/drawingml/2006/main">
-            <a:off x="609600" y="1352550"/>
-            <a:ext cx="10972800" cy="952500"/>
-          </a:xfrm>
-          <a:prstGeom xmlns:a="http://schemas.openxmlformats.org/drawingml/2006/main" prst="rect">
-            <a:avLst/>
-          </a:prstGeom>
-          <a:noFill xmlns:a="http://schemas.openxmlformats.org/drawingml/2006/main"/>
-          <a:ln xmlns:a="http://schemas.openxmlformats.org/drawingml/2006/main" w="0">
-            <a:noFill/>
-            <a:prstDash val="solid"/>
-          </a:ln>
-        </p:spPr>
-        <p:txBody>
-          <a:bodyPr xmlns:a="http://schemas.openxmlformats.org/drawingml/2006/main" lIns="0" tIns="0" rIns="0" bIns="0" anchor="ctr"/>
-          <a:lstStyle xmlns:a="http://schemas.openxmlformats.org/drawingml/2006/main"/>
-          <a:p xmlns:a="http://schemas.openxmlformats.org/drawingml/2006/main">
-            <a:pPr>
-              <a:defRPr sz="3750" b="1">
-                <a:solidFill>
-                  <a:srgbClr val="152B3A"/>
-                </a:solidFill>
-              </a:defRPr>
-            </a:pPr>
-            <a:r>
-              <a:rPr sz="3750" b="1">
-                <a:solidFill>
-                  <a:srgbClr val="152B3A"/>
-                </a:solidFill>
+            <a:off x="609600" y="990600"/>
+            <a:ext cx="10972800" cy="1000125"/>
+          </a:xfrm>
+          <a:prstGeom xmlns:a="http://schemas.openxmlformats.org/drawingml/2006/main" prst="rect">
+            <a:avLst/>
+          </a:prstGeom>
+          <a:noFill xmlns:a="http://schemas.openxmlformats.org/drawingml/2006/main"/>
+          <a:ln xmlns:a="http://schemas.openxmlformats.org/drawingml/2006/main" w="0">
+            <a:noFill/>
+            <a:prstDash val="solid"/>
+          </a:ln>
+        </p:spPr>
+        <p:txBody>
+          <a:bodyPr xmlns:a="http://schemas.openxmlformats.org/drawingml/2006/main" lIns="0" tIns="0" rIns="0" bIns="0" anchor="ctr">
+            <a:noAutofit/>
+          </a:bodyPr>
+          <a:lstStyle xmlns:a="http://schemas.openxmlformats.org/drawingml/2006/main"/>
+          <a:p xmlns:a="http://schemas.openxmlformats.org/drawingml/2006/main">
+            <a:pPr algn="l">
+              <a:buNone/>
+              <a:defRPr sz="3675" b="1">
+                <a:solidFill>
+                  <a:srgbClr val="152B3A"/>
+                </a:solidFill>
+                <a:latin typeface="Calibri"/>
+                <a:ea typeface="Calibri"/>
+                <a:cs typeface="Calibri"/>
+              </a:defRPr>
+            </a:pPr>
+            <a:r>
+              <a:rPr sz="3675" b="1">
+                <a:solidFill>
+                  <a:srgbClr val="152B3A"/>
+                </a:solidFill>
+                <a:latin typeface="Calibri"/>
+                <a:ea typeface="Calibri"/>
+                <a:cs typeface="Calibri"/>
               </a:rPr>
               <a:t>Move the model, then challenge it</a:t>
             </a:r>
@@ -7041,14 +8677,14 @@
         </p:nvSpPr>
         <p:spPr>
           <a:xfrm xmlns:a="http://schemas.openxmlformats.org/drawingml/2006/main">
-            <a:off x="609600" y="6219825"/>
+            <a:off x="609600" y="6191250"/>
             <a:ext cx="10972800" cy="9525"/>
           </a:xfrm>
           <a:prstGeom xmlns:a="http://schemas.openxmlformats.org/drawingml/2006/main" prst="rect">
             <a:avLst/>
           </a:prstGeom>
           <a:solidFill xmlns:a="http://schemas.openxmlformats.org/drawingml/2006/main">
-            <a:srgbClr val="DCE7DD"/>
+            <a:srgbClr val="CEDBD3"/>
           </a:solidFill>
           <a:ln xmlns:a="http://schemas.openxmlformats.org/drawingml/2006/main" w="0">
             <a:noFill/>
@@ -7072,34 +8708,43 @@
         </p:nvSpPr>
         <p:spPr>
           <a:xfrm xmlns:a="http://schemas.openxmlformats.org/drawingml/2006/main">
-            <a:off x="609600" y="6381750"/>
-            <a:ext cx="9906000" cy="228600"/>
-          </a:xfrm>
-          <a:prstGeom xmlns:a="http://schemas.openxmlformats.org/drawingml/2006/main" prst="rect">
-            <a:avLst/>
-          </a:prstGeom>
-          <a:noFill xmlns:a="http://schemas.openxmlformats.org/drawingml/2006/main"/>
-          <a:ln xmlns:a="http://schemas.openxmlformats.org/drawingml/2006/main" w="0">
-            <a:noFill/>
-            <a:prstDash val="solid"/>
-          </a:ln>
-        </p:spPr>
-        <p:txBody>
-          <a:bodyPr xmlns:a="http://schemas.openxmlformats.org/drawingml/2006/main" lIns="0" tIns="0" rIns="0" bIns="0" anchor="ctr"/>
-          <a:lstStyle xmlns:a="http://schemas.openxmlformats.org/drawingml/2006/main"/>
-          <a:p xmlns:a="http://schemas.openxmlformats.org/drawingml/2006/main">
-            <a:pPr>
-              <a:defRPr sz="1275" b="0">
+            <a:off x="609600" y="6419850"/>
+            <a:ext cx="9525000" cy="219075"/>
+          </a:xfrm>
+          <a:prstGeom xmlns:a="http://schemas.openxmlformats.org/drawingml/2006/main" prst="rect">
+            <a:avLst/>
+          </a:prstGeom>
+          <a:noFill xmlns:a="http://schemas.openxmlformats.org/drawingml/2006/main"/>
+          <a:ln xmlns:a="http://schemas.openxmlformats.org/drawingml/2006/main" w="0">
+            <a:noFill/>
+            <a:prstDash val="solid"/>
+          </a:ln>
+        </p:spPr>
+        <p:txBody>
+          <a:bodyPr xmlns:a="http://schemas.openxmlformats.org/drawingml/2006/main" lIns="0" tIns="0" rIns="0" bIns="0" anchor="ctr">
+            <a:noAutofit/>
+          </a:bodyPr>
+          <a:lstStyle xmlns:a="http://schemas.openxmlformats.org/drawingml/2006/main"/>
+          <a:p xmlns:a="http://schemas.openxmlformats.org/drawingml/2006/main">
+            <a:pPr algn="l">
+              <a:buNone/>
+              <a:defRPr sz="1200" b="0">
                 <a:solidFill>
                   <a:srgbClr val="50616B"/>
                 </a:solidFill>
-              </a:defRPr>
-            </a:pPr>
-            <a:r>
-              <a:rPr sz="1275" b="0">
+                <a:latin typeface="Calibri"/>
+                <a:ea typeface="Calibri"/>
+                <a:cs typeface="Calibri"/>
+              </a:defRPr>
+            </a:pPr>
+            <a:r>
+              <a:rPr sz="1200" b="0">
                 <a:solidFill>
                   <a:srgbClr val="50616B"/>
                 </a:solidFill>
+                <a:latin typeface="Calibri"/>
+                <a:ea typeface="Calibri"/>
+                <a:cs typeface="Calibri"/>
               </a:rPr>
               <a:t>AUTUMN 1  ·  WEEK 6  ·  LESSON A</a:t>
             </a:r>
@@ -7122,27 +8767,33 @@
         </p:nvSpPr>
         <p:spPr>
           <a:xfrm xmlns:a="http://schemas.openxmlformats.org/drawingml/2006/main">
-            <a:off x="11106150" y="6362700"/>
-            <a:ext cx="476250" cy="238125"/>
-          </a:xfrm>
-          <a:prstGeom xmlns:a="http://schemas.openxmlformats.org/drawingml/2006/main" prst="rect">
-            <a:avLst/>
-          </a:prstGeom>
-          <a:noFill xmlns:a="http://schemas.openxmlformats.org/drawingml/2006/main"/>
-          <a:ln xmlns:a="http://schemas.openxmlformats.org/drawingml/2006/main" w="0">
-            <a:noFill/>
-            <a:prstDash val="solid"/>
-          </a:ln>
-        </p:spPr>
-        <p:txBody>
-          <a:bodyPr xmlns:a="http://schemas.openxmlformats.org/drawingml/2006/main" lIns="0" tIns="0" rIns="0" bIns="0" anchor="ctr"/>
-          <a:lstStyle xmlns:a="http://schemas.openxmlformats.org/drawingml/2006/main"/>
-          <a:p xmlns:a="http://schemas.openxmlformats.org/drawingml/2006/main">
-            <a:pPr>
+            <a:off x="11106150" y="6400800"/>
+            <a:ext cx="476250" cy="247650"/>
+          </a:xfrm>
+          <a:prstGeom xmlns:a="http://schemas.openxmlformats.org/drawingml/2006/main" prst="rect">
+            <a:avLst/>
+          </a:prstGeom>
+          <a:noFill xmlns:a="http://schemas.openxmlformats.org/drawingml/2006/main"/>
+          <a:ln xmlns:a="http://schemas.openxmlformats.org/drawingml/2006/main" w="0">
+            <a:noFill/>
+            <a:prstDash val="solid"/>
+          </a:ln>
+        </p:spPr>
+        <p:txBody>
+          <a:bodyPr xmlns:a="http://schemas.openxmlformats.org/drawingml/2006/main" lIns="0" tIns="0" rIns="0" bIns="0" anchor="ctr">
+            <a:noAutofit/>
+          </a:bodyPr>
+          <a:lstStyle xmlns:a="http://schemas.openxmlformats.org/drawingml/2006/main"/>
+          <a:p xmlns:a="http://schemas.openxmlformats.org/drawingml/2006/main">
+            <a:pPr algn="l">
+              <a:buNone/>
               <a:defRPr sz="1350" b="1">
                 <a:solidFill>
                   <a:srgbClr val="28685E"/>
                 </a:solidFill>
+                <a:latin typeface="Calibri"/>
+                <a:ea typeface="Calibri"/>
+                <a:cs typeface="Calibri"/>
               </a:defRPr>
             </a:pPr>
             <a:r>
@@ -7150,6 +8801,9 @@
                 <a:solidFill>
                   <a:srgbClr val="28685E"/>
                 </a:solidFill>
+                <a:latin typeface="Calibri"/>
+                <a:ea typeface="Calibri"/>
+                <a:cs typeface="Calibri"/>
               </a:rPr>
               <a:t>06</a:t>
             </a:r>
@@ -7172,34 +8826,43 @@
         </p:nvSpPr>
         <p:spPr>
           <a:xfrm xmlns:a="http://schemas.openxmlformats.org/drawingml/2006/main">
-            <a:off x="609600" y="2619375"/>
-            <a:ext cx="10972800" cy="781050"/>
-          </a:xfrm>
-          <a:prstGeom xmlns:a="http://schemas.openxmlformats.org/drawingml/2006/main" prst="rect">
-            <a:avLst/>
-          </a:prstGeom>
-          <a:noFill xmlns:a="http://schemas.openxmlformats.org/drawingml/2006/main"/>
-          <a:ln xmlns:a="http://schemas.openxmlformats.org/drawingml/2006/main" w="0">
-            <a:noFill/>
-            <a:prstDash val="solid"/>
-          </a:ln>
-        </p:spPr>
-        <p:txBody>
-          <a:bodyPr xmlns:a="http://schemas.openxmlformats.org/drawingml/2006/main" lIns="0" tIns="0" rIns="0" bIns="0" anchor="ctr"/>
-          <a:lstStyle xmlns:a="http://schemas.openxmlformats.org/drawingml/2006/main"/>
-          <a:p xmlns:a="http://schemas.openxmlformats.org/drawingml/2006/main">
-            <a:pPr>
-              <a:defRPr sz="2550" b="0">
-                <a:solidFill>
-                  <a:srgbClr val="152B3A"/>
-                </a:solidFill>
-              </a:defRPr>
-            </a:pPr>
-            <a:r>
-              <a:rPr sz="2550" b="0">
-                <a:solidFill>
-                  <a:srgbClr val="152B3A"/>
-                </a:solidFill>
+            <a:off x="1000125" y="2333625"/>
+            <a:ext cx="10382250" cy="1076325"/>
+          </a:xfrm>
+          <a:prstGeom xmlns:a="http://schemas.openxmlformats.org/drawingml/2006/main" prst="rect">
+            <a:avLst/>
+          </a:prstGeom>
+          <a:noFill xmlns:a="http://schemas.openxmlformats.org/drawingml/2006/main"/>
+          <a:ln xmlns:a="http://schemas.openxmlformats.org/drawingml/2006/main" w="0">
+            <a:noFill/>
+            <a:prstDash val="solid"/>
+          </a:ln>
+        </p:spPr>
+        <p:txBody>
+          <a:bodyPr xmlns:a="http://schemas.openxmlformats.org/drawingml/2006/main" lIns="0" tIns="0" rIns="0" bIns="0" anchor="ctr">
+            <a:noAutofit/>
+          </a:bodyPr>
+          <a:lstStyle xmlns:a="http://schemas.openxmlformats.org/drawingml/2006/main"/>
+          <a:p xmlns:a="http://schemas.openxmlformats.org/drawingml/2006/main">
+            <a:pPr algn="l">
+              <a:buNone/>
+              <a:defRPr sz="2625" b="0">
+                <a:solidFill>
+                  <a:srgbClr val="152B3A"/>
+                </a:solidFill>
+                <a:latin typeface="Calibri"/>
+                <a:ea typeface="Calibri"/>
+                <a:cs typeface="Calibri"/>
+              </a:defRPr>
+            </a:pPr>
+            <a:r>
+              <a:rPr sz="2625" b="0">
+                <a:solidFill>
+                  <a:srgbClr val="152B3A"/>
+                </a:solidFill>
+                <a:latin typeface="Calibri"/>
+                <a:ea typeface="Calibri"/>
+                <a:cs typeface="Calibri"/>
               </a:rPr>
               <a:t>Put a Sun label on the desk and an Earth counter beside it.</a:t>
             </a:r>
@@ -7222,34 +8885,43 @@
         </p:nvSpPr>
         <p:spPr>
           <a:xfrm xmlns:a="http://schemas.openxmlformats.org/drawingml/2006/main">
-            <a:off x="609600" y="3476625"/>
-            <a:ext cx="10972800" cy="781050"/>
-          </a:xfrm>
-          <a:prstGeom xmlns:a="http://schemas.openxmlformats.org/drawingml/2006/main" prst="rect">
-            <a:avLst/>
-          </a:prstGeom>
-          <a:noFill xmlns:a="http://schemas.openxmlformats.org/drawingml/2006/main"/>
-          <a:ln xmlns:a="http://schemas.openxmlformats.org/drawingml/2006/main" w="0">
-            <a:noFill/>
-            <a:prstDash val="solid"/>
-          </a:ln>
-        </p:spPr>
-        <p:txBody>
-          <a:bodyPr xmlns:a="http://schemas.openxmlformats.org/drawingml/2006/main" lIns="0" tIns="0" rIns="0" bIns="0" anchor="ctr"/>
-          <a:lstStyle xmlns:a="http://schemas.openxmlformats.org/drawingml/2006/main"/>
-          <a:p xmlns:a="http://schemas.openxmlformats.org/drawingml/2006/main">
-            <a:pPr>
-              <a:defRPr sz="2550" b="0">
-                <a:solidFill>
-                  <a:srgbClr val="152B3A"/>
-                </a:solidFill>
-              </a:defRPr>
-            </a:pPr>
-            <a:r>
-              <a:rPr sz="2550" b="0">
-                <a:solidFill>
-                  <a:srgbClr val="152B3A"/>
-                </a:solidFill>
+            <a:off x="1000125" y="3467100"/>
+            <a:ext cx="10382250" cy="1076325"/>
+          </a:xfrm>
+          <a:prstGeom xmlns:a="http://schemas.openxmlformats.org/drawingml/2006/main" prst="rect">
+            <a:avLst/>
+          </a:prstGeom>
+          <a:noFill xmlns:a="http://schemas.openxmlformats.org/drawingml/2006/main"/>
+          <a:ln xmlns:a="http://schemas.openxmlformats.org/drawingml/2006/main" w="0">
+            <a:noFill/>
+            <a:prstDash val="solid"/>
+          </a:ln>
+        </p:spPr>
+        <p:txBody>
+          <a:bodyPr xmlns:a="http://schemas.openxmlformats.org/drawingml/2006/main" lIns="0" tIns="0" rIns="0" bIns="0" anchor="ctr">
+            <a:noAutofit/>
+          </a:bodyPr>
+          <a:lstStyle xmlns:a="http://schemas.openxmlformats.org/drawingml/2006/main"/>
+          <a:p xmlns:a="http://schemas.openxmlformats.org/drawingml/2006/main">
+            <a:pPr algn="l">
+              <a:buNone/>
+              <a:defRPr sz="2625" b="0">
+                <a:solidFill>
+                  <a:srgbClr val="152B3A"/>
+                </a:solidFill>
+                <a:latin typeface="Calibri"/>
+                <a:ea typeface="Calibri"/>
+                <a:cs typeface="Calibri"/>
+              </a:defRPr>
+            </a:pPr>
+            <a:r>
+              <a:rPr sz="2625" b="0">
+                <a:solidFill>
+                  <a:srgbClr val="152B3A"/>
+                </a:solidFill>
+                <a:latin typeface="Calibri"/>
+                <a:ea typeface="Calibri"/>
+                <a:cs typeface="Calibri"/>
               </a:rPr>
               <a:t>Move Earth around the Sun. At two places, reset both arrows.</a:t>
             </a:r>
@@ -7272,36 +8944,276 @@
         </p:nvSpPr>
         <p:spPr>
           <a:xfrm xmlns:a="http://schemas.openxmlformats.org/drawingml/2006/main">
-            <a:off x="609600" y="4333875"/>
-            <a:ext cx="10972800" cy="781050"/>
-          </a:xfrm>
-          <a:prstGeom xmlns:a="http://schemas.openxmlformats.org/drawingml/2006/main" prst="rect">
-            <a:avLst/>
-          </a:prstGeom>
-          <a:noFill xmlns:a="http://schemas.openxmlformats.org/drawingml/2006/main"/>
-          <a:ln xmlns:a="http://schemas.openxmlformats.org/drawingml/2006/main" w="0">
-            <a:noFill/>
-            <a:prstDash val="solid"/>
-          </a:ln>
-        </p:spPr>
-        <p:txBody>
-          <a:bodyPr xmlns:a="http://schemas.openxmlformats.org/drawingml/2006/main" lIns="0" tIns="0" rIns="0" bIns="0" anchor="ctr"/>
-          <a:lstStyle xmlns:a="http://schemas.openxmlformats.org/drawingml/2006/main"/>
-          <a:p xmlns:a="http://schemas.openxmlformats.org/drawingml/2006/main">
-            <a:pPr>
-              <a:defRPr sz="2550" b="0">
-                <a:solidFill>
-                  <a:srgbClr val="152B3A"/>
-                </a:solidFill>
-              </a:defRPr>
-            </a:pPr>
-            <a:r>
-              <a:rPr sz="2550" b="0">
-                <a:solidFill>
-                  <a:srgbClr val="152B3A"/>
-                </a:solidFill>
+            <a:off x="1000125" y="4600575"/>
+            <a:ext cx="10382250" cy="1076325"/>
+          </a:xfrm>
+          <a:prstGeom xmlns:a="http://schemas.openxmlformats.org/drawingml/2006/main" prst="rect">
+            <a:avLst/>
+          </a:prstGeom>
+          <a:noFill xmlns:a="http://schemas.openxmlformats.org/drawingml/2006/main"/>
+          <a:ln xmlns:a="http://schemas.openxmlformats.org/drawingml/2006/main" w="0">
+            <a:noFill/>
+            <a:prstDash val="solid"/>
+          </a:ln>
+        </p:spPr>
+        <p:txBody>
+          <a:bodyPr xmlns:a="http://schemas.openxmlformats.org/drawingml/2006/main" lIns="0" tIns="0" rIns="0" bIns="0" anchor="ctr">
+            <a:noAutofit/>
+          </a:bodyPr>
+          <a:lstStyle xmlns:a="http://schemas.openxmlformats.org/drawingml/2006/main"/>
+          <a:p xmlns:a="http://schemas.openxmlformats.org/drawingml/2006/main">
+            <a:pPr algn="l">
+              <a:buNone/>
+              <a:defRPr sz="2625" b="0">
+                <a:solidFill>
+                  <a:srgbClr val="152B3A"/>
+                </a:solidFill>
+                <a:latin typeface="Calibri"/>
+                <a:ea typeface="Calibri"/>
+                <a:cs typeface="Calibri"/>
+              </a:defRPr>
+            </a:pPr>
+            <a:r>
+              <a:rPr sz="2625" b="0">
+                <a:solidFill>
+                  <a:srgbClr val="152B3A"/>
+                </a:solidFill>
+                <a:latin typeface="Calibri"/>
+                <a:ea typeface="Calibri"/>
+                <a:cs typeface="Calibri"/>
               </a:rPr>
               <a:t>If gravity vanished, trace the straight-on direction.</a:t>
+            </a:r>
+          </a:p>
+        </p:txBody>
+      </p:sp>
+      <p:sp>
+        <p:nvSpPr>
+          <p:cNvPr id="11" name="cue-0">
+            <a:extLst xmlns:a="http://schemas.openxmlformats.org/drawingml/2006/main">
+              <a:ext uri="{FF2B5EF4-FFF2-40B4-BE49-F238E27FC236}">
+                <a16:creationId xmlns:a16="http://schemas.microsoft.com/office/drawing/2014/main" id="{F5B582DA-BD95-49BD-BD83-015E34667657}"/>
+              </a:ext>
+            </a:extLst>
+          </p:cNvPr>
+          <p:cNvSpPr>
+            <a:spLocks xmlns:a="http://schemas.openxmlformats.org/drawingml/2006/main" noGrp="1"/>
+          </p:cNvSpPr>
+          <p:nvPr/>
+        </p:nvSpPr>
+        <p:spPr>
+          <a:xfrm xmlns:a="http://schemas.openxmlformats.org/drawingml/2006/main">
+            <a:off x="609600" y="2362200"/>
+            <a:ext cx="323850" cy="323850"/>
+          </a:xfrm>
+          <a:prstGeom xmlns:a="http://schemas.openxmlformats.org/drawingml/2006/main" prst="rect">
+            <a:avLst/>
+          </a:prstGeom>
+          <a:noFill xmlns:a="http://schemas.openxmlformats.org/drawingml/2006/main"/>
+          <a:ln xmlns:a="http://schemas.openxmlformats.org/drawingml/2006/main" w="0">
+            <a:noFill/>
+          </a:ln>
+        </p:spPr>
+        <p:txBody>
+          <a:bodyPr xmlns:a="http://schemas.openxmlformats.org/drawingml/2006/main" lIns="0" tIns="0" rIns="0" bIns="0" anchor="ctr">
+            <a:noAutofit/>
+          </a:bodyPr>
+          <a:lstStyle xmlns:a="http://schemas.openxmlformats.org/drawingml/2006/main"/>
+          <a:p xmlns:a="http://schemas.openxmlformats.org/drawingml/2006/main">
+            <a:pPr algn="l">
+              <a:defRPr sz="1350" b="1">
+                <a:solidFill>
+                  <a:srgbClr val="28685E"/>
+                </a:solidFill>
+                <a:latin typeface="Calibri"/>
+                <a:ea typeface="Calibri"/>
+                <a:cs typeface="Calibri"/>
+              </a:defRPr>
+            </a:pPr>
+            <a:r>
+              <a:rPr sz="1350" b="1">
+                <a:solidFill>
+                  <a:srgbClr val="28685E"/>
+                </a:solidFill>
+                <a:latin typeface="Calibri"/>
+                <a:ea typeface="Calibri"/>
+                <a:cs typeface="Calibri"/>
+              </a:rPr>
+              <a:t>01</a:t>
+            </a:r>
+          </a:p>
+        </p:txBody>
+      </p:sp>
+      <p:sp>
+        <p:nvSpPr>
+          <p:cNvPr id="12" name="row-rule-0">
+            <a:extLst xmlns:a="http://schemas.openxmlformats.org/drawingml/2006/main">
+              <a:ext uri="{FF2B5EF4-FFF2-40B4-BE49-F238E27FC236}">
+                <a16:creationId xmlns:a16="http://schemas.microsoft.com/office/drawing/2014/main" id="{C4BBB38F-C2F1-4DC6-B42A-D9E7EAB67A29}"/>
+              </a:ext>
+            </a:extLst>
+          </p:cNvPr>
+          <p:cNvSpPr>
+            <a:spLocks xmlns:a="http://schemas.openxmlformats.org/drawingml/2006/main" noGrp="1"/>
+          </p:cNvSpPr>
+          <p:nvPr/>
+        </p:nvSpPr>
+        <p:spPr>
+          <a:xfrm xmlns:a="http://schemas.openxmlformats.org/drawingml/2006/main">
+            <a:off x="1000125" y="3419475"/>
+            <a:ext cx="10334625" cy="0"/>
+          </a:xfrm>
+          <a:prstGeom xmlns:a="http://schemas.openxmlformats.org/drawingml/2006/main" prst="line">
+            <a:avLst/>
+          </a:prstGeom>
+          <a:noFill xmlns:a="http://schemas.openxmlformats.org/drawingml/2006/main"/>
+          <a:ln xmlns:a="http://schemas.openxmlformats.org/drawingml/2006/main" w="9525">
+            <a:solidFill>
+              <a:srgbClr val="CEDBD3"/>
+            </a:solidFill>
+          </a:ln>
+        </p:spPr>
+      </p:sp>
+      <p:sp>
+        <p:nvSpPr>
+          <p:cNvPr id="13" name="cue-1">
+            <a:extLst xmlns:a="http://schemas.openxmlformats.org/drawingml/2006/main">
+              <a:ext uri="{FF2B5EF4-FFF2-40B4-BE49-F238E27FC236}">
+                <a16:creationId xmlns:a16="http://schemas.microsoft.com/office/drawing/2014/main" id="{6DC5A428-B409-4DFF-87CC-9C524E25DEDC}"/>
+              </a:ext>
+            </a:extLst>
+          </p:cNvPr>
+          <p:cNvSpPr>
+            <a:spLocks xmlns:a="http://schemas.openxmlformats.org/drawingml/2006/main" noGrp="1"/>
+          </p:cNvSpPr>
+          <p:nvPr/>
+        </p:nvSpPr>
+        <p:spPr>
+          <a:xfrm xmlns:a="http://schemas.openxmlformats.org/drawingml/2006/main">
+            <a:off x="609600" y="3495675"/>
+            <a:ext cx="323850" cy="323850"/>
+          </a:xfrm>
+          <a:prstGeom xmlns:a="http://schemas.openxmlformats.org/drawingml/2006/main" prst="rect">
+            <a:avLst/>
+          </a:prstGeom>
+          <a:noFill xmlns:a="http://schemas.openxmlformats.org/drawingml/2006/main"/>
+          <a:ln xmlns:a="http://schemas.openxmlformats.org/drawingml/2006/main" w="0">
+            <a:noFill/>
+          </a:ln>
+        </p:spPr>
+        <p:txBody>
+          <a:bodyPr xmlns:a="http://schemas.openxmlformats.org/drawingml/2006/main" lIns="0" tIns="0" rIns="0" bIns="0" anchor="ctr">
+            <a:noAutofit/>
+          </a:bodyPr>
+          <a:lstStyle xmlns:a="http://schemas.openxmlformats.org/drawingml/2006/main"/>
+          <a:p xmlns:a="http://schemas.openxmlformats.org/drawingml/2006/main">
+            <a:pPr algn="l">
+              <a:defRPr sz="1350" b="1">
+                <a:solidFill>
+                  <a:srgbClr val="28685E"/>
+                </a:solidFill>
+                <a:latin typeface="Calibri"/>
+                <a:ea typeface="Calibri"/>
+                <a:cs typeface="Calibri"/>
+              </a:defRPr>
+            </a:pPr>
+            <a:r>
+              <a:rPr sz="1350" b="1">
+                <a:solidFill>
+                  <a:srgbClr val="28685E"/>
+                </a:solidFill>
+                <a:latin typeface="Calibri"/>
+                <a:ea typeface="Calibri"/>
+                <a:cs typeface="Calibri"/>
+              </a:rPr>
+              <a:t>02</a:t>
+            </a:r>
+          </a:p>
+        </p:txBody>
+      </p:sp>
+      <p:sp>
+        <p:nvSpPr>
+          <p:cNvPr id="14" name="row-rule-1">
+            <a:extLst xmlns:a="http://schemas.openxmlformats.org/drawingml/2006/main">
+              <a:ext uri="{FF2B5EF4-FFF2-40B4-BE49-F238E27FC236}">
+                <a16:creationId xmlns:a16="http://schemas.microsoft.com/office/drawing/2014/main" id="{39F4956A-0F43-46FB-9929-2412D604F298}"/>
+              </a:ext>
+            </a:extLst>
+          </p:cNvPr>
+          <p:cNvSpPr>
+            <a:spLocks xmlns:a="http://schemas.openxmlformats.org/drawingml/2006/main" noGrp="1"/>
+          </p:cNvSpPr>
+          <p:nvPr/>
+        </p:nvSpPr>
+        <p:spPr>
+          <a:xfrm xmlns:a="http://schemas.openxmlformats.org/drawingml/2006/main">
+            <a:off x="1000125" y="4552950"/>
+            <a:ext cx="10334625" cy="0"/>
+          </a:xfrm>
+          <a:prstGeom xmlns:a="http://schemas.openxmlformats.org/drawingml/2006/main" prst="line">
+            <a:avLst/>
+          </a:prstGeom>
+          <a:noFill xmlns:a="http://schemas.openxmlformats.org/drawingml/2006/main"/>
+          <a:ln xmlns:a="http://schemas.openxmlformats.org/drawingml/2006/main" w="9525">
+            <a:solidFill>
+              <a:srgbClr val="CEDBD3"/>
+            </a:solidFill>
+          </a:ln>
+        </p:spPr>
+      </p:sp>
+      <p:sp>
+        <p:nvSpPr>
+          <p:cNvPr id="15" name="cue-2">
+            <a:extLst xmlns:a="http://schemas.openxmlformats.org/drawingml/2006/main">
+              <a:ext uri="{FF2B5EF4-FFF2-40B4-BE49-F238E27FC236}">
+                <a16:creationId xmlns:a16="http://schemas.microsoft.com/office/drawing/2014/main" id="{82D80602-8A05-482E-B4EB-A6D5626D0B7A}"/>
+              </a:ext>
+            </a:extLst>
+          </p:cNvPr>
+          <p:cNvSpPr>
+            <a:spLocks xmlns:a="http://schemas.openxmlformats.org/drawingml/2006/main" noGrp="1"/>
+          </p:cNvSpPr>
+          <p:nvPr/>
+        </p:nvSpPr>
+        <p:spPr>
+          <a:xfrm xmlns:a="http://schemas.openxmlformats.org/drawingml/2006/main">
+            <a:off x="609600" y="4629150"/>
+            <a:ext cx="323850" cy="323850"/>
+          </a:xfrm>
+          <a:prstGeom xmlns:a="http://schemas.openxmlformats.org/drawingml/2006/main" prst="rect">
+            <a:avLst/>
+          </a:prstGeom>
+          <a:noFill xmlns:a="http://schemas.openxmlformats.org/drawingml/2006/main"/>
+          <a:ln xmlns:a="http://schemas.openxmlformats.org/drawingml/2006/main" w="0">
+            <a:noFill/>
+          </a:ln>
+        </p:spPr>
+        <p:txBody>
+          <a:bodyPr xmlns:a="http://schemas.openxmlformats.org/drawingml/2006/main" lIns="0" tIns="0" rIns="0" bIns="0" anchor="ctr">
+            <a:noAutofit/>
+          </a:bodyPr>
+          <a:lstStyle xmlns:a="http://schemas.openxmlformats.org/drawingml/2006/main"/>
+          <a:p xmlns:a="http://schemas.openxmlformats.org/drawingml/2006/main">
+            <a:pPr algn="l">
+              <a:defRPr sz="1350" b="1">
+                <a:solidFill>
+                  <a:srgbClr val="28685E"/>
+                </a:solidFill>
+                <a:latin typeface="Calibri"/>
+                <a:ea typeface="Calibri"/>
+                <a:cs typeface="Calibri"/>
+              </a:defRPr>
+            </a:pPr>
+            <a:r>
+              <a:rPr sz="1350" b="1">
+                <a:solidFill>
+                  <a:srgbClr val="28685E"/>
+                </a:solidFill>
+                <a:latin typeface="Calibri"/>
+                <a:ea typeface="Calibri"/>
+                <a:cs typeface="Calibri"/>
+              </a:rPr>
+              <a:t>03</a:t>
             </a:r>
           </a:p>
         </p:txBody>
@@ -7322,7 +9234,7 @@
     <p:bg>
       <p:bgPr>
         <a:solidFill xmlns:a="http://schemas.openxmlformats.org/drawingml/2006/main">
-          <a:srgbClr val="F5F1E8"/>
+          <a:srgbClr val="FAF9F5"/>
         </a:solidFill>
       </p:bgPr>
     </p:bg>
@@ -7351,8 +9263,8 @@
         </p:nvSpPr>
         <p:spPr>
           <a:xfrm xmlns:a="http://schemas.openxmlformats.org/drawingml/2006/main">
-            <a:off x="609600" y="552450"/>
-            <a:ext cx="781050" cy="57150"/>
+            <a:off x="609600" y="733425"/>
+            <a:ext cx="781050" cy="38100"/>
           </a:xfrm>
           <a:prstGeom xmlns:a="http://schemas.openxmlformats.org/drawingml/2006/main" prst="rect">
             <a:avLst/>
@@ -7382,34 +9294,43 @@
         </p:nvSpPr>
         <p:spPr>
           <a:xfrm xmlns:a="http://schemas.openxmlformats.org/drawingml/2006/main">
-            <a:off x="609600" y="762000"/>
-            <a:ext cx="8572500" cy="285750"/>
-          </a:xfrm>
-          <a:prstGeom xmlns:a="http://schemas.openxmlformats.org/drawingml/2006/main" prst="rect">
-            <a:avLst/>
-          </a:prstGeom>
-          <a:noFill xmlns:a="http://schemas.openxmlformats.org/drawingml/2006/main"/>
-          <a:ln xmlns:a="http://schemas.openxmlformats.org/drawingml/2006/main" w="0">
-            <a:noFill/>
-            <a:prstDash val="solid"/>
-          </a:ln>
-        </p:spPr>
-        <p:txBody>
-          <a:bodyPr xmlns:a="http://schemas.openxmlformats.org/drawingml/2006/main" lIns="0" tIns="0" rIns="0" bIns="0" anchor="ctr"/>
-          <a:lstStyle xmlns:a="http://schemas.openxmlformats.org/drawingml/2006/main"/>
-          <a:p xmlns:a="http://schemas.openxmlformats.org/drawingml/2006/main">
-            <a:pPr>
-              <a:defRPr sz="1500" b="1">
+            <a:off x="609600" y="342900"/>
+            <a:ext cx="9334500" cy="304800"/>
+          </a:xfrm>
+          <a:prstGeom xmlns:a="http://schemas.openxmlformats.org/drawingml/2006/main" prst="rect">
+            <a:avLst/>
+          </a:prstGeom>
+          <a:noFill xmlns:a="http://schemas.openxmlformats.org/drawingml/2006/main"/>
+          <a:ln xmlns:a="http://schemas.openxmlformats.org/drawingml/2006/main" w="0">
+            <a:noFill/>
+            <a:prstDash val="solid"/>
+          </a:ln>
+        </p:spPr>
+        <p:txBody>
+          <a:bodyPr xmlns:a="http://schemas.openxmlformats.org/drawingml/2006/main" lIns="0" tIns="0" rIns="0" bIns="0" anchor="ctr">
+            <a:noAutofit/>
+          </a:bodyPr>
+          <a:lstStyle xmlns:a="http://schemas.openxmlformats.org/drawingml/2006/main"/>
+          <a:p xmlns:a="http://schemas.openxmlformats.org/drawingml/2006/main">
+            <a:pPr algn="l">
+              <a:buNone/>
+              <a:defRPr sz="1350" b="1">
                 <a:solidFill>
                   <a:srgbClr val="28685E"/>
                 </a:solidFill>
-              </a:defRPr>
-            </a:pPr>
-            <a:r>
-              <a:rPr sz="1500" b="1">
+                <a:latin typeface="Calibri"/>
+                <a:ea typeface="Calibri"/>
+                <a:cs typeface="Calibri"/>
+              </a:defRPr>
+            </a:pPr>
+            <a:r>
+              <a:rPr sz="1350" b="1">
                 <a:solidFill>
                   <a:srgbClr val="28685E"/>
                 </a:solidFill>
+                <a:latin typeface="Calibri"/>
+                <a:ea typeface="Calibri"/>
+                <a:cs typeface="Calibri"/>
               </a:rPr>
               <a:t>MADE BY MATT  /  GROW SCIENCE</a:t>
             </a:r>
@@ -7432,34 +9353,43 @@
         </p:nvSpPr>
         <p:spPr>
           <a:xfrm xmlns:a="http://schemas.openxmlformats.org/drawingml/2006/main">
-            <a:off x="609600" y="1352550"/>
-            <a:ext cx="10972800" cy="952500"/>
-          </a:xfrm>
-          <a:prstGeom xmlns:a="http://schemas.openxmlformats.org/drawingml/2006/main" prst="rect">
-            <a:avLst/>
-          </a:prstGeom>
-          <a:noFill xmlns:a="http://schemas.openxmlformats.org/drawingml/2006/main"/>
-          <a:ln xmlns:a="http://schemas.openxmlformats.org/drawingml/2006/main" w="0">
-            <a:noFill/>
-            <a:prstDash val="solid"/>
-          </a:ln>
-        </p:spPr>
-        <p:txBody>
-          <a:bodyPr xmlns:a="http://schemas.openxmlformats.org/drawingml/2006/main" lIns="0" tIns="0" rIns="0" bIns="0" anchor="ctr"/>
-          <a:lstStyle xmlns:a="http://schemas.openxmlformats.org/drawingml/2006/main"/>
-          <a:p xmlns:a="http://schemas.openxmlformats.org/drawingml/2006/main">
-            <a:pPr>
-              <a:defRPr sz="3750" b="1">
-                <a:solidFill>
-                  <a:srgbClr val="152B3A"/>
-                </a:solidFill>
-              </a:defRPr>
-            </a:pPr>
-            <a:r>
-              <a:rPr sz="3750" b="1">
-                <a:solidFill>
-                  <a:srgbClr val="152B3A"/>
-                </a:solidFill>
+            <a:off x="609600" y="990600"/>
+            <a:ext cx="10972800" cy="1000125"/>
+          </a:xfrm>
+          <a:prstGeom xmlns:a="http://schemas.openxmlformats.org/drawingml/2006/main" prst="rect">
+            <a:avLst/>
+          </a:prstGeom>
+          <a:noFill xmlns:a="http://schemas.openxmlformats.org/drawingml/2006/main"/>
+          <a:ln xmlns:a="http://schemas.openxmlformats.org/drawingml/2006/main" w="0">
+            <a:noFill/>
+            <a:prstDash val="solid"/>
+          </a:ln>
+        </p:spPr>
+        <p:txBody>
+          <a:bodyPr xmlns:a="http://schemas.openxmlformats.org/drawingml/2006/main" lIns="0" tIns="0" rIns="0" bIns="0" anchor="ctr">
+            <a:noAutofit/>
+          </a:bodyPr>
+          <a:lstStyle xmlns:a="http://schemas.openxmlformats.org/drawingml/2006/main"/>
+          <a:p xmlns:a="http://schemas.openxmlformats.org/drawingml/2006/main">
+            <a:pPr algn="l">
+              <a:buNone/>
+              <a:defRPr sz="3675" b="1">
+                <a:solidFill>
+                  <a:srgbClr val="152B3A"/>
+                </a:solidFill>
+                <a:latin typeface="Calibri"/>
+                <a:ea typeface="Calibri"/>
+                <a:cs typeface="Calibri"/>
+              </a:defRPr>
+            </a:pPr>
+            <a:r>
+              <a:rPr sz="3675" b="1">
+                <a:solidFill>
+                  <a:srgbClr val="152B3A"/>
+                </a:solidFill>
+                <a:latin typeface="Calibri"/>
+                <a:ea typeface="Calibri"/>
+                <a:cs typeface="Calibri"/>
               </a:rPr>
               <a:t>Rocky or giant?</a:t>
             </a:r>
@@ -7482,14 +9412,14 @@
         </p:nvSpPr>
         <p:spPr>
           <a:xfrm xmlns:a="http://schemas.openxmlformats.org/drawingml/2006/main">
-            <a:off x="609600" y="6219825"/>
+            <a:off x="609600" y="6191250"/>
             <a:ext cx="10972800" cy="9525"/>
           </a:xfrm>
           <a:prstGeom xmlns:a="http://schemas.openxmlformats.org/drawingml/2006/main" prst="rect">
             <a:avLst/>
           </a:prstGeom>
           <a:solidFill xmlns:a="http://schemas.openxmlformats.org/drawingml/2006/main">
-            <a:srgbClr val="DCE7DD"/>
+            <a:srgbClr val="CEDBD3"/>
           </a:solidFill>
           <a:ln xmlns:a="http://schemas.openxmlformats.org/drawingml/2006/main" w="0">
             <a:noFill/>
@@ -7513,34 +9443,43 @@
         </p:nvSpPr>
         <p:spPr>
           <a:xfrm xmlns:a="http://schemas.openxmlformats.org/drawingml/2006/main">
-            <a:off x="609600" y="6381750"/>
-            <a:ext cx="9906000" cy="228600"/>
-          </a:xfrm>
-          <a:prstGeom xmlns:a="http://schemas.openxmlformats.org/drawingml/2006/main" prst="rect">
-            <a:avLst/>
-          </a:prstGeom>
-          <a:noFill xmlns:a="http://schemas.openxmlformats.org/drawingml/2006/main"/>
-          <a:ln xmlns:a="http://schemas.openxmlformats.org/drawingml/2006/main" w="0">
-            <a:noFill/>
-            <a:prstDash val="solid"/>
-          </a:ln>
-        </p:spPr>
-        <p:txBody>
-          <a:bodyPr xmlns:a="http://schemas.openxmlformats.org/drawingml/2006/main" lIns="0" tIns="0" rIns="0" bIns="0" anchor="ctr"/>
-          <a:lstStyle xmlns:a="http://schemas.openxmlformats.org/drawingml/2006/main"/>
-          <a:p xmlns:a="http://schemas.openxmlformats.org/drawingml/2006/main">
-            <a:pPr>
-              <a:defRPr sz="1275" b="0">
+            <a:off x="609600" y="6419850"/>
+            <a:ext cx="9525000" cy="219075"/>
+          </a:xfrm>
+          <a:prstGeom xmlns:a="http://schemas.openxmlformats.org/drawingml/2006/main" prst="rect">
+            <a:avLst/>
+          </a:prstGeom>
+          <a:noFill xmlns:a="http://schemas.openxmlformats.org/drawingml/2006/main"/>
+          <a:ln xmlns:a="http://schemas.openxmlformats.org/drawingml/2006/main" w="0">
+            <a:noFill/>
+            <a:prstDash val="solid"/>
+          </a:ln>
+        </p:spPr>
+        <p:txBody>
+          <a:bodyPr xmlns:a="http://schemas.openxmlformats.org/drawingml/2006/main" lIns="0" tIns="0" rIns="0" bIns="0" anchor="ctr">
+            <a:noAutofit/>
+          </a:bodyPr>
+          <a:lstStyle xmlns:a="http://schemas.openxmlformats.org/drawingml/2006/main"/>
+          <a:p xmlns:a="http://schemas.openxmlformats.org/drawingml/2006/main">
+            <a:pPr algn="l">
+              <a:buNone/>
+              <a:defRPr sz="1200" b="0">
                 <a:solidFill>
                   <a:srgbClr val="50616B"/>
                 </a:solidFill>
-              </a:defRPr>
-            </a:pPr>
-            <a:r>
-              <a:rPr sz="1275" b="0">
+                <a:latin typeface="Calibri"/>
+                <a:ea typeface="Calibri"/>
+                <a:cs typeface="Calibri"/>
+              </a:defRPr>
+            </a:pPr>
+            <a:r>
+              <a:rPr sz="1200" b="0">
                 <a:solidFill>
                   <a:srgbClr val="50616B"/>
                 </a:solidFill>
+                <a:latin typeface="Calibri"/>
+                <a:ea typeface="Calibri"/>
+                <a:cs typeface="Calibri"/>
               </a:rPr>
               <a:t>AUTUMN 1  ·  WEEK 6  ·  LESSON A</a:t>
             </a:r>
@@ -7563,27 +9502,33 @@
         </p:nvSpPr>
         <p:spPr>
           <a:xfrm xmlns:a="http://schemas.openxmlformats.org/drawingml/2006/main">
-            <a:off x="11106150" y="6362700"/>
-            <a:ext cx="476250" cy="238125"/>
-          </a:xfrm>
-          <a:prstGeom xmlns:a="http://schemas.openxmlformats.org/drawingml/2006/main" prst="rect">
-            <a:avLst/>
-          </a:prstGeom>
-          <a:noFill xmlns:a="http://schemas.openxmlformats.org/drawingml/2006/main"/>
-          <a:ln xmlns:a="http://schemas.openxmlformats.org/drawingml/2006/main" w="0">
-            <a:noFill/>
-            <a:prstDash val="solid"/>
-          </a:ln>
-        </p:spPr>
-        <p:txBody>
-          <a:bodyPr xmlns:a="http://schemas.openxmlformats.org/drawingml/2006/main" lIns="0" tIns="0" rIns="0" bIns="0" anchor="ctr"/>
-          <a:lstStyle xmlns:a="http://schemas.openxmlformats.org/drawingml/2006/main"/>
-          <a:p xmlns:a="http://schemas.openxmlformats.org/drawingml/2006/main">
-            <a:pPr>
+            <a:off x="11106150" y="6400800"/>
+            <a:ext cx="476250" cy="247650"/>
+          </a:xfrm>
+          <a:prstGeom xmlns:a="http://schemas.openxmlformats.org/drawingml/2006/main" prst="rect">
+            <a:avLst/>
+          </a:prstGeom>
+          <a:noFill xmlns:a="http://schemas.openxmlformats.org/drawingml/2006/main"/>
+          <a:ln xmlns:a="http://schemas.openxmlformats.org/drawingml/2006/main" w="0">
+            <a:noFill/>
+            <a:prstDash val="solid"/>
+          </a:ln>
+        </p:spPr>
+        <p:txBody>
+          <a:bodyPr xmlns:a="http://schemas.openxmlformats.org/drawingml/2006/main" lIns="0" tIns="0" rIns="0" bIns="0" anchor="ctr">
+            <a:noAutofit/>
+          </a:bodyPr>
+          <a:lstStyle xmlns:a="http://schemas.openxmlformats.org/drawingml/2006/main"/>
+          <a:p xmlns:a="http://schemas.openxmlformats.org/drawingml/2006/main">
+            <a:pPr algn="l">
+              <a:buNone/>
               <a:defRPr sz="1350" b="1">
                 <a:solidFill>
                   <a:srgbClr val="28685E"/>
                 </a:solidFill>
+                <a:latin typeface="Calibri"/>
+                <a:ea typeface="Calibri"/>
+                <a:cs typeface="Calibri"/>
               </a:defRPr>
             </a:pPr>
             <a:r>
@@ -7591,6 +9536,9 @@
                 <a:solidFill>
                   <a:srgbClr val="28685E"/>
                 </a:solidFill>
+                <a:latin typeface="Calibri"/>
+                <a:ea typeface="Calibri"/>
+                <a:cs typeface="Calibri"/>
               </a:rPr>
               <a:t>07</a:t>
             </a:r>
@@ -7613,34 +9561,43 @@
         </p:nvSpPr>
         <p:spPr>
           <a:xfrm xmlns:a="http://schemas.openxmlformats.org/drawingml/2006/main">
-            <a:off x="609600" y="2619375"/>
-            <a:ext cx="10972800" cy="533400"/>
-          </a:xfrm>
-          <a:prstGeom xmlns:a="http://schemas.openxmlformats.org/drawingml/2006/main" prst="rect">
-            <a:avLst/>
-          </a:prstGeom>
-          <a:noFill xmlns:a="http://schemas.openxmlformats.org/drawingml/2006/main"/>
-          <a:ln xmlns:a="http://schemas.openxmlformats.org/drawingml/2006/main" w="0">
-            <a:noFill/>
-            <a:prstDash val="solid"/>
-          </a:ln>
-        </p:spPr>
-        <p:txBody>
-          <a:bodyPr xmlns:a="http://schemas.openxmlformats.org/drawingml/2006/main" lIns="0" tIns="0" rIns="0" bIns="0" anchor="ctr"/>
-          <a:lstStyle xmlns:a="http://schemas.openxmlformats.org/drawingml/2006/main"/>
-          <a:p xmlns:a="http://schemas.openxmlformats.org/drawingml/2006/main">
-            <a:pPr>
-              <a:defRPr sz="2175" b="0">
-                <a:solidFill>
-                  <a:srgbClr val="152B3A"/>
-                </a:solidFill>
-              </a:defRPr>
-            </a:pPr>
-            <a:r>
-              <a:rPr sz="2175" b="0">
-                <a:solidFill>
-                  <a:srgbClr val="152B3A"/>
-                </a:solidFill>
+            <a:off x="1000125" y="2333625"/>
+            <a:ext cx="10382250" cy="622935"/>
+          </a:xfrm>
+          <a:prstGeom xmlns:a="http://schemas.openxmlformats.org/drawingml/2006/main" prst="rect">
+            <a:avLst/>
+          </a:prstGeom>
+          <a:noFill xmlns:a="http://schemas.openxmlformats.org/drawingml/2006/main"/>
+          <a:ln xmlns:a="http://schemas.openxmlformats.org/drawingml/2006/main" w="0">
+            <a:noFill/>
+            <a:prstDash val="solid"/>
+          </a:ln>
+        </p:spPr>
+        <p:txBody>
+          <a:bodyPr xmlns:a="http://schemas.openxmlformats.org/drawingml/2006/main" lIns="0" tIns="0" rIns="0" bIns="0" anchor="ctr">
+            <a:noAutofit/>
+          </a:bodyPr>
+          <a:lstStyle xmlns:a="http://schemas.openxmlformats.org/drawingml/2006/main"/>
+          <a:p xmlns:a="http://schemas.openxmlformats.org/drawingml/2006/main">
+            <a:pPr algn="l">
+              <a:buNone/>
+              <a:defRPr sz="2400" b="0">
+                <a:solidFill>
+                  <a:srgbClr val="152B3A"/>
+                </a:solidFill>
+                <a:latin typeface="Calibri"/>
+                <a:ea typeface="Calibri"/>
+                <a:cs typeface="Calibri"/>
+              </a:defRPr>
+            </a:pPr>
+            <a:r>
+              <a:rPr sz="2400" b="0">
+                <a:solidFill>
+                  <a:srgbClr val="152B3A"/>
+                </a:solidFill>
+                <a:latin typeface="Calibri"/>
+                <a:ea typeface="Calibri"/>
+                <a:cs typeface="Calibri"/>
               </a:rPr>
               <a:t>Mercury</a:t>
             </a:r>
@@ -7663,34 +9620,43 @@
         </p:nvSpPr>
         <p:spPr>
           <a:xfrm xmlns:a="http://schemas.openxmlformats.org/drawingml/2006/main">
-            <a:off x="609600" y="3228975"/>
-            <a:ext cx="10972800" cy="533400"/>
-          </a:xfrm>
-          <a:prstGeom xmlns:a="http://schemas.openxmlformats.org/drawingml/2006/main" prst="rect">
-            <a:avLst/>
-          </a:prstGeom>
-          <a:noFill xmlns:a="http://schemas.openxmlformats.org/drawingml/2006/main"/>
-          <a:ln xmlns:a="http://schemas.openxmlformats.org/drawingml/2006/main" w="0">
-            <a:noFill/>
-            <a:prstDash val="solid"/>
-          </a:ln>
-        </p:spPr>
-        <p:txBody>
-          <a:bodyPr xmlns:a="http://schemas.openxmlformats.org/drawingml/2006/main" lIns="0" tIns="0" rIns="0" bIns="0" anchor="ctr"/>
-          <a:lstStyle xmlns:a="http://schemas.openxmlformats.org/drawingml/2006/main"/>
-          <a:p xmlns:a="http://schemas.openxmlformats.org/drawingml/2006/main">
-            <a:pPr>
-              <a:defRPr sz="2175" b="0">
-                <a:solidFill>
-                  <a:srgbClr val="152B3A"/>
-                </a:solidFill>
-              </a:defRPr>
-            </a:pPr>
-            <a:r>
-              <a:rPr sz="2175" b="0">
-                <a:solidFill>
-                  <a:srgbClr val="152B3A"/>
-                </a:solidFill>
+            <a:off x="1000125" y="3013710"/>
+            <a:ext cx="10382250" cy="622935"/>
+          </a:xfrm>
+          <a:prstGeom xmlns:a="http://schemas.openxmlformats.org/drawingml/2006/main" prst="rect">
+            <a:avLst/>
+          </a:prstGeom>
+          <a:noFill xmlns:a="http://schemas.openxmlformats.org/drawingml/2006/main"/>
+          <a:ln xmlns:a="http://schemas.openxmlformats.org/drawingml/2006/main" w="0">
+            <a:noFill/>
+            <a:prstDash val="solid"/>
+          </a:ln>
+        </p:spPr>
+        <p:txBody>
+          <a:bodyPr xmlns:a="http://schemas.openxmlformats.org/drawingml/2006/main" lIns="0" tIns="0" rIns="0" bIns="0" anchor="ctr">
+            <a:noAutofit/>
+          </a:bodyPr>
+          <a:lstStyle xmlns:a="http://schemas.openxmlformats.org/drawingml/2006/main"/>
+          <a:p xmlns:a="http://schemas.openxmlformats.org/drawingml/2006/main">
+            <a:pPr algn="l">
+              <a:buNone/>
+              <a:defRPr sz="2400" b="0">
+                <a:solidFill>
+                  <a:srgbClr val="152B3A"/>
+                </a:solidFill>
+                <a:latin typeface="Calibri"/>
+                <a:ea typeface="Calibri"/>
+                <a:cs typeface="Calibri"/>
+              </a:defRPr>
+            </a:pPr>
+            <a:r>
+              <a:rPr sz="2400" b="0">
+                <a:solidFill>
+                  <a:srgbClr val="152B3A"/>
+                </a:solidFill>
+                <a:latin typeface="Calibri"/>
+                <a:ea typeface="Calibri"/>
+                <a:cs typeface="Calibri"/>
               </a:rPr>
               <a:t>Mars</a:t>
             </a:r>
@@ -7713,34 +9679,43 @@
         </p:nvSpPr>
         <p:spPr>
           <a:xfrm xmlns:a="http://schemas.openxmlformats.org/drawingml/2006/main">
-            <a:off x="609600" y="3838575"/>
-            <a:ext cx="10972800" cy="533400"/>
-          </a:xfrm>
-          <a:prstGeom xmlns:a="http://schemas.openxmlformats.org/drawingml/2006/main" prst="rect">
-            <a:avLst/>
-          </a:prstGeom>
-          <a:noFill xmlns:a="http://schemas.openxmlformats.org/drawingml/2006/main"/>
-          <a:ln xmlns:a="http://schemas.openxmlformats.org/drawingml/2006/main" w="0">
-            <a:noFill/>
-            <a:prstDash val="solid"/>
-          </a:ln>
-        </p:spPr>
-        <p:txBody>
-          <a:bodyPr xmlns:a="http://schemas.openxmlformats.org/drawingml/2006/main" lIns="0" tIns="0" rIns="0" bIns="0" anchor="ctr"/>
-          <a:lstStyle xmlns:a="http://schemas.openxmlformats.org/drawingml/2006/main"/>
-          <a:p xmlns:a="http://schemas.openxmlformats.org/drawingml/2006/main">
-            <a:pPr>
-              <a:defRPr sz="2175" b="0">
-                <a:solidFill>
-                  <a:srgbClr val="152B3A"/>
-                </a:solidFill>
-              </a:defRPr>
-            </a:pPr>
-            <a:r>
-              <a:rPr sz="2175" b="0">
-                <a:solidFill>
-                  <a:srgbClr val="152B3A"/>
-                </a:solidFill>
+            <a:off x="1000125" y="3693795"/>
+            <a:ext cx="10382250" cy="622935"/>
+          </a:xfrm>
+          <a:prstGeom xmlns:a="http://schemas.openxmlformats.org/drawingml/2006/main" prst="rect">
+            <a:avLst/>
+          </a:prstGeom>
+          <a:noFill xmlns:a="http://schemas.openxmlformats.org/drawingml/2006/main"/>
+          <a:ln xmlns:a="http://schemas.openxmlformats.org/drawingml/2006/main" w="0">
+            <a:noFill/>
+            <a:prstDash val="solid"/>
+          </a:ln>
+        </p:spPr>
+        <p:txBody>
+          <a:bodyPr xmlns:a="http://schemas.openxmlformats.org/drawingml/2006/main" lIns="0" tIns="0" rIns="0" bIns="0" anchor="ctr">
+            <a:noAutofit/>
+          </a:bodyPr>
+          <a:lstStyle xmlns:a="http://schemas.openxmlformats.org/drawingml/2006/main"/>
+          <a:p xmlns:a="http://schemas.openxmlformats.org/drawingml/2006/main">
+            <a:pPr algn="l">
+              <a:buNone/>
+              <a:defRPr sz="2400" b="0">
+                <a:solidFill>
+                  <a:srgbClr val="152B3A"/>
+                </a:solidFill>
+                <a:latin typeface="Calibri"/>
+                <a:ea typeface="Calibri"/>
+                <a:cs typeface="Calibri"/>
+              </a:defRPr>
+            </a:pPr>
+            <a:r>
+              <a:rPr sz="2400" b="0">
+                <a:solidFill>
+                  <a:srgbClr val="152B3A"/>
+                </a:solidFill>
+                <a:latin typeface="Calibri"/>
+                <a:ea typeface="Calibri"/>
+                <a:cs typeface="Calibri"/>
               </a:rPr>
               <a:t>Jupiter</a:t>
             </a:r>
@@ -7763,34 +9738,43 @@
         </p:nvSpPr>
         <p:spPr>
           <a:xfrm xmlns:a="http://schemas.openxmlformats.org/drawingml/2006/main">
-            <a:off x="609600" y="4448175"/>
-            <a:ext cx="10972800" cy="533400"/>
-          </a:xfrm>
-          <a:prstGeom xmlns:a="http://schemas.openxmlformats.org/drawingml/2006/main" prst="rect">
-            <a:avLst/>
-          </a:prstGeom>
-          <a:noFill xmlns:a="http://schemas.openxmlformats.org/drawingml/2006/main"/>
-          <a:ln xmlns:a="http://schemas.openxmlformats.org/drawingml/2006/main" w="0">
-            <a:noFill/>
-            <a:prstDash val="solid"/>
-          </a:ln>
-        </p:spPr>
-        <p:txBody>
-          <a:bodyPr xmlns:a="http://schemas.openxmlformats.org/drawingml/2006/main" lIns="0" tIns="0" rIns="0" bIns="0" anchor="ctr"/>
-          <a:lstStyle xmlns:a="http://schemas.openxmlformats.org/drawingml/2006/main"/>
-          <a:p xmlns:a="http://schemas.openxmlformats.org/drawingml/2006/main">
-            <a:pPr>
-              <a:defRPr sz="2175" b="0">
-                <a:solidFill>
-                  <a:srgbClr val="152B3A"/>
-                </a:solidFill>
-              </a:defRPr>
-            </a:pPr>
-            <a:r>
-              <a:rPr sz="2175" b="0">
-                <a:solidFill>
-                  <a:srgbClr val="152B3A"/>
-                </a:solidFill>
+            <a:off x="1000125" y="4373880"/>
+            <a:ext cx="10382250" cy="622935"/>
+          </a:xfrm>
+          <a:prstGeom xmlns:a="http://schemas.openxmlformats.org/drawingml/2006/main" prst="rect">
+            <a:avLst/>
+          </a:prstGeom>
+          <a:noFill xmlns:a="http://schemas.openxmlformats.org/drawingml/2006/main"/>
+          <a:ln xmlns:a="http://schemas.openxmlformats.org/drawingml/2006/main" w="0">
+            <a:noFill/>
+            <a:prstDash val="solid"/>
+          </a:ln>
+        </p:spPr>
+        <p:txBody>
+          <a:bodyPr xmlns:a="http://schemas.openxmlformats.org/drawingml/2006/main" lIns="0" tIns="0" rIns="0" bIns="0" anchor="ctr">
+            <a:noAutofit/>
+          </a:bodyPr>
+          <a:lstStyle xmlns:a="http://schemas.openxmlformats.org/drawingml/2006/main"/>
+          <a:p xmlns:a="http://schemas.openxmlformats.org/drawingml/2006/main">
+            <a:pPr algn="l">
+              <a:buNone/>
+              <a:defRPr sz="2400" b="0">
+                <a:solidFill>
+                  <a:srgbClr val="152B3A"/>
+                </a:solidFill>
+                <a:latin typeface="Calibri"/>
+                <a:ea typeface="Calibri"/>
+                <a:cs typeface="Calibri"/>
+              </a:defRPr>
+            </a:pPr>
+            <a:r>
+              <a:rPr sz="2400" b="0">
+                <a:solidFill>
+                  <a:srgbClr val="152B3A"/>
+                </a:solidFill>
+                <a:latin typeface="Calibri"/>
+                <a:ea typeface="Calibri"/>
+                <a:cs typeface="Calibri"/>
               </a:rPr>
               <a:t>Neptune</a:t>
             </a:r>
@@ -7813,39 +9797,168 @@
         </p:nvSpPr>
         <p:spPr>
           <a:xfrm xmlns:a="http://schemas.openxmlformats.org/drawingml/2006/main">
-            <a:off x="609600" y="5057775"/>
-            <a:ext cx="10972800" cy="533400"/>
-          </a:xfrm>
-          <a:prstGeom xmlns:a="http://schemas.openxmlformats.org/drawingml/2006/main" prst="rect">
-            <a:avLst/>
-          </a:prstGeom>
-          <a:noFill xmlns:a="http://schemas.openxmlformats.org/drawingml/2006/main"/>
-          <a:ln xmlns:a="http://schemas.openxmlformats.org/drawingml/2006/main" w="0">
-            <a:noFill/>
-            <a:prstDash val="solid"/>
-          </a:ln>
-        </p:spPr>
-        <p:txBody>
-          <a:bodyPr xmlns:a="http://schemas.openxmlformats.org/drawingml/2006/main" lIns="0" tIns="0" rIns="0" bIns="0" anchor="ctr"/>
-          <a:lstStyle xmlns:a="http://schemas.openxmlformats.org/drawingml/2006/main"/>
-          <a:p xmlns:a="http://schemas.openxmlformats.org/drawingml/2006/main">
-            <a:pPr>
-              <a:defRPr sz="2175" b="0">
-                <a:solidFill>
-                  <a:srgbClr val="152B3A"/>
-                </a:solidFill>
-              </a:defRPr>
-            </a:pPr>
-            <a:r>
-              <a:rPr sz="2175" b="0">
-                <a:solidFill>
-                  <a:srgbClr val="152B3A"/>
-                </a:solidFill>
+            <a:off x="1000125" y="5053965"/>
+            <a:ext cx="10382250" cy="622935"/>
+          </a:xfrm>
+          <a:prstGeom xmlns:a="http://schemas.openxmlformats.org/drawingml/2006/main" prst="rect">
+            <a:avLst/>
+          </a:prstGeom>
+          <a:noFill xmlns:a="http://schemas.openxmlformats.org/drawingml/2006/main"/>
+          <a:ln xmlns:a="http://schemas.openxmlformats.org/drawingml/2006/main" w="0">
+            <a:noFill/>
+            <a:prstDash val="solid"/>
+          </a:ln>
+        </p:spPr>
+        <p:txBody>
+          <a:bodyPr xmlns:a="http://schemas.openxmlformats.org/drawingml/2006/main" lIns="0" tIns="0" rIns="0" bIns="0" anchor="ctr">
+            <a:noAutofit/>
+          </a:bodyPr>
+          <a:lstStyle xmlns:a="http://schemas.openxmlformats.org/drawingml/2006/main"/>
+          <a:p xmlns:a="http://schemas.openxmlformats.org/drawingml/2006/main">
+            <a:pPr algn="l">
+              <a:buNone/>
+              <a:defRPr sz="2400" b="0">
+                <a:solidFill>
+                  <a:srgbClr val="152B3A"/>
+                </a:solidFill>
+                <a:latin typeface="Calibri"/>
+                <a:ea typeface="Calibri"/>
+                <a:cs typeface="Calibri"/>
+              </a:defRPr>
+            </a:pPr>
+            <a:r>
+              <a:rPr sz="2400" b="0">
+                <a:solidFill>
+                  <a:srgbClr val="152B3A"/>
+                </a:solidFill>
+                <a:latin typeface="Calibri"/>
+                <a:ea typeface="Calibri"/>
+                <a:cs typeface="Calibri"/>
               </a:rPr>
               <a:t>Which has the longer year: Earth or Mars?</a:t>
             </a:r>
           </a:p>
         </p:txBody>
+      </p:sp>
+      <p:sp>
+        <p:nvSpPr>
+          <p:cNvPr id="14" name="row-rule-0">
+            <a:extLst xmlns:a="http://schemas.openxmlformats.org/drawingml/2006/main">
+              <a:ext uri="{FF2B5EF4-FFF2-40B4-BE49-F238E27FC236}">
+                <a16:creationId xmlns:a16="http://schemas.microsoft.com/office/drawing/2014/main" id="{F1CB0541-43AF-459A-BA0F-A7652FBDA45D}"/>
+              </a:ext>
+            </a:extLst>
+          </p:cNvPr>
+          <p:cNvSpPr>
+            <a:spLocks xmlns:a="http://schemas.openxmlformats.org/drawingml/2006/main" noGrp="1"/>
+          </p:cNvSpPr>
+          <p:nvPr/>
+        </p:nvSpPr>
+        <p:spPr>
+          <a:xfrm xmlns:a="http://schemas.openxmlformats.org/drawingml/2006/main">
+            <a:off x="1000125" y="2966085"/>
+            <a:ext cx="10334625" cy="0"/>
+          </a:xfrm>
+          <a:prstGeom xmlns:a="http://schemas.openxmlformats.org/drawingml/2006/main" prst="line">
+            <a:avLst/>
+          </a:prstGeom>
+          <a:noFill xmlns:a="http://schemas.openxmlformats.org/drawingml/2006/main"/>
+          <a:ln xmlns:a="http://schemas.openxmlformats.org/drawingml/2006/main" w="9525">
+            <a:solidFill>
+              <a:srgbClr val="CEDBD3"/>
+            </a:solidFill>
+          </a:ln>
+        </p:spPr>
+      </p:sp>
+      <p:sp>
+        <p:nvSpPr>
+          <p:cNvPr id="16" name="row-rule-1">
+            <a:extLst xmlns:a="http://schemas.openxmlformats.org/drawingml/2006/main">
+              <a:ext uri="{FF2B5EF4-FFF2-40B4-BE49-F238E27FC236}">
+                <a16:creationId xmlns:a16="http://schemas.microsoft.com/office/drawing/2014/main" id="{BBF14C2E-EA8F-42E4-BC5E-6DD59FC0978B}"/>
+              </a:ext>
+            </a:extLst>
+          </p:cNvPr>
+          <p:cNvSpPr>
+            <a:spLocks xmlns:a="http://schemas.openxmlformats.org/drawingml/2006/main" noGrp="1"/>
+          </p:cNvSpPr>
+          <p:nvPr/>
+        </p:nvSpPr>
+        <p:spPr>
+          <a:xfrm xmlns:a="http://schemas.openxmlformats.org/drawingml/2006/main">
+            <a:off x="1000125" y="3646170"/>
+            <a:ext cx="10334625" cy="0"/>
+          </a:xfrm>
+          <a:prstGeom xmlns:a="http://schemas.openxmlformats.org/drawingml/2006/main" prst="line">
+            <a:avLst/>
+          </a:prstGeom>
+          <a:noFill xmlns:a="http://schemas.openxmlformats.org/drawingml/2006/main"/>
+          <a:ln xmlns:a="http://schemas.openxmlformats.org/drawingml/2006/main" w="9525">
+            <a:solidFill>
+              <a:srgbClr val="CEDBD3"/>
+            </a:solidFill>
+          </a:ln>
+        </p:spPr>
+      </p:sp>
+      <p:sp>
+        <p:nvSpPr>
+          <p:cNvPr id="18" name="row-rule-2">
+            <a:extLst xmlns:a="http://schemas.openxmlformats.org/drawingml/2006/main">
+              <a:ext uri="{FF2B5EF4-FFF2-40B4-BE49-F238E27FC236}">
+                <a16:creationId xmlns:a16="http://schemas.microsoft.com/office/drawing/2014/main" id="{0E3E93B2-28D1-4850-BB92-829F471BB080}"/>
+              </a:ext>
+            </a:extLst>
+          </p:cNvPr>
+          <p:cNvSpPr>
+            <a:spLocks xmlns:a="http://schemas.openxmlformats.org/drawingml/2006/main" noGrp="1"/>
+          </p:cNvSpPr>
+          <p:nvPr/>
+        </p:nvSpPr>
+        <p:spPr>
+          <a:xfrm xmlns:a="http://schemas.openxmlformats.org/drawingml/2006/main">
+            <a:off x="1000125" y="4326255"/>
+            <a:ext cx="10334625" cy="0"/>
+          </a:xfrm>
+          <a:prstGeom xmlns:a="http://schemas.openxmlformats.org/drawingml/2006/main" prst="line">
+            <a:avLst/>
+          </a:prstGeom>
+          <a:noFill xmlns:a="http://schemas.openxmlformats.org/drawingml/2006/main"/>
+          <a:ln xmlns:a="http://schemas.openxmlformats.org/drawingml/2006/main" w="9525">
+            <a:solidFill>
+              <a:srgbClr val="CEDBD3"/>
+            </a:solidFill>
+          </a:ln>
+        </p:spPr>
+      </p:sp>
+      <p:sp>
+        <p:nvSpPr>
+          <p:cNvPr id="20" name="row-rule-3">
+            <a:extLst xmlns:a="http://schemas.openxmlformats.org/drawingml/2006/main">
+              <a:ext uri="{FF2B5EF4-FFF2-40B4-BE49-F238E27FC236}">
+                <a16:creationId xmlns:a16="http://schemas.microsoft.com/office/drawing/2014/main" id="{DD2F1220-C537-4CCE-B615-95372CE50BAF}"/>
+              </a:ext>
+            </a:extLst>
+          </p:cNvPr>
+          <p:cNvSpPr>
+            <a:spLocks xmlns:a="http://schemas.openxmlformats.org/drawingml/2006/main" noGrp="1"/>
+          </p:cNvSpPr>
+          <p:nvPr/>
+        </p:nvSpPr>
+        <p:spPr>
+          <a:xfrm xmlns:a="http://schemas.openxmlformats.org/drawingml/2006/main">
+            <a:off x="1000125" y="5006340"/>
+            <a:ext cx="10334625" cy="0"/>
+          </a:xfrm>
+          <a:prstGeom xmlns:a="http://schemas.openxmlformats.org/drawingml/2006/main" prst="line">
+            <a:avLst/>
+          </a:prstGeom>
+          <a:noFill xmlns:a="http://schemas.openxmlformats.org/drawingml/2006/main"/>
+          <a:ln xmlns:a="http://schemas.openxmlformats.org/drawingml/2006/main" w="9525">
+            <a:solidFill>
+              <a:srgbClr val="CEDBD3"/>
+            </a:solidFill>
+          </a:ln>
+        </p:spPr>
       </p:sp>
     </p:spTree>
     <p:extLst>
@@ -7863,7 +9976,7 @@
     <p:bg>
       <p:bgPr>
         <a:solidFill xmlns:a="http://schemas.openxmlformats.org/drawingml/2006/main">
-          <a:srgbClr val="F5F1E8"/>
+          <a:srgbClr val="FAF9F5"/>
         </a:solidFill>
       </p:bgPr>
     </p:bg>
@@ -7892,8 +10005,8 @@
         </p:nvSpPr>
         <p:spPr>
           <a:xfrm xmlns:a="http://schemas.openxmlformats.org/drawingml/2006/main">
-            <a:off x="609600" y="552450"/>
-            <a:ext cx="781050" cy="57150"/>
+            <a:off x="609600" y="733425"/>
+            <a:ext cx="781050" cy="38100"/>
           </a:xfrm>
           <a:prstGeom xmlns:a="http://schemas.openxmlformats.org/drawingml/2006/main" prst="rect">
             <a:avLst/>
@@ -7923,34 +10036,43 @@
         </p:nvSpPr>
         <p:spPr>
           <a:xfrm xmlns:a="http://schemas.openxmlformats.org/drawingml/2006/main">
-            <a:off x="609600" y="762000"/>
-            <a:ext cx="8572500" cy="285750"/>
-          </a:xfrm>
-          <a:prstGeom xmlns:a="http://schemas.openxmlformats.org/drawingml/2006/main" prst="rect">
-            <a:avLst/>
-          </a:prstGeom>
-          <a:noFill xmlns:a="http://schemas.openxmlformats.org/drawingml/2006/main"/>
-          <a:ln xmlns:a="http://schemas.openxmlformats.org/drawingml/2006/main" w="0">
-            <a:noFill/>
-            <a:prstDash val="solid"/>
-          </a:ln>
-        </p:spPr>
-        <p:txBody>
-          <a:bodyPr xmlns:a="http://schemas.openxmlformats.org/drawingml/2006/main" lIns="0" tIns="0" rIns="0" bIns="0" anchor="ctr"/>
-          <a:lstStyle xmlns:a="http://schemas.openxmlformats.org/drawingml/2006/main"/>
-          <a:p xmlns:a="http://schemas.openxmlformats.org/drawingml/2006/main">
-            <a:pPr>
-              <a:defRPr sz="1500" b="1">
+            <a:off x="609600" y="342900"/>
+            <a:ext cx="9334500" cy="304800"/>
+          </a:xfrm>
+          <a:prstGeom xmlns:a="http://schemas.openxmlformats.org/drawingml/2006/main" prst="rect">
+            <a:avLst/>
+          </a:prstGeom>
+          <a:noFill xmlns:a="http://schemas.openxmlformats.org/drawingml/2006/main"/>
+          <a:ln xmlns:a="http://schemas.openxmlformats.org/drawingml/2006/main" w="0">
+            <a:noFill/>
+            <a:prstDash val="solid"/>
+          </a:ln>
+        </p:spPr>
+        <p:txBody>
+          <a:bodyPr xmlns:a="http://schemas.openxmlformats.org/drawingml/2006/main" lIns="0" tIns="0" rIns="0" bIns="0" anchor="ctr">
+            <a:noAutofit/>
+          </a:bodyPr>
+          <a:lstStyle xmlns:a="http://schemas.openxmlformats.org/drawingml/2006/main"/>
+          <a:p xmlns:a="http://schemas.openxmlformats.org/drawingml/2006/main">
+            <a:pPr algn="l">
+              <a:buNone/>
+              <a:defRPr sz="1350" b="1">
                 <a:solidFill>
                   <a:srgbClr val="28685E"/>
                 </a:solidFill>
-              </a:defRPr>
-            </a:pPr>
-            <a:r>
-              <a:rPr sz="1500" b="1">
+                <a:latin typeface="Calibri"/>
+                <a:ea typeface="Calibri"/>
+                <a:cs typeface="Calibri"/>
+              </a:defRPr>
+            </a:pPr>
+            <a:r>
+              <a:rPr sz="1350" b="1">
                 <a:solidFill>
                   <a:srgbClr val="28685E"/>
                 </a:solidFill>
+                <a:latin typeface="Calibri"/>
+                <a:ea typeface="Calibri"/>
+                <a:cs typeface="Calibri"/>
               </a:rPr>
               <a:t>MADE BY MATT  /  GROW SCIENCE</a:t>
             </a:r>
@@ -7973,34 +10095,43 @@
         </p:nvSpPr>
         <p:spPr>
           <a:xfrm xmlns:a="http://schemas.openxmlformats.org/drawingml/2006/main">
-            <a:off x="609600" y="1352550"/>
-            <a:ext cx="10972800" cy="952500"/>
-          </a:xfrm>
-          <a:prstGeom xmlns:a="http://schemas.openxmlformats.org/drawingml/2006/main" prst="rect">
-            <a:avLst/>
-          </a:prstGeom>
-          <a:noFill xmlns:a="http://schemas.openxmlformats.org/drawingml/2006/main"/>
-          <a:ln xmlns:a="http://schemas.openxmlformats.org/drawingml/2006/main" w="0">
-            <a:noFill/>
-            <a:prstDash val="solid"/>
-          </a:ln>
-        </p:spPr>
-        <p:txBody>
-          <a:bodyPr xmlns:a="http://schemas.openxmlformats.org/drawingml/2006/main" lIns="0" tIns="0" rIns="0" bIns="0" anchor="ctr"/>
-          <a:lstStyle xmlns:a="http://schemas.openxmlformats.org/drawingml/2006/main"/>
-          <a:p xmlns:a="http://schemas.openxmlformats.org/drawingml/2006/main">
-            <a:pPr>
-              <a:defRPr sz="3750" b="1">
-                <a:solidFill>
-                  <a:srgbClr val="152B3A"/>
-                </a:solidFill>
-              </a:defRPr>
-            </a:pPr>
-            <a:r>
-              <a:rPr sz="3750" b="1">
-                <a:solidFill>
-                  <a:srgbClr val="152B3A"/>
-                </a:solidFill>
+            <a:off x="609600" y="990600"/>
+            <a:ext cx="10972800" cy="1000125"/>
+          </a:xfrm>
+          <a:prstGeom xmlns:a="http://schemas.openxmlformats.org/drawingml/2006/main" prst="rect">
+            <a:avLst/>
+          </a:prstGeom>
+          <a:noFill xmlns:a="http://schemas.openxmlformats.org/drawingml/2006/main"/>
+          <a:ln xmlns:a="http://schemas.openxmlformats.org/drawingml/2006/main" w="0">
+            <a:noFill/>
+            <a:prstDash val="solid"/>
+          </a:ln>
+        </p:spPr>
+        <p:txBody>
+          <a:bodyPr xmlns:a="http://schemas.openxmlformats.org/drawingml/2006/main" lIns="0" tIns="0" rIns="0" bIns="0" anchor="ctr">
+            <a:noAutofit/>
+          </a:bodyPr>
+          <a:lstStyle xmlns:a="http://schemas.openxmlformats.org/drawingml/2006/main"/>
+          <a:p xmlns:a="http://schemas.openxmlformats.org/drawingml/2006/main">
+            <a:pPr algn="l">
+              <a:buNone/>
+              <a:defRPr sz="3675" b="1">
+                <a:solidFill>
+                  <a:srgbClr val="152B3A"/>
+                </a:solidFill>
+                <a:latin typeface="Calibri"/>
+                <a:ea typeface="Calibri"/>
+                <a:cs typeface="Calibri"/>
+              </a:defRPr>
+            </a:pPr>
+            <a:r>
+              <a:rPr sz="3675" b="1">
+                <a:solidFill>
+                  <a:srgbClr val="152B3A"/>
+                </a:solidFill>
+                <a:latin typeface="Calibri"/>
+                <a:ea typeface="Calibri"/>
+                <a:cs typeface="Calibri"/>
               </a:rPr>
               <a:t>Check a reason, not just a label</a:t>
             </a:r>
@@ -8023,14 +10154,14 @@
         </p:nvSpPr>
         <p:spPr>
           <a:xfrm xmlns:a="http://schemas.openxmlformats.org/drawingml/2006/main">
-            <a:off x="609600" y="6219825"/>
+            <a:off x="609600" y="6191250"/>
             <a:ext cx="10972800" cy="9525"/>
           </a:xfrm>
           <a:prstGeom xmlns:a="http://schemas.openxmlformats.org/drawingml/2006/main" prst="rect">
             <a:avLst/>
           </a:prstGeom>
           <a:solidFill xmlns:a="http://schemas.openxmlformats.org/drawingml/2006/main">
-            <a:srgbClr val="DCE7DD"/>
+            <a:srgbClr val="CEDBD3"/>
           </a:solidFill>
           <a:ln xmlns:a="http://schemas.openxmlformats.org/drawingml/2006/main" w="0">
             <a:noFill/>
@@ -8054,34 +10185,43 @@
         </p:nvSpPr>
         <p:spPr>
           <a:xfrm xmlns:a="http://schemas.openxmlformats.org/drawingml/2006/main">
-            <a:off x="609600" y="6381750"/>
-            <a:ext cx="9906000" cy="228600"/>
-          </a:xfrm>
-          <a:prstGeom xmlns:a="http://schemas.openxmlformats.org/drawingml/2006/main" prst="rect">
-            <a:avLst/>
-          </a:prstGeom>
-          <a:noFill xmlns:a="http://schemas.openxmlformats.org/drawingml/2006/main"/>
-          <a:ln xmlns:a="http://schemas.openxmlformats.org/drawingml/2006/main" w="0">
-            <a:noFill/>
-            <a:prstDash val="solid"/>
-          </a:ln>
-        </p:spPr>
-        <p:txBody>
-          <a:bodyPr xmlns:a="http://schemas.openxmlformats.org/drawingml/2006/main" lIns="0" tIns="0" rIns="0" bIns="0" anchor="ctr"/>
-          <a:lstStyle xmlns:a="http://schemas.openxmlformats.org/drawingml/2006/main"/>
-          <a:p xmlns:a="http://schemas.openxmlformats.org/drawingml/2006/main">
-            <a:pPr>
-              <a:defRPr sz="1275" b="0">
+            <a:off x="609600" y="6419850"/>
+            <a:ext cx="9525000" cy="219075"/>
+          </a:xfrm>
+          <a:prstGeom xmlns:a="http://schemas.openxmlformats.org/drawingml/2006/main" prst="rect">
+            <a:avLst/>
+          </a:prstGeom>
+          <a:noFill xmlns:a="http://schemas.openxmlformats.org/drawingml/2006/main"/>
+          <a:ln xmlns:a="http://schemas.openxmlformats.org/drawingml/2006/main" w="0">
+            <a:noFill/>
+            <a:prstDash val="solid"/>
+          </a:ln>
+        </p:spPr>
+        <p:txBody>
+          <a:bodyPr xmlns:a="http://schemas.openxmlformats.org/drawingml/2006/main" lIns="0" tIns="0" rIns="0" bIns="0" anchor="ctr">
+            <a:noAutofit/>
+          </a:bodyPr>
+          <a:lstStyle xmlns:a="http://schemas.openxmlformats.org/drawingml/2006/main"/>
+          <a:p xmlns:a="http://schemas.openxmlformats.org/drawingml/2006/main">
+            <a:pPr algn="l">
+              <a:buNone/>
+              <a:defRPr sz="1200" b="0">
                 <a:solidFill>
                   <a:srgbClr val="50616B"/>
                 </a:solidFill>
-              </a:defRPr>
-            </a:pPr>
-            <a:r>
-              <a:rPr sz="1275" b="0">
+                <a:latin typeface="Calibri"/>
+                <a:ea typeface="Calibri"/>
+                <a:cs typeface="Calibri"/>
+              </a:defRPr>
+            </a:pPr>
+            <a:r>
+              <a:rPr sz="1200" b="0">
                 <a:solidFill>
                   <a:srgbClr val="50616B"/>
                 </a:solidFill>
+                <a:latin typeface="Calibri"/>
+                <a:ea typeface="Calibri"/>
+                <a:cs typeface="Calibri"/>
               </a:rPr>
               <a:t>AUTUMN 1  ·  WEEK 6  ·  LESSON A</a:t>
             </a:r>
@@ -8104,27 +10244,33 @@
         </p:nvSpPr>
         <p:spPr>
           <a:xfrm xmlns:a="http://schemas.openxmlformats.org/drawingml/2006/main">
-            <a:off x="11106150" y="6362700"/>
-            <a:ext cx="476250" cy="238125"/>
-          </a:xfrm>
-          <a:prstGeom xmlns:a="http://schemas.openxmlformats.org/drawingml/2006/main" prst="rect">
-            <a:avLst/>
-          </a:prstGeom>
-          <a:noFill xmlns:a="http://schemas.openxmlformats.org/drawingml/2006/main"/>
-          <a:ln xmlns:a="http://schemas.openxmlformats.org/drawingml/2006/main" w="0">
-            <a:noFill/>
-            <a:prstDash val="solid"/>
-          </a:ln>
-        </p:spPr>
-        <p:txBody>
-          <a:bodyPr xmlns:a="http://schemas.openxmlformats.org/drawingml/2006/main" lIns="0" tIns="0" rIns="0" bIns="0" anchor="ctr"/>
-          <a:lstStyle xmlns:a="http://schemas.openxmlformats.org/drawingml/2006/main"/>
-          <a:p xmlns:a="http://schemas.openxmlformats.org/drawingml/2006/main">
-            <a:pPr>
+            <a:off x="11106150" y="6400800"/>
+            <a:ext cx="476250" cy="247650"/>
+          </a:xfrm>
+          <a:prstGeom xmlns:a="http://schemas.openxmlformats.org/drawingml/2006/main" prst="rect">
+            <a:avLst/>
+          </a:prstGeom>
+          <a:noFill xmlns:a="http://schemas.openxmlformats.org/drawingml/2006/main"/>
+          <a:ln xmlns:a="http://schemas.openxmlformats.org/drawingml/2006/main" w="0">
+            <a:noFill/>
+            <a:prstDash val="solid"/>
+          </a:ln>
+        </p:spPr>
+        <p:txBody>
+          <a:bodyPr xmlns:a="http://schemas.openxmlformats.org/drawingml/2006/main" lIns="0" tIns="0" rIns="0" bIns="0" anchor="ctr">
+            <a:noAutofit/>
+          </a:bodyPr>
+          <a:lstStyle xmlns:a="http://schemas.openxmlformats.org/drawingml/2006/main"/>
+          <a:p xmlns:a="http://schemas.openxmlformats.org/drawingml/2006/main">
+            <a:pPr algn="l">
+              <a:buNone/>
               <a:defRPr sz="1350" b="1">
                 <a:solidFill>
                   <a:srgbClr val="28685E"/>
                 </a:solidFill>
+                <a:latin typeface="Calibri"/>
+                <a:ea typeface="Calibri"/>
+                <a:cs typeface="Calibri"/>
               </a:defRPr>
             </a:pPr>
             <a:r>
@@ -8132,6 +10278,9 @@
                 <a:solidFill>
                   <a:srgbClr val="28685E"/>
                 </a:solidFill>
+                <a:latin typeface="Calibri"/>
+                <a:ea typeface="Calibri"/>
+                <a:cs typeface="Calibri"/>
               </a:rPr>
               <a:t>08</a:t>
             </a:r>
@@ -8154,34 +10303,45 @@
         </p:nvSpPr>
         <p:spPr>
           <a:xfrm xmlns:a="http://schemas.openxmlformats.org/drawingml/2006/main">
-            <a:off x="609600" y="2619375"/>
-            <a:ext cx="4953000" cy="428625"/>
-          </a:xfrm>
-          <a:prstGeom xmlns:a="http://schemas.openxmlformats.org/drawingml/2006/main" prst="rect">
-            <a:avLst/>
-          </a:prstGeom>
-          <a:noFill xmlns:a="http://schemas.openxmlformats.org/drawingml/2006/main"/>
-          <a:ln xmlns:a="http://schemas.openxmlformats.org/drawingml/2006/main" w="0">
-            <a:noFill/>
-            <a:prstDash val="solid"/>
-          </a:ln>
-        </p:spPr>
-        <p:txBody>
-          <a:bodyPr xmlns:a="http://schemas.openxmlformats.org/drawingml/2006/main" lIns="0" tIns="0" rIns="0" bIns="0" anchor="ctr"/>
-          <a:lstStyle xmlns:a="http://schemas.openxmlformats.org/drawingml/2006/main"/>
-          <a:p xmlns:a="http://schemas.openxmlformats.org/drawingml/2006/main">
-            <a:pPr>
-              <a:defRPr sz="2025" b="1">
+            <a:off x="609600" y="2219325"/>
+            <a:ext cx="5257800" cy="762000"/>
+          </a:xfrm>
+          <a:prstGeom xmlns:a="http://schemas.openxmlformats.org/drawingml/2006/main" prst="rect">
+            <a:avLst/>
+          </a:prstGeom>
+          <a:solidFill xmlns:a="http://schemas.openxmlformats.org/drawingml/2006/main">
+            <a:srgbClr val="E7EFE9"/>
+          </a:solidFill>
+          <a:ln xmlns:a="http://schemas.openxmlformats.org/drawingml/2006/main" w="0">
+            <a:noFill/>
+            <a:prstDash val="solid"/>
+          </a:ln>
+        </p:spPr>
+        <p:txBody>
+          <a:bodyPr xmlns:a="http://schemas.openxmlformats.org/drawingml/2006/main" lIns="228600" tIns="114300" rIns="228600" bIns="114300" anchor="ctr">
+            <a:noAutofit/>
+          </a:bodyPr>
+          <a:lstStyle xmlns:a="http://schemas.openxmlformats.org/drawingml/2006/main"/>
+          <a:p xmlns:a="http://schemas.openxmlformats.org/drawingml/2006/main">
+            <a:pPr algn="l">
+              <a:buNone/>
+              <a:defRPr sz="1875" b="1">
                 <a:solidFill>
                   <a:srgbClr val="28685E"/>
                 </a:solidFill>
-              </a:defRPr>
-            </a:pPr>
-            <a:r>
-              <a:rPr sz="2025" b="1">
+                <a:latin typeface="Calibri"/>
+                <a:ea typeface="Calibri"/>
+                <a:cs typeface="Calibri"/>
+              </a:defRPr>
+            </a:pPr>
+            <a:r>
+              <a:rPr sz="1875" b="1">
                 <a:solidFill>
                   <a:srgbClr val="28685E"/>
                 </a:solidFill>
+                <a:latin typeface="Calibri"/>
+                <a:ea typeface="Calibri"/>
+                <a:cs typeface="Calibri"/>
               </a:rPr>
               <a:t>CLASSIFICATION CHECK</a:t>
             </a:r>
@@ -8204,34 +10364,45 @@
         </p:nvSpPr>
         <p:spPr>
           <a:xfrm xmlns:a="http://schemas.openxmlformats.org/drawingml/2006/main">
-            <a:off x="6572250" y="2619375"/>
-            <a:ext cx="4953000" cy="428625"/>
-          </a:xfrm>
-          <a:prstGeom xmlns:a="http://schemas.openxmlformats.org/drawingml/2006/main" prst="rect">
-            <a:avLst/>
-          </a:prstGeom>
-          <a:noFill xmlns:a="http://schemas.openxmlformats.org/drawingml/2006/main"/>
-          <a:ln xmlns:a="http://schemas.openxmlformats.org/drawingml/2006/main" w="0">
-            <a:noFill/>
-            <a:prstDash val="solid"/>
-          </a:ln>
-        </p:spPr>
-        <p:txBody>
-          <a:bodyPr xmlns:a="http://schemas.openxmlformats.org/drawingml/2006/main" lIns="0" tIns="0" rIns="0" bIns="0" anchor="ctr"/>
-          <a:lstStyle xmlns:a="http://schemas.openxmlformats.org/drawingml/2006/main"/>
-          <a:p xmlns:a="http://schemas.openxmlformats.org/drawingml/2006/main">
-            <a:pPr>
-              <a:defRPr sz="2025" b="1">
-                <a:solidFill>
-                  <a:srgbClr val="A65D25"/>
-                </a:solidFill>
-              </a:defRPr>
-            </a:pPr>
-            <a:r>
-              <a:rPr sz="2025" b="1">
-                <a:solidFill>
-                  <a:srgbClr val="A65D25"/>
-                </a:solidFill>
+            <a:off x="6381750" y="2219325"/>
+            <a:ext cx="5200650" cy="762000"/>
+          </a:xfrm>
+          <a:prstGeom xmlns:a="http://schemas.openxmlformats.org/drawingml/2006/main" prst="rect">
+            <a:avLst/>
+          </a:prstGeom>
+          <a:solidFill xmlns:a="http://schemas.openxmlformats.org/drawingml/2006/main">
+            <a:srgbClr val="F0EBE3"/>
+          </a:solidFill>
+          <a:ln xmlns:a="http://schemas.openxmlformats.org/drawingml/2006/main" w="0">
+            <a:noFill/>
+            <a:prstDash val="solid"/>
+          </a:ln>
+        </p:spPr>
+        <p:txBody>
+          <a:bodyPr xmlns:a="http://schemas.openxmlformats.org/drawingml/2006/main" lIns="228600" tIns="114300" rIns="228600" bIns="114300" anchor="ctr">
+            <a:noAutofit/>
+          </a:bodyPr>
+          <a:lstStyle xmlns:a="http://schemas.openxmlformats.org/drawingml/2006/main"/>
+          <a:p xmlns:a="http://schemas.openxmlformats.org/drawingml/2006/main">
+            <a:pPr algn="l">
+              <a:buNone/>
+              <a:defRPr sz="1875" b="1">
+                <a:solidFill>
+                  <a:srgbClr val="A95D21"/>
+                </a:solidFill>
+                <a:latin typeface="Calibri"/>
+                <a:ea typeface="Calibri"/>
+                <a:cs typeface="Calibri"/>
+              </a:defRPr>
+            </a:pPr>
+            <a:r>
+              <a:rPr sz="1875" b="1">
+                <a:solidFill>
+                  <a:srgbClr val="A95D21"/>
+                </a:solidFill>
+                <a:latin typeface="Calibri"/>
+                <a:ea typeface="Calibri"/>
+                <a:cs typeface="Calibri"/>
               </a:rPr>
               <a:t>YEAR CHECK</a:t>
             </a:r>
@@ -8254,27 +10425,35 @@
         </p:nvSpPr>
         <p:spPr>
           <a:xfrm xmlns:a="http://schemas.openxmlformats.org/drawingml/2006/main">
-            <a:off x="609600" y="3333750"/>
-            <a:ext cx="4953000" cy="2524125"/>
-          </a:xfrm>
-          <a:prstGeom xmlns:a="http://schemas.openxmlformats.org/drawingml/2006/main" prst="rect">
-            <a:avLst/>
-          </a:prstGeom>
-          <a:noFill xmlns:a="http://schemas.openxmlformats.org/drawingml/2006/main"/>
-          <a:ln xmlns:a="http://schemas.openxmlformats.org/drawingml/2006/main" w="0">
-            <a:noFill/>
-            <a:prstDash val="solid"/>
-          </a:ln>
-        </p:spPr>
-        <p:txBody>
-          <a:bodyPr xmlns:a="http://schemas.openxmlformats.org/drawingml/2006/main" lIns="0" tIns="0" rIns="0" bIns="0" anchor="ctr"/>
-          <a:lstStyle xmlns:a="http://schemas.openxmlformats.org/drawingml/2006/main"/>
-          <a:p xmlns:a="http://schemas.openxmlformats.org/drawingml/2006/main">
-            <a:pPr>
+            <a:off x="609600" y="2981325"/>
+            <a:ext cx="5257800" cy="2714625"/>
+          </a:xfrm>
+          <a:prstGeom xmlns:a="http://schemas.openxmlformats.org/drawingml/2006/main" prst="rect">
+            <a:avLst/>
+          </a:prstGeom>
+          <a:solidFill xmlns:a="http://schemas.openxmlformats.org/drawingml/2006/main">
+            <a:srgbClr val="E7EFE9"/>
+          </a:solidFill>
+          <a:ln xmlns:a="http://schemas.openxmlformats.org/drawingml/2006/main" w="0">
+            <a:noFill/>
+            <a:prstDash val="solid"/>
+          </a:ln>
+        </p:spPr>
+        <p:txBody>
+          <a:bodyPr xmlns:a="http://schemas.openxmlformats.org/drawingml/2006/main" lIns="228600" tIns="114300" rIns="228600" bIns="114300" anchor="ctr">
+            <a:noAutofit/>
+          </a:bodyPr>
+          <a:lstStyle xmlns:a="http://schemas.openxmlformats.org/drawingml/2006/main"/>
+          <a:p xmlns:a="http://schemas.openxmlformats.org/drawingml/2006/main">
+            <a:pPr algn="l">
+              <a:buNone/>
               <a:defRPr sz="2400" b="0">
                 <a:solidFill>
                   <a:srgbClr val="152B3A"/>
                 </a:solidFill>
+                <a:latin typeface="Calibri"/>
+                <a:ea typeface="Calibri"/>
+                <a:cs typeface="Calibri"/>
               </a:defRPr>
             </a:pPr>
             <a:r>
@@ -8282,16 +10461,23 @@
                 <a:solidFill>
                   <a:srgbClr val="152B3A"/>
                 </a:solidFill>
+                <a:latin typeface="Calibri"/>
+                <a:ea typeface="Calibri"/>
+                <a:cs typeface="Calibri"/>
               </a:rPr>
               <a:t>Mercury and Mars: rocky</a:t>
             </a:r>
           </a:p>
           <a:p xmlns:a="http://schemas.openxmlformats.org/drawingml/2006/main">
-            <a:pPr>
+            <a:pPr algn="l">
+              <a:buNone/>
               <a:defRPr sz="2400" b="0">
                 <a:solidFill>
                   <a:srgbClr val="152B3A"/>
                 </a:solidFill>
+                <a:latin typeface="Calibri"/>
+                <a:ea typeface="Calibri"/>
+                <a:cs typeface="Calibri"/>
               </a:defRPr>
             </a:pPr>
             <a:r>
@@ -8299,16 +10485,23 @@
                 <a:solidFill>
                   <a:srgbClr val="152B3A"/>
                 </a:solidFill>
+                <a:latin typeface="Calibri"/>
+                <a:ea typeface="Calibri"/>
+                <a:cs typeface="Calibri"/>
               </a:rPr>
               <a:t>Jupiter: gas giant</a:t>
             </a:r>
           </a:p>
           <a:p xmlns:a="http://schemas.openxmlformats.org/drawingml/2006/main">
-            <a:pPr>
+            <a:pPr algn="l">
+              <a:buNone/>
               <a:defRPr sz="2400" b="0">
                 <a:solidFill>
                   <a:srgbClr val="152B3A"/>
                 </a:solidFill>
+                <a:latin typeface="Calibri"/>
+                <a:ea typeface="Calibri"/>
+                <a:cs typeface="Calibri"/>
               </a:defRPr>
             </a:pPr>
             <a:r>
@@ -8316,6 +10509,9 @@
                 <a:solidFill>
                   <a:srgbClr val="152B3A"/>
                 </a:solidFill>
+                <a:latin typeface="Calibri"/>
+                <a:ea typeface="Calibri"/>
+                <a:cs typeface="Calibri"/>
               </a:rPr>
               <a:t>Neptune: ice giant</a:t>
             </a:r>
@@ -8338,27 +10534,35 @@
         </p:nvSpPr>
         <p:spPr>
           <a:xfrm xmlns:a="http://schemas.openxmlformats.org/drawingml/2006/main">
-            <a:off x="6572250" y="3333750"/>
-            <a:ext cx="4857750" cy="2524125"/>
-          </a:xfrm>
-          <a:prstGeom xmlns:a="http://schemas.openxmlformats.org/drawingml/2006/main" prst="rect">
-            <a:avLst/>
-          </a:prstGeom>
-          <a:noFill xmlns:a="http://schemas.openxmlformats.org/drawingml/2006/main"/>
-          <a:ln xmlns:a="http://schemas.openxmlformats.org/drawingml/2006/main" w="0">
-            <a:noFill/>
-            <a:prstDash val="solid"/>
-          </a:ln>
-        </p:spPr>
-        <p:txBody>
-          <a:bodyPr xmlns:a="http://schemas.openxmlformats.org/drawingml/2006/main" lIns="0" tIns="0" rIns="0" bIns="0" anchor="ctr"/>
-          <a:lstStyle xmlns:a="http://schemas.openxmlformats.org/drawingml/2006/main"/>
-          <a:p xmlns:a="http://schemas.openxmlformats.org/drawingml/2006/main">
-            <a:pPr>
+            <a:off x="6381750" y="2981325"/>
+            <a:ext cx="5200650" cy="2714625"/>
+          </a:xfrm>
+          <a:prstGeom xmlns:a="http://schemas.openxmlformats.org/drawingml/2006/main" prst="rect">
+            <a:avLst/>
+          </a:prstGeom>
+          <a:solidFill xmlns:a="http://schemas.openxmlformats.org/drawingml/2006/main">
+            <a:srgbClr val="F0EBE3"/>
+          </a:solidFill>
+          <a:ln xmlns:a="http://schemas.openxmlformats.org/drawingml/2006/main" w="0">
+            <a:noFill/>
+            <a:prstDash val="solid"/>
+          </a:ln>
+        </p:spPr>
+        <p:txBody>
+          <a:bodyPr xmlns:a="http://schemas.openxmlformats.org/drawingml/2006/main" lIns="228600" tIns="114300" rIns="228600" bIns="114300" anchor="ctr">
+            <a:noAutofit/>
+          </a:bodyPr>
+          <a:lstStyle xmlns:a="http://schemas.openxmlformats.org/drawingml/2006/main"/>
+          <a:p xmlns:a="http://schemas.openxmlformats.org/drawingml/2006/main">
+            <a:pPr algn="l">
+              <a:buNone/>
               <a:defRPr sz="2400" b="0">
                 <a:solidFill>
                   <a:srgbClr val="152B3A"/>
                 </a:solidFill>
+                <a:latin typeface="Calibri"/>
+                <a:ea typeface="Calibri"/>
+                <a:cs typeface="Calibri"/>
               </a:defRPr>
             </a:pPr>
             <a:r>
@@ -8366,16 +10570,23 @@
                 <a:solidFill>
                   <a:srgbClr val="152B3A"/>
                 </a:solidFill>
+                <a:latin typeface="Calibri"/>
+                <a:ea typeface="Calibri"/>
+                <a:cs typeface="Calibri"/>
               </a:rPr>
               <a:t>Earth: 365 Earth days</a:t>
             </a:r>
           </a:p>
           <a:p xmlns:a="http://schemas.openxmlformats.org/drawingml/2006/main">
-            <a:pPr>
+            <a:pPr algn="l">
+              <a:buNone/>
               <a:defRPr sz="2400" b="0">
                 <a:solidFill>
                   <a:srgbClr val="152B3A"/>
                 </a:solidFill>
+                <a:latin typeface="Calibri"/>
+                <a:ea typeface="Calibri"/>
+                <a:cs typeface="Calibri"/>
               </a:defRPr>
             </a:pPr>
             <a:r>
@@ -8383,16 +10594,23 @@
                 <a:solidFill>
                   <a:srgbClr val="152B3A"/>
                 </a:solidFill>
+                <a:latin typeface="Calibri"/>
+                <a:ea typeface="Calibri"/>
+                <a:cs typeface="Calibri"/>
               </a:rPr>
               <a:t>Mars: 687 Earth days</a:t>
             </a:r>
           </a:p>
           <a:p xmlns:a="http://schemas.openxmlformats.org/drawingml/2006/main">
-            <a:pPr>
+            <a:pPr algn="l">
+              <a:buNone/>
               <a:defRPr sz="2400" b="0">
                 <a:solidFill>
                   <a:srgbClr val="152B3A"/>
                 </a:solidFill>
+                <a:latin typeface="Calibri"/>
+                <a:ea typeface="Calibri"/>
+                <a:cs typeface="Calibri"/>
               </a:defRPr>
             </a:pPr>
             <a:r>
@@ -8400,6 +10618,9 @@
                 <a:solidFill>
                   <a:srgbClr val="152B3A"/>
                 </a:solidFill>
+                <a:latin typeface="Calibri"/>
+                <a:ea typeface="Calibri"/>
+                <a:cs typeface="Calibri"/>
               </a:rPr>
               <a:t>Mars takes 322 more days.</a:t>
             </a:r>
@@ -8422,7 +10643,7 @@
     <p:bg>
       <p:bgPr>
         <a:solidFill xmlns:a="http://schemas.openxmlformats.org/drawingml/2006/main">
-          <a:srgbClr val="F5F1E8"/>
+          <a:srgbClr val="FAF9F5"/>
         </a:solidFill>
       </p:bgPr>
     </p:bg>
@@ -8451,8 +10672,8 @@
         </p:nvSpPr>
         <p:spPr>
           <a:xfrm xmlns:a="http://schemas.openxmlformats.org/drawingml/2006/main">
-            <a:off x="609600" y="552450"/>
-            <a:ext cx="781050" cy="57150"/>
+            <a:off x="609600" y="733425"/>
+            <a:ext cx="781050" cy="38100"/>
           </a:xfrm>
           <a:prstGeom xmlns:a="http://schemas.openxmlformats.org/drawingml/2006/main" prst="rect">
             <a:avLst/>
@@ -8482,34 +10703,43 @@
         </p:nvSpPr>
         <p:spPr>
           <a:xfrm xmlns:a="http://schemas.openxmlformats.org/drawingml/2006/main">
-            <a:off x="609600" y="762000"/>
-            <a:ext cx="8572500" cy="285750"/>
-          </a:xfrm>
-          <a:prstGeom xmlns:a="http://schemas.openxmlformats.org/drawingml/2006/main" prst="rect">
-            <a:avLst/>
-          </a:prstGeom>
-          <a:noFill xmlns:a="http://schemas.openxmlformats.org/drawingml/2006/main"/>
-          <a:ln xmlns:a="http://schemas.openxmlformats.org/drawingml/2006/main" w="0">
-            <a:noFill/>
-            <a:prstDash val="solid"/>
-          </a:ln>
-        </p:spPr>
-        <p:txBody>
-          <a:bodyPr xmlns:a="http://schemas.openxmlformats.org/drawingml/2006/main" lIns="0" tIns="0" rIns="0" bIns="0" anchor="ctr"/>
-          <a:lstStyle xmlns:a="http://schemas.openxmlformats.org/drawingml/2006/main"/>
-          <a:p xmlns:a="http://schemas.openxmlformats.org/drawingml/2006/main">
-            <a:pPr>
-              <a:defRPr sz="1500" b="1">
+            <a:off x="609600" y="342900"/>
+            <a:ext cx="9334500" cy="304800"/>
+          </a:xfrm>
+          <a:prstGeom xmlns:a="http://schemas.openxmlformats.org/drawingml/2006/main" prst="rect">
+            <a:avLst/>
+          </a:prstGeom>
+          <a:noFill xmlns:a="http://schemas.openxmlformats.org/drawingml/2006/main"/>
+          <a:ln xmlns:a="http://schemas.openxmlformats.org/drawingml/2006/main" w="0">
+            <a:noFill/>
+            <a:prstDash val="solid"/>
+          </a:ln>
+        </p:spPr>
+        <p:txBody>
+          <a:bodyPr xmlns:a="http://schemas.openxmlformats.org/drawingml/2006/main" lIns="0" tIns="0" rIns="0" bIns="0" anchor="ctr">
+            <a:noAutofit/>
+          </a:bodyPr>
+          <a:lstStyle xmlns:a="http://schemas.openxmlformats.org/drawingml/2006/main"/>
+          <a:p xmlns:a="http://schemas.openxmlformats.org/drawingml/2006/main">
+            <a:pPr algn="l">
+              <a:buNone/>
+              <a:defRPr sz="1350" b="1">
                 <a:solidFill>
                   <a:srgbClr val="28685E"/>
                 </a:solidFill>
-              </a:defRPr>
-            </a:pPr>
-            <a:r>
-              <a:rPr sz="1500" b="1">
+                <a:latin typeface="Calibri"/>
+                <a:ea typeface="Calibri"/>
+                <a:cs typeface="Calibri"/>
+              </a:defRPr>
+            </a:pPr>
+            <a:r>
+              <a:rPr sz="1350" b="1">
                 <a:solidFill>
                   <a:srgbClr val="28685E"/>
                 </a:solidFill>
+                <a:latin typeface="Calibri"/>
+                <a:ea typeface="Calibri"/>
+                <a:cs typeface="Calibri"/>
               </a:rPr>
               <a:t>MADE BY MATT  /  GROW SCIENCE</a:t>
             </a:r>
@@ -8532,34 +10762,43 @@
         </p:nvSpPr>
         <p:spPr>
           <a:xfrm xmlns:a="http://schemas.openxmlformats.org/drawingml/2006/main">
-            <a:off x="609600" y="1352550"/>
-            <a:ext cx="10972800" cy="952500"/>
-          </a:xfrm>
-          <a:prstGeom xmlns:a="http://schemas.openxmlformats.org/drawingml/2006/main" prst="rect">
-            <a:avLst/>
-          </a:prstGeom>
-          <a:noFill xmlns:a="http://schemas.openxmlformats.org/drawingml/2006/main"/>
-          <a:ln xmlns:a="http://schemas.openxmlformats.org/drawingml/2006/main" w="0">
-            <a:noFill/>
-            <a:prstDash val="solid"/>
-          </a:ln>
-        </p:spPr>
-        <p:txBody>
-          <a:bodyPr xmlns:a="http://schemas.openxmlformats.org/drawingml/2006/main" lIns="0" tIns="0" rIns="0" bIns="0" anchor="ctr"/>
-          <a:lstStyle xmlns:a="http://schemas.openxmlformats.org/drawingml/2006/main"/>
-          <a:p xmlns:a="http://schemas.openxmlformats.org/drawingml/2006/main">
-            <a:pPr>
-              <a:defRPr sz="3750" b="1">
-                <a:solidFill>
-                  <a:srgbClr val="152B3A"/>
-                </a:solidFill>
-              </a:defRPr>
-            </a:pPr>
-            <a:r>
-              <a:rPr sz="3750" b="1">
-                <a:solidFill>
-                  <a:srgbClr val="152B3A"/>
-                </a:solidFill>
+            <a:off x="609600" y="990600"/>
+            <a:ext cx="10972800" cy="1000125"/>
+          </a:xfrm>
+          <a:prstGeom xmlns:a="http://schemas.openxmlformats.org/drawingml/2006/main" prst="rect">
+            <a:avLst/>
+          </a:prstGeom>
+          <a:noFill xmlns:a="http://schemas.openxmlformats.org/drawingml/2006/main"/>
+          <a:ln xmlns:a="http://schemas.openxmlformats.org/drawingml/2006/main" w="0">
+            <a:noFill/>
+            <a:prstDash val="solid"/>
+          </a:ln>
+        </p:spPr>
+        <p:txBody>
+          <a:bodyPr xmlns:a="http://schemas.openxmlformats.org/drawingml/2006/main" lIns="0" tIns="0" rIns="0" bIns="0" anchor="ctr">
+            <a:noAutofit/>
+          </a:bodyPr>
+          <a:lstStyle xmlns:a="http://schemas.openxmlformats.org/drawingml/2006/main"/>
+          <a:p xmlns:a="http://schemas.openxmlformats.org/drawingml/2006/main">
+            <a:pPr algn="l">
+              <a:buNone/>
+              <a:defRPr sz="3675" b="1">
+                <a:solidFill>
+                  <a:srgbClr val="152B3A"/>
+                </a:solidFill>
+                <a:latin typeface="Calibri"/>
+                <a:ea typeface="Calibri"/>
+                <a:cs typeface="Calibri"/>
+              </a:defRPr>
+            </a:pPr>
+            <a:r>
+              <a:rPr sz="3675" b="1">
+                <a:solidFill>
+                  <a:srgbClr val="152B3A"/>
+                </a:solidFill>
+                <a:latin typeface="Calibri"/>
+                <a:ea typeface="Calibri"/>
+                <a:cs typeface="Calibri"/>
               </a:rPr>
               <a:t>Build the explanation</a:t>
             </a:r>
@@ -8582,14 +10821,14 @@
         </p:nvSpPr>
         <p:spPr>
           <a:xfrm xmlns:a="http://schemas.openxmlformats.org/drawingml/2006/main">
-            <a:off x="609600" y="6219825"/>
+            <a:off x="609600" y="6191250"/>
             <a:ext cx="10972800" cy="9525"/>
           </a:xfrm>
           <a:prstGeom xmlns:a="http://schemas.openxmlformats.org/drawingml/2006/main" prst="rect">
             <a:avLst/>
           </a:prstGeom>
           <a:solidFill xmlns:a="http://schemas.openxmlformats.org/drawingml/2006/main">
-            <a:srgbClr val="DCE7DD"/>
+            <a:srgbClr val="CEDBD3"/>
           </a:solidFill>
           <a:ln xmlns:a="http://schemas.openxmlformats.org/drawingml/2006/main" w="0">
             <a:noFill/>
@@ -8613,34 +10852,43 @@
         </p:nvSpPr>
         <p:spPr>
           <a:xfrm xmlns:a="http://schemas.openxmlformats.org/drawingml/2006/main">
-            <a:off x="609600" y="6381750"/>
-            <a:ext cx="9906000" cy="228600"/>
-          </a:xfrm>
-          <a:prstGeom xmlns:a="http://schemas.openxmlformats.org/drawingml/2006/main" prst="rect">
-            <a:avLst/>
-          </a:prstGeom>
-          <a:noFill xmlns:a="http://schemas.openxmlformats.org/drawingml/2006/main"/>
-          <a:ln xmlns:a="http://schemas.openxmlformats.org/drawingml/2006/main" w="0">
-            <a:noFill/>
-            <a:prstDash val="solid"/>
-          </a:ln>
-        </p:spPr>
-        <p:txBody>
-          <a:bodyPr xmlns:a="http://schemas.openxmlformats.org/drawingml/2006/main" lIns="0" tIns="0" rIns="0" bIns="0" anchor="ctr"/>
-          <a:lstStyle xmlns:a="http://schemas.openxmlformats.org/drawingml/2006/main"/>
-          <a:p xmlns:a="http://schemas.openxmlformats.org/drawingml/2006/main">
-            <a:pPr>
-              <a:defRPr sz="1275" b="0">
+            <a:off x="609600" y="6419850"/>
+            <a:ext cx="9525000" cy="219075"/>
+          </a:xfrm>
+          <a:prstGeom xmlns:a="http://schemas.openxmlformats.org/drawingml/2006/main" prst="rect">
+            <a:avLst/>
+          </a:prstGeom>
+          <a:noFill xmlns:a="http://schemas.openxmlformats.org/drawingml/2006/main"/>
+          <a:ln xmlns:a="http://schemas.openxmlformats.org/drawingml/2006/main" w="0">
+            <a:noFill/>
+            <a:prstDash val="solid"/>
+          </a:ln>
+        </p:spPr>
+        <p:txBody>
+          <a:bodyPr xmlns:a="http://schemas.openxmlformats.org/drawingml/2006/main" lIns="0" tIns="0" rIns="0" bIns="0" anchor="ctr">
+            <a:noAutofit/>
+          </a:bodyPr>
+          <a:lstStyle xmlns:a="http://schemas.openxmlformats.org/drawingml/2006/main"/>
+          <a:p xmlns:a="http://schemas.openxmlformats.org/drawingml/2006/main">
+            <a:pPr algn="l">
+              <a:buNone/>
+              <a:defRPr sz="1200" b="0">
                 <a:solidFill>
                   <a:srgbClr val="50616B"/>
                 </a:solidFill>
-              </a:defRPr>
-            </a:pPr>
-            <a:r>
-              <a:rPr sz="1275" b="0">
+                <a:latin typeface="Calibri"/>
+                <a:ea typeface="Calibri"/>
+                <a:cs typeface="Calibri"/>
+              </a:defRPr>
+            </a:pPr>
+            <a:r>
+              <a:rPr sz="1200" b="0">
                 <a:solidFill>
                   <a:srgbClr val="50616B"/>
                 </a:solidFill>
+                <a:latin typeface="Calibri"/>
+                <a:ea typeface="Calibri"/>
+                <a:cs typeface="Calibri"/>
               </a:rPr>
               <a:t>AUTUMN 1  ·  WEEK 6  ·  LESSON A</a:t>
             </a:r>
@@ -8663,27 +10911,33 @@
         </p:nvSpPr>
         <p:spPr>
           <a:xfrm xmlns:a="http://schemas.openxmlformats.org/drawingml/2006/main">
-            <a:off x="11106150" y="6362700"/>
-            <a:ext cx="476250" cy="238125"/>
-          </a:xfrm>
-          <a:prstGeom xmlns:a="http://schemas.openxmlformats.org/drawingml/2006/main" prst="rect">
-            <a:avLst/>
-          </a:prstGeom>
-          <a:noFill xmlns:a="http://schemas.openxmlformats.org/drawingml/2006/main"/>
-          <a:ln xmlns:a="http://schemas.openxmlformats.org/drawingml/2006/main" w="0">
-            <a:noFill/>
-            <a:prstDash val="solid"/>
-          </a:ln>
-        </p:spPr>
-        <p:txBody>
-          <a:bodyPr xmlns:a="http://schemas.openxmlformats.org/drawingml/2006/main" lIns="0" tIns="0" rIns="0" bIns="0" anchor="ctr"/>
-          <a:lstStyle xmlns:a="http://schemas.openxmlformats.org/drawingml/2006/main"/>
-          <a:p xmlns:a="http://schemas.openxmlformats.org/drawingml/2006/main">
-            <a:pPr>
+            <a:off x="11106150" y="6400800"/>
+            <a:ext cx="476250" cy="247650"/>
+          </a:xfrm>
+          <a:prstGeom xmlns:a="http://schemas.openxmlformats.org/drawingml/2006/main" prst="rect">
+            <a:avLst/>
+          </a:prstGeom>
+          <a:noFill xmlns:a="http://schemas.openxmlformats.org/drawingml/2006/main"/>
+          <a:ln xmlns:a="http://schemas.openxmlformats.org/drawingml/2006/main" w="0">
+            <a:noFill/>
+            <a:prstDash val="solid"/>
+          </a:ln>
+        </p:spPr>
+        <p:txBody>
+          <a:bodyPr xmlns:a="http://schemas.openxmlformats.org/drawingml/2006/main" lIns="0" tIns="0" rIns="0" bIns="0" anchor="ctr">
+            <a:noAutofit/>
+          </a:bodyPr>
+          <a:lstStyle xmlns:a="http://schemas.openxmlformats.org/drawingml/2006/main"/>
+          <a:p xmlns:a="http://schemas.openxmlformats.org/drawingml/2006/main">
+            <a:pPr algn="l">
+              <a:buNone/>
               <a:defRPr sz="1350" b="1">
                 <a:solidFill>
                   <a:srgbClr val="28685E"/>
                 </a:solidFill>
+                <a:latin typeface="Calibri"/>
+                <a:ea typeface="Calibri"/>
+                <a:cs typeface="Calibri"/>
               </a:defRPr>
             </a:pPr>
             <a:r>
@@ -8691,6 +10945,9 @@
                 <a:solidFill>
                   <a:srgbClr val="28685E"/>
                 </a:solidFill>
+                <a:latin typeface="Calibri"/>
+                <a:ea typeface="Calibri"/>
+                <a:cs typeface="Calibri"/>
               </a:rPr>
               <a:t>09</a:t>
             </a:r>
@@ -8713,34 +10970,45 @@
         </p:nvSpPr>
         <p:spPr>
           <a:xfrm xmlns:a="http://schemas.openxmlformats.org/drawingml/2006/main">
-            <a:off x="609600" y="2686050"/>
-            <a:ext cx="10858500" cy="1524000"/>
-          </a:xfrm>
-          <a:prstGeom xmlns:a="http://schemas.openxmlformats.org/drawingml/2006/main" prst="rect">
-            <a:avLst/>
-          </a:prstGeom>
-          <a:noFill xmlns:a="http://schemas.openxmlformats.org/drawingml/2006/main"/>
-          <a:ln xmlns:a="http://schemas.openxmlformats.org/drawingml/2006/main" w="0">
-            <a:noFill/>
-            <a:prstDash val="solid"/>
-          </a:ln>
-        </p:spPr>
-        <p:txBody>
-          <a:bodyPr xmlns:a="http://schemas.openxmlformats.org/drawingml/2006/main" lIns="0" tIns="0" rIns="0" bIns="0" anchor="ctr"/>
-          <a:lstStyle xmlns:a="http://schemas.openxmlformats.org/drawingml/2006/main"/>
-          <a:p xmlns:a="http://schemas.openxmlformats.org/drawingml/2006/main">
-            <a:pPr>
-              <a:defRPr sz="2925" b="1">
+            <a:off x="457200" y="2181225"/>
+            <a:ext cx="5734050" cy="2409825"/>
+          </a:xfrm>
+          <a:prstGeom xmlns:a="http://schemas.openxmlformats.org/drawingml/2006/main" prst="rect">
+            <a:avLst/>
+          </a:prstGeom>
+          <a:solidFill xmlns:a="http://schemas.openxmlformats.org/drawingml/2006/main">
+            <a:srgbClr val="E7EFE9"/>
+          </a:solidFill>
+          <a:ln xmlns:a="http://schemas.openxmlformats.org/drawingml/2006/main" w="0">
+            <a:noFill/>
+            <a:prstDash val="solid"/>
+          </a:ln>
+        </p:spPr>
+        <p:txBody>
+          <a:bodyPr xmlns:a="http://schemas.openxmlformats.org/drawingml/2006/main" lIns="152400" tIns="114300" rIns="152400" bIns="114300" anchor="ctr">
+            <a:noAutofit/>
+          </a:bodyPr>
+          <a:lstStyle xmlns:a="http://schemas.openxmlformats.org/drawingml/2006/main"/>
+          <a:p xmlns:a="http://schemas.openxmlformats.org/drawingml/2006/main">
+            <a:pPr algn="l">
+              <a:buNone/>
+              <a:defRPr sz="2775" b="1">
                 <a:solidFill>
                   <a:srgbClr val="28685E"/>
                 </a:solidFill>
-              </a:defRPr>
-            </a:pPr>
-            <a:r>
-              <a:rPr sz="2925" b="1">
+                <a:latin typeface="Calibri"/>
+                <a:ea typeface="Calibri"/>
+                <a:cs typeface="Calibri"/>
+              </a:defRPr>
+            </a:pPr>
+            <a:r>
+              <a:rPr sz="2775" b="1">
                 <a:solidFill>
                   <a:srgbClr val="28685E"/>
                 </a:solidFill>
+                <a:latin typeface="Calibri"/>
+                <a:ea typeface="Calibri"/>
+                <a:cs typeface="Calibri"/>
               </a:rPr>
               <a:t>The Sun's gravity pulls Earth inward, continually bending its moving path into an orbit.</a:t>
             </a:r>
@@ -8763,36 +11031,423 @@
         </p:nvSpPr>
         <p:spPr>
           <a:xfrm xmlns:a="http://schemas.openxmlformats.org/drawingml/2006/main">
-            <a:off x="609600" y="4552950"/>
-            <a:ext cx="10858500" cy="1285875"/>
-          </a:xfrm>
-          <a:prstGeom xmlns:a="http://schemas.openxmlformats.org/drawingml/2006/main" prst="rect">
-            <a:avLst/>
-          </a:prstGeom>
-          <a:noFill xmlns:a="http://schemas.openxmlformats.org/drawingml/2006/main"/>
-          <a:ln xmlns:a="http://schemas.openxmlformats.org/drawingml/2006/main" w="0">
-            <a:noFill/>
-            <a:prstDash val="solid"/>
-          </a:ln>
-        </p:spPr>
-        <p:txBody>
-          <a:bodyPr xmlns:a="http://schemas.openxmlformats.org/drawingml/2006/main" lIns="0" tIns="0" rIns="0" bIns="0" anchor="ctr"/>
-          <a:lstStyle xmlns:a="http://schemas.openxmlformats.org/drawingml/2006/main"/>
-          <a:p xmlns:a="http://schemas.openxmlformats.org/drawingml/2006/main">
-            <a:pPr>
-              <a:defRPr sz="2700" b="0">
-                <a:solidFill>
-                  <a:srgbClr val="152B3A"/>
-                </a:solidFill>
-              </a:defRPr>
-            </a:pPr>
-            <a:r>
-              <a:rPr sz="2700" b="0">
-                <a:solidFill>
-                  <a:srgbClr val="152B3A"/>
-                </a:solidFill>
+            <a:off x="609600" y="4533900"/>
+            <a:ext cx="5429250" cy="1409700"/>
+          </a:xfrm>
+          <a:prstGeom xmlns:a="http://schemas.openxmlformats.org/drawingml/2006/main" prst="rect">
+            <a:avLst/>
+          </a:prstGeom>
+          <a:noFill xmlns:a="http://schemas.openxmlformats.org/drawingml/2006/main"/>
+          <a:ln xmlns:a="http://schemas.openxmlformats.org/drawingml/2006/main" w="0">
+            <a:noFill/>
+            <a:prstDash val="solid"/>
+          </a:ln>
+        </p:spPr>
+        <p:txBody>
+          <a:bodyPr xmlns:a="http://schemas.openxmlformats.org/drawingml/2006/main" lIns="0" tIns="0" rIns="0" bIns="0" anchor="ctr">
+            <a:noAutofit/>
+          </a:bodyPr>
+          <a:lstStyle xmlns:a="http://schemas.openxmlformats.org/drawingml/2006/main"/>
+          <a:p xmlns:a="http://schemas.openxmlformats.org/drawingml/2006/main">
+            <a:pPr algn="l">
+              <a:buNone/>
+              <a:defRPr sz="2250" b="0">
+                <a:solidFill>
+                  <a:srgbClr val="152B3A"/>
+                </a:solidFill>
+                <a:latin typeface="Calibri"/>
+                <a:ea typeface="Calibri"/>
+                <a:cs typeface="Calibri"/>
+              </a:defRPr>
+            </a:pPr>
+            <a:r>
+              <a:rPr sz="2250" b="0">
+                <a:solidFill>
+                  <a:srgbClr val="152B3A"/>
+                </a:solidFill>
+                <a:latin typeface="Calibri"/>
+                <a:ea typeface="Calibri"/>
+                <a:cs typeface="Calibri"/>
               </a:rPr>
               <a:t>Name the force, then explain its effect.</a:t>
+            </a:r>
+          </a:p>
+        </p:txBody>
+      </p:sp>
+      <p:sp>
+        <p:nvSpPr>
+          <p:cNvPr id="11" name="orbit-path">
+            <a:extLst xmlns:a="http://schemas.openxmlformats.org/drawingml/2006/main">
+              <a:ext uri="{FF2B5EF4-FFF2-40B4-BE49-F238E27FC236}">
+                <a16:creationId xmlns:a16="http://schemas.microsoft.com/office/drawing/2014/main" id="{AC56DA07-1E3A-4DD2-8494-2AFB43A35A7C}"/>
+              </a:ext>
+            </a:extLst>
+          </p:cNvPr>
+          <p:cNvSpPr>
+            <a:spLocks xmlns:a="http://schemas.openxmlformats.org/drawingml/2006/main" noGrp="1"/>
+          </p:cNvSpPr>
+          <p:nvPr/>
+        </p:nvSpPr>
+        <p:spPr>
+          <a:xfrm xmlns:a="http://schemas.openxmlformats.org/drawingml/2006/main">
+            <a:off x="6762750" y="2809875"/>
+            <a:ext cx="4286250" cy="2857500"/>
+          </a:xfrm>
+          <a:prstGeom xmlns:a="http://schemas.openxmlformats.org/drawingml/2006/main" prst="ellipse">
+            <a:avLst/>
+          </a:prstGeom>
+          <a:noFill xmlns:a="http://schemas.openxmlformats.org/drawingml/2006/main"/>
+          <a:ln xmlns:a="http://schemas.openxmlformats.org/drawingml/2006/main" w="28575">
+            <a:solidFill>
+              <a:srgbClr val="CEDBD3"/>
+            </a:solidFill>
+          </a:ln>
+        </p:spPr>
+      </p:sp>
+      <p:sp>
+        <p:nvSpPr>
+          <p:cNvPr id="12" name="sun-new">
+            <a:extLst xmlns:a="http://schemas.openxmlformats.org/drawingml/2006/main">
+              <a:ext uri="{FF2B5EF4-FFF2-40B4-BE49-F238E27FC236}">
+                <a16:creationId xmlns:a16="http://schemas.microsoft.com/office/drawing/2014/main" id="{A7546F3B-AFD1-45BF-930E-66328FA48F24}"/>
+              </a:ext>
+            </a:extLst>
+          </p:cNvPr>
+          <p:cNvSpPr>
+            <a:spLocks xmlns:a="http://schemas.openxmlformats.org/drawingml/2006/main" noGrp="1"/>
+          </p:cNvSpPr>
+          <p:nvPr/>
+        </p:nvSpPr>
+        <p:spPr>
+          <a:xfrm xmlns:a="http://schemas.openxmlformats.org/drawingml/2006/main">
+            <a:off x="8429625" y="3810000"/>
+            <a:ext cx="857250" cy="857250"/>
+          </a:xfrm>
+          <a:prstGeom xmlns:a="http://schemas.openxmlformats.org/drawingml/2006/main" prst="ellipse">
+            <a:avLst/>
+          </a:prstGeom>
+          <a:solidFill xmlns:a="http://schemas.openxmlformats.org/drawingml/2006/main">
+            <a:srgbClr val="D49C44"/>
+          </a:solidFill>
+          <a:ln xmlns:a="http://schemas.openxmlformats.org/drawingml/2006/main" w="0">
+            <a:noFill/>
+          </a:ln>
+        </p:spPr>
+      </p:sp>
+      <p:sp>
+        <p:nvSpPr>
+          <p:cNvPr id="13" name="sun-new-label">
+            <a:extLst xmlns:a="http://schemas.openxmlformats.org/drawingml/2006/main">
+              <a:ext uri="{FF2B5EF4-FFF2-40B4-BE49-F238E27FC236}">
+                <a16:creationId xmlns:a16="http://schemas.microsoft.com/office/drawing/2014/main" id="{71F12800-A9B9-4E5C-85B3-AD36A3C842FB}"/>
+              </a:ext>
+            </a:extLst>
+          </p:cNvPr>
+          <p:cNvSpPr>
+            <a:spLocks xmlns:a="http://schemas.openxmlformats.org/drawingml/2006/main" noGrp="1"/>
+          </p:cNvSpPr>
+          <p:nvPr/>
+        </p:nvSpPr>
+        <p:spPr>
+          <a:xfrm xmlns:a="http://schemas.openxmlformats.org/drawingml/2006/main">
+            <a:off x="8486775" y="4029075"/>
+            <a:ext cx="762000" cy="381000"/>
+          </a:xfrm>
+          <a:prstGeom xmlns:a="http://schemas.openxmlformats.org/drawingml/2006/main" prst="rect">
+            <a:avLst/>
+          </a:prstGeom>
+          <a:noFill xmlns:a="http://schemas.openxmlformats.org/drawingml/2006/main"/>
+          <a:ln xmlns:a="http://schemas.openxmlformats.org/drawingml/2006/main" w="0">
+            <a:noFill/>
+          </a:ln>
+        </p:spPr>
+        <p:txBody>
+          <a:bodyPr xmlns:a="http://schemas.openxmlformats.org/drawingml/2006/main" lIns="0" tIns="0" rIns="0" bIns="0" anchor="ctr">
+            <a:noAutofit/>
+          </a:bodyPr>
+          <a:lstStyle xmlns:a="http://schemas.openxmlformats.org/drawingml/2006/main"/>
+          <a:p xmlns:a="http://schemas.openxmlformats.org/drawingml/2006/main">
+            <a:pPr algn="ctr">
+              <a:defRPr sz="2025" b="1">
+                <a:solidFill>
+                  <a:srgbClr val="152B3A"/>
+                </a:solidFill>
+                <a:latin typeface="Calibri"/>
+                <a:ea typeface="Calibri"/>
+                <a:cs typeface="Calibri"/>
+              </a:defRPr>
+            </a:pPr>
+            <a:r>
+              <a:rPr sz="2025" b="1">
+                <a:solidFill>
+                  <a:srgbClr val="152B3A"/>
+                </a:solidFill>
+                <a:latin typeface="Calibri"/>
+                <a:ea typeface="Calibri"/>
+                <a:cs typeface="Calibri"/>
+              </a:rPr>
+              <a:t>Sun</a:t>
+            </a:r>
+          </a:p>
+        </p:txBody>
+      </p:sp>
+      <p:sp>
+        <p:nvSpPr>
+          <p:cNvPr id="14" name="earth-new">
+            <a:extLst xmlns:a="http://schemas.openxmlformats.org/drawingml/2006/main">
+              <a:ext uri="{FF2B5EF4-FFF2-40B4-BE49-F238E27FC236}">
+                <a16:creationId xmlns:a16="http://schemas.microsoft.com/office/drawing/2014/main" id="{B2689992-FC4E-401E-85B1-326718B92B45}"/>
+              </a:ext>
+            </a:extLst>
+          </p:cNvPr>
+          <p:cNvSpPr>
+            <a:spLocks xmlns:a="http://schemas.openxmlformats.org/drawingml/2006/main" noGrp="1"/>
+          </p:cNvSpPr>
+          <p:nvPr/>
+        </p:nvSpPr>
+        <p:spPr>
+          <a:xfrm xmlns:a="http://schemas.openxmlformats.org/drawingml/2006/main">
+            <a:off x="10715625" y="3905250"/>
+            <a:ext cx="400050" cy="400050"/>
+          </a:xfrm>
+          <a:prstGeom xmlns:a="http://schemas.openxmlformats.org/drawingml/2006/main" prst="ellipse">
+            <a:avLst/>
+          </a:prstGeom>
+          <a:solidFill xmlns:a="http://schemas.openxmlformats.org/drawingml/2006/main">
+            <a:srgbClr val="28685E"/>
+          </a:solidFill>
+          <a:ln xmlns:a="http://schemas.openxmlformats.org/drawingml/2006/main" w="0">
+            <a:noFill/>
+          </a:ln>
+        </p:spPr>
+      </p:sp>
+      <p:sp>
+        <p:nvSpPr>
+          <p:cNvPr id="15" name="gravity-new">
+            <a:extLst xmlns:a="http://schemas.openxmlformats.org/drawingml/2006/main">
+              <a:ext uri="{FF2B5EF4-FFF2-40B4-BE49-F238E27FC236}">
+                <a16:creationId xmlns:a16="http://schemas.microsoft.com/office/drawing/2014/main" id="{5DBF7554-7A9B-4EE4-8FA5-182A24A9B898}"/>
+              </a:ext>
+            </a:extLst>
+          </p:cNvPr>
+          <p:cNvSpPr>
+            <a:spLocks xmlns:a="http://schemas.openxmlformats.org/drawingml/2006/main" noGrp="1"/>
+          </p:cNvSpPr>
+          <p:nvPr/>
+        </p:nvSpPr>
+        <p:spPr>
+          <a:xfrm xmlns:a="http://schemas.openxmlformats.org/drawingml/2006/main" rot="10800000">
+            <a:off x="9505950" y="4010025"/>
+            <a:ext cx="990600" cy="219075"/>
+          </a:xfrm>
+          <a:prstGeom xmlns:a="http://schemas.openxmlformats.org/drawingml/2006/main" prst="rightArrow">
+            <a:avLst/>
+          </a:prstGeom>
+          <a:solidFill xmlns:a="http://schemas.openxmlformats.org/drawingml/2006/main">
+            <a:srgbClr val="28685E"/>
+          </a:solidFill>
+          <a:ln xmlns:a="http://schemas.openxmlformats.org/drawingml/2006/main" w="0">
+            <a:noFill/>
+          </a:ln>
+        </p:spPr>
+      </p:sp>
+      <p:sp>
+        <p:nvSpPr>
+          <p:cNvPr id="16" name="motion-new">
+            <a:extLst xmlns:a="http://schemas.openxmlformats.org/drawingml/2006/main">
+              <a:ext uri="{FF2B5EF4-FFF2-40B4-BE49-F238E27FC236}">
+                <a16:creationId xmlns:a16="http://schemas.microsoft.com/office/drawing/2014/main" id="{6C93EADF-91E7-467C-A37D-BB82A4374786}"/>
+              </a:ext>
+            </a:extLst>
+          </p:cNvPr>
+          <p:cNvSpPr>
+            <a:spLocks xmlns:a="http://schemas.openxmlformats.org/drawingml/2006/main" noGrp="1"/>
+          </p:cNvSpPr>
+          <p:nvPr/>
+        </p:nvSpPr>
+        <p:spPr>
+          <a:xfrm xmlns:a="http://schemas.openxmlformats.org/drawingml/2006/main" rot="16200000">
+            <a:off x="10467975" y="3228975"/>
+            <a:ext cx="895350" cy="219075"/>
+          </a:xfrm>
+          <a:prstGeom xmlns:a="http://schemas.openxmlformats.org/drawingml/2006/main" prst="rightArrow">
+            <a:avLst/>
+          </a:prstGeom>
+          <a:solidFill xmlns:a="http://schemas.openxmlformats.org/drawingml/2006/main">
+            <a:srgbClr val="A95D21"/>
+          </a:solidFill>
+          <a:ln xmlns:a="http://schemas.openxmlformats.org/drawingml/2006/main" w="0">
+            <a:noFill/>
+          </a:ln>
+        </p:spPr>
+      </p:sp>
+      <p:sp>
+        <p:nvSpPr>
+          <p:cNvPr id="17" name="gravity-new-label">
+            <a:extLst xmlns:a="http://schemas.openxmlformats.org/drawingml/2006/main">
+              <a:ext uri="{FF2B5EF4-FFF2-40B4-BE49-F238E27FC236}">
+                <a16:creationId xmlns:a16="http://schemas.microsoft.com/office/drawing/2014/main" id="{A02B7F0E-FB18-43D3-B8C8-9E81EE8403D7}"/>
+              </a:ext>
+            </a:extLst>
+          </p:cNvPr>
+          <p:cNvSpPr>
+            <a:spLocks xmlns:a="http://schemas.openxmlformats.org/drawingml/2006/main" noGrp="1"/>
+          </p:cNvSpPr>
+          <p:nvPr/>
+        </p:nvSpPr>
+        <p:spPr>
+          <a:xfrm xmlns:a="http://schemas.openxmlformats.org/drawingml/2006/main">
+            <a:off x="9410700" y="4467225"/>
+            <a:ext cx="1143000" cy="333375"/>
+          </a:xfrm>
+          <a:prstGeom xmlns:a="http://schemas.openxmlformats.org/drawingml/2006/main" prst="rect">
+            <a:avLst/>
+          </a:prstGeom>
+          <a:noFill xmlns:a="http://schemas.openxmlformats.org/drawingml/2006/main"/>
+          <a:ln xmlns:a="http://schemas.openxmlformats.org/drawingml/2006/main" w="0">
+            <a:noFill/>
+          </a:ln>
+        </p:spPr>
+        <p:txBody>
+          <a:bodyPr xmlns:a="http://schemas.openxmlformats.org/drawingml/2006/main" lIns="0" tIns="0" rIns="0" bIns="0" anchor="ctr">
+            <a:noAutofit/>
+          </a:bodyPr>
+          <a:lstStyle xmlns:a="http://schemas.openxmlformats.org/drawingml/2006/main"/>
+          <a:p xmlns:a="http://schemas.openxmlformats.org/drawingml/2006/main">
+            <a:pPr algn="l">
+              <a:defRPr sz="1800" b="1">
+                <a:solidFill>
+                  <a:srgbClr val="28685E"/>
+                </a:solidFill>
+                <a:latin typeface="Calibri"/>
+                <a:ea typeface="Calibri"/>
+                <a:cs typeface="Calibri"/>
+              </a:defRPr>
+            </a:pPr>
+            <a:r>
+              <a:rPr sz="1800" b="1">
+                <a:solidFill>
+                  <a:srgbClr val="28685E"/>
+                </a:solidFill>
+                <a:latin typeface="Calibri"/>
+                <a:ea typeface="Calibri"/>
+                <a:cs typeface="Calibri"/>
+              </a:rPr>
+              <a:t>gravity</a:t>
+            </a:r>
+          </a:p>
+        </p:txBody>
+      </p:sp>
+      <p:sp>
+        <p:nvSpPr>
+          <p:cNvPr id="18" name="motion-new-label">
+            <a:extLst xmlns:a="http://schemas.openxmlformats.org/drawingml/2006/main">
+              <a:ext uri="{FF2B5EF4-FFF2-40B4-BE49-F238E27FC236}">
+                <a16:creationId xmlns:a16="http://schemas.microsoft.com/office/drawing/2014/main" id="{EF426BE5-E3B7-4F74-B2C3-7293FF7D3A4E}"/>
+              </a:ext>
+            </a:extLst>
+          </p:cNvPr>
+          <p:cNvSpPr>
+            <a:spLocks xmlns:a="http://schemas.openxmlformats.org/drawingml/2006/main" noGrp="1"/>
+          </p:cNvSpPr>
+          <p:nvPr/>
+        </p:nvSpPr>
+        <p:spPr>
+          <a:xfrm xmlns:a="http://schemas.openxmlformats.org/drawingml/2006/main">
+            <a:off x="9763125" y="2543175"/>
+            <a:ext cx="1238250" cy="333375"/>
+          </a:xfrm>
+          <a:prstGeom xmlns:a="http://schemas.openxmlformats.org/drawingml/2006/main" prst="rect">
+            <a:avLst/>
+          </a:prstGeom>
+          <a:noFill xmlns:a="http://schemas.openxmlformats.org/drawingml/2006/main"/>
+          <a:ln xmlns:a="http://schemas.openxmlformats.org/drawingml/2006/main" w="0">
+            <a:noFill/>
+          </a:ln>
+        </p:spPr>
+        <p:txBody>
+          <a:bodyPr xmlns:a="http://schemas.openxmlformats.org/drawingml/2006/main" lIns="0" tIns="0" rIns="0" bIns="0" anchor="ctr">
+            <a:noAutofit/>
+          </a:bodyPr>
+          <a:lstStyle xmlns:a="http://schemas.openxmlformats.org/drawingml/2006/main"/>
+          <a:p xmlns:a="http://schemas.openxmlformats.org/drawingml/2006/main">
+            <a:pPr algn="l">
+              <a:defRPr sz="1800" b="1">
+                <a:solidFill>
+                  <a:srgbClr val="A95D21"/>
+                </a:solidFill>
+                <a:latin typeface="Calibri"/>
+                <a:ea typeface="Calibri"/>
+                <a:cs typeface="Calibri"/>
+              </a:defRPr>
+            </a:pPr>
+            <a:r>
+              <a:rPr sz="1800" b="1">
+                <a:solidFill>
+                  <a:srgbClr val="A95D21"/>
+                </a:solidFill>
+                <a:latin typeface="Calibri"/>
+                <a:ea typeface="Calibri"/>
+                <a:cs typeface="Calibri"/>
+              </a:rPr>
+              <a:t>motion</a:t>
+            </a:r>
+          </a:p>
+        </p:txBody>
+      </p:sp>
+      <p:sp>
+        <p:nvSpPr>
+          <p:cNvPr id="19" name="orbit-limit">
+            <a:extLst xmlns:a="http://schemas.openxmlformats.org/drawingml/2006/main">
+              <a:ext uri="{FF2B5EF4-FFF2-40B4-BE49-F238E27FC236}">
+                <a16:creationId xmlns:a16="http://schemas.microsoft.com/office/drawing/2014/main" id="{03BEF50A-61D5-495A-82A0-1B000D6D95DE}"/>
+              </a:ext>
+            </a:extLst>
+          </p:cNvPr>
+          <p:cNvSpPr>
+            <a:spLocks xmlns:a="http://schemas.openxmlformats.org/drawingml/2006/main" noGrp="1"/>
+          </p:cNvSpPr>
+          <p:nvPr/>
+        </p:nvSpPr>
+        <p:spPr>
+          <a:xfrm xmlns:a="http://schemas.openxmlformats.org/drawingml/2006/main">
+            <a:off x="6762750" y="5829300"/>
+            <a:ext cx="4381500" cy="333375"/>
+          </a:xfrm>
+          <a:prstGeom xmlns:a="http://schemas.openxmlformats.org/drawingml/2006/main" prst="rect">
+            <a:avLst/>
+          </a:prstGeom>
+          <a:noFill xmlns:a="http://schemas.openxmlformats.org/drawingml/2006/main"/>
+          <a:ln xmlns:a="http://schemas.openxmlformats.org/drawingml/2006/main" w="0">
+            <a:noFill/>
+          </a:ln>
+        </p:spPr>
+        <p:txBody>
+          <a:bodyPr xmlns:a="http://schemas.openxmlformats.org/drawingml/2006/main" lIns="0" tIns="0" rIns="0" bIns="0" anchor="ctr">
+            <a:noAutofit/>
+          </a:bodyPr>
+          <a:lstStyle xmlns:a="http://schemas.openxmlformats.org/drawingml/2006/main"/>
+          <a:p xmlns:a="http://schemas.openxmlformats.org/drawingml/2006/main">
+            <a:pPr algn="l">
+              <a:defRPr sz="1500" b="0">
+                <a:solidFill>
+                  <a:srgbClr val="50616B"/>
+                </a:solidFill>
+                <a:latin typeface="Calibri"/>
+                <a:ea typeface="Calibri"/>
+                <a:cs typeface="Calibri"/>
+              </a:defRPr>
+            </a:pPr>
+            <a:r>
+              <a:rPr sz="1500" b="0">
+                <a:solidFill>
+                  <a:srgbClr val="50616B"/>
+                </a:solidFill>
+                <a:latin typeface="Calibri"/>
+                <a:ea typeface="Calibri"/>
+                <a:cs typeface="Calibri"/>
+              </a:rPr>
+              <a:t>Schematic: sizes and distances not to scale</a:t>
             </a:r>
           </a:p>
         </p:txBody>
